--- a/presentations/powerpoint/arch-patterns-part1.pptx
+++ b/presentations/powerpoint/arch-patterns-part1.pptx
@@ -20,12 +20,6 @@
     <p:sldId id="268" r:id="rId18"/>
     <p:sldId id="269" r:id="rId19"/>
     <p:sldId id="270" r:id="rId20"/>
-    <p:sldId id="271" r:id="rId21"/>
-    <p:sldId id="272" r:id="rId22"/>
-    <p:sldId id="273" r:id="rId23"/>
-    <p:sldId id="274" r:id="rId24"/>
-    <p:sldId id="275" r:id="rId25"/>
-    <p:sldId id="276" r:id="rId26"/>
   </p:sldIdLst>
   <p:sldSz cx="12192000" cy="6858000"/>
   <p:notesSz cx="6858000" cy="9144000"/>
@@ -4299,9 +4293,6 @@
           <a:bodyPr/>
           <a:lstStyle/>
           <a:p>
-            <a:pPr>
-              <a:defRPr sz="4400"/>
-            </a:pPr>
             <a:r>
               <a:t>Architectural Patterns - Part 1</a:t>
             </a:r>
@@ -4323,9 +4314,6 @@
           <a:bodyPr/>
           <a:lstStyle/>
           <a:p>
-            <a:pPr>
-              <a:defRPr sz="2400"/>
-            </a:pPr>
             <a:r>
               <a:t>Design Patterns Workshop - Telekom Training</a:t>
             </a:r>
@@ -4357,7 +4345,7 @@
             <a:spLocks noGrp="1"/>
           </p:cNvSpPr>
           <p:nvPr>
-            <p:ph type="ctrTitle"/>
+            <p:ph type="title"/>
           </p:nvPr>
         </p:nvSpPr>
         <p:spPr/>
@@ -4366,149 +4354,135 @@
           <a:lstStyle/>
           <a:p>
             <a:r>
-              <a:t>2. Microservices - When to Use</a:t>
-            </a:r>
-          </a:p>
-        </p:txBody>
-      </p:sp>
-      <p:sp>
-        <p:nvSpPr>
-          <p:cNvPr id="3" name="TextBox 2"/>
-          <p:cNvSpPr txBox="1"/>
-          <p:nvPr/>
-        </p:nvSpPr>
-        <p:spPr>
-          <a:xfrm>
-            <a:off x="457200" y="1371600"/>
-            <a:ext cx="3657600" cy="5486400"/>
-          </a:xfrm>
-          <a:prstGeom prst="rect">
-            <a:avLst/>
-          </a:prstGeom>
-          <a:noFill/>
-        </p:spPr>
-        <p:txBody>
-          <a:bodyPr wrap="none">
-            <a:spAutoFit/>
-          </a:bodyPr>
+              <a:t>Microservices - Trade-offs</a:t>
+            </a:r>
+          </a:p>
+        </p:txBody>
+      </p:sp>
+      <p:sp>
+        <p:nvSpPr>
+          <p:cNvPr id="3" name="Content Placeholder 2"/>
+          <p:cNvSpPr>
+            <a:spLocks noGrp="1"/>
+          </p:cNvSpPr>
+          <p:nvPr>
+            <p:ph idx="1" sz="half"/>
+          </p:nvPr>
+        </p:nvSpPr>
+        <p:spPr/>
+        <p:txBody>
+          <a:bodyPr/>
           <a:lstStyle/>
           <a:p>
             <a:pPr>
-              <a:defRPr b="1" sz="1800">
-                <a:solidFill>
-                  <a:srgbClr val="008000"/>
-                </a:solidFill>
-              </a:defRPr>
+              <a:defRPr b="1" sz="1600"/>
             </a:pPr>
             <a:r>
-              <a:t>Ideal für:</a:t>
+              <a:t>Vorteile ✅</a:t>
             </a:r>
           </a:p>
           <a:p>
             <a:pPr>
-              <a:defRPr sz="1200"/>
+              <a:spcAft>
+                <a:spcPts val="600"/>
+              </a:spcAft>
             </a:pPr>
             <a:r>
-              <a:t>• Große verteilte Teams (5+ Entwickler)</a:t>
+              <a:t>• Unabhängige Skalierung pro Service</a:t>
             </a:r>
           </a:p>
           <a:p>
             <a:pPr>
-              <a:defRPr sz="1200"/>
+              <a:spcAft>
+                <a:spcPts val="600"/>
+              </a:spcAft>
             </a:pPr>
             <a:r>
-              <a:t>• Independent Service Scaling erforderlich</a:t>
+              <a:t>• Technology Stack Diversität möglich</a:t>
             </a:r>
           </a:p>
           <a:p>
             <a:pPr>
-              <a:defRPr sz="1200"/>
+              <a:spcAft>
+                <a:spcPts val="600"/>
+              </a:spcAft>
             </a:pPr>
             <a:r>
-              <a:t>• Complex Domain Logic</a:t>
+              <a:t>• Fehler-Isolierung zwischen Services</a:t>
             </a:r>
           </a:p>
           <a:p>
             <a:pPr>
-              <a:defRPr sz="1200"/>
+              <a:spcAft>
+                <a:spcPts val="600"/>
+              </a:spcAft>
             </a:pPr>
             <a:r>
-              <a:t>• High Availability Requirements</a:t>
-            </a:r>
-          </a:p>
+              <a:t>• Parallele Entwicklung durch verschiedene Teams</a:t>
+            </a:r>
+          </a:p>
+        </p:txBody>
+      </p:sp>
+      <p:sp>
+        <p:nvSpPr>
+          <p:cNvPr id="4" name="Content Placeholder 3"/>
+          <p:cNvSpPr>
+            <a:spLocks noGrp="1"/>
+          </p:cNvSpPr>
+          <p:nvPr>
+            <p:ph idx="2" sz="half"/>
+          </p:nvPr>
+        </p:nvSpPr>
+        <p:spPr/>
+        <p:txBody>
+          <a:bodyPr/>
+          <a:lstStyle/>
           <a:p>
             <a:pPr>
-              <a:defRPr sz="1200"/>
+              <a:defRPr b="1" sz="1600"/>
             </a:pPr>
             <a:r>
-              <a:t>• Technology Stack Diversität gewünscht</a:t>
-            </a:r>
-          </a:p>
-        </p:txBody>
-      </p:sp>
-      <p:sp>
-        <p:nvSpPr>
-          <p:cNvPr id="4" name="TextBox 3"/>
-          <p:cNvSpPr txBox="1"/>
-          <p:nvPr/>
-        </p:nvSpPr>
-        <p:spPr>
-          <a:xfrm>
-            <a:off x="4572000" y="1371600"/>
-            <a:ext cx="4114800" cy="5486400"/>
-          </a:xfrm>
-          <a:prstGeom prst="rect">
-            <a:avLst/>
-          </a:prstGeom>
-          <a:noFill/>
-        </p:spPr>
-        <p:txBody>
-          <a:bodyPr wrap="none">
-            <a:spAutoFit/>
-          </a:bodyPr>
-          <a:lstStyle/>
+              <a:t>Nachteile ❌</a:t>
+            </a:r>
+          </a:p>
           <a:p>
             <a:pPr>
-              <a:defRPr b="1" sz="1800">
-                <a:solidFill>
-                  <a:srgbClr val="FF0000"/>
-                </a:solidFill>
-              </a:defRPr>
+              <a:spcAft>
+                <a:spcPts val="600"/>
+              </a:spcAft>
             </a:pPr>
             <a:r>
-              <a:t>Vermeiden wenn:</a:t>
+              <a:t>• Hohe operationale Komplexität</a:t>
             </a:r>
           </a:p>
           <a:p>
             <a:pPr>
-              <a:defRPr sz="1200"/>
+              <a:spcAft>
+                <a:spcPts val="600"/>
+              </a:spcAft>
             </a:pPr>
             <a:r>
-              <a:t>• Kleine Teams (&lt;5 Entwickler)</a:t>
+              <a:t>• Distributed System Challenges (Latency, Partial Failures)</a:t>
             </a:r>
           </a:p>
           <a:p>
             <a:pPr>
-              <a:defRPr sz="1200"/>
+              <a:spcAft>
+                <a:spcPts val="600"/>
+              </a:spcAft>
             </a:pPr>
             <a:r>
-              <a:t>• Einfache Monolithische Anwendungen</a:t>
+              <a:t>• Data Consistency zwischen Services schwierig</a:t>
             </a:r>
           </a:p>
           <a:p>
             <a:pPr>
-              <a:defRPr sz="1200"/>
+              <a:spcAft>
+                <a:spcPts val="600"/>
+              </a:spcAft>
             </a:pPr>
             <a:r>
-              <a:t>• Begrenzte DevOps-Expertise</a:t>
-            </a:r>
-          </a:p>
-          <a:p>
-            <a:pPr>
-              <a:defRPr sz="1200"/>
-            </a:pPr>
-            <a:r>
-              <a:t>• Keine Container-Infrastruktur</a:t>
+              <a:t>• Service Discovery und Load Balancing erforderlich</a:t>
             </a:r>
           </a:p>
         </p:txBody>
@@ -4567,182 +4541,6 @@
           <a:bodyPr/>
           <a:lstStyle/>
           <a:p/>
-          <a:p>
-            <a:pPr>
-              <a:defRPr sz="1200"/>
-            </a:pPr>
-            <a:r>
-              <a:t>```</a:t>
-            </a:r>
-          </a:p>
-          <a:p>
-            <a:pPr>
-              <a:defRPr sz="1200"/>
-            </a:pPr>
-            <a:r>
-              <a:t>Event Flow:</a:t>
-            </a:r>
-          </a:p>
-          <a:p>
-            <a:pPr>
-              <a:defRPr sz="1200"/>
-            </a:pPr>
-            <a:r>
-              <a:t>┌─────────────┐    Events     ┌─────────────┐    Events     ┌─────────────┐</a:t>
-            </a:r>
-          </a:p>
-          <a:p>
-            <a:pPr>
-              <a:defRPr sz="1200"/>
-            </a:pPr>
-            <a:r>
-              <a:t>│  Producers  │ ─────────────&gt; │  Event Bus  │ ─────────────&gt; │  Consumers  │</a:t>
-            </a:r>
-          </a:p>
-          <a:p>
-            <a:pPr>
-              <a:defRPr sz="1200"/>
-            </a:pPr>
-            <a:r>
-              <a:t>│             │               │             │               │             │</a:t>
-            </a:r>
-          </a:p>
-          <a:p>
-            <a:pPr>
-              <a:defRPr sz="1200"/>
-            </a:pPr>
-            <a:r>
-              <a:t>│ Device      │               │  Apache     │               │ Alerting    │</a:t>
-            </a:r>
-          </a:p>
-          <a:p>
-            <a:pPr>
-              <a:defRPr sz="1200"/>
-            </a:pPr>
-            <a:r>
-              <a:t>│ Sensors     │               │  Kafka      │               │ System      │</a:t>
-            </a:r>
-          </a:p>
-          <a:p>
-            <a:pPr>
-              <a:defRPr sz="1200"/>
-            </a:pPr>
-            <a:r>
-              <a:t>│             │               │             │               │             │</a:t>
-            </a:r>
-          </a:p>
-          <a:p>
-            <a:pPr>
-              <a:defRPr sz="1200"/>
-            </a:pPr>
-            <a:r>
-              <a:t>│ User        │               │ Topics:     │               │ Analytics   │</a:t>
-            </a:r>
-          </a:p>
-          <a:p>
-            <a:pPr>
-              <a:defRPr sz="1200"/>
-            </a:pPr>
-            <a:r>
-              <a:t>│ Actions     │               │ - alerts    │               │ Engine      │</a:t>
-            </a:r>
-          </a:p>
-          <a:p>
-            <a:pPr>
-              <a:defRPr sz="1200"/>
-            </a:pPr>
-            <a:r>
-              <a:t>│             │               │ - metrics   │               │             │</a:t>
-            </a:r>
-          </a:p>
-          <a:p>
-            <a:pPr>
-              <a:defRPr sz="1200"/>
-            </a:pPr>
-            <a:r>
-              <a:t>│ System      │               │ - configs   │               │ Dashboard   │</a:t>
-            </a:r>
-          </a:p>
-          <a:p>
-            <a:pPr>
-              <a:defRPr sz="1200"/>
-            </a:pPr>
-            <a:r>
-              <a:t>│ Events      │               │ - audit     │               │ Updates     │</a:t>
-            </a:r>
-          </a:p>
-          <a:p>
-            <a:pPr>
-              <a:defRPr sz="1200"/>
-            </a:pPr>
-            <a:r>
-              <a:t>└─────────────┘               └─────────────┘               └─────────────┘</a:t>
-            </a:r>
-          </a:p>
-          <a:p>
-            <a:pPr>
-              <a:defRPr sz="1200"/>
-            </a:pPr>
-            <a:r>
-              <a:t>│                             │                             │</a:t>
-            </a:r>
-          </a:p>
-          <a:p>
-            <a:pPr>
-              <a:defRPr sz="1200"/>
-            </a:pPr>
-            <a:r>
-              <a:t>└─── Async Pub/Sub ────────────┼─── Message Queues ────────┘</a:t>
-            </a:r>
-          </a:p>
-          <a:p>
-            <a:pPr>
-              <a:defRPr sz="1200"/>
-            </a:pPr>
-            <a:r>
-              <a:t>│</a:t>
-            </a:r>
-          </a:p>
-          <a:p>
-            <a:pPr>
-              <a:defRPr sz="1200"/>
-            </a:pPr>
-            <a:r>
-              <a:t>┌─────────────┐</a:t>
-            </a:r>
-          </a:p>
-          <a:p>
-            <a:pPr>
-              <a:defRPr sz="1200"/>
-            </a:pPr>
-            <a:r>
-              <a:t>│ Event Store │</a:t>
-            </a:r>
-          </a:p>
-          <a:p>
-            <a:pPr>
-              <a:defRPr sz="1200"/>
-            </a:pPr>
-            <a:r>
-              <a:t>│ (History)   │</a:t>
-            </a:r>
-          </a:p>
-          <a:p>
-            <a:pPr>
-              <a:defRPr sz="1200"/>
-            </a:pPr>
-            <a:r>
-              <a:t>└─────────────┘</a:t>
-            </a:r>
-          </a:p>
-          <a:p>
-            <a:pPr>
-              <a:defRPr sz="1200"/>
-            </a:pPr>
-            <a:r>
-              <a:t>```</a:t>
-            </a:r>
-          </a:p>
         </p:txBody>
       </p:sp>
     </p:spTree>
@@ -4770,7 +4568,7 @@
             <a:spLocks noGrp="1"/>
           </p:cNvSpPr>
           <p:nvPr>
-            <p:ph type="ctrTitle"/>
+            <p:ph type="title"/>
           </p:nvPr>
         </p:nvSpPr>
         <p:spPr/>
@@ -4779,88 +4577,176 @@
           <a:lstStyle/>
           <a:p>
             <a:r>
-              <a:t>3. Event-Driven - Telekom Use Case</a:t>
-            </a:r>
-          </a:p>
-        </p:txBody>
-      </p:sp>
-      <p:sp>
-        <p:nvSpPr>
-          <p:cNvPr id="3" name="Subtitle 2"/>
-          <p:cNvSpPr>
-            <a:spLocks noGrp="1"/>
-          </p:cNvSpPr>
-          <p:nvPr>
-            <p:ph type="subTitle" idx="1"/>
+              <a:t>Event-Driven Architecture - Schema</a:t>
+            </a:r>
+          </a:p>
+        </p:txBody>
+      </p:sp>
+      <p:sp>
+        <p:nvSpPr>
+          <p:cNvPr id="3" name="Content Placeholder 2"/>
+          <p:cNvSpPr>
+            <a:spLocks noGrp="1"/>
+          </p:cNvSpPr>
+          <p:nvPr>
+            <p:ph idx="1"/>
           </p:nvPr>
         </p:nvSpPr>
         <p:spPr/>
         <p:txBody>
           <a:bodyPr/>
           <a:lstStyle/>
-          <a:p/>
           <a:p>
             <a:pPr>
-              <a:defRPr b="1" sz="1800"/>
+              <a:lnSpc>
+                <a:spcPct val="100000"/>
+              </a:lnSpc>
+              <a:spcBef>
+                <a:spcPts val="0"/>
+              </a:spcBef>
+              <a:spcAft>
+                <a:spcPts val="0"/>
+              </a:spcAft>
             </a:pPr>
             <a:r>
-              <a:t>Network Event Processing Platform</a:t>
-            </a:r>
-          </a:p>
-          <a:p>
-            <a:pPr lvl="1">
-              <a:defRPr sz="1400"/>
-            </a:pPr>
-            <a:r>
-              <a:t>**Events:** Device failures, configuration changes, performance alerts</a:t>
-            </a:r>
-          </a:p>
-          <a:p>
-            <a:pPr lvl="1">
-              <a:defRPr sz="1400"/>
-            </a:pPr>
-            <a:r>
-              <a:t>**Producers:** SNMP agents, log collectors, user interfaces</a:t>
-            </a:r>
-          </a:p>
-          <a:p>
-            <a:pPr lvl="1">
-              <a:defRPr sz="1400"/>
-            </a:pPr>
-            <a:r>
-              <a:t>**Consumers:** Alert system, analytics, dashboard updates, audit logging</a:t>
-            </a:r>
-          </a:p>
-          <a:p>
-            <a:pPr lvl="1">
-              <a:defRPr sz="1400"/>
-            </a:pPr>
-            <a:r>
-              <a:t>**Event Bus:** Apache Kafka</a:t>
-            </a:r>
-          </a:p>
-          <a:p>
-            <a:pPr lvl="1">
-              <a:defRPr sz="1400"/>
-            </a:pPr>
-            <a:r>
-              <a:t>**Event Topics:** alerts, metrics, configs, audit</a:t>
-            </a:r>
-          </a:p>
-          <a:p>
-            <a:pPr lvl="1">
-              <a:defRPr sz="1400"/>
-            </a:pPr>
-            <a:r>
-              <a:t>**Event Store:** Persistent event history</a:t>
-            </a:r>
-          </a:p>
-          <a:p>
-            <a:pPr lvl="1">
-              <a:defRPr sz="1400"/>
-            </a:pPr>
-            <a:r>
-              <a:t>**Consumers:** Real-time and batch processing</a:t>
+              <a:rPr sz="900">
+                <a:latin typeface="Consolas"/>
+              </a:rPr>
+              <a:t>Event Flow:</a:t>
+            </a:r>
+            <a:br/>
+            <a:r>
+              <a:rPr sz="900">
+                <a:latin typeface="Consolas"/>
+              </a:rPr>
+              <a:t>┌─────────────┐    Events     ┌─────────────┐    Events     ┌─────────────┐</a:t>
+            </a:r>
+            <a:br/>
+            <a:r>
+              <a:rPr sz="900">
+                <a:latin typeface="Consolas"/>
+              </a:rPr>
+              <a:t>│  Producers  │ ─────────────&gt; │  Event Bus  │ ─────────────&gt; │  Consumers  │</a:t>
+            </a:r>
+            <a:br/>
+            <a:r>
+              <a:rPr sz="900">
+                <a:latin typeface="Consolas"/>
+              </a:rPr>
+              <a:t>│             │               │             │               │             │</a:t>
+            </a:r>
+            <a:br/>
+            <a:r>
+              <a:rPr sz="900">
+                <a:latin typeface="Consolas"/>
+              </a:rPr>
+              <a:t>│ Device      │               │  Apache     │               │ Alerting    │</a:t>
+            </a:r>
+            <a:br/>
+            <a:r>
+              <a:rPr sz="900">
+                <a:latin typeface="Consolas"/>
+              </a:rPr>
+              <a:t>│ Sensors     │               │  Kafka      │               │ System      │</a:t>
+            </a:r>
+            <a:br/>
+            <a:r>
+              <a:rPr sz="900">
+                <a:latin typeface="Consolas"/>
+              </a:rPr>
+              <a:t>│             │               │             │               │             │</a:t>
+            </a:r>
+            <a:br/>
+            <a:r>
+              <a:rPr sz="900">
+                <a:latin typeface="Consolas"/>
+              </a:rPr>
+              <a:t>│ User        │               │ Topics:     │               │ Analytics   │</a:t>
+            </a:r>
+            <a:br/>
+            <a:r>
+              <a:rPr sz="900">
+                <a:latin typeface="Consolas"/>
+              </a:rPr>
+              <a:t>│ Actions     │               │ - alerts    │               │ Engine      │</a:t>
+            </a:r>
+            <a:br/>
+            <a:r>
+              <a:rPr sz="900">
+                <a:latin typeface="Consolas"/>
+              </a:rPr>
+              <a:t>│             │               │ - metrics   │               │             │</a:t>
+            </a:r>
+            <a:br/>
+            <a:r>
+              <a:rPr sz="900">
+                <a:latin typeface="Consolas"/>
+              </a:rPr>
+              <a:t>│ System      │               │ - configs   │               │ Dashboard   │</a:t>
+            </a:r>
+            <a:br/>
+            <a:r>
+              <a:rPr sz="900">
+                <a:latin typeface="Consolas"/>
+              </a:rPr>
+              <a:t>│ Events      │               │ - audit     │               │ Updates     │</a:t>
+            </a:r>
+            <a:br/>
+            <a:r>
+              <a:rPr sz="900">
+                <a:latin typeface="Consolas"/>
+              </a:rPr>
+              <a:t>└─────────────┘               └─────────────┘               └─────────────┘</a:t>
+            </a:r>
+            <a:br/>
+            <a:br/>
+            <a:r>
+              <a:rPr sz="900">
+                <a:latin typeface="Consolas"/>
+              </a:rPr>
+              <a:t>    │                             │                             │</a:t>
+            </a:r>
+            <a:br/>
+            <a:r>
+              <a:rPr sz="900">
+                <a:latin typeface="Consolas"/>
+              </a:rPr>
+              <a:t>    └─── Async Pub/Sub ────────────┼─── Message Queues ────────┘</a:t>
+            </a:r>
+            <a:br/>
+            <a:r>
+              <a:rPr sz="900">
+                <a:latin typeface="Consolas"/>
+              </a:rPr>
+              <a:t>                                   │</a:t>
+            </a:r>
+            <a:br/>
+            <a:r>
+              <a:rPr sz="900">
+                <a:latin typeface="Consolas"/>
+              </a:rPr>
+              <a:t>                          ┌─────────────┐</a:t>
+            </a:r>
+            <a:br/>
+            <a:r>
+              <a:rPr sz="900">
+                <a:latin typeface="Consolas"/>
+              </a:rPr>
+              <a:t>                          │ Event Store │</a:t>
+            </a:r>
+            <a:br/>
+            <a:r>
+              <a:rPr sz="900">
+                <a:latin typeface="Consolas"/>
+              </a:rPr>
+              <a:t>                          │ (History)   │</a:t>
+            </a:r>
+            <a:br/>
+            <a:r>
+              <a:rPr sz="900">
+                <a:latin typeface="Consolas"/>
+              </a:rPr>
+              <a:t>                          └─────────────┘</a:t>
             </a:r>
           </a:p>
         </p:txBody>
@@ -4899,198 +4785,26 @@
           <a:lstStyle/>
           <a:p>
             <a:r>
-              <a:t>3. Event-Driven - Trade-offs</a:t>
-            </a:r>
-          </a:p>
-        </p:txBody>
-      </p:sp>
-      <p:sp>
-        <p:nvSpPr>
-          <p:cNvPr id="3" name="TextBox 2"/>
-          <p:cNvSpPr txBox="1"/>
-          <p:nvPr/>
-        </p:nvSpPr>
-        <p:spPr>
-          <a:xfrm>
-            <a:off x="457200" y="1371600"/>
-            <a:ext cx="3657600" cy="5486400"/>
-          </a:xfrm>
-          <a:prstGeom prst="rect">
-            <a:avLst/>
-          </a:prstGeom>
-          <a:noFill/>
-        </p:spPr>
-        <p:txBody>
-          <a:bodyPr wrap="none">
-            <a:spAutoFit/>
-          </a:bodyPr>
+              <a:t>4. Hexagonal Architecture (Ports &amp; Adapters)</a:t>
+            </a:r>
+          </a:p>
+        </p:txBody>
+      </p:sp>
+      <p:sp>
+        <p:nvSpPr>
+          <p:cNvPr id="3" name="Subtitle 2"/>
+          <p:cNvSpPr>
+            <a:spLocks noGrp="1"/>
+          </p:cNvSpPr>
+          <p:nvPr>
+            <p:ph type="subTitle" idx="1"/>
+          </p:nvPr>
+        </p:nvSpPr>
+        <p:spPr/>
+        <p:txBody>
+          <a:bodyPr/>
           <a:lstStyle/>
-          <a:p>
-            <a:pPr>
-              <a:defRPr b="1" sz="1800"/>
-            </a:pPr>
-            <a:r>
-              <a:t>Vorteile ✅</a:t>
-            </a:r>
-          </a:p>
-          <a:p>
-            <a:pPr>
-              <a:defRPr sz="1200"/>
-            </a:pPr>
-            <a:r>
-              <a:t>• Lose Kopplung zwischen Komponenten</a:t>
-            </a:r>
-          </a:p>
-          <a:p>
-            <a:pPr>
-              <a:defRPr sz="1200"/>
-            </a:pPr>
-            <a:r>
-              <a:t>• Asynchrone Verarbeitung für bessere Performance</a:t>
-            </a:r>
-          </a:p>
-          <a:p>
-            <a:pPr>
-              <a:defRPr sz="1200"/>
-            </a:pPr>
-            <a:r>
-              <a:t>• Event Replay für Debugging und Analytics möglich</a:t>
-            </a:r>
-          </a:p>
-          <a:p>
-            <a:pPr>
-              <a:defRPr sz="1200"/>
-            </a:pPr>
-            <a:r>
-              <a:t>• Einfaches Hinzufügen neuer Event Consumer</a:t>
-            </a:r>
-          </a:p>
-        </p:txBody>
-      </p:sp>
-      <p:sp>
-        <p:nvSpPr>
-          <p:cNvPr id="4" name="TextBox 3"/>
-          <p:cNvSpPr txBox="1"/>
-          <p:nvPr/>
-        </p:nvSpPr>
-        <p:spPr>
-          <a:xfrm>
-            <a:off x="4572000" y="1371600"/>
-            <a:ext cx="4114800" cy="5486400"/>
-          </a:xfrm>
-          <a:prstGeom prst="rect">
-            <a:avLst/>
-          </a:prstGeom>
-          <a:noFill/>
-        </p:spPr>
-        <p:txBody>
-          <a:bodyPr wrap="none">
-            <a:spAutoFit/>
-          </a:bodyPr>
-          <a:lstStyle/>
-          <a:p>
-            <a:pPr>
-              <a:defRPr b="1" sz="1800"/>
-            </a:pPr>
-            <a:r>
-              <a:t>Nachteile ❌</a:t>
-            </a:r>
-          </a:p>
-          <a:p>
-            <a:pPr>
-              <a:defRPr sz="1200"/>
-            </a:pPr>
-            <a:r>
-              <a:t>• Eventually Consistent Data</a:t>
-            </a:r>
-          </a:p>
-          <a:p>
-            <a:pPr>
-              <a:defRPr sz="1200"/>
-            </a:pPr>
-            <a:r>
-              <a:t>• Komplexere Error Handling (Dead Letter Queues)</a:t>
-            </a:r>
-          </a:p>
-          <a:p>
-            <a:pPr>
-              <a:defRPr sz="1200"/>
-            </a:pPr>
-            <a:r>
-              <a:t>• Event Schema Evolution herausfordernd</a:t>
-            </a:r>
-          </a:p>
-          <a:p>
-            <a:pPr>
-              <a:defRPr sz="1200"/>
-            </a:pPr>
-            <a:r>
-              <a:t>• Debugging von Event Flows schwierig</a:t>
-            </a:r>
-          </a:p>
-        </p:txBody>
-      </p:sp>
-      <p:sp>
-        <p:nvSpPr>
-          <p:cNvPr id="5" name="TextBox 4"/>
-          <p:cNvSpPr txBox="1"/>
-          <p:nvPr/>
-        </p:nvSpPr>
-        <p:spPr>
-          <a:xfrm>
-            <a:off x="457200" y="5943600"/>
-            <a:ext cx="8229600" cy="1371600"/>
-          </a:xfrm>
-          <a:prstGeom prst="rect">
-            <a:avLst/>
-          </a:prstGeom>
-          <a:noFill/>
-        </p:spPr>
-        <p:txBody>
-          <a:bodyPr wrap="none">
-            <a:spAutoFit/>
-          </a:bodyPr>
-          <a:lstStyle/>
-          <a:p>
-            <a:pPr>
-              <a:defRPr b="1" sz="1400"/>
-            </a:pPr>
-            <a:r>
-              <a:t>Production Considerations ⚠️</a:t>
-            </a:r>
-          </a:p>
-          <a:p>
-            <a:pPr>
-              <a:defRPr sz="1000"/>
-            </a:pPr>
-            <a:r>
-              <a:t>• Event Schema Registry für Compatibility</a:t>
-            </a:r>
-          </a:p>
-          <a:p>
-            <a:pPr>
-              <a:defRPr sz="1000"/>
-            </a:pPr>
-            <a:r>
-              <a:t>• Dead Letter Queue für Failed Events</a:t>
-            </a:r>
-          </a:p>
-          <a:p>
-            <a:pPr>
-              <a:defRPr sz="1000"/>
-            </a:pPr>
-            <a:r>
-              <a:t>• Event Compression für hohe Throughput</a:t>
-            </a:r>
-          </a:p>
-          <a:p>
-            <a:pPr>
-              <a:defRPr sz="1000"/>
-            </a:pPr>
-            <a:r>
-              <a:t>• Monitoring von Queue Depths und Lag</a:t>
-            </a:r>
-          </a:p>
+          <a:p/>
         </p:txBody>
       </p:sp>
     </p:spTree>
@@ -5118,7 +4832,7 @@
             <a:spLocks noGrp="1"/>
           </p:cNvSpPr>
           <p:nvPr>
-            <p:ph type="ctrTitle"/>
+            <p:ph type="title"/>
           </p:nvPr>
         </p:nvSpPr>
         <p:spPr/>
@@ -5127,149 +4841,225 @@
           <a:lstStyle/>
           <a:p>
             <a:r>
-              <a:t>3. Event-Driven - When to Use</a:t>
-            </a:r>
-          </a:p>
-        </p:txBody>
-      </p:sp>
-      <p:sp>
-        <p:nvSpPr>
-          <p:cNvPr id="3" name="TextBox 2"/>
-          <p:cNvSpPr txBox="1"/>
-          <p:nvPr/>
-        </p:nvSpPr>
-        <p:spPr>
-          <a:xfrm>
-            <a:off x="457200" y="1371600"/>
-            <a:ext cx="3657600" cy="5486400"/>
-          </a:xfrm>
-          <a:prstGeom prst="rect">
-            <a:avLst/>
-          </a:prstGeom>
-          <a:noFill/>
-        </p:spPr>
-        <p:txBody>
-          <a:bodyPr wrap="none">
-            <a:spAutoFit/>
-          </a:bodyPr>
+              <a:t>Hexagonal Architecture - Schema</a:t>
+            </a:r>
+          </a:p>
+        </p:txBody>
+      </p:sp>
+      <p:sp>
+        <p:nvSpPr>
+          <p:cNvPr id="3" name="Content Placeholder 2"/>
+          <p:cNvSpPr>
+            <a:spLocks noGrp="1"/>
+          </p:cNvSpPr>
+          <p:nvPr>
+            <p:ph idx="1"/>
+          </p:nvPr>
+        </p:nvSpPr>
+        <p:spPr/>
+        <p:txBody>
+          <a:bodyPr/>
           <a:lstStyle/>
           <a:p>
             <a:pPr>
-              <a:defRPr b="1" sz="1800">
-                <a:solidFill>
-                  <a:srgbClr val="008000"/>
-                </a:solidFill>
-              </a:defRPr>
+              <a:lnSpc>
+                <a:spcPct val="100000"/>
+              </a:lnSpc>
+              <a:spcBef>
+                <a:spcPts val="0"/>
+              </a:spcBef>
+              <a:spcAft>
+                <a:spcPts val="0"/>
+              </a:spcAft>
             </a:pPr>
             <a:r>
-              <a:t>Ideal für:</a:t>
-            </a:r>
-          </a:p>
-          <a:p>
-            <a:pPr>
-              <a:defRPr sz="1200"/>
-            </a:pPr>
-            <a:r>
-              <a:t>• Real-time Monitoring und Alerting</a:t>
-            </a:r>
-          </a:p>
-          <a:p>
-            <a:pPr>
-              <a:defRPr sz="1200"/>
-            </a:pPr>
-            <a:r>
-              <a:t>• High-Throughput Event Processing</a:t>
-            </a:r>
-          </a:p>
-          <a:p>
-            <a:pPr>
-              <a:defRPr sz="1200"/>
-            </a:pPr>
-            <a:r>
-              <a:t>• Lose gekoppelte Systeme</a:t>
-            </a:r>
-          </a:p>
-          <a:p>
-            <a:pPr>
-              <a:defRPr sz="1200"/>
-            </a:pPr>
-            <a:r>
-              <a:t>• Asynchrone Verarbeitung erforderlich</a:t>
-            </a:r>
-          </a:p>
-          <a:p>
-            <a:pPr>
-              <a:defRPr sz="1200"/>
-            </a:pPr>
-            <a:r>
-              <a:t>• Event Replay und Analytics wichtig</a:t>
-            </a:r>
-          </a:p>
-        </p:txBody>
-      </p:sp>
-      <p:sp>
-        <p:nvSpPr>
-          <p:cNvPr id="4" name="TextBox 3"/>
-          <p:cNvSpPr txBox="1"/>
-          <p:nvPr/>
-        </p:nvSpPr>
-        <p:spPr>
-          <a:xfrm>
-            <a:off x="4572000" y="1371600"/>
-            <a:ext cx="4114800" cy="5486400"/>
-          </a:xfrm>
-          <a:prstGeom prst="rect">
-            <a:avLst/>
-          </a:prstGeom>
-          <a:noFill/>
-        </p:spPr>
-        <p:txBody>
-          <a:bodyPr wrap="none">
-            <a:spAutoFit/>
-          </a:bodyPr>
-          <a:lstStyle/>
-          <a:p>
-            <a:pPr>
-              <a:defRPr b="1" sz="1800">
-                <a:solidFill>
-                  <a:srgbClr val="FF0000"/>
-                </a:solidFill>
-              </a:defRPr>
-            </a:pPr>
-            <a:r>
-              <a:t>Vermeiden wenn:</a:t>
-            </a:r>
-          </a:p>
-          <a:p>
-            <a:pPr>
-              <a:defRPr sz="1200"/>
-            </a:pPr>
-            <a:r>
-              <a:t>• Strong Consistency erforderlich</a:t>
-            </a:r>
-          </a:p>
-          <a:p>
-            <a:pPr>
-              <a:defRPr sz="1200"/>
-            </a:pPr>
-            <a:r>
-              <a:t>• Einfache Request-Response Patterns</a:t>
-            </a:r>
-          </a:p>
-          <a:p>
-            <a:pPr>
-              <a:defRPr sz="1200"/>
-            </a:pPr>
-            <a:r>
-              <a:t>• Begrenzte Message Queue Expertise</a:t>
-            </a:r>
-          </a:p>
-          <a:p>
-            <a:pPr>
-              <a:defRPr sz="1200"/>
-            </a:pPr>
-            <a:r>
-              <a:t>• Synchrone Verarbeitung ausreichend</a:t>
+              <a:rPr sz="900">
+                <a:latin typeface="Consolas"/>
+              </a:rPr>
+              <a:t>Hexagonal Architecture</a:t>
+            </a:r>
+            <a:br/>
+            <a:r>
+              <a:rPr sz="900">
+                <a:latin typeface="Consolas"/>
+              </a:rPr>
+              <a:t>                           (Ports &amp; Adapters)</a:t>
+            </a:r>
+            <a:br/>
+            <a:br/>
+            <a:r>
+              <a:rPr sz="900">
+                <a:latin typeface="Consolas"/>
+              </a:rPr>
+              <a:t>    ┌─────────────────┐                    ┌─────────────────┐</a:t>
+            </a:r>
+            <a:br/>
+            <a:r>
+              <a:rPr sz="900">
+                <a:latin typeface="Consolas"/>
+              </a:rPr>
+              <a:t>    │   Web UI        │                    │   Database      │</a:t>
+            </a:r>
+            <a:br/>
+            <a:r>
+              <a:rPr sz="900">
+                <a:latin typeface="Consolas"/>
+              </a:rPr>
+              <a:t>    │   Adapter       │                    │   Adapter       │</a:t>
+            </a:r>
+            <a:br/>
+            <a:r>
+              <a:rPr sz="900">
+                <a:latin typeface="Consolas"/>
+              </a:rPr>
+              <a:t>    └─────┬───────────┘                    └─────┬───────────┘</a:t>
+            </a:r>
+            <a:br/>
+            <a:r>
+              <a:rPr sz="900">
+                <a:latin typeface="Consolas"/>
+              </a:rPr>
+              <a:t>          │                                      │</a:t>
+            </a:r>
+            <a:br/>
+            <a:r>
+              <a:rPr sz="900">
+                <a:latin typeface="Consolas"/>
+              </a:rPr>
+              <a:t>    ┌─────┴───────────┐                    ┌─────┴───────────┐</a:t>
+            </a:r>
+            <a:br/>
+            <a:r>
+              <a:rPr sz="900">
+                <a:latin typeface="Consolas"/>
+              </a:rPr>
+              <a:t>    │   HTTP Port     │                    │ Persistence Port│</a:t>
+            </a:r>
+            <a:br/>
+            <a:r>
+              <a:rPr sz="900">
+                <a:latin typeface="Consolas"/>
+              </a:rPr>
+              <a:t>    └─────┬───────────┘                    └─────┬───────────┘</a:t>
+            </a:r>
+            <a:br/>
+            <a:r>
+              <a:rPr sz="900">
+                <a:latin typeface="Consolas"/>
+              </a:rPr>
+              <a:t>          │                                      │</a:t>
+            </a:r>
+            <a:br/>
+            <a:r>
+              <a:rPr sz="900">
+                <a:latin typeface="Consolas"/>
+              </a:rPr>
+              <a:t>          │     ┌─────────────────────────┐      │</a:t>
+            </a:r>
+            <a:br/>
+            <a:r>
+              <a:rPr sz="900">
+                <a:latin typeface="Consolas"/>
+              </a:rPr>
+              <a:t>          └─────│                         │──────┘</a:t>
+            </a:r>
+            <a:br/>
+            <a:r>
+              <a:rPr sz="900">
+                <a:latin typeface="Consolas"/>
+              </a:rPr>
+              <a:t>                │     Domain Core         │</a:t>
+            </a:r>
+            <a:br/>
+            <a:r>
+              <a:rPr sz="900">
+                <a:latin typeface="Consolas"/>
+              </a:rPr>
+              <a:t>                │                         │</a:t>
+            </a:r>
+            <a:br/>
+            <a:r>
+              <a:rPr sz="900">
+                <a:latin typeface="Consolas"/>
+              </a:rPr>
+              <a:t>    ┌───────────│   Business Logic        │──────────┐</a:t>
+            </a:r>
+            <a:br/>
+            <a:r>
+              <a:rPr sz="900">
+                <a:latin typeface="Consolas"/>
+              </a:rPr>
+              <a:t>    │           │                         │          │</a:t>
+            </a:r>
+            <a:br/>
+            <a:r>
+              <a:rPr sz="900">
+                <a:latin typeface="Consolas"/>
+              </a:rPr>
+              <a:t>    │           └─────────────────────────┘          │</a:t>
+            </a:r>
+            <a:br/>
+            <a:r>
+              <a:rPr sz="900">
+                <a:latin typeface="Consolas"/>
+              </a:rPr>
+              <a:t>    │                                                │</a:t>
+            </a:r>
+            <a:br/>
+            <a:r>
+              <a:rPr sz="900">
+                <a:latin typeface="Consolas"/>
+              </a:rPr>
+              <a:t>┌───┴───────────┐                            ┌─────┴───────────┐</a:t>
+            </a:r>
+            <a:br/>
+            <a:r>
+              <a:rPr sz="900">
+                <a:latin typeface="Consolas"/>
+              </a:rPr>
+              <a:t>│  API Port     │                            │   Event Port    │</a:t>
+            </a:r>
+            <a:br/>
+            <a:r>
+              <a:rPr sz="900">
+                <a:latin typeface="Consolas"/>
+              </a:rPr>
+              <a:t>└───┬───────────┘                            └─────┬───────────┘</a:t>
+            </a:r>
+            <a:br/>
+            <a:r>
+              <a:rPr sz="900">
+                <a:latin typeface="Consolas"/>
+              </a:rPr>
+              <a:t>    │                                              │</a:t>
+            </a:r>
+            <a:br/>
+            <a:r>
+              <a:rPr sz="900">
+                <a:latin typeface="Consolas"/>
+              </a:rPr>
+              <a:t>┌───┴───────────┐                            ┌─────┴───────────┐</a:t>
+            </a:r>
+            <a:br/>
+            <a:r>
+              <a:rPr sz="900">
+                <a:latin typeface="Consolas"/>
+              </a:rPr>
+              <a:t>│   REST API    │                            │   Message       │</a:t>
+            </a:r>
+            <a:br/>
+            <a:r>
+              <a:rPr sz="900">
+                <a:latin typeface="Consolas"/>
+              </a:rPr>
+              <a:t>│   Adapter     │                            │   Queue Adapter │</a:t>
+            </a:r>
+            <a:br/>
+            <a:r>
+              <a:rPr sz="900">
+                <a:latin typeface="Consolas"/>
+              </a:rPr>
+              <a:t>└───────────────┘                            └─────────────────┘</a:t>
             </a:r>
           </a:p>
         </p:txBody>
@@ -5299,7 +5089,7 @@
             <a:spLocks noGrp="1"/>
           </p:cNvSpPr>
           <p:nvPr>
-            <p:ph type="ctrTitle"/>
+            <p:ph type="title"/>
           </p:nvPr>
         </p:nvSpPr>
         <p:spPr/>
@@ -5308,1497 +5098,117 @@
           <a:lstStyle/>
           <a:p>
             <a:r>
-              <a:t>4. Hexagonal Architecture (Ports &amp; Adapters)</a:t>
-            </a:r>
-          </a:p>
-        </p:txBody>
-      </p:sp>
-      <p:sp>
-        <p:nvSpPr>
-          <p:cNvPr id="3" name="Subtitle 2"/>
-          <p:cNvSpPr>
-            <a:spLocks noGrp="1"/>
-          </p:cNvSpPr>
-          <p:nvPr>
-            <p:ph type="subTitle" idx="1"/>
+              <a:t>Summary - Part 1</a:t>
+            </a:r>
+          </a:p>
+        </p:txBody>
+      </p:sp>
+      <p:sp>
+        <p:nvSpPr>
+          <p:cNvPr id="3" name="Content Placeholder 2"/>
+          <p:cNvSpPr>
+            <a:spLocks noGrp="1"/>
+          </p:cNvSpPr>
+          <p:nvPr>
+            <p:ph idx="1"/>
           </p:nvPr>
         </p:nvSpPr>
         <p:spPr/>
         <p:txBody>
           <a:bodyPr/>
           <a:lstStyle/>
-          <a:p/>
-          <a:p>
-            <a:pPr>
-              <a:defRPr sz="1200"/>
-            </a:pPr>
-            <a:r>
-              <a:t>```</a:t>
-            </a:r>
-          </a:p>
-          <a:p>
-            <a:pPr>
-              <a:defRPr sz="1200"/>
-            </a:pPr>
-            <a:r>
-              <a:t>Hexagonal Architecture</a:t>
-            </a:r>
-          </a:p>
-          <a:p>
-            <a:pPr>
-              <a:defRPr sz="1200"/>
-            </a:pPr>
-            <a:r>
-              <a:t>(Ports &amp; Adapters)</a:t>
-            </a:r>
-          </a:p>
-          <a:p>
-            <a:pPr>
-              <a:defRPr sz="1200"/>
-            </a:pPr>
-            <a:r>
-              <a:t>┌─────────────────┐                    ┌─────────────────┐</a:t>
-            </a:r>
-          </a:p>
-          <a:p>
-            <a:pPr>
-              <a:defRPr sz="1200"/>
-            </a:pPr>
-            <a:r>
-              <a:t>│   Web UI        │                    │   Database      │</a:t>
-            </a:r>
-          </a:p>
-          <a:p>
-            <a:pPr>
-              <a:defRPr sz="1200"/>
-            </a:pPr>
-            <a:r>
-              <a:t>│   Adapter       │                    │   Adapter       │</a:t>
-            </a:r>
-          </a:p>
-          <a:p>
-            <a:pPr>
-              <a:defRPr sz="1200"/>
-            </a:pPr>
-            <a:r>
-              <a:t>└─────┬───────────┘                    └─────┬───────────┘</a:t>
-            </a:r>
-          </a:p>
-          <a:p>
-            <a:pPr>
-              <a:defRPr sz="1200"/>
-            </a:pPr>
-            <a:r>
-              <a:t>│                                      │</a:t>
-            </a:r>
-          </a:p>
-          <a:p>
-            <a:pPr>
-              <a:defRPr sz="1200"/>
-            </a:pPr>
-            <a:r>
-              <a:t>┌─────┴───────────┐                    ┌─────┴───────────┐</a:t>
-            </a:r>
-          </a:p>
-          <a:p>
-            <a:pPr>
-              <a:defRPr sz="1200"/>
-            </a:pPr>
-            <a:r>
-              <a:t>│   HTTP Port     │                    │ Persistence Port│</a:t>
-            </a:r>
-          </a:p>
-          <a:p>
-            <a:pPr>
-              <a:defRPr sz="1200"/>
-            </a:pPr>
-            <a:r>
-              <a:t>└─────┬───────────┘                    └─────┬───────────┘</a:t>
-            </a:r>
-          </a:p>
-          <a:p>
-            <a:pPr>
-              <a:defRPr sz="1200"/>
-            </a:pPr>
-            <a:r>
-              <a:t>│                                      │</a:t>
-            </a:r>
-          </a:p>
-          <a:p>
-            <a:pPr>
-              <a:defRPr sz="1200"/>
-            </a:pPr>
-            <a:r>
-              <a:t>│     ┌─────────────────────────┐      │</a:t>
-            </a:r>
-          </a:p>
-          <a:p>
-            <a:pPr>
-              <a:defRPr sz="1200"/>
-            </a:pPr>
-            <a:r>
-              <a:t>└─────│                         │──────┘</a:t>
-            </a:r>
-          </a:p>
-          <a:p>
-            <a:pPr>
-              <a:defRPr sz="1200"/>
-            </a:pPr>
-            <a:r>
-              <a:t>│     Domain Core         │</a:t>
-            </a:r>
-          </a:p>
-          <a:p>
-            <a:pPr>
-              <a:defRPr sz="1200"/>
-            </a:pPr>
-            <a:r>
-              <a:t>│                         │</a:t>
-            </a:r>
-          </a:p>
-          <a:p>
-            <a:pPr>
-              <a:defRPr sz="1200"/>
-            </a:pPr>
-            <a:r>
-              <a:t>┌───────────│   Business Logic        │──────────┐</a:t>
-            </a:r>
-          </a:p>
-          <a:p>
-            <a:pPr>
-              <a:defRPr sz="1200"/>
-            </a:pPr>
-            <a:r>
-              <a:t>│           │                         │          │</a:t>
-            </a:r>
-          </a:p>
-          <a:p>
-            <a:pPr>
-              <a:defRPr sz="1200"/>
-            </a:pPr>
-            <a:r>
-              <a:t>│           └─────────────────────────┘          │</a:t>
-            </a:r>
-          </a:p>
-          <a:p>
-            <a:pPr>
-              <a:defRPr sz="1200"/>
-            </a:pPr>
-            <a:r>
-              <a:t>│                                                │</a:t>
-            </a:r>
-          </a:p>
-          <a:p>
-            <a:pPr>
-              <a:defRPr sz="1200"/>
-            </a:pPr>
-            <a:r>
-              <a:t>┌───┴───────────┐                            ┌─────┴───────────┐</a:t>
-            </a:r>
-          </a:p>
-          <a:p>
-            <a:pPr>
-              <a:defRPr sz="1200"/>
-            </a:pPr>
-            <a:r>
-              <a:t>│  API Port     │                            │   Event Port    │</a:t>
-            </a:r>
-          </a:p>
-          <a:p>
-            <a:pPr>
-              <a:defRPr sz="1200"/>
-            </a:pPr>
-            <a:r>
-              <a:t>└───┬───────────┘                            └─────┬───────────┘</a:t>
-            </a:r>
-          </a:p>
-          <a:p>
-            <a:pPr>
-              <a:defRPr sz="1200"/>
-            </a:pPr>
-            <a:r>
-              <a:t>│                                              │</a:t>
-            </a:r>
-          </a:p>
-          <a:p>
-            <a:pPr>
-              <a:defRPr sz="1200"/>
-            </a:pPr>
-            <a:r>
-              <a:t>┌───┴───────────┐                            ┌─────┴───────────┐</a:t>
-            </a:r>
-          </a:p>
-          <a:p>
-            <a:pPr>
-              <a:defRPr sz="1200"/>
-            </a:pPr>
-            <a:r>
-              <a:t>│   REST API    │                            │   Message       │</a:t>
-            </a:r>
-          </a:p>
-          <a:p>
-            <a:pPr>
-              <a:defRPr sz="1200"/>
-            </a:pPr>
-            <a:r>
-              <a:t>│   Adapter     │                            │   Queue Adapter │</a:t>
-            </a:r>
-          </a:p>
-          <a:p>
-            <a:pPr>
-              <a:defRPr sz="1200"/>
-            </a:pPr>
-            <a:r>
-              <a:t>└───────────────┘                            └─────────────────┘</a:t>
-            </a:r>
-          </a:p>
-          <a:p>
-            <a:pPr>
-              <a:defRPr sz="1200"/>
-            </a:pPr>
-            <a:r>
-              <a:t>```</a:t>
-            </a:r>
-          </a:p>
-        </p:txBody>
-      </p:sp>
-    </p:spTree>
-  </p:cSld>
-  <p:clrMapOvr>
-    <a:masterClrMapping/>
-  </p:clrMapOvr>
-</p:sld>
-</file>
-
-<file path=ppt/slides/slide16.xml><?xml version="1.0" encoding="utf-8"?>
-<p:sld xmlns:a="http://schemas.openxmlformats.org/drawingml/2006/main" xmlns:p="http://schemas.openxmlformats.org/presentationml/2006/main" xmlns:r="http://schemas.openxmlformats.org/officeDocument/2006/relationships">
-  <p:cSld>
-    <p:spTree>
-      <p:nvGrpSpPr>
-        <p:cNvPr id="1" name=""/>
-        <p:cNvGrpSpPr/>
-        <p:nvPr/>
-      </p:nvGrpSpPr>
-      <p:grpSpPr/>
-      <p:sp>
-        <p:nvSpPr>
-          <p:cNvPr id="2" name="Title 1"/>
-          <p:cNvSpPr>
-            <a:spLocks noGrp="1"/>
-          </p:cNvSpPr>
-          <p:nvPr>
-            <p:ph type="ctrTitle"/>
-          </p:nvPr>
-        </p:nvSpPr>
-        <p:spPr/>
-        <p:txBody>
-          <a:bodyPr/>
-          <a:lstStyle/>
-          <a:p>
-            <a:r>
-              <a:t>4. Hexagonal Architecture - Telekom Use Case</a:t>
-            </a:r>
-          </a:p>
-        </p:txBody>
-      </p:sp>
-      <p:sp>
-        <p:nvSpPr>
-          <p:cNvPr id="3" name="Subtitle 2"/>
-          <p:cNvSpPr>
-            <a:spLocks noGrp="1"/>
-          </p:cNvSpPr>
-          <p:nvPr>
-            <p:ph type="subTitle" idx="1"/>
-          </p:nvPr>
-        </p:nvSpPr>
-        <p:spPr/>
-        <p:txBody>
-          <a:bodyPr/>
-          <a:lstStyle/>
-          <a:p/>
-          <a:p>
-            <a:pPr>
-              <a:defRPr b="1" sz="1800"/>
-            </a:pPr>
-            <a:r>
-              <a:t>Device Configuration Service</a:t>
-            </a:r>
-          </a:p>
-          <a:p>
-            <a:pPr lvl="1">
-              <a:defRPr sz="1400"/>
-            </a:pPr>
-            <a:r>
-              <a:t>**Device configuration validation**</a:t>
-            </a:r>
-          </a:p>
-          <a:p>
-            <a:pPr lvl="1">
-              <a:defRPr sz="1400"/>
-            </a:pPr>
-            <a:r>
-              <a:t>**Template processing**</a:t>
-            </a:r>
-          </a:p>
-          <a:p>
-            <a:pPr lvl="1">
-              <a:defRPr sz="1400"/>
-            </a:pPr>
-            <a:r>
-              <a:t>**Business rules enforcement**</a:t>
-            </a:r>
-          </a:p>
-          <a:p>
-            <a:pPr lvl="1">
-              <a:defRPr sz="1400"/>
-            </a:pPr>
-            <a:r>
-              <a:t>**REST API:** Web interface</a:t>
-            </a:r>
-          </a:p>
-          <a:p>
-            <a:pPr lvl="1">
-              <a:defRPr sz="1400"/>
-            </a:pPr>
-            <a:r>
-              <a:t>**SNMP interface:** Device communication</a:t>
-            </a:r>
-          </a:p>
-          <a:p>
-            <a:pPr lvl="1">
-              <a:defRPr sz="1400"/>
-            </a:pPr>
-            <a:r>
-              <a:t>**File-based config:** Bulk operations</a:t>
-            </a:r>
-          </a:p>
-          <a:p>
-            <a:pPr lvl="1">
-              <a:defRPr sz="1400"/>
-            </a:pPr>
-            <a:r>
-              <a:t>**Message queues:** Event notifications</a:t>
-            </a:r>
-          </a:p>
-          <a:p>
-            <a:pPr lvl="1">
-              <a:defRPr sz="1400"/>
-            </a:pPr>
-            <a:r>
-              <a:t>**Device management:** Core business operations</a:t>
-            </a:r>
-          </a:p>
-          <a:p>
-            <a:pPr lvl="1">
-              <a:defRPr sz="1400"/>
-            </a:pPr>
-            <a:r>
-              <a:t>**Configuration storage:** Persistence interface</a:t>
-            </a:r>
-          </a:p>
-          <a:p>
-            <a:pPr lvl="1">
-              <a:defRPr sz="1400"/>
-            </a:pPr>
-            <a:r>
-              <a:t>**Event notification:** Integration interface</a:t>
-            </a:r>
-          </a:p>
-        </p:txBody>
-      </p:sp>
-    </p:spTree>
-  </p:cSld>
-  <p:clrMapOvr>
-    <a:masterClrMapping/>
-  </p:clrMapOvr>
-</p:sld>
-</file>
-
-<file path=ppt/slides/slide17.xml><?xml version="1.0" encoding="utf-8"?>
-<p:sld xmlns:a="http://schemas.openxmlformats.org/drawingml/2006/main" xmlns:p="http://schemas.openxmlformats.org/presentationml/2006/main" xmlns:r="http://schemas.openxmlformats.org/officeDocument/2006/relationships">
-  <p:cSld>
-    <p:spTree>
-      <p:nvGrpSpPr>
-        <p:cNvPr id="1" name=""/>
-        <p:cNvGrpSpPr/>
-        <p:nvPr/>
-      </p:nvGrpSpPr>
-      <p:grpSpPr/>
-      <p:sp>
-        <p:nvSpPr>
-          <p:cNvPr id="2" name="Title 1"/>
-          <p:cNvSpPr>
-            <a:spLocks noGrp="1"/>
-          </p:cNvSpPr>
-          <p:nvPr>
-            <p:ph type="ctrTitle"/>
-          </p:nvPr>
-        </p:nvSpPr>
-        <p:spPr/>
-        <p:txBody>
-          <a:bodyPr/>
-          <a:lstStyle/>
-          <a:p>
-            <a:r>
-              <a:t>4. Hexagonal Architecture - Trade-offs</a:t>
-            </a:r>
-          </a:p>
-        </p:txBody>
-      </p:sp>
-      <p:sp>
-        <p:nvSpPr>
-          <p:cNvPr id="3" name="TextBox 2"/>
-          <p:cNvSpPr txBox="1"/>
-          <p:nvPr/>
-        </p:nvSpPr>
-        <p:spPr>
-          <a:xfrm>
-            <a:off x="457200" y="1371600"/>
-            <a:ext cx="3657600" cy="5486400"/>
-          </a:xfrm>
-          <a:prstGeom prst="rect">
-            <a:avLst/>
-          </a:prstGeom>
-          <a:noFill/>
-        </p:spPr>
-        <p:txBody>
-          <a:bodyPr wrap="none">
-            <a:spAutoFit/>
-          </a:bodyPr>
-          <a:lstStyle/>
-          <a:p>
-            <a:pPr>
-              <a:defRPr b="1" sz="1800"/>
-            </a:pPr>
-            <a:r>
-              <a:t>Vorteile ✅</a:t>
-            </a:r>
-          </a:p>
-          <a:p>
-            <a:pPr>
-              <a:defRPr sz="1200"/>
-            </a:pPr>
-            <a:r>
-              <a:t>• Domain Logic vollständig isoliert von Infrastructure</a:t>
-            </a:r>
-          </a:p>
-          <a:p>
-            <a:pPr>
-              <a:defRPr sz="1200"/>
-            </a:pPr>
-            <a:r>
-              <a:t>• Austauschbare External Dependencies (Database, APIs)</a:t>
-            </a:r>
-          </a:p>
-          <a:p>
-            <a:pPr>
-              <a:defRPr sz="1200"/>
-            </a:pPr>
-            <a:r>
-              <a:t>• Excellente Testbarkeit durch Dependency Inversion</a:t>
-            </a:r>
-          </a:p>
-          <a:p>
-            <a:pPr>
-              <a:defRPr sz="1200"/>
-            </a:pPr>
-            <a:r>
-              <a:t>• Framework-agnostic Domain Layer</a:t>
-            </a:r>
-          </a:p>
-        </p:txBody>
-      </p:sp>
-      <p:sp>
-        <p:nvSpPr>
-          <p:cNvPr id="4" name="TextBox 3"/>
-          <p:cNvSpPr txBox="1"/>
-          <p:nvPr/>
-        </p:nvSpPr>
-        <p:spPr>
-          <a:xfrm>
-            <a:off x="4572000" y="1371600"/>
-            <a:ext cx="4114800" cy="5486400"/>
-          </a:xfrm>
-          <a:prstGeom prst="rect">
-            <a:avLst/>
-          </a:prstGeom>
-          <a:noFill/>
-        </p:spPr>
-        <p:txBody>
-          <a:bodyPr wrap="none">
-            <a:spAutoFit/>
-          </a:bodyPr>
-          <a:lstStyle/>
-          <a:p>
-            <a:pPr>
-              <a:defRPr b="1" sz="1800"/>
-            </a:pPr>
-            <a:r>
-              <a:t>Nachteile ❌</a:t>
-            </a:r>
-          </a:p>
-          <a:p>
-            <a:pPr>
-              <a:defRPr sz="1200"/>
-            </a:pPr>
-            <a:r>
-              <a:t>• Initial Setup komplexer als Layer Architecture</a:t>
-            </a:r>
-          </a:p>
-          <a:p>
-            <a:pPr>
-              <a:defRPr sz="1200"/>
-            </a:pPr>
-            <a:r>
-              <a:t>• Mehr Abstractions und Interfaces</a:t>
-            </a:r>
-          </a:p>
-          <a:p>
-            <a:pPr>
-              <a:defRPr sz="1200"/>
-            </a:pPr>
-            <a:r>
-              <a:t>• Kann Over-Engineering für einfache CRUD Apps sein</a:t>
-            </a:r>
-          </a:p>
-          <a:p>
-            <a:pPr>
-              <a:defRPr sz="1200"/>
-            </a:pPr>
-            <a:r>
-              <a:t>• Team muss Dependency Inversion verstehen</a:t>
-            </a:r>
-          </a:p>
-        </p:txBody>
-      </p:sp>
-      <p:sp>
-        <p:nvSpPr>
-          <p:cNvPr id="5" name="TextBox 4"/>
-          <p:cNvSpPr txBox="1"/>
-          <p:nvPr/>
-        </p:nvSpPr>
-        <p:spPr>
-          <a:xfrm>
-            <a:off x="457200" y="5943600"/>
-            <a:ext cx="8229600" cy="1371600"/>
-          </a:xfrm>
-          <a:prstGeom prst="rect">
-            <a:avLst/>
-          </a:prstGeom>
-          <a:noFill/>
-        </p:spPr>
-        <p:txBody>
-          <a:bodyPr wrap="none">
-            <a:spAutoFit/>
-          </a:bodyPr>
-          <a:lstStyle/>
-          <a:p>
-            <a:pPr>
-              <a:defRPr b="1" sz="1400"/>
-            </a:pPr>
-            <a:r>
-              <a:t>Production Considerations ⚠️</a:t>
-            </a:r>
-          </a:p>
-          <a:p>
-            <a:pPr>
-              <a:defRPr sz="1000"/>
-            </a:pPr>
-            <a:r>
-              <a:t>• Adapter Health Checks für alle External Systems</a:t>
-            </a:r>
-          </a:p>
-          <a:p>
-            <a:pPr>
-              <a:defRPr sz="1000"/>
-            </a:pPr>
-            <a:r>
-              <a:t>• Circuit Breaker Pattern für External Dependencies</a:t>
-            </a:r>
-          </a:p>
-          <a:p>
-            <a:pPr>
-              <a:defRPr sz="1000"/>
-            </a:pPr>
-            <a:r>
-              <a:t>• Adapter-specific Monitoring und Alerting</a:t>
-            </a:r>
-          </a:p>
-          <a:p>
-            <a:pPr>
-              <a:defRPr sz="1000"/>
-            </a:pPr>
-            <a:r>
-              <a:t>• Configuration für Adapter Switching</a:t>
-            </a:r>
-          </a:p>
-        </p:txBody>
-      </p:sp>
-    </p:spTree>
-  </p:cSld>
-  <p:clrMapOvr>
-    <a:masterClrMapping/>
-  </p:clrMapOvr>
-</p:sld>
-</file>
-
-<file path=ppt/slides/slide18.xml><?xml version="1.0" encoding="utf-8"?>
-<p:sld xmlns:a="http://schemas.openxmlformats.org/drawingml/2006/main" xmlns:p="http://schemas.openxmlformats.org/presentationml/2006/main" xmlns:r="http://schemas.openxmlformats.org/officeDocument/2006/relationships">
-  <p:cSld>
-    <p:spTree>
-      <p:nvGrpSpPr>
-        <p:cNvPr id="1" name=""/>
-        <p:cNvGrpSpPr/>
-        <p:nvPr/>
-      </p:nvGrpSpPr>
-      <p:grpSpPr/>
-      <p:sp>
-        <p:nvSpPr>
-          <p:cNvPr id="2" name="Title 1"/>
-          <p:cNvSpPr>
-            <a:spLocks noGrp="1"/>
-          </p:cNvSpPr>
-          <p:nvPr>
-            <p:ph type="ctrTitle"/>
-          </p:nvPr>
-        </p:nvSpPr>
-        <p:spPr/>
-        <p:txBody>
-          <a:bodyPr/>
-          <a:lstStyle/>
-          <a:p>
-            <a:r>
-              <a:t>4. Hexagonal Architecture - When to Use</a:t>
-            </a:r>
-          </a:p>
-        </p:txBody>
-      </p:sp>
-      <p:sp>
-        <p:nvSpPr>
-          <p:cNvPr id="3" name="TextBox 2"/>
-          <p:cNvSpPr txBox="1"/>
-          <p:nvPr/>
-        </p:nvSpPr>
-        <p:spPr>
-          <a:xfrm>
-            <a:off x="457200" y="1371600"/>
-            <a:ext cx="3657600" cy="5486400"/>
-          </a:xfrm>
-          <a:prstGeom prst="rect">
-            <a:avLst/>
-          </a:prstGeom>
-          <a:noFill/>
-        </p:spPr>
-        <p:txBody>
-          <a:bodyPr wrap="none">
-            <a:spAutoFit/>
-          </a:bodyPr>
-          <a:lstStyle/>
-          <a:p>
-            <a:pPr>
-              <a:defRPr b="1" sz="1800">
-                <a:solidFill>
-                  <a:srgbClr val="008000"/>
-                </a:solidFill>
-              </a:defRPr>
-            </a:pPr>
-            <a:r>
-              <a:t>Ideal für:</a:t>
-            </a:r>
-          </a:p>
-          <a:p>
-            <a:pPr>
-              <a:defRPr sz="1200"/>
-            </a:pPr>
-            <a:r>
-              <a:t>• Long-lived Business Applications</a:t>
-            </a:r>
-          </a:p>
-          <a:p>
-            <a:pPr>
-              <a:defRPr sz="1200"/>
-            </a:pPr>
-            <a:r>
-              <a:t>• Frequent External System Changes</a:t>
-            </a:r>
-          </a:p>
-          <a:p>
-            <a:pPr>
-              <a:defRPr sz="1200"/>
-            </a:pPr>
-            <a:r>
-              <a:t>• High Testing Requirements</a:t>
-            </a:r>
-          </a:p>
-          <a:p>
-            <a:pPr>
-              <a:defRPr sz="1200"/>
-            </a:pPr>
-            <a:r>
-              <a:t>• Framework Independence gewünscht</a:t>
-            </a:r>
-          </a:p>
-          <a:p>
-            <a:pPr>
-              <a:defRPr sz="1200"/>
-            </a:pPr>
+          <a:p>
+            <a:pPr/>
+            <a:r>
+              <a:t>**Pattern Selection Guide:**</a:t>
+            </a:r>
+          </a:p>
+          <a:p>
+            <a:pPr/>
+            <a:r>
+              <a:t>**Start Simple (Layered):**</a:t>
+            </a:r>
+          </a:p>
+          <a:p>
+            <a:pPr lvl="1"/>
+            <a:r>
+              <a:t>• Prototypen und Proof-of-Concepts</a:t>
+            </a:r>
+          </a:p>
+          <a:p>
+            <a:pPr lvl="1"/>
+            <a:r>
+              <a:t>• Kleine Teams (&lt;5 Entwickler)</a:t>
+            </a:r>
+          </a:p>
+          <a:p>
+            <a:pPr lvl="1"/>
+            <a:r>
+              <a:t>• Einfache CRUD-Operationen</a:t>
+            </a:r>
+          </a:p>
+          <a:p>
+            <a:pPr/>
+            <a:r>
+              <a:t>**Scale Smart (Microservices):**</a:t>
+            </a:r>
+          </a:p>
+          <a:p>
+            <a:pPr lvl="1"/>
+            <a:r>
+              <a:t>• Große verteilte Teams</a:t>
+            </a:r>
+          </a:p>
+          <a:p>
+            <a:pPr lvl="1"/>
+            <a:r>
+              <a:t>• Independent Service Scaling</a:t>
+            </a:r>
+          </a:p>
+          <a:p>
+            <a:pPr lvl="1"/>
+            <a:r>
+              <a:t>• High Availability Requirements</a:t>
+            </a:r>
+          </a:p>
+          <a:p>
+            <a:pPr/>
+            <a:r>
+              <a:t>**Integrate Efficiently (Event-Driven):**</a:t>
+            </a:r>
+          </a:p>
+          <a:p>
+            <a:pPr lvl="1"/>
+            <a:r>
+              <a:t>• Real-time Processing</a:t>
+            </a:r>
+          </a:p>
+          <a:p>
+            <a:pPr lvl="1"/>
+            <a:r>
+              <a:t>• System Integration</a:t>
+            </a:r>
+          </a:p>
+          <a:p>
+            <a:pPr/>
+            <a:r>
+              <a:t>**Design for Change (Hexagonal):**</a:t>
+            </a:r>
+          </a:p>
+          <a:p>
+            <a:pPr lvl="1"/>
             <a:r>
               <a:t>• Complex Domain Logic</a:t>
             </a:r>
           </a:p>
-        </p:txBody>
-      </p:sp>
-      <p:sp>
-        <p:nvSpPr>
-          <p:cNvPr id="4" name="TextBox 3"/>
-          <p:cNvSpPr txBox="1"/>
-          <p:nvPr/>
-        </p:nvSpPr>
-        <p:spPr>
-          <a:xfrm>
-            <a:off x="4572000" y="1371600"/>
-            <a:ext cx="4114800" cy="5486400"/>
-          </a:xfrm>
-          <a:prstGeom prst="rect">
-            <a:avLst/>
-          </a:prstGeom>
-          <a:noFill/>
-        </p:spPr>
-        <p:txBody>
-          <a:bodyPr wrap="none">
-            <a:spAutoFit/>
-          </a:bodyPr>
-          <a:lstStyle/>
-          <a:p>
-            <a:pPr>
-              <a:defRPr b="1" sz="1800">
-                <a:solidFill>
-                  <a:srgbClr val="FF0000"/>
-                </a:solidFill>
-              </a:defRPr>
-            </a:pPr>
-            <a:r>
-              <a:t>Vermeiden wenn:</a:t>
-            </a:r>
-          </a:p>
-          <a:p>
-            <a:pPr>
-              <a:defRPr sz="1200"/>
-            </a:pPr>
-            <a:r>
-              <a:t>• Einfache CRUD Applications</a:t>
-            </a:r>
-          </a:p>
-          <a:p>
-            <a:pPr>
-              <a:defRPr sz="1200"/>
-            </a:pPr>
-            <a:r>
-              <a:t>• Begrenzte DI/IoC Erfahrung</a:t>
-            </a:r>
-          </a:p>
-          <a:p>
-            <a:pPr>
-              <a:defRPr sz="1200"/>
-            </a:pPr>
-            <a:r>
-              <a:t>• Kurze Entwicklungszyklen</a:t>
-            </a:r>
-          </a:p>
-          <a:p>
-            <a:pPr>
-              <a:defRPr sz="1200"/>
-            </a:pPr>
-            <a:r>
-              <a:t>• Kleine Prototyp-Projekte</a:t>
-            </a:r>
-          </a:p>
-        </p:txBody>
-      </p:sp>
-    </p:spTree>
-  </p:cSld>
-  <p:clrMapOvr>
-    <a:masterClrMapping/>
-  </p:clrMapOvr>
-</p:sld>
-</file>
-
-<file path=ppt/slides/slide19.xml><?xml version="1.0" encoding="utf-8"?>
-<p:sld xmlns:a="http://schemas.openxmlformats.org/drawingml/2006/main" xmlns:p="http://schemas.openxmlformats.org/presentationml/2006/main" xmlns:r="http://schemas.openxmlformats.org/officeDocument/2006/relationships">
-  <p:cSld>
-    <p:spTree>
-      <p:nvGrpSpPr>
-        <p:cNvPr id="1" name=""/>
-        <p:cNvGrpSpPr/>
-        <p:nvPr/>
-      </p:nvGrpSpPr>
-      <p:grpSpPr/>
-      <p:sp>
-        <p:nvSpPr>
-          <p:cNvPr id="2" name="Title 1"/>
-          <p:cNvSpPr>
-            <a:spLocks noGrp="1"/>
-          </p:cNvSpPr>
-          <p:nvPr>
-            <p:ph type="ctrTitle"/>
-          </p:nvPr>
-        </p:nvSpPr>
-        <p:spPr/>
-        <p:txBody>
-          <a:bodyPr/>
-          <a:lstStyle/>
-          <a:p>
-            <a:r>
-              <a:t>Architecture Decision Matrix - Part 1</a:t>
-            </a:r>
-          </a:p>
-        </p:txBody>
-      </p:sp>
-      <p:graphicFrame>
-        <p:nvGraphicFramePr>
-          <p:cNvPr id="3" name="Table 2"/>
-          <p:cNvGraphicFramePr>
-            <a:graphicFrameLocks noGrp="1"/>
-          </p:cNvGraphicFramePr>
-          <p:nvPr/>
-        </p:nvGraphicFramePr>
-        <p:xfrm>
-          <a:off x="457200" y="1371600"/>
-          <a:ext cx="8229600" cy="4572000"/>
-        </p:xfrm>
-        <a:graphic>
-          <a:graphicData uri="http://schemas.openxmlformats.org/drawingml/2006/table">
-            <a:tbl>
-              <a:tblPr firstRow="1" bandRow="1">
-                <a:tableStyleId>{5C22544A-7EE6-4342-B048-85BDC9FD1C3A}</a:tableStyleId>
-              </a:tblPr>
-              <a:tblGrid>
-                <a:gridCol w="1645920"/>
-                <a:gridCol w="1645920"/>
-                <a:gridCol w="1645920"/>
-                <a:gridCol w="1645920"/>
-                <a:gridCol w="1645920"/>
-              </a:tblGrid>
-              <a:tr h="571500">
-                <a:tc>
-                  <a:txBody>
-                    <a:bodyPr/>
-                    <a:lstStyle/>
-                    <a:p>
-                      <a:pPr>
-                        <a:defRPr b="1" sz="1200"/>
-                      </a:pPr>
-                      <a:r>
-                        <a:t>Criteria</a:t>
-                      </a:r>
-                    </a:p>
-                  </a:txBody>
-                  <a:tcPr/>
-                </a:tc>
-                <a:tc>
-                  <a:txBody>
-                    <a:bodyPr/>
-                    <a:lstStyle/>
-                    <a:p>
-                      <a:pPr>
-                        <a:defRPr b="1" sz="1200"/>
-                      </a:pPr>
-                      <a:r>
-                        <a:t>Layered</a:t>
-                      </a:r>
-                    </a:p>
-                  </a:txBody>
-                  <a:tcPr/>
-                </a:tc>
-                <a:tc>
-                  <a:txBody>
-                    <a:bodyPr/>
-                    <a:lstStyle/>
-                    <a:p>
-                      <a:pPr>
-                        <a:defRPr b="1" sz="1200"/>
-                      </a:pPr>
-                      <a:r>
-                        <a:t>Microservices</a:t>
-                      </a:r>
-                    </a:p>
-                  </a:txBody>
-                  <a:tcPr/>
-                </a:tc>
-                <a:tc>
-                  <a:txBody>
-                    <a:bodyPr/>
-                    <a:lstStyle/>
-                    <a:p>
-                      <a:pPr>
-                        <a:defRPr b="1" sz="1200"/>
-                      </a:pPr>
-                      <a:r>
-                        <a:t>Event-Driven</a:t>
-                      </a:r>
-                    </a:p>
-                  </a:txBody>
-                  <a:tcPr/>
-                </a:tc>
-                <a:tc>
-                  <a:txBody>
-                    <a:bodyPr/>
-                    <a:lstStyle/>
-                    <a:p>
-                      <a:pPr>
-                        <a:defRPr b="1" sz="1200"/>
-                      </a:pPr>
-                      <a:r>
-                        <a:t>Hexagonal</a:t>
-                      </a:r>
-                    </a:p>
-                  </a:txBody>
-                  <a:tcPr/>
-                </a:tc>
-              </a:tr>
-              <a:tr h="571500">
-                <a:tc>
-                  <a:txBody>
-                    <a:bodyPr/>
-                    <a:lstStyle/>
-                    <a:p>
-                      <a:pPr>
-                        <a:defRPr sz="1000"/>
-                      </a:pPr>
-                      <a:r>
-                        <a:t>**Team Size**</a:t>
-                      </a:r>
-                    </a:p>
-                  </a:txBody>
-                  <a:tcPr/>
-                </a:tc>
-                <a:tc>
-                  <a:txBody>
-                    <a:bodyPr/>
-                    <a:lstStyle/>
-                    <a:p>
-                      <a:pPr>
-                        <a:defRPr sz="1000"/>
-                      </a:pPr>
-                      <a:r>
-                        <a:t>1-5</a:t>
-                      </a:r>
-                    </a:p>
-                  </a:txBody>
-                  <a:tcPr/>
-                </a:tc>
-                <a:tc>
-                  <a:txBody>
-                    <a:bodyPr/>
-                    <a:lstStyle/>
-                    <a:p>
-                      <a:pPr>
-                        <a:defRPr sz="1000"/>
-                      </a:pPr>
-                      <a:r>
-                        <a:t>5+</a:t>
-                      </a:r>
-                    </a:p>
-                  </a:txBody>
-                  <a:tcPr/>
-                </a:tc>
-                <a:tc>
-                  <a:txBody>
-                    <a:bodyPr/>
-                    <a:lstStyle/>
-                    <a:p>
-                      <a:pPr>
-                        <a:defRPr sz="1000"/>
-                      </a:pPr>
-                      <a:r>
-                        <a:t>3-8</a:t>
-                      </a:r>
-                    </a:p>
-                  </a:txBody>
-                  <a:tcPr/>
-                </a:tc>
-                <a:tc>
-                  <a:txBody>
-                    <a:bodyPr/>
-                    <a:lstStyle/>
-                    <a:p>
-                      <a:pPr>
-                        <a:defRPr sz="1000"/>
-                      </a:pPr>
-                      <a:r>
-                        <a:t>2-6</a:t>
-                      </a:r>
-                    </a:p>
-                  </a:txBody>
-                  <a:tcPr/>
-                </a:tc>
-              </a:tr>
-              <a:tr h="571500">
-                <a:tc>
-                  <a:txBody>
-                    <a:bodyPr/>
-                    <a:lstStyle/>
-                    <a:p>
-                      <a:pPr>
-                        <a:defRPr sz="1000"/>
-                      </a:pPr>
-                      <a:r>
-                        <a:t>**Scalability**</a:t>
-                      </a:r>
-                    </a:p>
-                  </a:txBody>
-                  <a:tcPr/>
-                </a:tc>
-                <a:tc>
-                  <a:txBody>
-                    <a:bodyPr/>
-                    <a:lstStyle/>
-                    <a:p>
-                      <a:pPr>
-                        <a:defRPr sz="1000"/>
-                      </a:pPr>
-                      <a:r>
-                        <a:t>Low</a:t>
-                      </a:r>
-                    </a:p>
-                  </a:txBody>
-                  <a:tcPr/>
-                </a:tc>
-                <a:tc>
-                  <a:txBody>
-                    <a:bodyPr/>
-                    <a:lstStyle/>
-                    <a:p>
-                      <a:pPr>
-                        <a:defRPr sz="1000"/>
-                      </a:pPr>
-                      <a:r>
-                        <a:t>High</a:t>
-                      </a:r>
-                    </a:p>
-                  </a:txBody>
-                  <a:tcPr/>
-                </a:tc>
-                <a:tc>
-                  <a:txBody>
-                    <a:bodyPr/>
-                    <a:lstStyle/>
-                    <a:p>
-                      <a:pPr>
-                        <a:defRPr sz="1000"/>
-                      </a:pPr>
-                      <a:r>
-                        <a:t>High</a:t>
-                      </a:r>
-                    </a:p>
-                  </a:txBody>
-                  <a:tcPr/>
-                </a:tc>
-                <a:tc>
-                  <a:txBody>
-                    <a:bodyPr/>
-                    <a:lstStyle/>
-                    <a:p>
-                      <a:pPr>
-                        <a:defRPr sz="1000"/>
-                      </a:pPr>
-                      <a:r>
-                        <a:t>Medium</a:t>
-                      </a:r>
-                    </a:p>
-                  </a:txBody>
-                  <a:tcPr/>
-                </a:tc>
-              </a:tr>
-              <a:tr h="571500">
-                <a:tc>
-                  <a:txBody>
-                    <a:bodyPr/>
-                    <a:lstStyle/>
-                    <a:p>
-                      <a:pPr>
-                        <a:defRPr sz="1000"/>
-                      </a:pPr>
-                      <a:r>
-                        <a:t>**Complexity**</a:t>
-                      </a:r>
-                    </a:p>
-                  </a:txBody>
-                  <a:tcPr/>
-                </a:tc>
-                <a:tc>
-                  <a:txBody>
-                    <a:bodyPr/>
-                    <a:lstStyle/>
-                    <a:p>
-                      <a:pPr>
-                        <a:defRPr sz="1000"/>
-                      </a:pPr>
-                      <a:r>
-                        <a:t>Low</a:t>
-                      </a:r>
-                    </a:p>
-                  </a:txBody>
-                  <a:tcPr/>
-                </a:tc>
-                <a:tc>
-                  <a:txBody>
-                    <a:bodyPr/>
-                    <a:lstStyle/>
-                    <a:p>
-                      <a:pPr>
-                        <a:defRPr sz="1000"/>
-                      </a:pPr>
-                      <a:r>
-                        <a:t>Very High</a:t>
-                      </a:r>
-                    </a:p>
-                  </a:txBody>
-                  <a:tcPr/>
-                </a:tc>
-                <a:tc>
-                  <a:txBody>
-                    <a:bodyPr/>
-                    <a:lstStyle/>
-                    <a:p>
-                      <a:pPr>
-                        <a:defRPr sz="1000"/>
-                      </a:pPr>
-                      <a:r>
-                        <a:t>Medium</a:t>
-                      </a:r>
-                    </a:p>
-                  </a:txBody>
-                  <a:tcPr/>
-                </a:tc>
-                <a:tc>
-                  <a:txBody>
-                    <a:bodyPr/>
-                    <a:lstStyle/>
-                    <a:p>
-                      <a:pPr>
-                        <a:defRPr sz="1000"/>
-                      </a:pPr>
-                      <a:r>
-                        <a:t>Medium</a:t>
-                      </a:r>
-                    </a:p>
-                  </a:txBody>
-                  <a:tcPr/>
-                </a:tc>
-              </a:tr>
-              <a:tr h="571500">
-                <a:tc>
-                  <a:txBody>
-                    <a:bodyPr/>
-                    <a:lstStyle/>
-                    <a:p>
-                      <a:pPr>
-                        <a:defRPr sz="1000"/>
-                      </a:pPr>
-                      <a:r>
-                        <a:t>**Performance**</a:t>
-                      </a:r>
-                    </a:p>
-                  </a:txBody>
-                  <a:tcPr/>
-                </a:tc>
-                <a:tc>
-                  <a:txBody>
-                    <a:bodyPr/>
-                    <a:lstStyle/>
-                    <a:p>
-                      <a:pPr>
-                        <a:defRPr sz="1000"/>
-                      </a:pPr>
-                      <a:r>
-                        <a:t>Good</a:t>
-                      </a:r>
-                    </a:p>
-                  </a:txBody>
-                  <a:tcPr/>
-                </a:tc>
-                <a:tc>
-                  <a:txBody>
-                    <a:bodyPr/>
-                    <a:lstStyle/>
-                    <a:p>
-                      <a:pPr>
-                        <a:defRPr sz="1000"/>
-                      </a:pPr>
-                      <a:r>
-                        <a:t>Variable</a:t>
-                      </a:r>
-                    </a:p>
-                  </a:txBody>
-                  <a:tcPr/>
-                </a:tc>
-                <a:tc>
-                  <a:txBody>
-                    <a:bodyPr/>
-                    <a:lstStyle/>
-                    <a:p>
-                      <a:pPr>
-                        <a:defRPr sz="1000"/>
-                      </a:pPr>
-                      <a:r>
-                        <a:t>High</a:t>
-                      </a:r>
-                    </a:p>
-                  </a:txBody>
-                  <a:tcPr/>
-                </a:tc>
-                <a:tc>
-                  <a:txBody>
-                    <a:bodyPr/>
-                    <a:lstStyle/>
-                    <a:p>
-                      <a:pPr>
-                        <a:defRPr sz="1000"/>
-                      </a:pPr>
-                      <a:r>
-                        <a:t>Good</a:t>
-                      </a:r>
-                    </a:p>
-                  </a:txBody>
-                  <a:tcPr/>
-                </a:tc>
-              </a:tr>
-              <a:tr h="571500">
-                <a:tc>
-                  <a:txBody>
-                    <a:bodyPr/>
-                    <a:lstStyle/>
-                    <a:p>
-                      <a:pPr>
-                        <a:defRPr sz="1000"/>
-                      </a:pPr>
-                      <a:r>
-                        <a:t>**Maintainability**</a:t>
-                      </a:r>
-                    </a:p>
-                  </a:txBody>
-                  <a:tcPr/>
-                </a:tc>
-                <a:tc>
-                  <a:txBody>
-                    <a:bodyPr/>
-                    <a:lstStyle/>
-                    <a:p>
-                      <a:pPr>
-                        <a:defRPr sz="1000"/>
-                      </a:pPr>
-                      <a:r>
-                        <a:t>High</a:t>
-                      </a:r>
-                    </a:p>
-                  </a:txBody>
-                  <a:tcPr/>
-                </a:tc>
-                <a:tc>
-                  <a:txBody>
-                    <a:bodyPr/>
-                    <a:lstStyle/>
-                    <a:p>
-                      <a:pPr>
-                        <a:defRPr sz="1000"/>
-                      </a:pPr>
-                      <a:r>
-                        <a:t>Medium</a:t>
-                      </a:r>
-                    </a:p>
-                  </a:txBody>
-                  <a:tcPr/>
-                </a:tc>
-                <a:tc>
-                  <a:txBody>
-                    <a:bodyPr/>
-                    <a:lstStyle/>
-                    <a:p>
-                      <a:pPr>
-                        <a:defRPr sz="1000"/>
-                      </a:pPr>
-                      <a:r>
-                        <a:t>Medium</a:t>
-                      </a:r>
-                    </a:p>
-                  </a:txBody>
-                  <a:tcPr/>
-                </a:tc>
-                <a:tc>
-                  <a:txBody>
-                    <a:bodyPr/>
-                    <a:lstStyle/>
-                    <a:p>
-                      <a:pPr>
-                        <a:defRPr sz="1000"/>
-                      </a:pPr>
-                      <a:r>
-                        <a:t>High</a:t>
-                      </a:r>
-                    </a:p>
-                  </a:txBody>
-                  <a:tcPr/>
-                </a:tc>
-              </a:tr>
-              <a:tr h="571500">
-                <a:tc>
-                  <a:txBody>
-                    <a:bodyPr/>
-                    <a:lstStyle/>
-                    <a:p>
-                      <a:pPr>
-                        <a:defRPr sz="1000"/>
-                      </a:pPr>
-                      <a:r>
-                        <a:t>**Testing**</a:t>
-                      </a:r>
-                    </a:p>
-                  </a:txBody>
-                  <a:tcPr/>
-                </a:tc>
-                <a:tc>
-                  <a:txBody>
-                    <a:bodyPr/>
-                    <a:lstStyle/>
-                    <a:p>
-                      <a:pPr>
-                        <a:defRPr sz="1000"/>
-                      </a:pPr>
-                      <a:r>
-                        <a:t>Easy</a:t>
-                      </a:r>
-                    </a:p>
-                  </a:txBody>
-                  <a:tcPr/>
-                </a:tc>
-                <a:tc>
-                  <a:txBody>
-                    <a:bodyPr/>
-                    <a:lstStyle/>
-                    <a:p>
-                      <a:pPr>
-                        <a:defRPr sz="1000"/>
-                      </a:pPr>
-                      <a:r>
-                        <a:t>Complex</a:t>
-                      </a:r>
-                    </a:p>
-                  </a:txBody>
-                  <a:tcPr/>
-                </a:tc>
-                <a:tc>
-                  <a:txBody>
-                    <a:bodyPr/>
-                    <a:lstStyle/>
-                    <a:p>
-                      <a:pPr>
-                        <a:defRPr sz="1000"/>
-                      </a:pPr>
-                      <a:r>
-                        <a:t>Medium</a:t>
-                      </a:r>
-                    </a:p>
-                  </a:txBody>
-                  <a:tcPr/>
-                </a:tc>
-                <a:tc>
-                  <a:txBody>
-                    <a:bodyPr/>
-                    <a:lstStyle/>
-                    <a:p>
-                      <a:pPr>
-                        <a:defRPr sz="1000"/>
-                      </a:pPr>
-                      <a:r>
-                        <a:t>Easy</a:t>
-                      </a:r>
-                    </a:p>
-                  </a:txBody>
-                  <a:tcPr/>
-                </a:tc>
-              </a:tr>
-              <a:tr h="571500">
-                <a:tc>
-                  <a:txBody>
-                    <a:bodyPr/>
-                    <a:lstStyle/>
-                    <a:p>
-                      <a:pPr>
-                        <a:defRPr sz="1000"/>
-                      </a:pPr>
-                      <a:r>
-                        <a:t>**Deployment**</a:t>
-                      </a:r>
-                    </a:p>
-                  </a:txBody>
-                  <a:tcPr/>
-                </a:tc>
-                <a:tc>
-                  <a:txBody>
-                    <a:bodyPr/>
-                    <a:lstStyle/>
-                    <a:p>
-                      <a:pPr>
-                        <a:defRPr sz="1000"/>
-                      </a:pPr>
-                      <a:r>
-                        <a:t>Simple</a:t>
-                      </a:r>
-                    </a:p>
-                  </a:txBody>
-                  <a:tcPr/>
-                </a:tc>
-                <a:tc>
-                  <a:txBody>
-                    <a:bodyPr/>
-                    <a:lstStyle/>
-                    <a:p>
-                      <a:pPr>
-                        <a:defRPr sz="1000"/>
-                      </a:pPr>
-                      <a:r>
-                        <a:t>Complex</a:t>
-                      </a:r>
-                    </a:p>
-                  </a:txBody>
-                  <a:tcPr/>
-                </a:tc>
-                <a:tc>
-                  <a:txBody>
-                    <a:bodyPr/>
-                    <a:lstStyle/>
-                    <a:p>
-                      <a:pPr>
-                        <a:defRPr sz="1000"/>
-                      </a:pPr>
-                      <a:r>
-                        <a:t>Medium</a:t>
-                      </a:r>
-                    </a:p>
-                  </a:txBody>
-                  <a:tcPr/>
-                </a:tc>
-                <a:tc>
-                  <a:txBody>
-                    <a:bodyPr/>
-                    <a:lstStyle/>
-                    <a:p>
-                      <a:pPr>
-                        <a:defRPr sz="1000"/>
-                      </a:pPr>
-                      <a:r>
-                        <a:t>Simple</a:t>
-                      </a:r>
-                    </a:p>
-                  </a:txBody>
-                  <a:tcPr/>
-                </a:tc>
-              </a:tr>
-            </a:tbl>
-          </a:graphicData>
-        </a:graphic>
-      </p:graphicFrame>
+          <a:p>
+            <a:pPr lvl="1"/>
+            <a:r>
+              <a:t>• Testability Requirements</a:t>
+            </a:r>
+          </a:p>
+        </p:txBody>
+      </p:sp>
     </p:spTree>
   </p:cSld>
   <p:clrMapOvr>
@@ -6855,578 +5265,6 @@
           <a:p/>
         </p:txBody>
       </p:sp>
-      <p:sp>
-        <p:nvSpPr>
-          <p:cNvPr id="4" name="TextBox 3"/>
-          <p:cNvSpPr txBox="1"/>
-          <p:nvPr/>
-        </p:nvSpPr>
-        <p:spPr>
-          <a:xfrm>
-            <a:off x="914400" y="1828800"/>
-            <a:ext cx="7315200" cy="4572000"/>
-          </a:xfrm>
-          <a:prstGeom prst="rect">
-            <a:avLst/>
-          </a:prstGeom>
-          <a:noFill/>
-        </p:spPr>
-        <p:txBody>
-          <a:bodyPr wrap="none">
-            <a:spAutoFit/>
-          </a:bodyPr>
-          <a:lstStyle/>
-          <a:p>
-            <a:pPr>
-              <a:defRPr sz="1000">
-                <a:latin typeface="Consolas"/>
-              </a:defRPr>
-            </a:pPr>
-            <a:r>
-              <a:t>Layered Architecture        N-Tier Architecture        Clean Architecture</a:t>
-            </a:r>
-          </a:p>
-          <a:p>
-            <a:pPr>
-              <a:defRPr sz="1000">
-                <a:latin typeface="Consolas"/>
-              </a:defRPr>
-            </a:pPr>
-            <a:r>
-              <a:t>┌─────────────────┐        ┌─────────────────┐        ┌─────────────────┐</a:t>
-            </a:r>
-          </a:p>
-          <a:p>
-            <a:pPr>
-              <a:defRPr sz="1000">
-                <a:latin typeface="Consolas"/>
-              </a:defRPr>
-            </a:pPr>
-            <a:r>
-              <a:t>│   Presentation  │        │   Client Tier   │        │   Frameworks    │</a:t>
-            </a:r>
-          </a:p>
-          <a:p>
-            <a:pPr>
-              <a:defRPr sz="1000">
-                <a:latin typeface="Consolas"/>
-              </a:defRPr>
-            </a:pPr>
-            <a:r>
-              <a:t>├─────────────────┤        ├─────────────────┤        ├─────────────────┤</a:t>
-            </a:r>
-          </a:p>
-          <a:p>
-            <a:pPr>
-              <a:defRPr sz="1000">
-                <a:latin typeface="Consolas"/>
-              </a:defRPr>
-            </a:pPr>
-            <a:r>
-              <a:t>│    Business     │        │ Application     │        │   Interface     │</a:t>
-            </a:r>
-          </a:p>
-          <a:p>
-            <a:pPr>
-              <a:defRPr sz="1000">
-                <a:latin typeface="Consolas"/>
-              </a:defRPr>
-            </a:pPr>
-            <a:r>
-              <a:t>├─────────────────┤  &lt;--&gt;  │      Tier       │  &lt;--&gt;  │   Adapters      │</a:t>
-            </a:r>
-          </a:p>
-          <a:p>
-            <a:pPr>
-              <a:defRPr sz="1000">
-                <a:latin typeface="Consolas"/>
-              </a:defRPr>
-            </a:pPr>
-            <a:r>
-              <a:t>│  Persistence    │        ├─────────────────┤        ├─────────────────┤</a:t>
-            </a:r>
-          </a:p>
-          <a:p>
-            <a:pPr>
-              <a:defRPr sz="1000">
-                <a:latin typeface="Consolas"/>
-              </a:defRPr>
-            </a:pPr>
-            <a:r>
-              <a:t>├─────────────────┤        │   Data Tier     │        │  Use Cases      │</a:t>
-            </a:r>
-          </a:p>
-          <a:p>
-            <a:pPr>
-              <a:defRPr sz="1000">
-                <a:latin typeface="Consolas"/>
-              </a:defRPr>
-            </a:pPr>
-            <a:r>
-              <a:t>│    Database     │        └─────────────────┘        ├─────────────────┤</a:t>
-            </a:r>
-          </a:p>
-          <a:p>
-            <a:pPr>
-              <a:defRPr sz="1000">
-                <a:latin typeface="Consolas"/>
-              </a:defRPr>
-            </a:pPr>
-            <a:r>
-              <a:t>└─────────────────┘                                   │   Entities      │</a:t>
-            </a:r>
-          </a:p>
-          <a:p>
-            <a:pPr>
-              <a:defRPr sz="1000">
-                <a:latin typeface="Consolas"/>
-              </a:defRPr>
-            </a:pPr>
-            <a:r>
-              <a:t>                                                       └─────────────────┘</a:t>
-            </a:r>
-          </a:p>
-          <a:p>
-            <a:pPr>
-              <a:defRPr sz="1000">
-                <a:latin typeface="Consolas"/>
-              </a:defRPr>
-            </a:pPr>
-            <a:r>
-              <a:t>Classic Layering           Enterprise N-Tier          Domain-Centric</a:t>
-            </a:r>
-          </a:p>
-        </p:txBody>
-      </p:sp>
-      <p:sp>
-        <p:nvSpPr>
-          <p:cNvPr id="5" name="TextBox 4"/>
-          <p:cNvSpPr txBox="1"/>
-          <p:nvPr/>
-        </p:nvSpPr>
-        <p:spPr>
-          <a:xfrm>
-            <a:off x="914400" y="6400800"/>
-            <a:ext cx="7315200" cy="914400"/>
-          </a:xfrm>
-          <a:prstGeom prst="rect">
-            <a:avLst/>
-          </a:prstGeom>
-          <a:noFill/>
-        </p:spPr>
-        <p:txBody>
-          <a:bodyPr wrap="none">
-            <a:spAutoFit/>
-          </a:bodyPr>
-          <a:lstStyle/>
-          <a:p>
-            <a:pPr>
-              <a:defRPr sz="1600" b="1"/>
-            </a:pPr>
-            <a:r>
-              <a:t>Focus: Clear separation of concerns through horizontal layers</a:t>
-            </a:r>
-          </a:p>
-        </p:txBody>
-      </p:sp>
-    </p:spTree>
-  </p:cSld>
-  <p:clrMapOvr>
-    <a:masterClrMapping/>
-  </p:clrMapOvr>
-</p:sld>
-</file>
-
-<file path=ppt/slides/slide20.xml><?xml version="1.0" encoding="utf-8"?>
-<p:sld xmlns:a="http://schemas.openxmlformats.org/drawingml/2006/main" xmlns:p="http://schemas.openxmlformats.org/presentationml/2006/main" xmlns:r="http://schemas.openxmlformats.org/officeDocument/2006/relationships">
-  <p:cSld>
-    <p:spTree>
-      <p:nvGrpSpPr>
-        <p:cNvPr id="1" name=""/>
-        <p:cNvGrpSpPr/>
-        <p:nvPr/>
-      </p:nvGrpSpPr>
-      <p:grpSpPr/>
-      <p:sp>
-        <p:nvSpPr>
-          <p:cNvPr id="2" name="Title 1"/>
-          <p:cNvSpPr>
-            <a:spLocks noGrp="1"/>
-          </p:cNvSpPr>
-          <p:nvPr>
-            <p:ph type="ctrTitle"/>
-          </p:nvPr>
-        </p:nvSpPr>
-        <p:spPr/>
-        <p:txBody>
-          <a:bodyPr/>
-          <a:lstStyle/>
-          <a:p>
-            <a:r>
-              <a:t>Telekom-Specific Recommendations</a:t>
-            </a:r>
-          </a:p>
-        </p:txBody>
-      </p:sp>
-      <p:sp>
-        <p:nvSpPr>
-          <p:cNvPr id="3" name="Subtitle 2"/>
-          <p:cNvSpPr>
-            <a:spLocks noGrp="1"/>
-          </p:cNvSpPr>
-          <p:nvPr>
-            <p:ph type="subTitle" idx="1"/>
-          </p:nvPr>
-        </p:nvSpPr>
-        <p:spPr/>
-        <p:txBody>
-          <a:bodyPr/>
-          <a:lstStyle/>
-          <a:p/>
-          <a:p>
-            <a:pPr>
-              <a:defRPr b="1" sz="1600"/>
-            </a:pPr>
-            <a:r>
-              <a:t>Für Network Operations (NOC):</a:t>
-            </a:r>
-          </a:p>
-          <a:p>
-            <a:pPr lvl="1">
-              <a:defRPr sz="1200">
-                <a:solidFill>
-                  <a:srgbClr val="008000"/>
-                </a:solidFill>
-              </a:defRPr>
-            </a:pPr>
-            <a:r>
-              <a:t>✅ **Event-Driven** für Real-time Monitoring</a:t>
-            </a:r>
-          </a:p>
-          <a:p>
-            <a:pPr lvl="1">
-              <a:defRPr sz="1200">
-                <a:solidFill>
-                  <a:srgbClr val="008000"/>
-                </a:solidFill>
-              </a:defRPr>
-            </a:pPr>
-            <a:r>
-              <a:t>✅ **Microservices** für Service-specific Teams</a:t>
-            </a:r>
-          </a:p>
-          <a:p>
-            <a:pPr lvl="1">
-              <a:defRPr sz="1200">
-                <a:solidFill>
-                  <a:srgbClr val="FFA500"/>
-                </a:solidFill>
-              </a:defRPr>
-            </a:pPr>
-            <a:r>
-              <a:t>⚠️ **Layered** nur für Simple Tools</a:t>
-            </a:r>
-          </a:p>
-          <a:p>
-            <a:pPr>
-              <a:defRPr b="1" sz="1600"/>
-            </a:pPr>
-            <a:r>
-              <a:t>Für Infrastructure Services:</a:t>
-            </a:r>
-          </a:p>
-          <a:p>
-            <a:pPr lvl="1">
-              <a:defRPr sz="1200">
-                <a:solidFill>
-                  <a:srgbClr val="008000"/>
-                </a:solidFill>
-              </a:defRPr>
-            </a:pPr>
-            <a:r>
-              <a:t>✅ **Microservices** für Independent Scaling</a:t>
-            </a:r>
-          </a:p>
-          <a:p>
-            <a:pPr lvl="1">
-              <a:defRPr sz="1200">
-                <a:solidFill>
-                  <a:srgbClr val="008000"/>
-                </a:solidFill>
-              </a:defRPr>
-            </a:pPr>
-            <a:r>
-              <a:t>✅ **Event-Driven** für System Integration</a:t>
-            </a:r>
-          </a:p>
-          <a:p>
-            <a:pPr lvl="1">
-              <a:defRPr sz="1200">
-                <a:solidFill>
-                  <a:srgbClr val="008000"/>
-                </a:solidFill>
-              </a:defRPr>
-            </a:pPr>
-            <a:r>
-              <a:t>✅ **Hexagonal** für Core Business Logic</a:t>
-            </a:r>
-          </a:p>
-          <a:p>
-            <a:pPr>
-              <a:defRPr b="1" sz="1600"/>
-            </a:pPr>
-            <a:r>
-              <a:t>Migration Strategy:</a:t>
-            </a:r>
-          </a:p>
-          <a:p>
-            <a:pPr lvl="1">
-              <a:defRPr sz="1200"/>
-            </a:pPr>
-            <a:r>
-              <a:t>Start: Layered für Prototypen</a:t>
-            </a:r>
-          </a:p>
-          <a:p>
-            <a:pPr lvl="1">
-              <a:defRPr sz="1200"/>
-            </a:pPr>
-            <a:r>
-              <a:t>Scale: Event-Driven für Integration</a:t>
-            </a:r>
-          </a:p>
-          <a:p>
-            <a:pPr lvl="1">
-              <a:defRPr sz="1200"/>
-            </a:pPr>
-            <a:r>
-              <a:t>Optimize: Microservices für Team Growth</a:t>
-            </a:r>
-          </a:p>
-        </p:txBody>
-      </p:sp>
-    </p:spTree>
-  </p:cSld>
-  <p:clrMapOvr>
-    <a:masterClrMapping/>
-  </p:clrMapOvr>
-</p:sld>
-</file>
-
-<file path=ppt/slides/slide21.xml><?xml version="1.0" encoding="utf-8"?>
-<p:sld xmlns:a="http://schemas.openxmlformats.org/drawingml/2006/main" xmlns:p="http://schemas.openxmlformats.org/presentationml/2006/main" xmlns:r="http://schemas.openxmlformats.org/officeDocument/2006/relationships">
-  <p:cSld>
-    <p:spTree>
-      <p:nvGrpSpPr>
-        <p:cNvPr id="1" name=""/>
-        <p:cNvGrpSpPr/>
-        <p:nvPr/>
-      </p:nvGrpSpPr>
-      <p:grpSpPr/>
-      <p:sp>
-        <p:nvSpPr>
-          <p:cNvPr id="2" name="Title 1"/>
-          <p:cNvSpPr>
-            <a:spLocks noGrp="1"/>
-          </p:cNvSpPr>
-          <p:nvPr>
-            <p:ph type="ctrTitle"/>
-          </p:nvPr>
-        </p:nvSpPr>
-        <p:spPr/>
-        <p:txBody>
-          <a:bodyPr/>
-          <a:lstStyle/>
-          <a:p>
-            <a:r>
-              <a:t>Summary - Part 1</a:t>
-            </a:r>
-          </a:p>
-        </p:txBody>
-      </p:sp>
-      <p:sp>
-        <p:nvSpPr>
-          <p:cNvPr id="3" name="Subtitle 2"/>
-          <p:cNvSpPr>
-            <a:spLocks noGrp="1"/>
-          </p:cNvSpPr>
-          <p:nvPr>
-            <p:ph type="subTitle" idx="1"/>
-          </p:nvPr>
-        </p:nvSpPr>
-        <p:spPr/>
-        <p:txBody>
-          <a:bodyPr/>
-          <a:lstStyle/>
-          <a:p/>
-          <a:p>
-            <a:pPr>
-              <a:defRPr b="1" sz="1800"/>
-            </a:pPr>
-            <a:r>
-              <a:t>Pattern Selection Guide:</a:t>
-            </a:r>
-          </a:p>
-          <a:p>
-            <a:pPr>
-              <a:defRPr b="1" sz="1400"/>
-            </a:pPr>
-            <a:r>
-              <a:t>## Summary - Part 1</a:t>
-            </a:r>
-            <a:br/>
-            <a:br/>
-            <a:r>
-              <a:t>### Pattern Selection Guide:</a:t>
-            </a:r>
-          </a:p>
-          <a:p>
-            <a:pPr>
-              <a:defRPr b="1" sz="1400"/>
-            </a:pPr>
-            <a:r>
-              <a:t>Start Simple (Layered):</a:t>
-            </a:r>
-          </a:p>
-          <a:p>
-            <a:pPr lvl="1">
-              <a:defRPr sz="1200"/>
-            </a:pPr>
-            <a:r>
-              <a:t>Prototypen und Proof-of-Concepts</a:t>
-            </a:r>
-          </a:p>
-          <a:p>
-            <a:pPr lvl="1">
-              <a:defRPr sz="1200"/>
-            </a:pPr>
-            <a:r>
-              <a:t>Kleine Teams (&lt;5 Entwickler)</a:t>
-            </a:r>
-          </a:p>
-          <a:p>
-            <a:pPr lvl="1">
-              <a:defRPr sz="1200"/>
-            </a:pPr>
-            <a:r>
-              <a:t>Einfache CRUD-Operationen</a:t>
-            </a:r>
-          </a:p>
-          <a:p>
-            <a:pPr>
-              <a:defRPr b="1" sz="1400"/>
-            </a:pPr>
-            <a:r>
-              <a:t>Scale Smart (Microservices):</a:t>
-            </a:r>
-          </a:p>
-          <a:p>
-            <a:pPr lvl="1">
-              <a:defRPr sz="1200"/>
-            </a:pPr>
-            <a:r>
-              <a:t>Große verteilte Teams</a:t>
-            </a:r>
-          </a:p>
-          <a:p>
-            <a:pPr lvl="1">
-              <a:defRPr sz="1200"/>
-            </a:pPr>
-            <a:r>
-              <a:t>Independent Service Scaling</a:t>
-            </a:r>
-          </a:p>
-          <a:p>
-            <a:pPr lvl="1">
-              <a:defRPr sz="1200"/>
-            </a:pPr>
-            <a:r>
-              <a:t>High Availability Requirements</a:t>
-            </a:r>
-          </a:p>
-          <a:p>
-            <a:pPr>
-              <a:defRPr b="1" sz="1400"/>
-            </a:pPr>
-            <a:r>
-              <a:t>Integrate Efficiently (Event-Driven):</a:t>
-            </a:r>
-          </a:p>
-          <a:p>
-            <a:pPr lvl="1">
-              <a:defRPr sz="1200"/>
-            </a:pPr>
-            <a:r>
-              <a:t>Real-time Processing</a:t>
-            </a:r>
-          </a:p>
-          <a:p>
-            <a:pPr lvl="1">
-              <a:defRPr sz="1200"/>
-            </a:pPr>
-            <a:r>
-              <a:t>System Integration</a:t>
-            </a:r>
-          </a:p>
-          <a:p>
-            <a:pPr lvl="1">
-              <a:defRPr sz="1200"/>
-            </a:pPr>
-            <a:r>
-              <a:t>Asynchronous Workflows</a:t>
-            </a:r>
-          </a:p>
-          <a:p>
-            <a:pPr>
-              <a:defRPr b="1" sz="1400"/>
-            </a:pPr>
-            <a:r>
-              <a:t>Design for Change (Hexagonal):</a:t>
-            </a:r>
-          </a:p>
-          <a:p>
-            <a:pPr lvl="1">
-              <a:defRPr sz="1200"/>
-            </a:pPr>
-            <a:r>
-              <a:t>Complex Domain Logic</a:t>
-            </a:r>
-          </a:p>
-          <a:p>
-            <a:pPr lvl="1">
-              <a:defRPr sz="1200"/>
-            </a:pPr>
-            <a:r>
-              <a:t>Testability Requirements</a:t>
-            </a:r>
-          </a:p>
-          <a:p>
-            <a:pPr lvl="1">
-              <a:defRPr sz="1200"/>
-            </a:pPr>
-            <a:r>
-              <a:t>External System Integration</a:t>
-            </a:r>
-          </a:p>
-          <a:p>
-            <a:pPr>
-              <a:defRPr b="1" sz="1400"/>
-            </a:pPr>
-            <a:r>
-              <a:t>Next:</a:t>
-            </a:r>
-          </a:p>
-          <a:p>
-            <a:br/>
-            <a:pPr>
-              <a:defRPr i="1" sz="1400"/>
-            </a:pPr>
-            <a:r>
-              <a:t>Next: Part 2 covers CQRS, Event Sourcing, and advanced patterns</a:t>
-            </a:r>
-          </a:p>
-        </p:txBody>
-      </p:sp>
     </p:spTree>
   </p:cSld>
   <p:clrMapOvr>
@@ -7452,7 +5290,7 @@
             <a:spLocks noGrp="1"/>
           </p:cNvSpPr>
           <p:nvPr>
-            <p:ph type="ctrTitle"/>
+            <p:ph type="title"/>
           </p:nvPr>
         </p:nvSpPr>
         <p:spPr/>
@@ -7461,128 +5299,119 @@
           <a:lstStyle/>
           <a:p>
             <a:r>
-              <a:t>1. Layered Architecture (Schichtarchitektur)</a:t>
-            </a:r>
-          </a:p>
-        </p:txBody>
-      </p:sp>
-      <p:sp>
-        <p:nvSpPr>
-          <p:cNvPr id="3" name="Subtitle 2"/>
-          <p:cNvSpPr>
-            <a:spLocks noGrp="1"/>
-          </p:cNvSpPr>
-          <p:nvPr>
-            <p:ph type="subTitle" idx="1"/>
+              <a:t>Architecture Types Comparison</a:t>
+            </a:r>
+          </a:p>
+        </p:txBody>
+      </p:sp>
+      <p:sp>
+        <p:nvSpPr>
+          <p:cNvPr id="3" name="Content Placeholder 2"/>
+          <p:cNvSpPr>
+            <a:spLocks noGrp="1"/>
+          </p:cNvSpPr>
+          <p:nvPr>
+            <p:ph idx="1"/>
           </p:nvPr>
         </p:nvSpPr>
         <p:spPr/>
         <p:txBody>
           <a:bodyPr/>
           <a:lstStyle/>
-          <a:p/>
           <a:p>
             <a:pPr>
-              <a:defRPr sz="1200"/>
+              <a:lnSpc>
+                <a:spcPct val="100000"/>
+              </a:lnSpc>
+              <a:spcBef>
+                <a:spcPts val="0"/>
+              </a:spcBef>
+              <a:spcAft>
+                <a:spcPts val="0"/>
+              </a:spcAft>
             </a:pPr>
             <a:r>
-              <a:t>```</a:t>
-            </a:r>
-          </a:p>
-          <a:p>
-            <a:pPr>
-              <a:defRPr sz="1200"/>
-            </a:pPr>
-            <a:r>
-              <a:t>┌─────────────────────────────────────────────────┐</a:t>
-            </a:r>
-          </a:p>
-          <a:p>
-            <a:pPr>
-              <a:defRPr sz="1200"/>
-            </a:pPr>
-            <a:r>
-              <a:t>│                Presentation Layer               │ &lt;- Web UI, REST APIs</a:t>
-            </a:r>
-          </a:p>
-          <a:p>
-            <a:pPr>
-              <a:defRPr sz="1200"/>
-            </a:pPr>
-            <a:r>
-              <a:t>├─────────────────────────────────────────────────┤</a:t>
-            </a:r>
-          </a:p>
-          <a:p>
-            <a:pPr>
-              <a:defRPr sz="1200"/>
-            </a:pPr>
-            <a:r>
-              <a:t>│                 Business Layer                  │ &lt;- Domain Logic</a:t>
-            </a:r>
-          </a:p>
-          <a:p>
-            <a:pPr>
-              <a:defRPr sz="1200"/>
-            </a:pPr>
-            <a:r>
-              <a:t>├─────────────────────────────────────────────────┤</a:t>
-            </a:r>
-          </a:p>
-          <a:p>
-            <a:pPr>
-              <a:defRPr sz="1200"/>
-            </a:pPr>
-            <a:r>
-              <a:t>│                Persistence Layer                │ &lt;- Data Access</a:t>
-            </a:r>
-          </a:p>
-          <a:p>
-            <a:pPr>
-              <a:defRPr sz="1200"/>
-            </a:pPr>
-            <a:r>
-              <a:t>├─────────────────────────────────────────────────┤</a:t>
-            </a:r>
-          </a:p>
-          <a:p>
-            <a:pPr>
-              <a:defRPr sz="1200"/>
-            </a:pPr>
-            <a:r>
-              <a:t>│                 Database Layer                  │ &lt;- Data Storage</a:t>
-            </a:r>
-          </a:p>
-          <a:p>
-            <a:pPr>
-              <a:defRPr sz="1200"/>
-            </a:pPr>
-            <a:r>
-              <a:t>└─────────────────────────────────────────────────┘</a:t>
-            </a:r>
-          </a:p>
-          <a:p>
-            <a:pPr>
-              <a:defRPr sz="1200"/>
-            </a:pPr>
-            <a:r>
-              <a:t>Dependency Flow: Top -&gt; Down (Higher layers depend on lower layers)</a:t>
-            </a:r>
-          </a:p>
-          <a:p>
-            <a:pPr>
-              <a:defRPr sz="1200"/>
-            </a:pPr>
-            <a:r>
-              <a:t>Data Flow: Bidirectional through defined interfaces</a:t>
-            </a:r>
-          </a:p>
-          <a:p>
-            <a:pPr>
-              <a:defRPr sz="1200"/>
-            </a:pPr>
-            <a:r>
-              <a:t>```</a:t>
+              <a:rPr sz="900">
+                <a:latin typeface="Consolas"/>
+              </a:rPr>
+              <a:t>Layered Architecture        N-Tier Architecture        Clean Architecture</a:t>
+            </a:r>
+            <a:br/>
+            <a:r>
+              <a:rPr sz="900">
+                <a:latin typeface="Consolas"/>
+              </a:rPr>
+              <a:t>┌─────────────────┐        ┌─────────────────┐        ┌─────────────────┐</a:t>
+            </a:r>
+            <a:br/>
+            <a:r>
+              <a:rPr sz="900">
+                <a:latin typeface="Consolas"/>
+              </a:rPr>
+              <a:t>│   Presentation  │        │   Client Tier   │        │   Frameworks    │</a:t>
+            </a:r>
+            <a:br/>
+            <a:r>
+              <a:rPr sz="900">
+                <a:latin typeface="Consolas"/>
+              </a:rPr>
+              <a:t>├─────────────────┤        ├─────────────────┤        ├─────────────────┤</a:t>
+            </a:r>
+            <a:br/>
+            <a:r>
+              <a:rPr sz="900">
+                <a:latin typeface="Consolas"/>
+              </a:rPr>
+              <a:t>│    Business     │        │ Application     │        │   Interface     │</a:t>
+            </a:r>
+            <a:br/>
+            <a:r>
+              <a:rPr sz="900">
+                <a:latin typeface="Consolas"/>
+              </a:rPr>
+              <a:t>├─────────────────┤  &lt;--&gt;  │      Tier       │  &lt;--&gt;  │   Adapters      │</a:t>
+            </a:r>
+            <a:br/>
+            <a:r>
+              <a:rPr sz="900">
+                <a:latin typeface="Consolas"/>
+              </a:rPr>
+              <a:t>│  Persistence    │        ├─────────────────┤        ├─────────────────┤</a:t>
+            </a:r>
+            <a:br/>
+            <a:r>
+              <a:rPr sz="900">
+                <a:latin typeface="Consolas"/>
+              </a:rPr>
+              <a:t>├─────────────────┤        │   Data Tier     │        │  Use Cases      │</a:t>
+            </a:r>
+            <a:br/>
+            <a:r>
+              <a:rPr sz="900">
+                <a:latin typeface="Consolas"/>
+              </a:rPr>
+              <a:t>│    Database     │        └─────────────────┘        ├─────────────────┤</a:t>
+            </a:r>
+            <a:br/>
+            <a:r>
+              <a:rPr sz="900">
+                <a:latin typeface="Consolas"/>
+              </a:rPr>
+              <a:t>└─────────────────┘                                   │   Entities      │</a:t>
+            </a:r>
+            <a:br/>
+            <a:r>
+              <a:rPr sz="900">
+                <a:latin typeface="Consolas"/>
+              </a:rPr>
+              <a:t>                                                       └─────────────────┘</a:t>
+            </a:r>
+            <a:br/>
+            <a:r>
+              <a:rPr sz="900">
+                <a:latin typeface="Consolas"/>
+              </a:rPr>
+              <a:t>Classic Layering           Enterprise N-Tier          Domain-Centric</a:t>
             </a:r>
           </a:p>
         </p:txBody>
@@ -7621,7 +5450,7 @@
           <a:lstStyle/>
           <a:p>
             <a:r>
-              <a:t>1. Layered Architecture - Telekom Use Case</a:t>
+              <a:t>1. Layered Architecture (Schichtarchitektur)</a:t>
             </a:r>
           </a:p>
         </p:txBody>
@@ -7641,78 +5470,6 @@
           <a:bodyPr/>
           <a:lstStyle/>
           <a:p/>
-          <a:p>
-            <a:pPr>
-              <a:defRPr b="1" sz="1800"/>
-            </a:pPr>
-            <a:r>
-              <a:t>Network Configuration Management System</a:t>
-            </a:r>
-          </a:p>
-          <a:p>
-            <a:pPr lvl="1">
-              <a:defRPr sz="1400"/>
-            </a:pPr>
-            <a:r>
-              <a:t>**Presentation:** Web Dashboard für Network Engineers</a:t>
-            </a:r>
-          </a:p>
-          <a:p>
-            <a:pPr lvl="1">
-              <a:defRPr sz="1400"/>
-            </a:pPr>
-            <a:r>
-              <a:t>**Business:** Configuration Validation, Change Management</a:t>
-            </a:r>
-          </a:p>
-          <a:p>
-            <a:pPr lvl="1">
-              <a:defRPr sz="1400"/>
-            </a:pPr>
-            <a:r>
-              <a:t>**Persistence:** Configuration Repository, Audit Logging</a:t>
-            </a:r>
-          </a:p>
-          <a:p>
-            <a:pPr lvl="1">
-              <a:defRPr sz="1400"/>
-            </a:pPr>
-            <a:r>
-              <a:t>**Database:** PostgreSQL für Config Data, MongoDB für Audit Logs</a:t>
-            </a:r>
-          </a:p>
-          <a:p>
-            <a:pPr lvl="1">
-              <a:defRPr sz="1400"/>
-            </a:pPr>
-            <a:r>
-              <a:t>SNMP configuration management</a:t>
-            </a:r>
-          </a:p>
-          <a:p>
-            <a:pPr lvl="1">
-              <a:defRPr sz="1400"/>
-            </a:pPr>
-            <a:r>
-              <a:t>Network device inventory</a:t>
-            </a:r>
-          </a:p>
-          <a:p>
-            <a:pPr lvl="1">
-              <a:defRPr sz="1400"/>
-            </a:pPr>
-            <a:r>
-              <a:t>Change approval workflows</a:t>
-            </a:r>
-          </a:p>
-          <a:p>
-            <a:pPr lvl="1">
-              <a:defRPr sz="1400"/>
-            </a:pPr>
-            <a:r>
-              <a:t>Configuration backup and restore</a:t>
-            </a:r>
-          </a:p>
         </p:txBody>
       </p:sp>
     </p:spTree>
@@ -7740,7 +5497,7 @@
             <a:spLocks noGrp="1"/>
           </p:cNvSpPr>
           <p:nvPr>
-            <p:ph type="ctrTitle"/>
+            <p:ph type="title"/>
           </p:nvPr>
         </p:nvSpPr>
         <p:spPr/>
@@ -7749,188 +5506,113 @@
           <a:lstStyle/>
           <a:p>
             <a:r>
-              <a:t>1. Layered Architecture - Trade-offs</a:t>
-            </a:r>
-          </a:p>
-        </p:txBody>
-      </p:sp>
-      <p:sp>
-        <p:nvSpPr>
-          <p:cNvPr id="3" name="TextBox 2"/>
-          <p:cNvSpPr txBox="1"/>
-          <p:nvPr/>
-        </p:nvSpPr>
-        <p:spPr>
-          <a:xfrm>
-            <a:off x="457200" y="1371600"/>
-            <a:ext cx="3657600" cy="5486400"/>
-          </a:xfrm>
-          <a:prstGeom prst="rect">
-            <a:avLst/>
-          </a:prstGeom>
-          <a:noFill/>
-        </p:spPr>
-        <p:txBody>
-          <a:bodyPr wrap="none">
-            <a:spAutoFit/>
-          </a:bodyPr>
+              <a:t>Layered Architecture - Schema</a:t>
+            </a:r>
+          </a:p>
+        </p:txBody>
+      </p:sp>
+      <p:sp>
+        <p:nvSpPr>
+          <p:cNvPr id="3" name="Content Placeholder 2"/>
+          <p:cNvSpPr>
+            <a:spLocks noGrp="1"/>
+          </p:cNvSpPr>
+          <p:nvPr>
+            <p:ph idx="1"/>
+          </p:nvPr>
+        </p:nvSpPr>
+        <p:spPr/>
+        <p:txBody>
+          <a:bodyPr/>
           <a:lstStyle/>
           <a:p>
             <a:pPr>
-              <a:defRPr b="1" sz="1800"/>
+              <a:lnSpc>
+                <a:spcPct val="100000"/>
+              </a:lnSpc>
+              <a:spcBef>
+                <a:spcPts val="0"/>
+              </a:spcBef>
+              <a:spcAft>
+                <a:spcPts val="0"/>
+              </a:spcAft>
             </a:pPr>
             <a:r>
-              <a:t>Vorteile ✅</a:t>
-            </a:r>
-          </a:p>
-          <a:p>
-            <a:pPr>
-              <a:defRPr sz="1200"/>
-            </a:pPr>
-            <a:r>
-              <a:t>• Klare Trennung der Verantwortlichkeiten</a:t>
-            </a:r>
-          </a:p>
-          <a:p>
-            <a:pPr>
-              <a:defRPr sz="1200"/>
-            </a:pPr>
-            <a:r>
-              <a:t>• Einfache Testbarkeit jeder Schicht</a:t>
-            </a:r>
-          </a:p>
-          <a:p>
-            <a:pPr>
-              <a:defRPr sz="1200"/>
-            </a:pPr>
-            <a:r>
-              <a:t>• Bewährtes Pattern mit hoher Entwickler-Akzeptanz</a:t>
-            </a:r>
-          </a:p>
-          <a:p>
-            <a:pPr>
-              <a:defRPr sz="1200"/>
-            </a:pPr>
-            <a:r>
-              <a:t>• Gute Performance bei einfachen CRUD-Operationen</a:t>
-            </a:r>
-          </a:p>
-        </p:txBody>
-      </p:sp>
-      <p:sp>
-        <p:nvSpPr>
-          <p:cNvPr id="4" name="TextBox 3"/>
-          <p:cNvSpPr txBox="1"/>
-          <p:nvPr/>
-        </p:nvSpPr>
-        <p:spPr>
-          <a:xfrm>
-            <a:off x="4572000" y="1371600"/>
-            <a:ext cx="4114800" cy="5486400"/>
-          </a:xfrm>
-          <a:prstGeom prst="rect">
-            <a:avLst/>
-          </a:prstGeom>
-          <a:noFill/>
-        </p:spPr>
-        <p:txBody>
-          <a:bodyPr wrap="none">
-            <a:spAutoFit/>
-          </a:bodyPr>
-          <a:lstStyle/>
-          <a:p>
-            <a:pPr>
-              <a:defRPr b="1" sz="1800"/>
-            </a:pPr>
-            <a:r>
-              <a:t>Nachteile ❌</a:t>
-            </a:r>
-          </a:p>
-          <a:p>
-            <a:pPr>
-              <a:defRPr sz="1200"/>
-            </a:pPr>
-            <a:r>
-              <a:t>• Monolithischer Charakter erschwert Skalierung</a:t>
-            </a:r>
-          </a:p>
-          <a:p>
-            <a:pPr>
-              <a:defRPr sz="1200"/>
-            </a:pPr>
-            <a:r>
-              <a:t>• Änderungen propagieren durch alle Schichten</a:t>
-            </a:r>
-          </a:p>
-          <a:p>
-            <a:pPr>
-              <a:defRPr sz="1200"/>
-            </a:pPr>
-            <a:r>
-              <a:t>• Datenbankschema-Changes beeinflussen alle Layer</a:t>
-            </a:r>
-          </a:p>
-          <a:p>
-            <a:pPr>
-              <a:defRPr sz="1200"/>
-            </a:pPr>
-            <a:r>
-              <a:t>• Schwierig für komplexe Domain Logic</a:t>
-            </a:r>
-          </a:p>
-        </p:txBody>
-      </p:sp>
-      <p:sp>
-        <p:nvSpPr>
-          <p:cNvPr id="5" name="TextBox 4"/>
-          <p:cNvSpPr txBox="1"/>
-          <p:nvPr/>
-        </p:nvSpPr>
-        <p:spPr>
-          <a:xfrm>
-            <a:off x="457200" y="5943600"/>
-            <a:ext cx="8229600" cy="1371600"/>
-          </a:xfrm>
-          <a:prstGeom prst="rect">
-            <a:avLst/>
-          </a:prstGeom>
-          <a:noFill/>
-        </p:spPr>
-        <p:txBody>
-          <a:bodyPr wrap="none">
-            <a:spAutoFit/>
-          </a:bodyPr>
-          <a:lstStyle/>
-          <a:p>
-            <a:pPr>
-              <a:defRPr b="1" sz="1400"/>
-            </a:pPr>
-            <a:r>
-              <a:t>Production Considerations ⚠️</a:t>
-            </a:r>
-          </a:p>
-          <a:p>
-            <a:pPr>
-              <a:defRPr sz="1000"/>
-            </a:pPr>
-            <a:r>
-              <a:t>• Horizontal Skalierung nur als Ganzes möglich</a:t>
-            </a:r>
-          </a:p>
-          <a:p>
-            <a:pPr>
-              <a:defRPr sz="1000"/>
-            </a:pPr>
-            <a:r>
-              <a:t>• Session-Management zwischen Layers erforderlich</a:t>
-            </a:r>
-          </a:p>
-          <a:p>
-            <a:pPr>
-              <a:defRPr sz="1000"/>
-            </a:pPr>
-            <a:r>
-              <a:t>• Monitoring muss alle Schichten umfassen</a:t>
+              <a:rPr sz="900">
+                <a:latin typeface="Consolas"/>
+              </a:rPr>
+              <a:t>┌─────────────────────────────────────────────────┐</a:t>
+            </a:r>
+            <a:br/>
+            <a:r>
+              <a:rPr sz="900">
+                <a:latin typeface="Consolas"/>
+              </a:rPr>
+              <a:t>│                Presentation Layer               │ &lt;- Web UI, REST APIs</a:t>
+            </a:r>
+            <a:br/>
+            <a:r>
+              <a:rPr sz="900">
+                <a:latin typeface="Consolas"/>
+              </a:rPr>
+              <a:t>├─────────────────────────────────────────────────┤</a:t>
+            </a:r>
+            <a:br/>
+            <a:r>
+              <a:rPr sz="900">
+                <a:latin typeface="Consolas"/>
+              </a:rPr>
+              <a:t>│                 Business Layer                  │ &lt;- Domain Logic</a:t>
+            </a:r>
+            <a:br/>
+            <a:r>
+              <a:rPr sz="900">
+                <a:latin typeface="Consolas"/>
+              </a:rPr>
+              <a:t>├─────────────────────────────────────────────────┤</a:t>
+            </a:r>
+            <a:br/>
+            <a:r>
+              <a:rPr sz="900">
+                <a:latin typeface="Consolas"/>
+              </a:rPr>
+              <a:t>│                Persistence Layer                │ &lt;- Data Access</a:t>
+            </a:r>
+            <a:br/>
+            <a:r>
+              <a:rPr sz="900">
+                <a:latin typeface="Consolas"/>
+              </a:rPr>
+              <a:t>├─────────────────────────────────────────────────┤</a:t>
+            </a:r>
+            <a:br/>
+            <a:r>
+              <a:rPr sz="900">
+                <a:latin typeface="Consolas"/>
+              </a:rPr>
+              <a:t>│                 Database Layer                  │ &lt;- Data Storage</a:t>
+            </a:r>
+            <a:br/>
+            <a:r>
+              <a:rPr sz="900">
+                <a:latin typeface="Consolas"/>
+              </a:rPr>
+              <a:t>└─────────────────────────────────────────────────┘</a:t>
+            </a:r>
+            <a:br/>
+            <a:br/>
+            <a:r>
+              <a:rPr sz="900">
+                <a:latin typeface="Consolas"/>
+              </a:rPr>
+              <a:t>Dependency Flow: Top -&gt; Down (Higher layers depend on lower layers)</a:t>
+            </a:r>
+            <a:br/>
+            <a:r>
+              <a:rPr sz="900">
+                <a:latin typeface="Consolas"/>
+              </a:rPr>
+              <a:t>Data Flow: Bidirectional through defined interfaces</a:t>
             </a:r>
           </a:p>
         </p:txBody>
@@ -7960,7 +5642,7 @@
             <a:spLocks noGrp="1"/>
           </p:cNvSpPr>
           <p:nvPr>
-            <p:ph type="ctrTitle"/>
+            <p:ph type="title"/>
           </p:nvPr>
         </p:nvSpPr>
         <p:spPr/>
@@ -7969,149 +5651,89 @@
           <a:lstStyle/>
           <a:p>
             <a:r>
-              <a:t>1. Layered Architecture - When to Use</a:t>
-            </a:r>
-          </a:p>
-        </p:txBody>
-      </p:sp>
-      <p:sp>
-        <p:nvSpPr>
-          <p:cNvPr id="3" name="TextBox 2"/>
-          <p:cNvSpPr txBox="1"/>
-          <p:nvPr/>
-        </p:nvSpPr>
-        <p:spPr>
-          <a:xfrm>
-            <a:off x="457200" y="1371600"/>
-            <a:ext cx="3657600" cy="5486400"/>
-          </a:xfrm>
-          <a:prstGeom prst="rect">
-            <a:avLst/>
-          </a:prstGeom>
-          <a:noFill/>
-        </p:spPr>
-        <p:txBody>
-          <a:bodyPr wrap="none">
-            <a:spAutoFit/>
-          </a:bodyPr>
+              <a:t>Layered Architecture - Telekom Use Case</a:t>
+            </a:r>
+          </a:p>
+        </p:txBody>
+      </p:sp>
+      <p:sp>
+        <p:nvSpPr>
+          <p:cNvPr id="3" name="Content Placeholder 2"/>
+          <p:cNvSpPr>
+            <a:spLocks noGrp="1"/>
+          </p:cNvSpPr>
+          <p:nvPr>
+            <p:ph idx="1"/>
+          </p:nvPr>
+        </p:nvSpPr>
+        <p:spPr/>
+        <p:txBody>
+          <a:bodyPr/>
           <a:lstStyle/>
           <a:p>
-            <a:pPr>
-              <a:defRPr b="1" sz="1800">
-                <a:solidFill>
-                  <a:srgbClr val="008000"/>
-                </a:solidFill>
-              </a:defRPr>
-            </a:pPr>
-            <a:r>
-              <a:t>Ideal für:</a:t>
-            </a:r>
-          </a:p>
-          <a:p>
-            <a:pPr>
-              <a:defRPr sz="1200"/>
-            </a:pPr>
-            <a:r>
-              <a:t>• Kleine bis mittlere Teams (&lt;5 Entwickler)</a:t>
-            </a:r>
-          </a:p>
-          <a:p>
-            <a:pPr>
-              <a:defRPr sz="1200"/>
-            </a:pPr>
-            <a:r>
-              <a:t>• Einfache CRUD-Operationen</a:t>
-            </a:r>
-          </a:p>
-          <a:p>
-            <a:pPr>
-              <a:defRPr sz="1200"/>
-            </a:pPr>
-            <a:r>
-              <a:t>• Prototypen und Proof-of-Concepts</a:t>
-            </a:r>
-          </a:p>
-          <a:p>
-            <a:pPr>
-              <a:defRPr sz="1200"/>
-            </a:pPr>
-            <a:r>
-              <a:t>• Kurze Time-to-Market Anforderungen</a:t>
-            </a:r>
-          </a:p>
-          <a:p>
-            <a:pPr>
-              <a:defRPr sz="1200"/>
-            </a:pPr>
-            <a:r>
-              <a:t>• Bewährte Entwicklungsstandards erforderlich</a:t>
-            </a:r>
-          </a:p>
-        </p:txBody>
-      </p:sp>
-      <p:sp>
-        <p:nvSpPr>
-          <p:cNvPr id="4" name="TextBox 3"/>
-          <p:cNvSpPr txBox="1"/>
-          <p:nvPr/>
-        </p:nvSpPr>
-        <p:spPr>
-          <a:xfrm>
-            <a:off x="4572000" y="1371600"/>
-            <a:ext cx="4114800" cy="5486400"/>
-          </a:xfrm>
-          <a:prstGeom prst="rect">
-            <a:avLst/>
-          </a:prstGeom>
-          <a:noFill/>
-        </p:spPr>
-        <p:txBody>
-          <a:bodyPr wrap="none">
-            <a:spAutoFit/>
-          </a:bodyPr>
-          <a:lstStyle/>
-          <a:p>
-            <a:pPr>
-              <a:defRPr b="1" sz="1800">
-                <a:solidFill>
-                  <a:srgbClr val="FF0000"/>
-                </a:solidFill>
-              </a:defRPr>
-            </a:pPr>
-            <a:r>
-              <a:t>Vermeiden wenn:</a:t>
-            </a:r>
-          </a:p>
-          <a:p>
-            <a:pPr>
-              <a:defRPr sz="1200"/>
-            </a:pPr>
-            <a:r>
-              <a:t>• Hohe Skalierungsanforderungen</a:t>
-            </a:r>
-          </a:p>
-          <a:p>
-            <a:pPr>
-              <a:defRPr sz="1200"/>
-            </a:pPr>
-            <a:r>
-              <a:t>• Komplexe Domain Logic</a:t>
-            </a:r>
-          </a:p>
-          <a:p>
-            <a:pPr>
-              <a:defRPr sz="1200"/>
-            </a:pPr>
-            <a:r>
-              <a:t>• Mehrere unabhängige Teams</a:t>
-            </a:r>
-          </a:p>
-          <a:p>
-            <a:pPr>
-              <a:defRPr sz="1200"/>
-            </a:pPr>
-            <a:r>
-              <a:t>• Mikroservice-Architektur gewünscht</a:t>
+            <a:pPr/>
+            <a:r>
+              <a:t>**Network Configuration Management System**</a:t>
+            </a:r>
+          </a:p>
+          <a:p>
+            <a:pPr/>
+            <a:r>
+              <a:t>**Layer Implementation:**</a:t>
+            </a:r>
+          </a:p>
+          <a:p>
+            <a:pPr lvl="1"/>
+            <a:r>
+              <a:t>• Presentation: Web Dashboard für Network Engineers</a:t>
+            </a:r>
+          </a:p>
+          <a:p>
+            <a:pPr lvl="1"/>
+            <a:r>
+              <a:t>• Business: Configuration Validation, Change Management</a:t>
+            </a:r>
+          </a:p>
+          <a:p>
+            <a:pPr lvl="1"/>
+            <a:r>
+              <a:t>• Persistence: Configuration Repository, Audit Logging</a:t>
+            </a:r>
+          </a:p>
+          <a:p>
+            <a:pPr lvl="1"/>
+            <a:r>
+              <a:t>• Database: PostgreSQL für Config Data, MongoDB für Audit Logs</a:t>
+            </a:r>
+          </a:p>
+          <a:p>
+            <a:pPr/>
+            <a:r>
+              <a:t>**Real-world Application:**</a:t>
+            </a:r>
+          </a:p>
+          <a:p>
+            <a:pPr lvl="1"/>
+            <a:r>
+              <a:t>• SNMP configuration management</a:t>
+            </a:r>
+          </a:p>
+          <a:p>
+            <a:pPr lvl="1"/>
+            <a:r>
+              <a:t>• Network device inventory</a:t>
+            </a:r>
+          </a:p>
+          <a:p>
+            <a:pPr lvl="1"/>
+            <a:r>
+              <a:t>• Change approval workflows</a:t>
+            </a:r>
+          </a:p>
+          <a:p>
+            <a:pPr lvl="1"/>
+            <a:r>
+              <a:t>• Configuration backup and restore</a:t>
             </a:r>
           </a:p>
         </p:txBody>
@@ -8141,7 +5763,7 @@
             <a:spLocks noGrp="1"/>
           </p:cNvSpPr>
           <p:nvPr>
-            <p:ph type="ctrTitle"/>
+            <p:ph type="title"/>
           </p:nvPr>
         </p:nvSpPr>
         <p:spPr/>
@@ -8150,176 +5772,135 @@
           <a:lstStyle/>
           <a:p>
             <a:r>
-              <a:t>2. Microservices Architecture</a:t>
-            </a:r>
-          </a:p>
-        </p:txBody>
-      </p:sp>
-      <p:sp>
-        <p:nvSpPr>
-          <p:cNvPr id="3" name="Subtitle 2"/>
-          <p:cNvSpPr>
-            <a:spLocks noGrp="1"/>
-          </p:cNvSpPr>
-          <p:nvPr>
-            <p:ph type="subTitle" idx="1"/>
+              <a:t>Layered Architecture - Trade-offs</a:t>
+            </a:r>
+          </a:p>
+        </p:txBody>
+      </p:sp>
+      <p:sp>
+        <p:nvSpPr>
+          <p:cNvPr id="3" name="Content Placeholder 2"/>
+          <p:cNvSpPr>
+            <a:spLocks noGrp="1"/>
+          </p:cNvSpPr>
+          <p:nvPr>
+            <p:ph idx="1" sz="half"/>
           </p:nvPr>
         </p:nvSpPr>
         <p:spPr/>
         <p:txBody>
           <a:bodyPr/>
           <a:lstStyle/>
-          <a:p/>
           <a:p>
             <a:pPr>
-              <a:defRPr sz="1200"/>
+              <a:defRPr b="1" sz="1600"/>
             </a:pPr>
             <a:r>
-              <a:t>```</a:t>
+              <a:t>Vorteile ✅</a:t>
             </a:r>
           </a:p>
           <a:p>
             <a:pPr>
-              <a:defRPr sz="1200"/>
+              <a:spcAft>
+                <a:spcPts val="600"/>
+              </a:spcAft>
             </a:pPr>
             <a:r>
-              <a:t>Service Landscape:</a:t>
+              <a:t>• Klare Trennung der Verantwortlichkeiten</a:t>
             </a:r>
           </a:p>
           <a:p>
             <a:pPr>
-              <a:defRPr sz="1200"/>
+              <a:spcAft>
+                <a:spcPts val="600"/>
+              </a:spcAft>
             </a:pPr>
             <a:r>
-              <a:t>┌───────────────┐  ┌───────────────┐  ┌───────────────┐</a:t>
+              <a:t>• Einfache Testbarkeit jeder Schicht</a:t>
             </a:r>
           </a:p>
           <a:p>
             <a:pPr>
-              <a:defRPr sz="1200"/>
+              <a:spcAft>
+                <a:spcPts val="600"/>
+              </a:spcAft>
             </a:pPr>
             <a:r>
-              <a:t>│  Device Mgmt  │  │   Monitoring  │  │  Configuration │</a:t>
+              <a:t>• Bewährtes Pattern mit hoher Entwickler-Akzeptanz</a:t>
             </a:r>
           </a:p>
           <a:p>
             <a:pPr>
-              <a:defRPr sz="1200"/>
+              <a:spcAft>
+                <a:spcPts val="600"/>
+              </a:spcAft>
             </a:pPr>
             <a:r>
-              <a:t>│   Service     │  │    Service    │  │    Service    │</a:t>
-            </a:r>
-          </a:p>
+              <a:t>• Gute Performance bei einfachen CRUD-Operationen</a:t>
+            </a:r>
+          </a:p>
+        </p:txBody>
+      </p:sp>
+      <p:sp>
+        <p:nvSpPr>
+          <p:cNvPr id="4" name="Content Placeholder 3"/>
+          <p:cNvSpPr>
+            <a:spLocks noGrp="1"/>
+          </p:cNvSpPr>
+          <p:nvPr>
+            <p:ph idx="2" sz="half"/>
+          </p:nvPr>
+        </p:nvSpPr>
+        <p:spPr/>
+        <p:txBody>
+          <a:bodyPr/>
+          <a:lstStyle/>
           <a:p>
             <a:pPr>
-              <a:defRPr sz="1200"/>
+              <a:defRPr b="1" sz="1600"/>
             </a:pPr>
             <a:r>
-              <a:t>├───────────────┤  ├───────────────┤  ├───────────────┤</a:t>
+              <a:t>Nachteile ❌</a:t>
             </a:r>
           </a:p>
           <a:p>
             <a:pPr>
-              <a:defRPr sz="1200"/>
+              <a:spcAft>
+                <a:spcPts val="600"/>
+              </a:spcAft>
             </a:pPr>
             <a:r>
-              <a:t>│  PostgreSQL   │  │  InfluxDB     │  │   MongoDB     │</a:t>
+              <a:t>• Monolithischer Charakter erschwert Skalierung</a:t>
             </a:r>
           </a:p>
           <a:p>
             <a:pPr>
-              <a:defRPr sz="1200"/>
+              <a:spcAft>
+                <a:spcPts val="600"/>
+              </a:spcAft>
             </a:pPr>
             <a:r>
-              <a:t>└───────────────┘  └───────────────┘  └───────────────┘</a:t>
+              <a:t>• Änderungen propagieren durch alle Schichten</a:t>
             </a:r>
           </a:p>
           <a:p>
             <a:pPr>
-              <a:defRPr sz="1200"/>
+              <a:spcAft>
+                <a:spcPts val="600"/>
+              </a:spcAft>
             </a:pPr>
             <a:r>
-              <a:t>│                  │                  │</a:t>
+              <a:t>• Datenbankschema-Changes beeinflussen alle Layer</a:t>
             </a:r>
           </a:p>
           <a:p>
             <a:pPr>
-              <a:defRPr sz="1200"/>
+              <a:spcAft>
+                <a:spcPts val="600"/>
+              </a:spcAft>
             </a:pPr>
             <a:r>
-              <a:t>└──────────────────┼──────────────────┘</a:t>
-            </a:r>
-          </a:p>
-          <a:p>
-            <a:pPr>
-              <a:defRPr sz="1200"/>
-            </a:pPr>
-            <a:r>
-              <a:t>│</a:t>
-            </a:r>
-          </a:p>
-          <a:p>
-            <a:pPr>
-              <a:defRPr sz="1200"/>
-            </a:pPr>
-            <a:r>
-              <a:t>┌─────────────────┐</a:t>
-            </a:r>
-          </a:p>
-          <a:p>
-            <a:pPr>
-              <a:defRPr sz="1200"/>
-            </a:pPr>
-            <a:r>
-              <a:t>│   API Gateway   │</a:t>
-            </a:r>
-          </a:p>
-          <a:p>
-            <a:pPr>
-              <a:defRPr sz="1200"/>
-            </a:pPr>
-            <a:r>
-              <a:t>├─────────────────┤</a:t>
-            </a:r>
-          </a:p>
-          <a:p>
-            <a:pPr>
-              <a:defRPr sz="1200"/>
-            </a:pPr>
-            <a:r>
-              <a:t>│ Load Balancer   │</a:t>
-            </a:r>
-          </a:p>
-          <a:p>
-            <a:pPr>
-              <a:defRPr sz="1200"/>
-            </a:pPr>
-            <a:r>
-              <a:t>├─────────────────┤</a:t>
-            </a:r>
-          </a:p>
-          <a:p>
-            <a:pPr>
-              <a:defRPr sz="1200"/>
-            </a:pPr>
-            <a:r>
-              <a:t>│ Service Mesh    │</a:t>
-            </a:r>
-          </a:p>
-          <a:p>
-            <a:pPr>
-              <a:defRPr sz="1200"/>
-            </a:pPr>
-            <a:r>
-              <a:t>└─────────────────┘</a:t>
-            </a:r>
-          </a:p>
-          <a:p>
-            <a:pPr>
-              <a:defRPr sz="1200"/>
-            </a:pPr>
-            <a:r>
-              <a:t>```</a:t>
+              <a:t>• Schwierig für komplexe Domain Logic</a:t>
             </a:r>
           </a:p>
         </p:txBody>
@@ -8358,7 +5939,7 @@
           <a:lstStyle/>
           <a:p>
             <a:r>
-              <a:t>2. Microservices - Telekom Use Case</a:t>
+              <a:t>2. Microservices Architecture</a:t>
             </a:r>
           </a:p>
         </p:txBody>
@@ -8378,78 +5959,6 @@
           <a:bodyPr/>
           <a:lstStyle/>
           <a:p/>
-          <a:p>
-            <a:pPr>
-              <a:defRPr b="1" sz="1800"/>
-            </a:pPr>
-            <a:r>
-              <a:t>Network Operations Center (NOC) Platform</a:t>
-            </a:r>
-          </a:p>
-          <a:p>
-            <a:pPr lvl="1">
-              <a:defRPr sz="1400"/>
-            </a:pPr>
-            <a:r>
-              <a:t>**Device Management:** CRUD für Router, Switches, Firewalls</a:t>
-            </a:r>
-          </a:p>
-          <a:p>
-            <a:pPr lvl="1">
-              <a:defRPr sz="1400"/>
-            </a:pPr>
-            <a:r>
-              <a:t>**Monitoring Service:** Metriken, Alerts, Health Checks</a:t>
-            </a:r>
-          </a:p>
-          <a:p>
-            <a:pPr lvl="1">
-              <a:defRPr sz="1400"/>
-            </a:pPr>
-            <a:r>
-              <a:t>**Configuration Service:** Config Templates, Deployment</a:t>
-            </a:r>
-          </a:p>
-          <a:p>
-            <a:pPr lvl="1">
-              <a:defRPr sz="1400"/>
-            </a:pPr>
-            <a:r>
-              <a:t>**Analytics Service:** Performance Analysis, Capacity Planning</a:t>
-            </a:r>
-          </a:p>
-          <a:p>
-            <a:pPr lvl="1">
-              <a:defRPr sz="1400"/>
-            </a:pPr>
-            <a:r>
-              <a:t>**Container:** Docker + Kubernetes</a:t>
-            </a:r>
-          </a:p>
-          <a:p>
-            <a:pPr lvl="1">
-              <a:defRPr sz="1400"/>
-            </a:pPr>
-            <a:r>
-              <a:t>**API Gateway:** Kong oder Istio</a:t>
-            </a:r>
-          </a:p>
-          <a:p>
-            <a:pPr lvl="1">
-              <a:defRPr sz="1400"/>
-            </a:pPr>
-            <a:r>
-              <a:t>**Service Mesh:** Linkerd oder Istio</a:t>
-            </a:r>
-          </a:p>
-          <a:p>
-            <a:pPr lvl="1">
-              <a:defRPr sz="1400"/>
-            </a:pPr>
-            <a:r>
-              <a:t>**Monitoring:** Prometheus + Grafana</a:t>
-            </a:r>
-          </a:p>
         </p:txBody>
       </p:sp>
     </p:spTree>
@@ -8477,7 +5986,7 @@
             <a:spLocks noGrp="1"/>
           </p:cNvSpPr>
           <p:nvPr>
-            <p:ph type="ctrTitle"/>
+            <p:ph type="title"/>
           </p:nvPr>
         </p:nvSpPr>
         <p:spPr/>
@@ -8486,196 +5995,154 @@
           <a:lstStyle/>
           <a:p>
             <a:r>
-              <a:t>2. Microservices - Trade-offs</a:t>
-            </a:r>
-          </a:p>
-        </p:txBody>
-      </p:sp>
-      <p:sp>
-        <p:nvSpPr>
-          <p:cNvPr id="3" name="TextBox 2"/>
-          <p:cNvSpPr txBox="1"/>
-          <p:nvPr/>
-        </p:nvSpPr>
-        <p:spPr>
-          <a:xfrm>
-            <a:off x="457200" y="1371600"/>
-            <a:ext cx="3657600" cy="5486400"/>
-          </a:xfrm>
-          <a:prstGeom prst="rect">
-            <a:avLst/>
-          </a:prstGeom>
-          <a:noFill/>
-        </p:spPr>
-        <p:txBody>
-          <a:bodyPr wrap="none">
-            <a:spAutoFit/>
-          </a:bodyPr>
+              <a:t>Microservices Architecture - Schema</a:t>
+            </a:r>
+          </a:p>
+        </p:txBody>
+      </p:sp>
+      <p:sp>
+        <p:nvSpPr>
+          <p:cNvPr id="3" name="Content Placeholder 2"/>
+          <p:cNvSpPr>
+            <a:spLocks noGrp="1"/>
+          </p:cNvSpPr>
+          <p:nvPr>
+            <p:ph idx="1"/>
+          </p:nvPr>
+        </p:nvSpPr>
+        <p:spPr/>
+        <p:txBody>
+          <a:bodyPr/>
           <a:lstStyle/>
           <a:p>
             <a:pPr>
-              <a:defRPr b="1" sz="1800"/>
+              <a:lnSpc>
+                <a:spcPct val="100000"/>
+              </a:lnSpc>
+              <a:spcBef>
+                <a:spcPts val="0"/>
+              </a:spcBef>
+              <a:spcAft>
+                <a:spcPts val="0"/>
+              </a:spcAft>
             </a:pPr>
             <a:r>
-              <a:t>Vorteile ✅</a:t>
-            </a:r>
-          </a:p>
-          <a:p>
-            <a:pPr>
-              <a:defRPr sz="1200"/>
-            </a:pPr>
-            <a:r>
-              <a:t>• Unabhängige Skalierung pro Service</a:t>
-            </a:r>
-          </a:p>
-          <a:p>
-            <a:pPr>
-              <a:defRPr sz="1200"/>
-            </a:pPr>
-            <a:r>
-              <a:t>• Technology Stack Diversität möglich</a:t>
-            </a:r>
-          </a:p>
-          <a:p>
-            <a:pPr>
-              <a:defRPr sz="1200"/>
-            </a:pPr>
-            <a:r>
-              <a:t>• Fehler-Isolierung zwischen Services</a:t>
-            </a:r>
-          </a:p>
-          <a:p>
-            <a:pPr>
-              <a:defRPr sz="1200"/>
-            </a:pPr>
-            <a:r>
-              <a:t>• Parallele Entwicklung durch verschiedene Teams</a:t>
-            </a:r>
-          </a:p>
-        </p:txBody>
-      </p:sp>
-      <p:sp>
-        <p:nvSpPr>
-          <p:cNvPr id="4" name="TextBox 3"/>
-          <p:cNvSpPr txBox="1"/>
-          <p:nvPr/>
-        </p:nvSpPr>
-        <p:spPr>
-          <a:xfrm>
-            <a:off x="4572000" y="1371600"/>
-            <a:ext cx="4114800" cy="5486400"/>
-          </a:xfrm>
-          <a:prstGeom prst="rect">
-            <a:avLst/>
-          </a:prstGeom>
-          <a:noFill/>
-        </p:spPr>
-        <p:txBody>
-          <a:bodyPr wrap="none">
-            <a:spAutoFit/>
-          </a:bodyPr>
-          <a:lstStyle/>
-          <a:p>
-            <a:pPr>
-              <a:defRPr b="1" sz="1800"/>
-            </a:pPr>
-            <a:r>
-              <a:t>Nachteile ❌</a:t>
-            </a:r>
-          </a:p>
-          <a:p>
-            <a:pPr>
-              <a:defRPr sz="1200"/>
-            </a:pPr>
-            <a:r>
-              <a:t>• Hohe operationale Komplexität</a:t>
-            </a:r>
-          </a:p>
-          <a:p>
-            <a:pPr>
-              <a:defRPr sz="1200"/>
-            </a:pPr>
-            <a:r>
-              <a:t>• Distributed System Challenges (Latency, Partial Failures)</a:t>
-            </a:r>
-          </a:p>
-          <a:p>
-            <a:pPr>
-              <a:defRPr sz="1200"/>
-            </a:pPr>
-            <a:r>
-              <a:t>• Data Consistency zwischen Services schwierig</a:t>
-            </a:r>
-          </a:p>
-          <a:p>
-            <a:pPr>
-              <a:defRPr sz="1200"/>
-            </a:pPr>
-            <a:r>
-              <a:t>• Service Discovery und Load Balancing erforderlich</a:t>
-            </a:r>
-          </a:p>
-        </p:txBody>
-      </p:sp>
-      <p:sp>
-        <p:nvSpPr>
-          <p:cNvPr id="5" name="TextBox 4"/>
-          <p:cNvSpPr txBox="1"/>
-          <p:nvPr/>
-        </p:nvSpPr>
-        <p:spPr>
-          <a:xfrm>
-            <a:off x="457200" y="5943600"/>
-            <a:ext cx="8229600" cy="1371600"/>
-          </a:xfrm>
-          <a:prstGeom prst="rect">
-            <a:avLst/>
-          </a:prstGeom>
-          <a:noFill/>
-        </p:spPr>
-        <p:txBody>
-          <a:bodyPr wrap="none">
-            <a:spAutoFit/>
-          </a:bodyPr>
-          <a:lstStyle/>
-          <a:p>
-            <a:pPr>
-              <a:defRPr b="1" sz="1400"/>
-            </a:pPr>
-            <a:r>
-              <a:t>Production Considerations ⚠️</a:t>
-            </a:r>
-          </a:p>
-          <a:p>
-            <a:pPr>
-              <a:defRPr sz="1000"/>
-            </a:pPr>
-            <a:r>
-              <a:t>• Container Orchestration (Kubernetes) notwendig</a:t>
-            </a:r>
-          </a:p>
-          <a:p>
-            <a:pPr>
-              <a:defRPr sz="1000"/>
-            </a:pPr>
-            <a:r>
-              <a:t>• Service Mesh für Service-to-Service Communication</a:t>
-            </a:r>
-          </a:p>
-          <a:p>
-            <a:pPr>
-              <a:defRPr sz="1000"/>
-            </a:pPr>
-            <a:r>
-              <a:t>• Distributed Tracing für End-to-End Monitoring</a:t>
-            </a:r>
-          </a:p>
-          <a:p>
-            <a:pPr>
-              <a:defRPr sz="1000"/>
-            </a:pPr>
-            <a:r>
-              <a:t>• Event Sourcing für Data Consistency</a:t>
+              <a:rPr sz="900">
+                <a:latin typeface="Consolas"/>
+              </a:rPr>
+              <a:t>Service Landscape:</a:t>
+            </a:r>
+            <a:br/>
+            <a:r>
+              <a:rPr sz="900">
+                <a:latin typeface="Consolas"/>
+              </a:rPr>
+              <a:t>┌───────────────┐  ┌───────────────┐  ┌───────────────┐</a:t>
+            </a:r>
+            <a:br/>
+            <a:r>
+              <a:rPr sz="900">
+                <a:latin typeface="Consolas"/>
+              </a:rPr>
+              <a:t>│  Device Mgmt  │  │   Monitoring  │  │  Configuration │</a:t>
+            </a:r>
+            <a:br/>
+            <a:r>
+              <a:rPr sz="900">
+                <a:latin typeface="Consolas"/>
+              </a:rPr>
+              <a:t>│   Service     │  │    Service    │  │    Service    │</a:t>
+            </a:r>
+            <a:br/>
+            <a:r>
+              <a:rPr sz="900">
+                <a:latin typeface="Consolas"/>
+              </a:rPr>
+              <a:t>├───────────────┤  ├───────────────┤  ├───────────────┤</a:t>
+            </a:r>
+            <a:br/>
+            <a:r>
+              <a:rPr sz="900">
+                <a:latin typeface="Consolas"/>
+              </a:rPr>
+              <a:t>│  PostgreSQL   │  │  InfluxDB     │  │   MongoDB     │</a:t>
+            </a:r>
+            <a:br/>
+            <a:r>
+              <a:rPr sz="900">
+                <a:latin typeface="Consolas"/>
+              </a:rPr>
+              <a:t>└───────────────┘  └───────────────┘  └───────────────┘</a:t>
+            </a:r>
+            <a:br/>
+            <a:r>
+              <a:rPr sz="900">
+                <a:latin typeface="Consolas"/>
+              </a:rPr>
+              <a:t>         │                  │                  │</a:t>
+            </a:r>
+            <a:br/>
+            <a:r>
+              <a:rPr sz="900">
+                <a:latin typeface="Consolas"/>
+              </a:rPr>
+              <a:t>         └──────────────────┼──────────────────┘</a:t>
+            </a:r>
+            <a:br/>
+            <a:r>
+              <a:rPr sz="900">
+                <a:latin typeface="Consolas"/>
+              </a:rPr>
+              <a:t>                            │</a:t>
+            </a:r>
+            <a:br/>
+            <a:r>
+              <a:rPr sz="900">
+                <a:latin typeface="Consolas"/>
+              </a:rPr>
+              <a:t>                   ┌─────────────────┐</a:t>
+            </a:r>
+            <a:br/>
+            <a:r>
+              <a:rPr sz="900">
+                <a:latin typeface="Consolas"/>
+              </a:rPr>
+              <a:t>                   │   API Gateway   │</a:t>
+            </a:r>
+            <a:br/>
+            <a:r>
+              <a:rPr sz="900">
+                <a:latin typeface="Consolas"/>
+              </a:rPr>
+              <a:t>                   ├─────────────────┤</a:t>
+            </a:r>
+            <a:br/>
+            <a:r>
+              <a:rPr sz="900">
+                <a:latin typeface="Consolas"/>
+              </a:rPr>
+              <a:t>                   │ Load Balancer   │</a:t>
+            </a:r>
+            <a:br/>
+            <a:r>
+              <a:rPr sz="900">
+                <a:latin typeface="Consolas"/>
+              </a:rPr>
+              <a:t>                   ├─────────────────┤</a:t>
+            </a:r>
+            <a:br/>
+            <a:r>
+              <a:rPr sz="900">
+                <a:latin typeface="Consolas"/>
+              </a:rPr>
+              <a:t>                   │ Service Mesh    │</a:t>
+            </a:r>
+            <a:br/>
+            <a:r>
+              <a:rPr sz="900">
+                <a:latin typeface="Consolas"/>
+              </a:rPr>
+              <a:t>                   └─────────────────┘</a:t>
             </a:r>
           </a:p>
         </p:txBody>

--- a/presentations/powerpoint/arch-patterns-part1.pptx
+++ b/presentations/powerpoint/arch-patterns-part1.pptx
@@ -5,21 +5,25 @@
     <p:sldMasterId id="2147483661" r:id="rId1"/>
   </p:sldMasterIdLst>
   <p:sldIdLst>
-    <p:sldId id="256" r:id="rId6"/>
-    <p:sldId id="257" r:id="rId7"/>
-    <p:sldId id="258" r:id="rId8"/>
-    <p:sldId id="259" r:id="rId9"/>
-    <p:sldId id="260" r:id="rId10"/>
-    <p:sldId id="261" r:id="rId11"/>
-    <p:sldId id="262" r:id="rId12"/>
-    <p:sldId id="263" r:id="rId13"/>
-    <p:sldId id="264" r:id="rId14"/>
-    <p:sldId id="265" r:id="rId15"/>
-    <p:sldId id="266" r:id="rId16"/>
-    <p:sldId id="267" r:id="rId17"/>
-    <p:sldId id="268" r:id="rId18"/>
-    <p:sldId id="269" r:id="rId19"/>
-    <p:sldId id="270" r:id="rId20"/>
+    <p:sldId id="256" r:id="rId2"/>
+    <p:sldId id="257" r:id="rId3"/>
+    <p:sldId id="258" r:id="rId4"/>
+    <p:sldId id="259" r:id="rId5"/>
+    <p:sldId id="260" r:id="rId6"/>
+    <p:sldId id="261" r:id="rId7"/>
+    <p:sldId id="262" r:id="rId8"/>
+    <p:sldId id="263" r:id="rId9"/>
+    <p:sldId id="264" r:id="rId10"/>
+    <p:sldId id="265" r:id="rId11"/>
+    <p:sldId id="266" r:id="rId12"/>
+    <p:sldId id="267" r:id="rId13"/>
+    <p:sldId id="268" r:id="rId14"/>
+    <p:sldId id="269" r:id="rId15"/>
+    <p:sldId id="270" r:id="rId16"/>
+    <p:sldId id="271" r:id="rId21"/>
+    <p:sldId id="272" r:id="rId22"/>
+    <p:sldId id="273" r:id="rId23"/>
+    <p:sldId id="274" r:id="rId25"/>
   </p:sldIdLst>
   <p:sldSz cx="12192000" cy="6858000"/>
   <p:notesSz cx="6858000" cy="9144000"/>
@@ -124,6 +128,1796 @@
     </p:ext>
   </p:extLst>
 </p:presentation>
+</file>
+
+<file path=ppt/notesMasters/notesMaster1.xml><?xml version="1.0" encoding="utf-8"?>
+<p:notesMaster xmlns:a="http://schemas.openxmlformats.org/drawingml/2006/main" xmlns:p="http://schemas.openxmlformats.org/presentationml/2006/main" xmlns:r="http://schemas.openxmlformats.org/officeDocument/2006/relationships">
+  <p:cSld>
+    <p:bg>
+      <p:bgRef idx="1001">
+        <a:schemeClr val="bg1"/>
+      </p:bgRef>
+    </p:bg>
+    <p:spTree>
+      <p:nvGrpSpPr>
+        <p:cNvPr id="1" name=""/>
+        <p:cNvGrpSpPr/>
+        <p:nvPr/>
+      </p:nvGrpSpPr>
+      <p:grpSpPr>
+        <a:xfrm>
+          <a:off x="0" y="0"/>
+          <a:ext cx="0" cy="0"/>
+          <a:chOff x="0" y="0"/>
+          <a:chExt cx="0" cy="0"/>
+        </a:xfrm>
+      </p:grpSpPr>
+      <p:sp>
+        <p:nvSpPr>
+          <p:cNvPr id="2" name="Header Placeholder 1"/>
+          <p:cNvSpPr>
+            <a:spLocks noGrp="1"/>
+          </p:cNvSpPr>
+          <p:nvPr>
+            <p:ph type="hdr" sz="quarter"/>
+          </p:nvPr>
+        </p:nvSpPr>
+        <p:spPr>
+          <a:xfrm>
+            <a:off x="0" y="0"/>
+            <a:ext cx="2971800" cy="457200"/>
+          </a:xfrm>
+          <a:prstGeom prst="rect">
+            <a:avLst/>
+          </a:prstGeom>
+        </p:spPr>
+        <p:txBody>
+          <a:bodyPr vert="horz" lIns="91440" tIns="45720" rIns="91440" bIns="45720" rtlCol="0"/>
+          <a:lstStyle>
+            <a:lvl1pPr algn="l">
+              <a:defRPr sz="1200"/>
+            </a:lvl1pPr>
+          </a:lstStyle>
+          <a:p>
+            <a:endParaRPr lang="en-US"/>
+          </a:p>
+        </p:txBody>
+      </p:sp>
+      <p:sp>
+        <p:nvSpPr>
+          <p:cNvPr id="3" name="Date Placeholder 2"/>
+          <p:cNvSpPr>
+            <a:spLocks noGrp="1"/>
+          </p:cNvSpPr>
+          <p:nvPr>
+            <p:ph type="dt" idx="1"/>
+          </p:nvPr>
+        </p:nvSpPr>
+        <p:spPr>
+          <a:xfrm>
+            <a:off x="3884613" y="0"/>
+            <a:ext cx="2971800" cy="457200"/>
+          </a:xfrm>
+          <a:prstGeom prst="rect">
+            <a:avLst/>
+          </a:prstGeom>
+        </p:spPr>
+        <p:txBody>
+          <a:bodyPr vert="horz" lIns="91440" tIns="45720" rIns="91440" bIns="45720" rtlCol="0"/>
+          <a:lstStyle>
+            <a:lvl1pPr algn="r">
+              <a:defRPr sz="1200"/>
+            </a:lvl1pPr>
+          </a:lstStyle>
+          <a:p>
+            <a:fld id="{0F89C1C7-3DCD-1040-A9CF-14679D8B5DDD}" type="datetimeFigureOut">
+              <a:rPr lang="en-US" smtClean="0"/>
+              <a:t>10/17/16</a:t>
+            </a:fld>
+            <a:endParaRPr lang="en-US"/>
+          </a:p>
+        </p:txBody>
+      </p:sp>
+      <p:sp>
+        <p:nvSpPr>
+          <p:cNvPr id="4" name="Slide Image Placeholder 3"/>
+          <p:cNvSpPr>
+            <a:spLocks noGrp="1" noRot="1" noChangeAspect="1"/>
+          </p:cNvSpPr>
+          <p:nvPr>
+            <p:ph type="sldImg" idx="2"/>
+          </p:nvPr>
+        </p:nvSpPr>
+        <p:spPr>
+          <a:xfrm>
+            <a:off x="1143000" y="685800"/>
+            <a:ext cx="4572000" cy="3429000"/>
+          </a:xfrm>
+          <a:prstGeom prst="rect">
+            <a:avLst/>
+          </a:prstGeom>
+          <a:noFill/>
+          <a:ln w="12700">
+            <a:solidFill>
+              <a:prstClr val="black"/>
+            </a:solidFill>
+          </a:ln>
+        </p:spPr>
+        <p:txBody>
+          <a:bodyPr vert="horz" lIns="91440" tIns="45720" rIns="91440" bIns="45720" rtlCol="0" anchor="ctr"/>
+          <a:lstStyle/>
+          <a:p>
+            <a:endParaRPr lang="en-US"/>
+          </a:p>
+        </p:txBody>
+      </p:sp>
+      <p:sp>
+        <p:nvSpPr>
+          <p:cNvPr id="5" name="Notes Placeholder 4"/>
+          <p:cNvSpPr>
+            <a:spLocks noGrp="1"/>
+          </p:cNvSpPr>
+          <p:nvPr>
+            <p:ph type="body" sz="quarter" idx="3"/>
+          </p:nvPr>
+        </p:nvSpPr>
+        <p:spPr>
+          <a:xfrm>
+            <a:off x="685800" y="4343400"/>
+            <a:ext cx="5486400" cy="4114800"/>
+          </a:xfrm>
+          <a:prstGeom prst="rect">
+            <a:avLst/>
+          </a:prstGeom>
+        </p:spPr>
+        <p:txBody>
+          <a:bodyPr vert="horz" lIns="91440" tIns="45720" rIns="91440" bIns="45720" rtlCol="0"/>
+          <a:lstStyle/>
+          <a:p>
+            <a:pPr lvl="0"/>
+            <a:r>
+              <a:rPr lang="en-US" smtClean="0"/>
+              <a:t>Click to edit Master text styles</a:t>
+            </a:r>
+          </a:p>
+          <a:p>
+            <a:pPr lvl="1"/>
+            <a:r>
+              <a:rPr lang="en-US" smtClean="0"/>
+              <a:t>Second level</a:t>
+            </a:r>
+          </a:p>
+          <a:p>
+            <a:pPr lvl="2"/>
+            <a:r>
+              <a:rPr lang="en-US" smtClean="0"/>
+              <a:t>Third level</a:t>
+            </a:r>
+          </a:p>
+          <a:p>
+            <a:pPr lvl="3"/>
+            <a:r>
+              <a:rPr lang="en-US" smtClean="0"/>
+              <a:t>Fourth level</a:t>
+            </a:r>
+          </a:p>
+          <a:p>
+            <a:pPr lvl="4"/>
+            <a:r>
+              <a:rPr lang="en-US" smtClean="0"/>
+              <a:t>Fifth level</a:t>
+            </a:r>
+            <a:endParaRPr lang="en-US"/>
+          </a:p>
+        </p:txBody>
+      </p:sp>
+      <p:sp>
+        <p:nvSpPr>
+          <p:cNvPr id="6" name="Footer Placeholder 5"/>
+          <p:cNvSpPr>
+            <a:spLocks noGrp="1"/>
+          </p:cNvSpPr>
+          <p:nvPr>
+            <p:ph type="ftr" sz="quarter" idx="4"/>
+          </p:nvPr>
+        </p:nvSpPr>
+        <p:spPr>
+          <a:xfrm>
+            <a:off x="0" y="8685213"/>
+            <a:ext cx="2971800" cy="457200"/>
+          </a:xfrm>
+          <a:prstGeom prst="rect">
+            <a:avLst/>
+          </a:prstGeom>
+        </p:spPr>
+        <p:txBody>
+          <a:bodyPr vert="horz" lIns="91440" tIns="45720" rIns="91440" bIns="45720" rtlCol="0" anchor="b"/>
+          <a:lstStyle>
+            <a:lvl1pPr algn="l">
+              <a:defRPr sz="1200"/>
+            </a:lvl1pPr>
+          </a:lstStyle>
+          <a:p>
+            <a:endParaRPr lang="en-US"/>
+          </a:p>
+        </p:txBody>
+      </p:sp>
+      <p:sp>
+        <p:nvSpPr>
+          <p:cNvPr id="7" name="Slide Number Placeholder 6"/>
+          <p:cNvSpPr>
+            <a:spLocks noGrp="1"/>
+          </p:cNvSpPr>
+          <p:nvPr>
+            <p:ph type="sldNum" sz="quarter" idx="5"/>
+          </p:nvPr>
+        </p:nvSpPr>
+        <p:spPr>
+          <a:xfrm>
+            <a:off x="3884613" y="8685213"/>
+            <a:ext cx="2971800" cy="457200"/>
+          </a:xfrm>
+          <a:prstGeom prst="rect">
+            <a:avLst/>
+          </a:prstGeom>
+        </p:spPr>
+        <p:txBody>
+          <a:bodyPr vert="horz" lIns="91440" tIns="45720" rIns="91440" bIns="45720" rtlCol="0" anchor="b"/>
+          <a:lstStyle>
+            <a:lvl1pPr algn="r">
+              <a:defRPr sz="1200"/>
+            </a:lvl1pPr>
+          </a:lstStyle>
+          <a:p>
+            <a:fld id="{BB5E49A5-4136-284D-997B-48E1D791AD67}" type="slidenum">
+              <a:rPr lang="en-US" smtClean="0"/>
+              <a:t>‹#›</a:t>
+            </a:fld>
+            <a:endParaRPr lang="en-US"/>
+          </a:p>
+        </p:txBody>
+      </p:sp>
+    </p:spTree>
+    <p:extLst>
+      <p:ext uri="{BB962C8B-B14F-4D97-AF65-F5344CB8AC3E}">
+        <p14:creationId xmlns:p14="http://schemas.microsoft.com/office/powerpoint/2010/main" val="2623252185"/>
+      </p:ext>
+    </p:extLst>
+  </p:cSld>
+  <p:clrMap bg1="lt1" tx1="dk1" bg2="lt2" tx2="dk2" accent1="accent1" accent2="accent2" accent3="accent3" accent4="accent4" accent5="accent5" accent6="accent6" hlink="hlink" folHlink="folHlink"/>
+  <p:notesStyle>
+    <a:lvl1pPr marL="0" algn="l" defTabSz="457200" rtl="0" eaLnBrk="1" latinLnBrk="0" hangingPunct="1">
+      <a:defRPr sz="1200" kern="1200">
+        <a:solidFill>
+          <a:schemeClr val="tx1"/>
+        </a:solidFill>
+        <a:latin typeface="+mn-lt"/>
+        <a:ea typeface="+mn-ea"/>
+        <a:cs typeface="+mn-cs"/>
+      </a:defRPr>
+    </a:lvl1pPr>
+    <a:lvl2pPr marL="457200" algn="l" defTabSz="457200" rtl="0" eaLnBrk="1" latinLnBrk="0" hangingPunct="1">
+      <a:defRPr sz="1200" kern="1200">
+        <a:solidFill>
+          <a:schemeClr val="tx1"/>
+        </a:solidFill>
+        <a:latin typeface="+mn-lt"/>
+        <a:ea typeface="+mn-ea"/>
+        <a:cs typeface="+mn-cs"/>
+      </a:defRPr>
+    </a:lvl2pPr>
+    <a:lvl3pPr marL="914400" algn="l" defTabSz="457200" rtl="0" eaLnBrk="1" latinLnBrk="0" hangingPunct="1">
+      <a:defRPr sz="1200" kern="1200">
+        <a:solidFill>
+          <a:schemeClr val="tx1"/>
+        </a:solidFill>
+        <a:latin typeface="+mn-lt"/>
+        <a:ea typeface="+mn-ea"/>
+        <a:cs typeface="+mn-cs"/>
+      </a:defRPr>
+    </a:lvl3pPr>
+    <a:lvl4pPr marL="1371600" algn="l" defTabSz="457200" rtl="0" eaLnBrk="1" latinLnBrk="0" hangingPunct="1">
+      <a:defRPr sz="1200" kern="1200">
+        <a:solidFill>
+          <a:schemeClr val="tx1"/>
+        </a:solidFill>
+        <a:latin typeface="+mn-lt"/>
+        <a:ea typeface="+mn-ea"/>
+        <a:cs typeface="+mn-cs"/>
+      </a:defRPr>
+    </a:lvl4pPr>
+    <a:lvl5pPr marL="1828800" algn="l" defTabSz="457200" rtl="0" eaLnBrk="1" latinLnBrk="0" hangingPunct="1">
+      <a:defRPr sz="1200" kern="1200">
+        <a:solidFill>
+          <a:schemeClr val="tx1"/>
+        </a:solidFill>
+        <a:latin typeface="+mn-lt"/>
+        <a:ea typeface="+mn-ea"/>
+        <a:cs typeface="+mn-cs"/>
+      </a:defRPr>
+    </a:lvl5pPr>
+    <a:lvl6pPr marL="2286000" algn="l" defTabSz="457200" rtl="0" eaLnBrk="1" latinLnBrk="0" hangingPunct="1">
+      <a:defRPr sz="1200" kern="1200">
+        <a:solidFill>
+          <a:schemeClr val="tx1"/>
+        </a:solidFill>
+        <a:latin typeface="+mn-lt"/>
+        <a:ea typeface="+mn-ea"/>
+        <a:cs typeface="+mn-cs"/>
+      </a:defRPr>
+    </a:lvl6pPr>
+    <a:lvl7pPr marL="2743200" algn="l" defTabSz="457200" rtl="0" eaLnBrk="1" latinLnBrk="0" hangingPunct="1">
+      <a:defRPr sz="1200" kern="1200">
+        <a:solidFill>
+          <a:schemeClr val="tx1"/>
+        </a:solidFill>
+        <a:latin typeface="+mn-lt"/>
+        <a:ea typeface="+mn-ea"/>
+        <a:cs typeface="+mn-cs"/>
+      </a:defRPr>
+    </a:lvl7pPr>
+    <a:lvl8pPr marL="3200400" algn="l" defTabSz="457200" rtl="0" eaLnBrk="1" latinLnBrk="0" hangingPunct="1">
+      <a:defRPr sz="1200" kern="1200">
+        <a:solidFill>
+          <a:schemeClr val="tx1"/>
+        </a:solidFill>
+        <a:latin typeface="+mn-lt"/>
+        <a:ea typeface="+mn-ea"/>
+        <a:cs typeface="+mn-cs"/>
+      </a:defRPr>
+    </a:lvl8pPr>
+    <a:lvl9pPr marL="3657600" algn="l" defTabSz="457200" rtl="0" eaLnBrk="1" latinLnBrk="0" hangingPunct="1">
+      <a:defRPr sz="1200" kern="1200">
+        <a:solidFill>
+          <a:schemeClr val="tx1"/>
+        </a:solidFill>
+        <a:latin typeface="+mn-lt"/>
+        <a:ea typeface="+mn-ea"/>
+        <a:cs typeface="+mn-cs"/>
+      </a:defRPr>
+    </a:lvl9pPr>
+  </p:notesStyle>
+</p:notesMaster>
+</file>
+
+<file path=ppt/notesSlides/notesSlide1.xml><?xml version="1.0" encoding="utf-8"?>
+<p:notes xmlns:a="http://schemas.openxmlformats.org/drawingml/2006/main" xmlns:p="http://schemas.openxmlformats.org/presentationml/2006/main" xmlns:r="http://schemas.openxmlformats.org/officeDocument/2006/relationships">
+  <p:cSld>
+    <p:spTree>
+      <p:nvGrpSpPr>
+        <p:cNvPr id="1" name=""/>
+        <p:cNvGrpSpPr/>
+        <p:nvPr/>
+      </p:nvGrpSpPr>
+      <p:grpSpPr>
+        <a:xfrm>
+          <a:off x="0" y="0"/>
+          <a:ext cx="0" cy="0"/>
+          <a:chOff x="0" y="0"/>
+          <a:chExt cx="0" cy="0"/>
+        </a:xfrm>
+      </p:grpSpPr>
+      <p:sp>
+        <p:nvSpPr>
+          <p:cNvPr id="2" name="Slide Image Placeholder 1"/>
+          <p:cNvSpPr>
+            <a:spLocks noGrp="1"/>
+          </p:cNvSpPr>
+          <p:nvPr>
+            <p:ph type="sldImg" idx="2"/>
+          </p:nvPr>
+        </p:nvSpPr>
+        <p:spPr/>
+      </p:sp>
+      <p:sp>
+        <p:nvSpPr>
+          <p:cNvPr id="3" name="Notes Placeholder 2"/>
+          <p:cNvSpPr>
+            <a:spLocks noGrp="1"/>
+          </p:cNvSpPr>
+          <p:nvPr>
+            <p:ph type="body" idx="3" sz="quarter"/>
+          </p:nvPr>
+        </p:nvSpPr>
+        <p:spPr/>
+        <p:txBody>
+          <a:bodyPr/>
+          <a:lstStyle/>
+          <a:p>
+            <a:r>
+              <a:t>| Criteria | Layered | Microservices | Event-Driven | Hexagonal |</a:t>
+            </a:r>
+          </a:p>
+          <a:p>
+            <a:r>
+              <a:t>|----------|---------|---------------|---------------|-----------|</a:t>
+            </a:r>
+          </a:p>
+          <a:p>
+            <a:r>
+              <a:t>| **Team Size** | 1-5 | 5+ | 3-8 | 2-6 |</a:t>
+            </a:r>
+          </a:p>
+        </p:txBody>
+      </p:sp>
+      <p:sp>
+        <p:nvSpPr>
+          <p:cNvPr id="4" name="Slide Number Placeholder 3"/>
+          <p:cNvSpPr>
+            <a:spLocks noGrp="1"/>
+          </p:cNvSpPr>
+          <p:nvPr>
+            <p:ph type="sldNum" idx="5" sz="quarter"/>
+          </p:nvPr>
+        </p:nvSpPr>
+        <p:spPr/>
+      </p:sp>
+    </p:spTree>
+  </p:cSld>
+  <p:clrMapOvr>
+    <a:masterClrMapping/>
+  </p:clrMapOvr>
+</p:notes>
+</file>
+
+<file path=ppt/notesSlides/notesSlide10.xml><?xml version="1.0" encoding="utf-8"?>
+<p:notes xmlns:a="http://schemas.openxmlformats.org/drawingml/2006/main" xmlns:p="http://schemas.openxmlformats.org/presentationml/2006/main" xmlns:r="http://schemas.openxmlformats.org/officeDocument/2006/relationships">
+  <p:cSld>
+    <p:spTree>
+      <p:nvGrpSpPr>
+        <p:cNvPr id="1" name=""/>
+        <p:cNvGrpSpPr/>
+        <p:nvPr/>
+      </p:nvGrpSpPr>
+      <p:grpSpPr>
+        <a:xfrm>
+          <a:off x="0" y="0"/>
+          <a:ext cx="0" cy="0"/>
+          <a:chOff x="0" y="0"/>
+          <a:chExt cx="0" cy="0"/>
+        </a:xfrm>
+      </p:grpSpPr>
+      <p:sp>
+        <p:nvSpPr>
+          <p:cNvPr id="2" name="Slide Image Placeholder 1"/>
+          <p:cNvSpPr>
+            <a:spLocks noGrp="1"/>
+          </p:cNvSpPr>
+          <p:nvPr>
+            <p:ph type="sldImg" idx="2"/>
+          </p:nvPr>
+        </p:nvSpPr>
+        <p:spPr/>
+      </p:sp>
+      <p:sp>
+        <p:nvSpPr>
+          <p:cNvPr id="3" name="Notes Placeholder 2"/>
+          <p:cNvSpPr>
+            <a:spLocks noGrp="1"/>
+          </p:cNvSpPr>
+          <p:nvPr>
+            <p:ph type="body" idx="3" sz="quarter"/>
+          </p:nvPr>
+        </p:nvSpPr>
+        <p:spPr/>
+        <p:txBody>
+          <a:bodyPr/>
+          <a:lstStyle/>
+          <a:p>
+            <a:r>
+              <a:t>| Criteria | Layered | Microservices | Event-Driven | Hexagonal |</a:t>
+            </a:r>
+          </a:p>
+          <a:p>
+            <a:r>
+              <a:t>|----------|---------|---------------|---------------|-----------|</a:t>
+            </a:r>
+          </a:p>
+          <a:p>
+            <a:r>
+              <a:t>| **Team Size** | 1-5 | 5+ | 3-8 | 2-6 |</a:t>
+            </a:r>
+          </a:p>
+        </p:txBody>
+      </p:sp>
+      <p:sp>
+        <p:nvSpPr>
+          <p:cNvPr id="4" name="Slide Number Placeholder 3"/>
+          <p:cNvSpPr>
+            <a:spLocks noGrp="1"/>
+          </p:cNvSpPr>
+          <p:nvPr>
+            <p:ph type="sldNum" idx="5" sz="quarter"/>
+          </p:nvPr>
+        </p:nvSpPr>
+        <p:spPr/>
+      </p:sp>
+    </p:spTree>
+  </p:cSld>
+  <p:clrMapOvr>
+    <a:masterClrMapping/>
+  </p:clrMapOvr>
+</p:notes>
+</file>
+
+<file path=ppt/notesSlides/notesSlide11.xml><?xml version="1.0" encoding="utf-8"?>
+<p:notes xmlns:a="http://schemas.openxmlformats.org/drawingml/2006/main" xmlns:p="http://schemas.openxmlformats.org/presentationml/2006/main" xmlns:r="http://schemas.openxmlformats.org/officeDocument/2006/relationships">
+  <p:cSld>
+    <p:spTree>
+      <p:nvGrpSpPr>
+        <p:cNvPr id="1" name=""/>
+        <p:cNvGrpSpPr/>
+        <p:nvPr/>
+      </p:nvGrpSpPr>
+      <p:grpSpPr>
+        <a:xfrm>
+          <a:off x="0" y="0"/>
+          <a:ext cx="0" cy="0"/>
+          <a:chOff x="0" y="0"/>
+          <a:chExt cx="0" cy="0"/>
+        </a:xfrm>
+      </p:grpSpPr>
+      <p:sp>
+        <p:nvSpPr>
+          <p:cNvPr id="2" name="Slide Image Placeholder 1"/>
+          <p:cNvSpPr>
+            <a:spLocks noGrp="1"/>
+          </p:cNvSpPr>
+          <p:nvPr>
+            <p:ph type="sldImg" idx="2"/>
+          </p:nvPr>
+        </p:nvSpPr>
+        <p:spPr/>
+      </p:sp>
+      <p:sp>
+        <p:nvSpPr>
+          <p:cNvPr id="3" name="Notes Placeholder 2"/>
+          <p:cNvSpPr>
+            <a:spLocks noGrp="1"/>
+          </p:cNvSpPr>
+          <p:nvPr>
+            <p:ph type="body" idx="3" sz="quarter"/>
+          </p:nvPr>
+        </p:nvSpPr>
+        <p:spPr/>
+        <p:txBody>
+          <a:bodyPr/>
+          <a:lstStyle/>
+          <a:p>
+            <a:r>
+              <a:t>| Criteria | Layered | Microservices | Event-Driven | Hexagonal |</a:t>
+            </a:r>
+          </a:p>
+          <a:p>
+            <a:r>
+              <a:t>|----------|---------|---------------|---------------|-----------|</a:t>
+            </a:r>
+          </a:p>
+          <a:p>
+            <a:r>
+              <a:t>| **Team Size** | 1-5 | 5+ | 3-8 | 2-6 |</a:t>
+            </a:r>
+          </a:p>
+        </p:txBody>
+      </p:sp>
+      <p:sp>
+        <p:nvSpPr>
+          <p:cNvPr id="4" name="Slide Number Placeholder 3"/>
+          <p:cNvSpPr>
+            <a:spLocks noGrp="1"/>
+          </p:cNvSpPr>
+          <p:nvPr>
+            <p:ph type="sldNum" idx="5" sz="quarter"/>
+          </p:nvPr>
+        </p:nvSpPr>
+        <p:spPr/>
+      </p:sp>
+    </p:spTree>
+  </p:cSld>
+  <p:clrMapOvr>
+    <a:masterClrMapping/>
+  </p:clrMapOvr>
+</p:notes>
+</file>
+
+<file path=ppt/notesSlides/notesSlide12.xml><?xml version="1.0" encoding="utf-8"?>
+<p:notes xmlns:a="http://schemas.openxmlformats.org/drawingml/2006/main" xmlns:p="http://schemas.openxmlformats.org/presentationml/2006/main" xmlns:r="http://schemas.openxmlformats.org/officeDocument/2006/relationships">
+  <p:cSld>
+    <p:spTree>
+      <p:nvGrpSpPr>
+        <p:cNvPr id="1" name=""/>
+        <p:cNvGrpSpPr/>
+        <p:nvPr/>
+      </p:nvGrpSpPr>
+      <p:grpSpPr>
+        <a:xfrm>
+          <a:off x="0" y="0"/>
+          <a:ext cx="0" cy="0"/>
+          <a:chOff x="0" y="0"/>
+          <a:chExt cx="0" cy="0"/>
+        </a:xfrm>
+      </p:grpSpPr>
+      <p:sp>
+        <p:nvSpPr>
+          <p:cNvPr id="2" name="Slide Image Placeholder 1"/>
+          <p:cNvSpPr>
+            <a:spLocks noGrp="1"/>
+          </p:cNvSpPr>
+          <p:nvPr>
+            <p:ph type="sldImg" idx="2"/>
+          </p:nvPr>
+        </p:nvSpPr>
+        <p:spPr/>
+      </p:sp>
+      <p:sp>
+        <p:nvSpPr>
+          <p:cNvPr id="3" name="Notes Placeholder 2"/>
+          <p:cNvSpPr>
+            <a:spLocks noGrp="1"/>
+          </p:cNvSpPr>
+          <p:nvPr>
+            <p:ph type="body" idx="3" sz="quarter"/>
+          </p:nvPr>
+        </p:nvSpPr>
+        <p:spPr/>
+        <p:txBody>
+          <a:bodyPr/>
+          <a:lstStyle/>
+          <a:p>
+            <a:r>
+              <a:t>| Criteria | Layered | Microservices | Event-Driven | Hexagonal |</a:t>
+            </a:r>
+          </a:p>
+          <a:p>
+            <a:r>
+              <a:t>|----------|---------|---------------|---------------|-----------|</a:t>
+            </a:r>
+          </a:p>
+          <a:p>
+            <a:r>
+              <a:t>| **Team Size** | 1-5 | 5+ | 3-8 | 2-6 |</a:t>
+            </a:r>
+          </a:p>
+        </p:txBody>
+      </p:sp>
+      <p:sp>
+        <p:nvSpPr>
+          <p:cNvPr id="4" name="Slide Number Placeholder 3"/>
+          <p:cNvSpPr>
+            <a:spLocks noGrp="1"/>
+          </p:cNvSpPr>
+          <p:nvPr>
+            <p:ph type="sldNum" idx="5" sz="quarter"/>
+          </p:nvPr>
+        </p:nvSpPr>
+        <p:spPr/>
+      </p:sp>
+    </p:spTree>
+  </p:cSld>
+  <p:clrMapOvr>
+    <a:masterClrMapping/>
+  </p:clrMapOvr>
+</p:notes>
+</file>
+
+<file path=ppt/notesSlides/notesSlide13.xml><?xml version="1.0" encoding="utf-8"?>
+<p:notes xmlns:a="http://schemas.openxmlformats.org/drawingml/2006/main" xmlns:p="http://schemas.openxmlformats.org/presentationml/2006/main" xmlns:r="http://schemas.openxmlformats.org/officeDocument/2006/relationships">
+  <p:cSld>
+    <p:spTree>
+      <p:nvGrpSpPr>
+        <p:cNvPr id="1" name=""/>
+        <p:cNvGrpSpPr/>
+        <p:nvPr/>
+      </p:nvGrpSpPr>
+      <p:grpSpPr>
+        <a:xfrm>
+          <a:off x="0" y="0"/>
+          <a:ext cx="0" cy="0"/>
+          <a:chOff x="0" y="0"/>
+          <a:chExt cx="0" cy="0"/>
+        </a:xfrm>
+      </p:grpSpPr>
+      <p:sp>
+        <p:nvSpPr>
+          <p:cNvPr id="2" name="Slide Image Placeholder 1"/>
+          <p:cNvSpPr>
+            <a:spLocks noGrp="1"/>
+          </p:cNvSpPr>
+          <p:nvPr>
+            <p:ph type="sldImg" idx="2"/>
+          </p:nvPr>
+        </p:nvSpPr>
+        <p:spPr/>
+      </p:sp>
+      <p:sp>
+        <p:nvSpPr>
+          <p:cNvPr id="3" name="Notes Placeholder 2"/>
+          <p:cNvSpPr>
+            <a:spLocks noGrp="1"/>
+          </p:cNvSpPr>
+          <p:nvPr>
+            <p:ph type="body" idx="3" sz="quarter"/>
+          </p:nvPr>
+        </p:nvSpPr>
+        <p:spPr/>
+        <p:txBody>
+          <a:bodyPr/>
+          <a:lstStyle/>
+          <a:p>
+            <a:r>
+              <a:t>| Criteria | Layered | Microservices | Event-Driven | Hexagonal |</a:t>
+            </a:r>
+          </a:p>
+          <a:p>
+            <a:r>
+              <a:t>|----------|---------|---------------|---------------|-----------|</a:t>
+            </a:r>
+          </a:p>
+          <a:p>
+            <a:r>
+              <a:t>| **Team Size** | 1-5 | 5+ | 3-8 | 2-6 |</a:t>
+            </a:r>
+          </a:p>
+        </p:txBody>
+      </p:sp>
+      <p:sp>
+        <p:nvSpPr>
+          <p:cNvPr id="4" name="Slide Number Placeholder 3"/>
+          <p:cNvSpPr>
+            <a:spLocks noGrp="1"/>
+          </p:cNvSpPr>
+          <p:nvPr>
+            <p:ph type="sldNum" idx="5" sz="quarter"/>
+          </p:nvPr>
+        </p:nvSpPr>
+        <p:spPr/>
+      </p:sp>
+    </p:spTree>
+  </p:cSld>
+  <p:clrMapOvr>
+    <a:masterClrMapping/>
+  </p:clrMapOvr>
+</p:notes>
+</file>
+
+<file path=ppt/notesSlides/notesSlide14.xml><?xml version="1.0" encoding="utf-8"?>
+<p:notes xmlns:a="http://schemas.openxmlformats.org/drawingml/2006/main" xmlns:p="http://schemas.openxmlformats.org/presentationml/2006/main" xmlns:r="http://schemas.openxmlformats.org/officeDocument/2006/relationships">
+  <p:cSld>
+    <p:spTree>
+      <p:nvGrpSpPr>
+        <p:cNvPr id="1" name=""/>
+        <p:cNvGrpSpPr/>
+        <p:nvPr/>
+      </p:nvGrpSpPr>
+      <p:grpSpPr>
+        <a:xfrm>
+          <a:off x="0" y="0"/>
+          <a:ext cx="0" cy="0"/>
+          <a:chOff x="0" y="0"/>
+          <a:chExt cx="0" cy="0"/>
+        </a:xfrm>
+      </p:grpSpPr>
+      <p:sp>
+        <p:nvSpPr>
+          <p:cNvPr id="2" name="Slide Image Placeholder 1"/>
+          <p:cNvSpPr>
+            <a:spLocks noGrp="1"/>
+          </p:cNvSpPr>
+          <p:nvPr>
+            <p:ph type="sldImg" idx="2"/>
+          </p:nvPr>
+        </p:nvSpPr>
+        <p:spPr/>
+      </p:sp>
+      <p:sp>
+        <p:nvSpPr>
+          <p:cNvPr id="3" name="Notes Placeholder 2"/>
+          <p:cNvSpPr>
+            <a:spLocks noGrp="1"/>
+          </p:cNvSpPr>
+          <p:nvPr>
+            <p:ph type="body" idx="3" sz="quarter"/>
+          </p:nvPr>
+        </p:nvSpPr>
+        <p:spPr/>
+        <p:txBody>
+          <a:bodyPr/>
+          <a:lstStyle/>
+          <a:p>
+            <a:r>
+              <a:t>| Criteria | Layered | Microservices | Event-Driven | Hexagonal |</a:t>
+            </a:r>
+          </a:p>
+          <a:p>
+            <a:r>
+              <a:t>|----------|---------|---------------|---------------|-----------|</a:t>
+            </a:r>
+          </a:p>
+          <a:p>
+            <a:r>
+              <a:t>| **Team Size** | 1-5 | 5+ | 3-8 | 2-6 |</a:t>
+            </a:r>
+          </a:p>
+        </p:txBody>
+      </p:sp>
+      <p:sp>
+        <p:nvSpPr>
+          <p:cNvPr id="4" name="Slide Number Placeholder 3"/>
+          <p:cNvSpPr>
+            <a:spLocks noGrp="1"/>
+          </p:cNvSpPr>
+          <p:nvPr>
+            <p:ph type="sldNum" idx="5" sz="quarter"/>
+          </p:nvPr>
+        </p:nvSpPr>
+        <p:spPr/>
+      </p:sp>
+    </p:spTree>
+  </p:cSld>
+  <p:clrMapOvr>
+    <a:masterClrMapping/>
+  </p:clrMapOvr>
+</p:notes>
+</file>
+
+<file path=ppt/notesSlides/notesSlide15.xml><?xml version="1.0" encoding="utf-8"?>
+<p:notes xmlns:a="http://schemas.openxmlformats.org/drawingml/2006/main" xmlns:p="http://schemas.openxmlformats.org/presentationml/2006/main" xmlns:r="http://schemas.openxmlformats.org/officeDocument/2006/relationships">
+  <p:cSld>
+    <p:spTree>
+      <p:nvGrpSpPr>
+        <p:cNvPr id="1" name=""/>
+        <p:cNvGrpSpPr/>
+        <p:nvPr/>
+      </p:nvGrpSpPr>
+      <p:grpSpPr>
+        <a:xfrm>
+          <a:off x="0" y="0"/>
+          <a:ext cx="0" cy="0"/>
+          <a:chOff x="0" y="0"/>
+          <a:chExt cx="0" cy="0"/>
+        </a:xfrm>
+      </p:grpSpPr>
+      <p:sp>
+        <p:nvSpPr>
+          <p:cNvPr id="2" name="Slide Image Placeholder 1"/>
+          <p:cNvSpPr>
+            <a:spLocks noGrp="1"/>
+          </p:cNvSpPr>
+          <p:nvPr>
+            <p:ph type="sldImg" idx="2"/>
+          </p:nvPr>
+        </p:nvSpPr>
+        <p:spPr/>
+      </p:sp>
+      <p:sp>
+        <p:nvSpPr>
+          <p:cNvPr id="3" name="Notes Placeholder 2"/>
+          <p:cNvSpPr>
+            <a:spLocks noGrp="1"/>
+          </p:cNvSpPr>
+          <p:nvPr>
+            <p:ph type="body" idx="3" sz="quarter"/>
+          </p:nvPr>
+        </p:nvSpPr>
+        <p:spPr/>
+        <p:txBody>
+          <a:bodyPr/>
+          <a:lstStyle/>
+          <a:p>
+            <a:r>
+              <a:t>| Criteria | Layered | Microservices | Event-Driven | Hexagonal |</a:t>
+            </a:r>
+          </a:p>
+          <a:p>
+            <a:r>
+              <a:t>|----------|---------|---------------|---------------|-----------|</a:t>
+            </a:r>
+          </a:p>
+          <a:p>
+            <a:r>
+              <a:t>| **Team Size** | 1-5 | 5+ | 3-8 | 2-6 |</a:t>
+            </a:r>
+          </a:p>
+        </p:txBody>
+      </p:sp>
+      <p:sp>
+        <p:nvSpPr>
+          <p:cNvPr id="4" name="Slide Number Placeholder 3"/>
+          <p:cNvSpPr>
+            <a:spLocks noGrp="1"/>
+          </p:cNvSpPr>
+          <p:nvPr>
+            <p:ph type="sldNum" idx="5" sz="quarter"/>
+          </p:nvPr>
+        </p:nvSpPr>
+        <p:spPr/>
+      </p:sp>
+    </p:spTree>
+  </p:cSld>
+  <p:clrMapOvr>
+    <a:masterClrMapping/>
+  </p:clrMapOvr>
+</p:notes>
+</file>
+
+<file path=ppt/notesSlides/notesSlide16.xml><?xml version="1.0" encoding="utf-8"?>
+<p:notes xmlns:a="http://schemas.openxmlformats.org/drawingml/2006/main" xmlns:p="http://schemas.openxmlformats.org/presentationml/2006/main" xmlns:r="http://schemas.openxmlformats.org/officeDocument/2006/relationships">
+  <p:cSld>
+    <p:spTree>
+      <p:nvGrpSpPr>
+        <p:cNvPr id="1" name=""/>
+        <p:cNvGrpSpPr/>
+        <p:nvPr/>
+      </p:nvGrpSpPr>
+      <p:grpSpPr>
+        <a:xfrm>
+          <a:off x="0" y="0"/>
+          <a:ext cx="0" cy="0"/>
+          <a:chOff x="0" y="0"/>
+          <a:chExt cx="0" cy="0"/>
+        </a:xfrm>
+      </p:grpSpPr>
+      <p:sp>
+        <p:nvSpPr>
+          <p:cNvPr id="2" name="Slide Image Placeholder 1"/>
+          <p:cNvSpPr>
+            <a:spLocks noGrp="1"/>
+          </p:cNvSpPr>
+          <p:nvPr>
+            <p:ph type="sldImg" idx="2"/>
+          </p:nvPr>
+        </p:nvSpPr>
+        <p:spPr/>
+      </p:sp>
+      <p:sp>
+        <p:nvSpPr>
+          <p:cNvPr id="3" name="Notes Placeholder 2"/>
+          <p:cNvSpPr>
+            <a:spLocks noGrp="1"/>
+          </p:cNvSpPr>
+          <p:nvPr>
+            <p:ph type="body" idx="3" sz="quarter"/>
+          </p:nvPr>
+        </p:nvSpPr>
+        <p:spPr/>
+        <p:txBody>
+          <a:bodyPr/>
+          <a:lstStyle/>
+          <a:p>
+            <a:r>
+              <a:t>| Criteria | Layered | Microservices | Event-Driven | Hexagonal |</a:t>
+            </a:r>
+          </a:p>
+          <a:p>
+            <a:r>
+              <a:t>|----------|---------|---------------|---------------|-----------|</a:t>
+            </a:r>
+          </a:p>
+          <a:p>
+            <a:r>
+              <a:t>| **Team Size** | 1-5 | 5+ | 3-8 | 2-6 |</a:t>
+            </a:r>
+          </a:p>
+        </p:txBody>
+      </p:sp>
+      <p:sp>
+        <p:nvSpPr>
+          <p:cNvPr id="4" name="Slide Number Placeholder 3"/>
+          <p:cNvSpPr>
+            <a:spLocks noGrp="1"/>
+          </p:cNvSpPr>
+          <p:nvPr>
+            <p:ph type="sldNum" idx="5" sz="quarter"/>
+          </p:nvPr>
+        </p:nvSpPr>
+        <p:spPr/>
+      </p:sp>
+    </p:spTree>
+  </p:cSld>
+  <p:clrMapOvr>
+    <a:masterClrMapping/>
+  </p:clrMapOvr>
+</p:notes>
+</file>
+
+<file path=ppt/notesSlides/notesSlide17.xml><?xml version="1.0" encoding="utf-8"?>
+<p:notes xmlns:a="http://schemas.openxmlformats.org/drawingml/2006/main" xmlns:p="http://schemas.openxmlformats.org/presentationml/2006/main" xmlns:r="http://schemas.openxmlformats.org/officeDocument/2006/relationships">
+  <p:cSld>
+    <p:spTree>
+      <p:nvGrpSpPr>
+        <p:cNvPr id="1" name=""/>
+        <p:cNvGrpSpPr/>
+        <p:nvPr/>
+      </p:nvGrpSpPr>
+      <p:grpSpPr>
+        <a:xfrm>
+          <a:off x="0" y="0"/>
+          <a:ext cx="0" cy="0"/>
+          <a:chOff x="0" y="0"/>
+          <a:chExt cx="0" cy="0"/>
+        </a:xfrm>
+      </p:grpSpPr>
+      <p:sp>
+        <p:nvSpPr>
+          <p:cNvPr id="2" name="Slide Image Placeholder 1"/>
+          <p:cNvSpPr>
+            <a:spLocks noGrp="1"/>
+          </p:cNvSpPr>
+          <p:nvPr>
+            <p:ph type="sldImg" idx="2"/>
+          </p:nvPr>
+        </p:nvSpPr>
+        <p:spPr/>
+      </p:sp>
+      <p:sp>
+        <p:nvSpPr>
+          <p:cNvPr id="3" name="Notes Placeholder 2"/>
+          <p:cNvSpPr>
+            <a:spLocks noGrp="1"/>
+          </p:cNvSpPr>
+          <p:nvPr>
+            <p:ph type="body" idx="3" sz="quarter"/>
+          </p:nvPr>
+        </p:nvSpPr>
+        <p:spPr/>
+        <p:txBody>
+          <a:bodyPr/>
+          <a:lstStyle/>
+          <a:p>
+            <a:r>
+              <a:t>| Criteria | Layered | Microservices | Event-Driven | Hexagonal |</a:t>
+            </a:r>
+          </a:p>
+          <a:p>
+            <a:r>
+              <a:t>|----------|---------|---------------|---------------|-----------|</a:t>
+            </a:r>
+          </a:p>
+          <a:p>
+            <a:r>
+              <a:t>| **Team Size** | 1-5 | 5+ | 3-8 | 2-6 |</a:t>
+            </a:r>
+          </a:p>
+        </p:txBody>
+      </p:sp>
+      <p:sp>
+        <p:nvSpPr>
+          <p:cNvPr id="4" name="Slide Number Placeholder 3"/>
+          <p:cNvSpPr>
+            <a:spLocks noGrp="1"/>
+          </p:cNvSpPr>
+          <p:nvPr>
+            <p:ph type="sldNum" idx="5" sz="quarter"/>
+          </p:nvPr>
+        </p:nvSpPr>
+        <p:spPr/>
+      </p:sp>
+    </p:spTree>
+  </p:cSld>
+  <p:clrMapOvr>
+    <a:masterClrMapping/>
+  </p:clrMapOvr>
+</p:notes>
+</file>
+
+<file path=ppt/notesSlides/notesSlide18.xml><?xml version="1.0" encoding="utf-8"?>
+<p:notes xmlns:a="http://schemas.openxmlformats.org/drawingml/2006/main" xmlns:p="http://schemas.openxmlformats.org/presentationml/2006/main" xmlns:r="http://schemas.openxmlformats.org/officeDocument/2006/relationships">
+  <p:cSld>
+    <p:spTree>
+      <p:nvGrpSpPr>
+        <p:cNvPr id="1" name=""/>
+        <p:cNvGrpSpPr/>
+        <p:nvPr/>
+      </p:nvGrpSpPr>
+      <p:grpSpPr>
+        <a:xfrm>
+          <a:off x="0" y="0"/>
+          <a:ext cx="0" cy="0"/>
+          <a:chOff x="0" y="0"/>
+          <a:chExt cx="0" cy="0"/>
+        </a:xfrm>
+      </p:grpSpPr>
+      <p:sp>
+        <p:nvSpPr>
+          <p:cNvPr id="2" name="Slide Image Placeholder 1"/>
+          <p:cNvSpPr>
+            <a:spLocks noGrp="1"/>
+          </p:cNvSpPr>
+          <p:nvPr>
+            <p:ph type="sldImg" idx="2"/>
+          </p:nvPr>
+        </p:nvSpPr>
+        <p:spPr/>
+      </p:sp>
+      <p:sp>
+        <p:nvSpPr>
+          <p:cNvPr id="3" name="Notes Placeholder 2"/>
+          <p:cNvSpPr>
+            <a:spLocks noGrp="1"/>
+          </p:cNvSpPr>
+          <p:nvPr>
+            <p:ph type="body" idx="3" sz="quarter"/>
+          </p:nvPr>
+        </p:nvSpPr>
+        <p:spPr/>
+        <p:txBody>
+          <a:bodyPr/>
+          <a:lstStyle/>
+          <a:p>
+            <a:r>
+              <a:t>| Criteria | Layered | Microservices | Event-Driven | Hexagonal |</a:t>
+            </a:r>
+          </a:p>
+          <a:p>
+            <a:r>
+              <a:t>|----------|---------|---------------|---------------|-----------|</a:t>
+            </a:r>
+          </a:p>
+          <a:p>
+            <a:r>
+              <a:t>| **Team Size** | 1-5 | 5+ | 3-8 | 2-6 |</a:t>
+            </a:r>
+          </a:p>
+        </p:txBody>
+      </p:sp>
+      <p:sp>
+        <p:nvSpPr>
+          <p:cNvPr id="4" name="Slide Number Placeholder 3"/>
+          <p:cNvSpPr>
+            <a:spLocks noGrp="1"/>
+          </p:cNvSpPr>
+          <p:nvPr>
+            <p:ph type="sldNum" idx="5" sz="quarter"/>
+          </p:nvPr>
+        </p:nvSpPr>
+        <p:spPr/>
+      </p:sp>
+    </p:spTree>
+  </p:cSld>
+  <p:clrMapOvr>
+    <a:masterClrMapping/>
+  </p:clrMapOvr>
+</p:notes>
+</file>
+
+<file path=ppt/notesSlides/notesSlide2.xml><?xml version="1.0" encoding="utf-8"?>
+<p:notes xmlns:a="http://schemas.openxmlformats.org/drawingml/2006/main" xmlns:p="http://schemas.openxmlformats.org/presentationml/2006/main" xmlns:r="http://schemas.openxmlformats.org/officeDocument/2006/relationships">
+  <p:cSld>
+    <p:spTree>
+      <p:nvGrpSpPr>
+        <p:cNvPr id="1" name=""/>
+        <p:cNvGrpSpPr/>
+        <p:nvPr/>
+      </p:nvGrpSpPr>
+      <p:grpSpPr>
+        <a:xfrm>
+          <a:off x="0" y="0"/>
+          <a:ext cx="0" cy="0"/>
+          <a:chOff x="0" y="0"/>
+          <a:chExt cx="0" cy="0"/>
+        </a:xfrm>
+      </p:grpSpPr>
+      <p:sp>
+        <p:nvSpPr>
+          <p:cNvPr id="2" name="Slide Image Placeholder 1"/>
+          <p:cNvSpPr>
+            <a:spLocks noGrp="1"/>
+          </p:cNvSpPr>
+          <p:nvPr>
+            <p:ph type="sldImg" idx="2"/>
+          </p:nvPr>
+        </p:nvSpPr>
+        <p:spPr/>
+      </p:sp>
+      <p:sp>
+        <p:nvSpPr>
+          <p:cNvPr id="3" name="Notes Placeholder 2"/>
+          <p:cNvSpPr>
+            <a:spLocks noGrp="1"/>
+          </p:cNvSpPr>
+          <p:nvPr>
+            <p:ph type="body" idx="3" sz="quarter"/>
+          </p:nvPr>
+        </p:nvSpPr>
+        <p:spPr/>
+        <p:txBody>
+          <a:bodyPr/>
+          <a:lstStyle/>
+          <a:p>
+            <a:r>
+              <a:t>Layered Architecture        N-Tier Architecture        Clean Architecture</a:t>
+            </a:r>
+          </a:p>
+          <a:p>
+            <a:r>
+              <a:t>┌─────────────────┐        ┌─────────────────┐        ┌─────────────────┐</a:t>
+            </a:r>
+          </a:p>
+          <a:p>
+            <a:r>
+              <a:t>│   Presentation  │        │   Client Tier   │        │   Frameworks    │</a:t>
+            </a:r>
+          </a:p>
+        </p:txBody>
+      </p:sp>
+      <p:sp>
+        <p:nvSpPr>
+          <p:cNvPr id="4" name="Slide Number Placeholder 3"/>
+          <p:cNvSpPr>
+            <a:spLocks noGrp="1"/>
+          </p:cNvSpPr>
+          <p:nvPr>
+            <p:ph type="sldNum" idx="5" sz="quarter"/>
+          </p:nvPr>
+        </p:nvSpPr>
+        <p:spPr/>
+      </p:sp>
+    </p:spTree>
+  </p:cSld>
+  <p:clrMapOvr>
+    <a:masterClrMapping/>
+  </p:clrMapOvr>
+</p:notes>
+</file>
+
+<file path=ppt/notesSlides/notesSlide3.xml><?xml version="1.0" encoding="utf-8"?>
+<p:notes xmlns:a="http://schemas.openxmlformats.org/drawingml/2006/main" xmlns:p="http://schemas.openxmlformats.org/presentationml/2006/main" xmlns:r="http://schemas.openxmlformats.org/officeDocument/2006/relationships">
+  <p:cSld>
+    <p:spTree>
+      <p:nvGrpSpPr>
+        <p:cNvPr id="1" name=""/>
+        <p:cNvGrpSpPr/>
+        <p:nvPr/>
+      </p:nvGrpSpPr>
+      <p:grpSpPr>
+        <a:xfrm>
+          <a:off x="0" y="0"/>
+          <a:ext cx="0" cy="0"/>
+          <a:chOff x="0" y="0"/>
+          <a:chExt cx="0" cy="0"/>
+        </a:xfrm>
+      </p:grpSpPr>
+      <p:sp>
+        <p:nvSpPr>
+          <p:cNvPr id="2" name="Slide Image Placeholder 1"/>
+          <p:cNvSpPr>
+            <a:spLocks noGrp="1"/>
+          </p:cNvSpPr>
+          <p:nvPr>
+            <p:ph type="sldImg" idx="2"/>
+          </p:nvPr>
+        </p:nvSpPr>
+        <p:spPr/>
+      </p:sp>
+      <p:sp>
+        <p:nvSpPr>
+          <p:cNvPr id="3" name="Notes Placeholder 2"/>
+          <p:cNvSpPr>
+            <a:spLocks noGrp="1"/>
+          </p:cNvSpPr>
+          <p:nvPr>
+            <p:ph type="body" idx="3" sz="quarter"/>
+          </p:nvPr>
+        </p:nvSpPr>
+        <p:spPr/>
+        <p:txBody>
+          <a:bodyPr/>
+          <a:lstStyle/>
+          <a:p>
+            <a:r>
+              <a:t>| Criteria | Layered | Microservices | Event-Driven | Hexagonal |</a:t>
+            </a:r>
+          </a:p>
+          <a:p>
+            <a:r>
+              <a:t>|----------|---------|---------------|---------------|-----------|</a:t>
+            </a:r>
+          </a:p>
+          <a:p>
+            <a:r>
+              <a:t>| **Team Size** | 1-5 | 5+ | 3-8 | 2-6 |</a:t>
+            </a:r>
+          </a:p>
+        </p:txBody>
+      </p:sp>
+      <p:sp>
+        <p:nvSpPr>
+          <p:cNvPr id="4" name="Slide Number Placeholder 3"/>
+          <p:cNvSpPr>
+            <a:spLocks noGrp="1"/>
+          </p:cNvSpPr>
+          <p:nvPr>
+            <p:ph type="sldNum" idx="5" sz="quarter"/>
+          </p:nvPr>
+        </p:nvSpPr>
+        <p:spPr/>
+      </p:sp>
+    </p:spTree>
+  </p:cSld>
+  <p:clrMapOvr>
+    <a:masterClrMapping/>
+  </p:clrMapOvr>
+</p:notes>
+</file>
+
+<file path=ppt/notesSlides/notesSlide4.xml><?xml version="1.0" encoding="utf-8"?>
+<p:notes xmlns:a="http://schemas.openxmlformats.org/drawingml/2006/main" xmlns:p="http://schemas.openxmlformats.org/presentationml/2006/main" xmlns:r="http://schemas.openxmlformats.org/officeDocument/2006/relationships">
+  <p:cSld>
+    <p:spTree>
+      <p:nvGrpSpPr>
+        <p:cNvPr id="1" name=""/>
+        <p:cNvGrpSpPr/>
+        <p:nvPr/>
+      </p:nvGrpSpPr>
+      <p:grpSpPr>
+        <a:xfrm>
+          <a:off x="0" y="0"/>
+          <a:ext cx="0" cy="0"/>
+          <a:chOff x="0" y="0"/>
+          <a:chExt cx="0" cy="0"/>
+        </a:xfrm>
+      </p:grpSpPr>
+      <p:sp>
+        <p:nvSpPr>
+          <p:cNvPr id="2" name="Slide Image Placeholder 1"/>
+          <p:cNvSpPr>
+            <a:spLocks noGrp="1"/>
+          </p:cNvSpPr>
+          <p:nvPr>
+            <p:ph type="sldImg" idx="2"/>
+          </p:nvPr>
+        </p:nvSpPr>
+        <p:spPr/>
+      </p:sp>
+      <p:sp>
+        <p:nvSpPr>
+          <p:cNvPr id="3" name="Notes Placeholder 2"/>
+          <p:cNvSpPr>
+            <a:spLocks noGrp="1"/>
+          </p:cNvSpPr>
+          <p:nvPr>
+            <p:ph type="body" idx="3" sz="quarter"/>
+          </p:nvPr>
+        </p:nvSpPr>
+        <p:spPr/>
+        <p:txBody>
+          <a:bodyPr/>
+          <a:lstStyle/>
+          <a:p>
+            <a:r>
+              <a:t>| Criteria | Layered | Microservices | Event-Driven | Hexagonal |</a:t>
+            </a:r>
+          </a:p>
+          <a:p>
+            <a:r>
+              <a:t>|----------|---------|---------------|---------------|-----------|</a:t>
+            </a:r>
+          </a:p>
+          <a:p>
+            <a:r>
+              <a:t>| **Team Size** | 1-5 | 5+ | 3-8 | 2-6 |</a:t>
+            </a:r>
+          </a:p>
+        </p:txBody>
+      </p:sp>
+      <p:sp>
+        <p:nvSpPr>
+          <p:cNvPr id="4" name="Slide Number Placeholder 3"/>
+          <p:cNvSpPr>
+            <a:spLocks noGrp="1"/>
+          </p:cNvSpPr>
+          <p:nvPr>
+            <p:ph type="sldNum" idx="5" sz="quarter"/>
+          </p:nvPr>
+        </p:nvSpPr>
+        <p:spPr/>
+      </p:sp>
+    </p:spTree>
+  </p:cSld>
+  <p:clrMapOvr>
+    <a:masterClrMapping/>
+  </p:clrMapOvr>
+</p:notes>
+</file>
+
+<file path=ppt/notesSlides/notesSlide5.xml><?xml version="1.0" encoding="utf-8"?>
+<p:notes xmlns:a="http://schemas.openxmlformats.org/drawingml/2006/main" xmlns:p="http://schemas.openxmlformats.org/presentationml/2006/main" xmlns:r="http://schemas.openxmlformats.org/officeDocument/2006/relationships">
+  <p:cSld>
+    <p:spTree>
+      <p:nvGrpSpPr>
+        <p:cNvPr id="1" name=""/>
+        <p:cNvGrpSpPr/>
+        <p:nvPr/>
+      </p:nvGrpSpPr>
+      <p:grpSpPr>
+        <a:xfrm>
+          <a:off x="0" y="0"/>
+          <a:ext cx="0" cy="0"/>
+          <a:chOff x="0" y="0"/>
+          <a:chExt cx="0" cy="0"/>
+        </a:xfrm>
+      </p:grpSpPr>
+      <p:sp>
+        <p:nvSpPr>
+          <p:cNvPr id="2" name="Slide Image Placeholder 1"/>
+          <p:cNvSpPr>
+            <a:spLocks noGrp="1"/>
+          </p:cNvSpPr>
+          <p:nvPr>
+            <p:ph type="sldImg" idx="2"/>
+          </p:nvPr>
+        </p:nvSpPr>
+        <p:spPr/>
+      </p:sp>
+      <p:sp>
+        <p:nvSpPr>
+          <p:cNvPr id="3" name="Notes Placeholder 2"/>
+          <p:cNvSpPr>
+            <a:spLocks noGrp="1"/>
+          </p:cNvSpPr>
+          <p:nvPr>
+            <p:ph type="body" idx="3" sz="quarter"/>
+          </p:nvPr>
+        </p:nvSpPr>
+        <p:spPr/>
+        <p:txBody>
+          <a:bodyPr/>
+          <a:lstStyle/>
+          <a:p>
+            <a:r>
+              <a:t>| Criteria | Layered | Microservices | Event-Driven | Hexagonal |</a:t>
+            </a:r>
+          </a:p>
+          <a:p>
+            <a:r>
+              <a:t>|----------|---------|---------------|---------------|-----------|</a:t>
+            </a:r>
+          </a:p>
+          <a:p>
+            <a:r>
+              <a:t>| **Team Size** | 1-5 | 5+ | 3-8 | 2-6 |</a:t>
+            </a:r>
+          </a:p>
+        </p:txBody>
+      </p:sp>
+      <p:sp>
+        <p:nvSpPr>
+          <p:cNvPr id="4" name="Slide Number Placeholder 3"/>
+          <p:cNvSpPr>
+            <a:spLocks noGrp="1"/>
+          </p:cNvSpPr>
+          <p:nvPr>
+            <p:ph type="sldNum" idx="5" sz="quarter"/>
+          </p:nvPr>
+        </p:nvSpPr>
+        <p:spPr/>
+      </p:sp>
+    </p:spTree>
+  </p:cSld>
+  <p:clrMapOvr>
+    <a:masterClrMapping/>
+  </p:clrMapOvr>
+</p:notes>
+</file>
+
+<file path=ppt/notesSlides/notesSlide6.xml><?xml version="1.0" encoding="utf-8"?>
+<p:notes xmlns:a="http://schemas.openxmlformats.org/drawingml/2006/main" xmlns:p="http://schemas.openxmlformats.org/presentationml/2006/main" xmlns:r="http://schemas.openxmlformats.org/officeDocument/2006/relationships">
+  <p:cSld>
+    <p:spTree>
+      <p:nvGrpSpPr>
+        <p:cNvPr id="1" name=""/>
+        <p:cNvGrpSpPr/>
+        <p:nvPr/>
+      </p:nvGrpSpPr>
+      <p:grpSpPr>
+        <a:xfrm>
+          <a:off x="0" y="0"/>
+          <a:ext cx="0" cy="0"/>
+          <a:chOff x="0" y="0"/>
+          <a:chExt cx="0" cy="0"/>
+        </a:xfrm>
+      </p:grpSpPr>
+      <p:sp>
+        <p:nvSpPr>
+          <p:cNvPr id="2" name="Slide Image Placeholder 1"/>
+          <p:cNvSpPr>
+            <a:spLocks noGrp="1"/>
+          </p:cNvSpPr>
+          <p:nvPr>
+            <p:ph type="sldImg" idx="2"/>
+          </p:nvPr>
+        </p:nvSpPr>
+        <p:spPr/>
+      </p:sp>
+      <p:sp>
+        <p:nvSpPr>
+          <p:cNvPr id="3" name="Notes Placeholder 2"/>
+          <p:cNvSpPr>
+            <a:spLocks noGrp="1"/>
+          </p:cNvSpPr>
+          <p:nvPr>
+            <p:ph type="body" idx="3" sz="quarter"/>
+          </p:nvPr>
+        </p:nvSpPr>
+        <p:spPr/>
+        <p:txBody>
+          <a:bodyPr/>
+          <a:lstStyle/>
+          <a:p>
+            <a:r>
+              <a:t>| Criteria | Layered | Microservices | Event-Driven | Hexagonal |</a:t>
+            </a:r>
+          </a:p>
+          <a:p>
+            <a:r>
+              <a:t>|----------|---------|---------------|---------------|-----------|</a:t>
+            </a:r>
+          </a:p>
+          <a:p>
+            <a:r>
+              <a:t>| **Team Size** | 1-5 | 5+ | 3-8 | 2-6 |</a:t>
+            </a:r>
+          </a:p>
+        </p:txBody>
+      </p:sp>
+      <p:sp>
+        <p:nvSpPr>
+          <p:cNvPr id="4" name="Slide Number Placeholder 3"/>
+          <p:cNvSpPr>
+            <a:spLocks noGrp="1"/>
+          </p:cNvSpPr>
+          <p:nvPr>
+            <p:ph type="sldNum" idx="5" sz="quarter"/>
+          </p:nvPr>
+        </p:nvSpPr>
+        <p:spPr/>
+      </p:sp>
+    </p:spTree>
+  </p:cSld>
+  <p:clrMapOvr>
+    <a:masterClrMapping/>
+  </p:clrMapOvr>
+</p:notes>
+</file>
+
+<file path=ppt/notesSlides/notesSlide7.xml><?xml version="1.0" encoding="utf-8"?>
+<p:notes xmlns:a="http://schemas.openxmlformats.org/drawingml/2006/main" xmlns:p="http://schemas.openxmlformats.org/presentationml/2006/main" xmlns:r="http://schemas.openxmlformats.org/officeDocument/2006/relationships">
+  <p:cSld>
+    <p:spTree>
+      <p:nvGrpSpPr>
+        <p:cNvPr id="1" name=""/>
+        <p:cNvGrpSpPr/>
+        <p:nvPr/>
+      </p:nvGrpSpPr>
+      <p:grpSpPr>
+        <a:xfrm>
+          <a:off x="0" y="0"/>
+          <a:ext cx="0" cy="0"/>
+          <a:chOff x="0" y="0"/>
+          <a:chExt cx="0" cy="0"/>
+        </a:xfrm>
+      </p:grpSpPr>
+      <p:sp>
+        <p:nvSpPr>
+          <p:cNvPr id="2" name="Slide Image Placeholder 1"/>
+          <p:cNvSpPr>
+            <a:spLocks noGrp="1"/>
+          </p:cNvSpPr>
+          <p:nvPr>
+            <p:ph type="sldImg" idx="2"/>
+          </p:nvPr>
+        </p:nvSpPr>
+        <p:spPr/>
+      </p:sp>
+      <p:sp>
+        <p:nvSpPr>
+          <p:cNvPr id="3" name="Notes Placeholder 2"/>
+          <p:cNvSpPr>
+            <a:spLocks noGrp="1"/>
+          </p:cNvSpPr>
+          <p:nvPr>
+            <p:ph type="body" idx="3" sz="quarter"/>
+          </p:nvPr>
+        </p:nvSpPr>
+        <p:spPr/>
+        <p:txBody>
+          <a:bodyPr/>
+          <a:lstStyle/>
+          <a:p>
+            <a:r>
+              <a:t>| Criteria | Layered | Microservices | Event-Driven | Hexagonal |</a:t>
+            </a:r>
+          </a:p>
+          <a:p>
+            <a:r>
+              <a:t>|----------|---------|---------------|---------------|-----------|</a:t>
+            </a:r>
+          </a:p>
+          <a:p>
+            <a:r>
+              <a:t>| **Team Size** | 1-5 | 5+ | 3-8 | 2-6 |</a:t>
+            </a:r>
+          </a:p>
+        </p:txBody>
+      </p:sp>
+      <p:sp>
+        <p:nvSpPr>
+          <p:cNvPr id="4" name="Slide Number Placeholder 3"/>
+          <p:cNvSpPr>
+            <a:spLocks noGrp="1"/>
+          </p:cNvSpPr>
+          <p:nvPr>
+            <p:ph type="sldNum" idx="5" sz="quarter"/>
+          </p:nvPr>
+        </p:nvSpPr>
+        <p:spPr/>
+      </p:sp>
+    </p:spTree>
+  </p:cSld>
+  <p:clrMapOvr>
+    <a:masterClrMapping/>
+  </p:clrMapOvr>
+</p:notes>
+</file>
+
+<file path=ppt/notesSlides/notesSlide8.xml><?xml version="1.0" encoding="utf-8"?>
+<p:notes xmlns:a="http://schemas.openxmlformats.org/drawingml/2006/main" xmlns:p="http://schemas.openxmlformats.org/presentationml/2006/main" xmlns:r="http://schemas.openxmlformats.org/officeDocument/2006/relationships">
+  <p:cSld>
+    <p:spTree>
+      <p:nvGrpSpPr>
+        <p:cNvPr id="1" name=""/>
+        <p:cNvGrpSpPr/>
+        <p:nvPr/>
+      </p:nvGrpSpPr>
+      <p:grpSpPr>
+        <a:xfrm>
+          <a:off x="0" y="0"/>
+          <a:ext cx="0" cy="0"/>
+          <a:chOff x="0" y="0"/>
+          <a:chExt cx="0" cy="0"/>
+        </a:xfrm>
+      </p:grpSpPr>
+      <p:sp>
+        <p:nvSpPr>
+          <p:cNvPr id="2" name="Slide Image Placeholder 1"/>
+          <p:cNvSpPr>
+            <a:spLocks noGrp="1"/>
+          </p:cNvSpPr>
+          <p:nvPr>
+            <p:ph type="sldImg" idx="2"/>
+          </p:nvPr>
+        </p:nvSpPr>
+        <p:spPr/>
+      </p:sp>
+      <p:sp>
+        <p:nvSpPr>
+          <p:cNvPr id="3" name="Notes Placeholder 2"/>
+          <p:cNvSpPr>
+            <a:spLocks noGrp="1"/>
+          </p:cNvSpPr>
+          <p:nvPr>
+            <p:ph type="body" idx="3" sz="quarter"/>
+          </p:nvPr>
+        </p:nvSpPr>
+        <p:spPr/>
+        <p:txBody>
+          <a:bodyPr/>
+          <a:lstStyle/>
+          <a:p>
+            <a:r>
+              <a:t>| Criteria | Layered | Microservices | Event-Driven | Hexagonal |</a:t>
+            </a:r>
+          </a:p>
+          <a:p>
+            <a:r>
+              <a:t>|----------|---------|---------------|---------------|-----------|</a:t>
+            </a:r>
+          </a:p>
+          <a:p>
+            <a:r>
+              <a:t>| **Team Size** | 1-5 | 5+ | 3-8 | 2-6 |</a:t>
+            </a:r>
+          </a:p>
+        </p:txBody>
+      </p:sp>
+      <p:sp>
+        <p:nvSpPr>
+          <p:cNvPr id="4" name="Slide Number Placeholder 3"/>
+          <p:cNvSpPr>
+            <a:spLocks noGrp="1"/>
+          </p:cNvSpPr>
+          <p:nvPr>
+            <p:ph type="sldNum" idx="5" sz="quarter"/>
+          </p:nvPr>
+        </p:nvSpPr>
+        <p:spPr/>
+      </p:sp>
+    </p:spTree>
+  </p:cSld>
+  <p:clrMapOvr>
+    <a:masterClrMapping/>
+  </p:clrMapOvr>
+</p:notes>
+</file>
+
+<file path=ppt/notesSlides/notesSlide9.xml><?xml version="1.0" encoding="utf-8"?>
+<p:notes xmlns:a="http://schemas.openxmlformats.org/drawingml/2006/main" xmlns:p="http://schemas.openxmlformats.org/presentationml/2006/main" xmlns:r="http://schemas.openxmlformats.org/officeDocument/2006/relationships">
+  <p:cSld>
+    <p:spTree>
+      <p:nvGrpSpPr>
+        <p:cNvPr id="1" name=""/>
+        <p:cNvGrpSpPr/>
+        <p:nvPr/>
+      </p:nvGrpSpPr>
+      <p:grpSpPr>
+        <a:xfrm>
+          <a:off x="0" y="0"/>
+          <a:ext cx="0" cy="0"/>
+          <a:chOff x="0" y="0"/>
+          <a:chExt cx="0" cy="0"/>
+        </a:xfrm>
+      </p:grpSpPr>
+      <p:sp>
+        <p:nvSpPr>
+          <p:cNvPr id="2" name="Slide Image Placeholder 1"/>
+          <p:cNvSpPr>
+            <a:spLocks noGrp="1"/>
+          </p:cNvSpPr>
+          <p:nvPr>
+            <p:ph type="sldImg" idx="2"/>
+          </p:nvPr>
+        </p:nvSpPr>
+        <p:spPr/>
+      </p:sp>
+      <p:sp>
+        <p:nvSpPr>
+          <p:cNvPr id="3" name="Notes Placeholder 2"/>
+          <p:cNvSpPr>
+            <a:spLocks noGrp="1"/>
+          </p:cNvSpPr>
+          <p:nvPr>
+            <p:ph type="body" idx="3" sz="quarter"/>
+          </p:nvPr>
+        </p:nvSpPr>
+        <p:spPr/>
+        <p:txBody>
+          <a:bodyPr/>
+          <a:lstStyle/>
+          <a:p>
+            <a:r>
+              <a:t>| Criteria | Layered | Microservices | Event-Driven | Hexagonal |</a:t>
+            </a:r>
+          </a:p>
+          <a:p>
+            <a:r>
+              <a:t>|----------|---------|---------------|---------------|-----------|</a:t>
+            </a:r>
+          </a:p>
+          <a:p>
+            <a:r>
+              <a:t>| **Team Size** | 1-5 | 5+ | 3-8 | 2-6 |</a:t>
+            </a:r>
+          </a:p>
+        </p:txBody>
+      </p:sp>
+      <p:sp>
+        <p:nvSpPr>
+          <p:cNvPr id="4" name="Slide Number Placeholder 3"/>
+          <p:cNvSpPr>
+            <a:spLocks noGrp="1"/>
+          </p:cNvSpPr>
+          <p:nvPr>
+            <p:ph type="sldNum" idx="5" sz="quarter"/>
+          </p:nvPr>
+        </p:nvSpPr>
+        <p:spPr/>
+      </p:sp>
+    </p:spTree>
+  </p:cSld>
+  <p:clrMapOvr>
+    <a:masterClrMapping/>
+  </p:clrMapOvr>
+</p:notes>
 </file>
 
 <file path=ppt/slideLayouts/slideLayout1.xml><?xml version="1.0" encoding="utf-8"?>
@@ -4269,7 +6063,7 @@
 </file>
 
 <file path=ppt/slides/slide1.xml><?xml version="1.0" encoding="utf-8"?>
-<p:sld xmlns:a="http://schemas.openxmlformats.org/drawingml/2006/main" xmlns:p="http://schemas.openxmlformats.org/presentationml/2006/main" xmlns:r="http://schemas.openxmlformats.org/officeDocument/2006/relationships">
+<p:sld xmlns:a="http://schemas.openxmlformats.org/drawingml/2006/main" xmlns:r="http://schemas.openxmlformats.org/officeDocument/2006/relationships" xmlns:p="http://schemas.openxmlformats.org/presentationml/2006/main">
   <p:cSld>
     <p:spTree>
       <p:nvGrpSpPr>
@@ -4277,7 +6071,14 @@
         <p:cNvGrpSpPr/>
         <p:nvPr/>
       </p:nvGrpSpPr>
-      <p:grpSpPr/>
+      <p:grpSpPr>
+        <a:xfrm>
+          <a:off x="0" y="0"/>
+          <a:ext cx="0" cy="0"/>
+          <a:chOff x="0" y="0"/>
+          <a:chExt cx="0" cy="0"/>
+        </a:xfrm>
+      </p:grpSpPr>
       <p:sp>
         <p:nvSpPr>
           <p:cNvPr id="2" name="Title 1"/>
@@ -4314,9 +6115,7 @@
           <a:bodyPr/>
           <a:lstStyle/>
           <a:p>
-            <a:r>
-              <a:t>Design Patterns Workshop - Telekom Training</a:t>
-            </a:r>
+            <a:endParaRPr dirty="0"/>
           </a:p>
         </p:txBody>
       </p:sp>
@@ -4329,7 +6128,7 @@
 </file>
 
 <file path=ppt/slides/slide10.xml><?xml version="1.0" encoding="utf-8"?>
-<p:sld xmlns:a="http://schemas.openxmlformats.org/drawingml/2006/main" xmlns:p="http://schemas.openxmlformats.org/presentationml/2006/main" xmlns:r="http://schemas.openxmlformats.org/officeDocument/2006/relationships">
+<p:sld xmlns:a="http://schemas.openxmlformats.org/drawingml/2006/main" xmlns:r="http://schemas.openxmlformats.org/officeDocument/2006/relationships" xmlns:p="http://schemas.openxmlformats.org/presentationml/2006/main">
   <p:cSld>
     <p:spTree>
       <p:nvGrpSpPr>
@@ -4337,7 +6136,14 @@
         <p:cNvGrpSpPr/>
         <p:nvPr/>
       </p:nvGrpSpPr>
-      <p:grpSpPr/>
+      <p:grpSpPr>
+        <a:xfrm>
+          <a:off x="0" y="0"/>
+          <a:ext cx="0" cy="0"/>
+          <a:chOff x="0" y="0"/>
+          <a:chExt cx="0" cy="0"/>
+        </a:xfrm>
+      </p:grpSpPr>
       <p:sp>
         <p:nvSpPr>
           <p:cNvPr id="2" name="Title 1"/>
@@ -4366,59 +6172,155 @@
             <a:spLocks noGrp="1"/>
           </p:cNvSpPr>
           <p:nvPr>
-            <p:ph idx="1" sz="half"/>
+            <p:ph sz="half" idx="1"/>
           </p:nvPr>
         </p:nvSpPr>
         <p:spPr/>
         <p:txBody>
-          <a:bodyPr/>
+          <a:bodyPr>
+            <a:normAutofit/>
+          </a:bodyPr>
           <a:lstStyle/>
           <a:p>
+            <a:pPr marL="0" indent="0">
+              <a:lnSpc>
+                <a:spcPct val="150000"/>
+              </a:lnSpc>
+              <a:buNone/>
+              <a:defRPr sz="1600" b="1"/>
+            </a:pPr>
+            <a:r>
+              <a:rPr sz="1800" dirty="0" err="1"/>
+              <a:t>Vorteile</a:t>
+            </a:r>
+            <a:r>
+              <a:rPr sz="1800" dirty="0"/>
+              <a:t> </a:t>
+            </a:r>
+          </a:p>
+          <a:p>
             <a:pPr>
-              <a:defRPr b="1" sz="1600"/>
-            </a:pPr>
-            <a:r>
-              <a:t>Vorteile ✅</a:t>
-            </a:r>
-          </a:p>
-          <a:p>
-            <a:pPr>
+              <a:lnSpc>
+                <a:spcPct val="150000"/>
+              </a:lnSpc>
               <a:spcAft>
                 <a:spcPts val="600"/>
               </a:spcAft>
             </a:pPr>
             <a:r>
-              <a:t>• Unabhängige Skalierung pro Service</a:t>
+              <a:rPr sz="1800" dirty="0" err="1"/>
+              <a:t>Unabhängige</a:t>
+            </a:r>
+            <a:r>
+              <a:rPr sz="1800" dirty="0"/>
+              <a:t> </a:t>
+            </a:r>
+            <a:r>
+              <a:rPr sz="1800" dirty="0" err="1"/>
+              <a:t>Skalierung</a:t>
+            </a:r>
+            <a:r>
+              <a:rPr sz="1800" dirty="0"/>
+              <a:t> pro Service</a:t>
             </a:r>
           </a:p>
           <a:p>
             <a:pPr>
+              <a:lnSpc>
+                <a:spcPct val="150000"/>
+              </a:lnSpc>
               <a:spcAft>
                 <a:spcPts val="600"/>
               </a:spcAft>
             </a:pPr>
             <a:r>
-              <a:t>• Technology Stack Diversität möglich</a:t>
-            </a:r>
+              <a:rPr sz="1800" dirty="0"/>
+              <a:t>Technology Stack </a:t>
+            </a:r>
+            <a:r>
+              <a:rPr sz="1800" dirty="0" err="1"/>
+              <a:t>Diversität</a:t>
+            </a:r>
+            <a:r>
+              <a:rPr sz="1800" dirty="0"/>
+              <a:t> </a:t>
+            </a:r>
+            <a:r>
+              <a:rPr sz="1800" dirty="0" err="1"/>
+              <a:t>möglich</a:t>
+            </a:r>
+            <a:endParaRPr sz="1800" dirty="0"/>
           </a:p>
           <a:p>
             <a:pPr>
+              <a:lnSpc>
+                <a:spcPct val="150000"/>
+              </a:lnSpc>
               <a:spcAft>
                 <a:spcPts val="600"/>
               </a:spcAft>
             </a:pPr>
             <a:r>
-              <a:t>• Fehler-Isolierung zwischen Services</a:t>
+              <a:rPr sz="1800" dirty="0"/>
+              <a:t>Fehler-</a:t>
+            </a:r>
+            <a:r>
+              <a:rPr sz="1800" dirty="0" err="1"/>
+              <a:t>Isolierung</a:t>
+            </a:r>
+            <a:r>
+              <a:rPr sz="1800" dirty="0"/>
+              <a:t> </a:t>
+            </a:r>
+            <a:r>
+              <a:rPr sz="1800" dirty="0" err="1"/>
+              <a:t>zwischen</a:t>
+            </a:r>
+            <a:r>
+              <a:rPr sz="1800" dirty="0"/>
+              <a:t> Services</a:t>
             </a:r>
           </a:p>
           <a:p>
             <a:pPr>
+              <a:lnSpc>
+                <a:spcPct val="150000"/>
+              </a:lnSpc>
               <a:spcAft>
                 <a:spcPts val="600"/>
               </a:spcAft>
             </a:pPr>
             <a:r>
-              <a:t>• Parallele Entwicklung durch verschiedene Teams</a:t>
+              <a:rPr sz="1800" dirty="0" err="1"/>
+              <a:t>Parallele</a:t>
+            </a:r>
+            <a:r>
+              <a:rPr sz="1800" dirty="0"/>
+              <a:t> </a:t>
+            </a:r>
+            <a:r>
+              <a:rPr sz="1800" dirty="0" err="1"/>
+              <a:t>Entwicklung</a:t>
+            </a:r>
+            <a:r>
+              <a:rPr sz="1800" dirty="0"/>
+              <a:t> </a:t>
+            </a:r>
+            <a:r>
+              <a:rPr sz="1800" dirty="0" err="1"/>
+              <a:t>durch</a:t>
+            </a:r>
+            <a:r>
+              <a:rPr sz="1800" dirty="0"/>
+              <a:t> </a:t>
+            </a:r>
+            <a:r>
+              <a:rPr sz="1800" dirty="0" err="1"/>
+              <a:t>verschiedene</a:t>
+            </a:r>
+            <a:r>
+              <a:rPr sz="1800" dirty="0"/>
+              <a:t> Teams</a:t>
             </a:r>
           </a:p>
         </p:txBody>
@@ -4430,60 +6332,118 @@
             <a:spLocks noGrp="1"/>
           </p:cNvSpPr>
           <p:nvPr>
-            <p:ph idx="2" sz="half"/>
+            <p:ph sz="half" idx="2"/>
           </p:nvPr>
         </p:nvSpPr>
         <p:spPr/>
         <p:txBody>
-          <a:bodyPr/>
+          <a:bodyPr>
+            <a:normAutofit/>
+          </a:bodyPr>
           <a:lstStyle/>
           <a:p>
+            <a:pPr marL="0" indent="0">
+              <a:lnSpc>
+                <a:spcPct val="150000"/>
+              </a:lnSpc>
+              <a:buNone/>
+              <a:defRPr sz="1600" b="1"/>
+            </a:pPr>
+            <a:r>
+              <a:rPr sz="1800" dirty="0" err="1"/>
+              <a:t>Nachteile</a:t>
+            </a:r>
+            <a:r>
+              <a:rPr sz="1800" dirty="0"/>
+              <a:t> </a:t>
+            </a:r>
+          </a:p>
+          <a:p>
             <a:pPr>
-              <a:defRPr b="1" sz="1600"/>
-            </a:pPr>
-            <a:r>
-              <a:t>Nachteile ❌</a:t>
-            </a:r>
-          </a:p>
-          <a:p>
-            <a:pPr>
+              <a:lnSpc>
+                <a:spcPct val="150000"/>
+              </a:lnSpc>
               <a:spcAft>
                 <a:spcPts val="600"/>
               </a:spcAft>
             </a:pPr>
             <a:r>
-              <a:t>• Hohe operationale Komplexität</a:t>
-            </a:r>
+              <a:rPr sz="1800" dirty="0"/>
+              <a:t>Hohe </a:t>
+            </a:r>
+            <a:r>
+              <a:rPr sz="1800" dirty="0" err="1"/>
+              <a:t>operationale</a:t>
+            </a:r>
+            <a:r>
+              <a:rPr sz="1800" dirty="0"/>
+              <a:t> </a:t>
+            </a:r>
+            <a:r>
+              <a:rPr sz="1800" dirty="0" err="1"/>
+              <a:t>Komplexität</a:t>
+            </a:r>
+            <a:endParaRPr sz="1800" dirty="0"/>
           </a:p>
           <a:p>
             <a:pPr>
+              <a:lnSpc>
+                <a:spcPct val="150000"/>
+              </a:lnSpc>
               <a:spcAft>
                 <a:spcPts val="600"/>
               </a:spcAft>
             </a:pPr>
             <a:r>
-              <a:t>• Distributed System Challenges (Latency, Partial Failures)</a:t>
+              <a:rPr sz="1800" dirty="0"/>
+              <a:t>Distributed System Challenges (Latency, Partial Failures)</a:t>
             </a:r>
           </a:p>
           <a:p>
             <a:pPr>
+              <a:lnSpc>
+                <a:spcPct val="150000"/>
+              </a:lnSpc>
               <a:spcAft>
                 <a:spcPts val="600"/>
               </a:spcAft>
             </a:pPr>
             <a:r>
-              <a:t>• Data Consistency zwischen Services schwierig</a:t>
-            </a:r>
+              <a:rPr sz="1800" dirty="0"/>
+              <a:t>Data Consistency </a:t>
+            </a:r>
+            <a:r>
+              <a:rPr sz="1800" dirty="0" err="1"/>
+              <a:t>zwischen</a:t>
+            </a:r>
+            <a:r>
+              <a:rPr sz="1800" dirty="0"/>
+              <a:t> Services </a:t>
+            </a:r>
+            <a:r>
+              <a:rPr sz="1800" dirty="0" err="1"/>
+              <a:t>schwierig</a:t>
+            </a:r>
+            <a:endParaRPr sz="1800" dirty="0"/>
           </a:p>
           <a:p>
             <a:pPr>
+              <a:lnSpc>
+                <a:spcPct val="150000"/>
+              </a:lnSpc>
               <a:spcAft>
                 <a:spcPts val="600"/>
               </a:spcAft>
             </a:pPr>
             <a:r>
-              <a:t>• Service Discovery und Load Balancing erforderlich</a:t>
-            </a:r>
+              <a:rPr sz="1800" dirty="0"/>
+              <a:t>Service Discovery und Load Balancing </a:t>
+            </a:r>
+            <a:r>
+              <a:rPr sz="1800" dirty="0" err="1"/>
+              <a:t>erforderlich</a:t>
+            </a:r>
+            <a:endParaRPr sz="1800" dirty="0"/>
           </a:p>
         </p:txBody>
       </p:sp>
@@ -4492,11 +6452,482 @@
   <p:clrMapOvr>
     <a:masterClrMapping/>
   </p:clrMapOvr>
+  <p:timing>
+    <p:tnLst>
+      <p:par>
+        <p:cTn id="1" dur="indefinite" restart="never" nodeType="tmRoot">
+          <p:childTnLst>
+            <p:seq concurrent="1" nextAc="seek">
+              <p:cTn id="2" dur="indefinite" nodeType="mainSeq">
+                <p:childTnLst>
+                  <p:par>
+                    <p:cTn id="3" fill="hold">
+                      <p:stCondLst>
+                        <p:cond delay="indefinite"/>
+                      </p:stCondLst>
+                      <p:childTnLst>
+                        <p:par>
+                          <p:cTn id="4" fill="hold">
+                            <p:stCondLst>
+                              <p:cond delay="0"/>
+                            </p:stCondLst>
+                            <p:childTnLst>
+                              <p:par>
+                                <p:cTn id="5" presetID="1" presetClass="entr" presetSubtype="0" fill="hold" nodeType="clickEffect">
+                                  <p:stCondLst>
+                                    <p:cond delay="0"/>
+                                  </p:stCondLst>
+                                  <p:childTnLst>
+                                    <p:set>
+                                      <p:cBhvr>
+                                        <p:cTn id="6" dur="1" fill="hold">
+                                          <p:stCondLst>
+                                            <p:cond delay="0"/>
+                                          </p:stCondLst>
+                                        </p:cTn>
+                                        <p:tgtEl>
+                                          <p:spTgt spid="3">
+                                            <p:txEl>
+                                              <p:pRg st="1" end="1"/>
+                                            </p:txEl>
+                                          </p:spTgt>
+                                        </p:tgtEl>
+                                        <p:attrNameLst>
+                                          <p:attrName>style.visibility</p:attrName>
+                                        </p:attrNameLst>
+                                      </p:cBhvr>
+                                      <p:to>
+                                        <p:strVal val="visible"/>
+                                      </p:to>
+                                    </p:set>
+                                  </p:childTnLst>
+                                </p:cTn>
+                              </p:par>
+                            </p:childTnLst>
+                          </p:cTn>
+                        </p:par>
+                      </p:childTnLst>
+                    </p:cTn>
+                  </p:par>
+                  <p:par>
+                    <p:cTn id="7" fill="hold">
+                      <p:stCondLst>
+                        <p:cond delay="indefinite"/>
+                      </p:stCondLst>
+                      <p:childTnLst>
+                        <p:par>
+                          <p:cTn id="8" fill="hold">
+                            <p:stCondLst>
+                              <p:cond delay="0"/>
+                            </p:stCondLst>
+                            <p:childTnLst>
+                              <p:par>
+                                <p:cTn id="9" presetID="1" presetClass="entr" presetSubtype="0" fill="hold" nodeType="clickEffect">
+                                  <p:stCondLst>
+                                    <p:cond delay="0"/>
+                                  </p:stCondLst>
+                                  <p:childTnLst>
+                                    <p:set>
+                                      <p:cBhvr>
+                                        <p:cTn id="10" dur="1" fill="hold">
+                                          <p:stCondLst>
+                                            <p:cond delay="0"/>
+                                          </p:stCondLst>
+                                        </p:cTn>
+                                        <p:tgtEl>
+                                          <p:spTgt spid="3">
+                                            <p:txEl>
+                                              <p:pRg st="2" end="2"/>
+                                            </p:txEl>
+                                          </p:spTgt>
+                                        </p:tgtEl>
+                                        <p:attrNameLst>
+                                          <p:attrName>style.visibility</p:attrName>
+                                        </p:attrNameLst>
+                                      </p:cBhvr>
+                                      <p:to>
+                                        <p:strVal val="visible"/>
+                                      </p:to>
+                                    </p:set>
+                                  </p:childTnLst>
+                                </p:cTn>
+                              </p:par>
+                            </p:childTnLst>
+                          </p:cTn>
+                        </p:par>
+                      </p:childTnLst>
+                    </p:cTn>
+                  </p:par>
+                  <p:par>
+                    <p:cTn id="11" fill="hold">
+                      <p:stCondLst>
+                        <p:cond delay="indefinite"/>
+                      </p:stCondLst>
+                      <p:childTnLst>
+                        <p:par>
+                          <p:cTn id="12" fill="hold">
+                            <p:stCondLst>
+                              <p:cond delay="0"/>
+                            </p:stCondLst>
+                            <p:childTnLst>
+                              <p:par>
+                                <p:cTn id="13" presetID="1" presetClass="entr" presetSubtype="0" fill="hold" nodeType="clickEffect">
+                                  <p:stCondLst>
+                                    <p:cond delay="0"/>
+                                  </p:stCondLst>
+                                  <p:childTnLst>
+                                    <p:set>
+                                      <p:cBhvr>
+                                        <p:cTn id="14" dur="1" fill="hold">
+                                          <p:stCondLst>
+                                            <p:cond delay="0"/>
+                                          </p:stCondLst>
+                                        </p:cTn>
+                                        <p:tgtEl>
+                                          <p:spTgt spid="3">
+                                            <p:txEl>
+                                              <p:pRg st="3" end="3"/>
+                                            </p:txEl>
+                                          </p:spTgt>
+                                        </p:tgtEl>
+                                        <p:attrNameLst>
+                                          <p:attrName>style.visibility</p:attrName>
+                                        </p:attrNameLst>
+                                      </p:cBhvr>
+                                      <p:to>
+                                        <p:strVal val="visible"/>
+                                      </p:to>
+                                    </p:set>
+                                  </p:childTnLst>
+                                </p:cTn>
+                              </p:par>
+                            </p:childTnLst>
+                          </p:cTn>
+                        </p:par>
+                      </p:childTnLst>
+                    </p:cTn>
+                  </p:par>
+                  <p:par>
+                    <p:cTn id="15" fill="hold">
+                      <p:stCondLst>
+                        <p:cond delay="indefinite"/>
+                      </p:stCondLst>
+                      <p:childTnLst>
+                        <p:par>
+                          <p:cTn id="16" fill="hold">
+                            <p:stCondLst>
+                              <p:cond delay="0"/>
+                            </p:stCondLst>
+                            <p:childTnLst>
+                              <p:par>
+                                <p:cTn id="17" presetID="1" presetClass="entr" presetSubtype="0" fill="hold" nodeType="clickEffect">
+                                  <p:stCondLst>
+                                    <p:cond delay="0"/>
+                                  </p:stCondLst>
+                                  <p:childTnLst>
+                                    <p:set>
+                                      <p:cBhvr>
+                                        <p:cTn id="18" dur="1" fill="hold">
+                                          <p:stCondLst>
+                                            <p:cond delay="0"/>
+                                          </p:stCondLst>
+                                        </p:cTn>
+                                        <p:tgtEl>
+                                          <p:spTgt spid="3">
+                                            <p:txEl>
+                                              <p:pRg st="4" end="4"/>
+                                            </p:txEl>
+                                          </p:spTgt>
+                                        </p:tgtEl>
+                                        <p:attrNameLst>
+                                          <p:attrName>style.visibility</p:attrName>
+                                        </p:attrNameLst>
+                                      </p:cBhvr>
+                                      <p:to>
+                                        <p:strVal val="visible"/>
+                                      </p:to>
+                                    </p:set>
+                                  </p:childTnLst>
+                                </p:cTn>
+                              </p:par>
+                            </p:childTnLst>
+                          </p:cTn>
+                        </p:par>
+                      </p:childTnLst>
+                    </p:cTn>
+                  </p:par>
+                  <p:par>
+                    <p:cTn id="19" fill="hold">
+                      <p:stCondLst>
+                        <p:cond delay="indefinite"/>
+                      </p:stCondLst>
+                      <p:childTnLst>
+                        <p:par>
+                          <p:cTn id="20" fill="hold">
+                            <p:stCondLst>
+                              <p:cond delay="0"/>
+                            </p:stCondLst>
+                            <p:childTnLst>
+                              <p:par>
+                                <p:cTn id="21" presetID="1" presetClass="entr" presetSubtype="0" fill="hold" nodeType="clickEffect">
+                                  <p:stCondLst>
+                                    <p:cond delay="0"/>
+                                  </p:stCondLst>
+                                  <p:childTnLst>
+                                    <p:set>
+                                      <p:cBhvr>
+                                        <p:cTn id="22" dur="1" fill="hold">
+                                          <p:stCondLst>
+                                            <p:cond delay="0"/>
+                                          </p:stCondLst>
+                                        </p:cTn>
+                                        <p:tgtEl>
+                                          <p:spTgt spid="4">
+                                            <p:txEl>
+                                              <p:pRg st="0" end="0"/>
+                                            </p:txEl>
+                                          </p:spTgt>
+                                        </p:tgtEl>
+                                        <p:attrNameLst>
+                                          <p:attrName>style.visibility</p:attrName>
+                                        </p:attrNameLst>
+                                      </p:cBhvr>
+                                      <p:to>
+                                        <p:strVal val="visible"/>
+                                      </p:to>
+                                    </p:set>
+                                  </p:childTnLst>
+                                </p:cTn>
+                              </p:par>
+                            </p:childTnLst>
+                          </p:cTn>
+                        </p:par>
+                      </p:childTnLst>
+                    </p:cTn>
+                  </p:par>
+                  <p:par>
+                    <p:cTn id="23" fill="hold">
+                      <p:stCondLst>
+                        <p:cond delay="indefinite"/>
+                      </p:stCondLst>
+                      <p:childTnLst>
+                        <p:par>
+                          <p:cTn id="24" fill="hold">
+                            <p:stCondLst>
+                              <p:cond delay="0"/>
+                            </p:stCondLst>
+                            <p:childTnLst>
+                              <p:par>
+                                <p:cTn id="25" presetID="1" presetClass="entr" presetSubtype="0" fill="hold" nodeType="clickEffect">
+                                  <p:stCondLst>
+                                    <p:cond delay="0"/>
+                                  </p:stCondLst>
+                                  <p:childTnLst>
+                                    <p:set>
+                                      <p:cBhvr>
+                                        <p:cTn id="26" dur="1" fill="hold">
+                                          <p:stCondLst>
+                                            <p:cond delay="0"/>
+                                          </p:stCondLst>
+                                        </p:cTn>
+                                        <p:tgtEl>
+                                          <p:spTgt spid="4">
+                                            <p:txEl>
+                                              <p:pRg st="1" end="1"/>
+                                            </p:txEl>
+                                          </p:spTgt>
+                                        </p:tgtEl>
+                                        <p:attrNameLst>
+                                          <p:attrName>style.visibility</p:attrName>
+                                        </p:attrNameLst>
+                                      </p:cBhvr>
+                                      <p:to>
+                                        <p:strVal val="visible"/>
+                                      </p:to>
+                                    </p:set>
+                                  </p:childTnLst>
+                                </p:cTn>
+                              </p:par>
+                            </p:childTnLst>
+                          </p:cTn>
+                        </p:par>
+                      </p:childTnLst>
+                    </p:cTn>
+                  </p:par>
+                  <p:par>
+                    <p:cTn id="27" fill="hold">
+                      <p:stCondLst>
+                        <p:cond delay="indefinite"/>
+                      </p:stCondLst>
+                      <p:childTnLst>
+                        <p:par>
+                          <p:cTn id="28" fill="hold">
+                            <p:stCondLst>
+                              <p:cond delay="0"/>
+                            </p:stCondLst>
+                            <p:childTnLst>
+                              <p:par>
+                                <p:cTn id="29" presetID="1" presetClass="entr" presetSubtype="0" fill="hold" nodeType="clickEffect">
+                                  <p:stCondLst>
+                                    <p:cond delay="0"/>
+                                  </p:stCondLst>
+                                  <p:childTnLst>
+                                    <p:set>
+                                      <p:cBhvr>
+                                        <p:cTn id="30" dur="1" fill="hold">
+                                          <p:stCondLst>
+                                            <p:cond delay="0"/>
+                                          </p:stCondLst>
+                                        </p:cTn>
+                                        <p:tgtEl>
+                                          <p:spTgt spid="4">
+                                            <p:txEl>
+                                              <p:pRg st="2" end="2"/>
+                                            </p:txEl>
+                                          </p:spTgt>
+                                        </p:tgtEl>
+                                        <p:attrNameLst>
+                                          <p:attrName>style.visibility</p:attrName>
+                                        </p:attrNameLst>
+                                      </p:cBhvr>
+                                      <p:to>
+                                        <p:strVal val="visible"/>
+                                      </p:to>
+                                    </p:set>
+                                  </p:childTnLst>
+                                </p:cTn>
+                              </p:par>
+                            </p:childTnLst>
+                          </p:cTn>
+                        </p:par>
+                      </p:childTnLst>
+                    </p:cTn>
+                  </p:par>
+                  <p:par>
+                    <p:cTn id="31" fill="hold">
+                      <p:stCondLst>
+                        <p:cond delay="indefinite"/>
+                      </p:stCondLst>
+                      <p:childTnLst>
+                        <p:par>
+                          <p:cTn id="32" fill="hold">
+                            <p:stCondLst>
+                              <p:cond delay="0"/>
+                            </p:stCondLst>
+                            <p:childTnLst>
+                              <p:par>
+                                <p:cTn id="33" presetID="1" presetClass="entr" presetSubtype="0" fill="hold" nodeType="clickEffect">
+                                  <p:stCondLst>
+                                    <p:cond delay="0"/>
+                                  </p:stCondLst>
+                                  <p:childTnLst>
+                                    <p:set>
+                                      <p:cBhvr>
+                                        <p:cTn id="34" dur="1" fill="hold">
+                                          <p:stCondLst>
+                                            <p:cond delay="0"/>
+                                          </p:stCondLst>
+                                        </p:cTn>
+                                        <p:tgtEl>
+                                          <p:spTgt spid="4">
+                                            <p:txEl>
+                                              <p:pRg st="3" end="3"/>
+                                            </p:txEl>
+                                          </p:spTgt>
+                                        </p:tgtEl>
+                                        <p:attrNameLst>
+                                          <p:attrName>style.visibility</p:attrName>
+                                        </p:attrNameLst>
+                                      </p:cBhvr>
+                                      <p:to>
+                                        <p:strVal val="visible"/>
+                                      </p:to>
+                                    </p:set>
+                                  </p:childTnLst>
+                                </p:cTn>
+                              </p:par>
+                            </p:childTnLst>
+                          </p:cTn>
+                        </p:par>
+                      </p:childTnLst>
+                    </p:cTn>
+                  </p:par>
+                  <p:par>
+                    <p:cTn id="35" fill="hold">
+                      <p:stCondLst>
+                        <p:cond delay="indefinite"/>
+                      </p:stCondLst>
+                      <p:childTnLst>
+                        <p:par>
+                          <p:cTn id="36" fill="hold">
+                            <p:stCondLst>
+                              <p:cond delay="0"/>
+                            </p:stCondLst>
+                            <p:childTnLst>
+                              <p:par>
+                                <p:cTn id="37" presetID="1" presetClass="entr" presetSubtype="0" fill="hold" nodeType="clickEffect">
+                                  <p:stCondLst>
+                                    <p:cond delay="0"/>
+                                  </p:stCondLst>
+                                  <p:childTnLst>
+                                    <p:set>
+                                      <p:cBhvr>
+                                        <p:cTn id="38" dur="1" fill="hold">
+                                          <p:stCondLst>
+                                            <p:cond delay="0"/>
+                                          </p:stCondLst>
+                                        </p:cTn>
+                                        <p:tgtEl>
+                                          <p:spTgt spid="4">
+                                            <p:txEl>
+                                              <p:pRg st="4" end="4"/>
+                                            </p:txEl>
+                                          </p:spTgt>
+                                        </p:tgtEl>
+                                        <p:attrNameLst>
+                                          <p:attrName>style.visibility</p:attrName>
+                                        </p:attrNameLst>
+                                      </p:cBhvr>
+                                      <p:to>
+                                        <p:strVal val="visible"/>
+                                      </p:to>
+                                    </p:set>
+                                  </p:childTnLst>
+                                </p:cTn>
+                              </p:par>
+                            </p:childTnLst>
+                          </p:cTn>
+                        </p:par>
+                      </p:childTnLst>
+                    </p:cTn>
+                  </p:par>
+                </p:childTnLst>
+              </p:cTn>
+              <p:prevCondLst>
+                <p:cond evt="onPrev" delay="0">
+                  <p:tgtEl>
+                    <p:sldTgt/>
+                  </p:tgtEl>
+                </p:cond>
+              </p:prevCondLst>
+              <p:nextCondLst>
+                <p:cond evt="onNext" delay="0">
+                  <p:tgtEl>
+                    <p:sldTgt/>
+                  </p:tgtEl>
+                </p:cond>
+              </p:nextCondLst>
+            </p:seq>
+          </p:childTnLst>
+        </p:cTn>
+      </p:par>
+    </p:tnLst>
+  </p:timing>
 </p:sld>
 </file>
 
 <file path=ppt/slides/slide11.xml><?xml version="1.0" encoding="utf-8"?>
-<p:sld xmlns:a="http://schemas.openxmlformats.org/drawingml/2006/main" xmlns:p="http://schemas.openxmlformats.org/presentationml/2006/main" xmlns:r="http://schemas.openxmlformats.org/officeDocument/2006/relationships">
+<p:sld xmlns:a="http://schemas.openxmlformats.org/drawingml/2006/main" xmlns:r="http://schemas.openxmlformats.org/officeDocument/2006/relationships" xmlns:p="http://schemas.openxmlformats.org/presentationml/2006/main">
   <p:cSld>
     <p:spTree>
       <p:nvGrpSpPr>
@@ -4504,7 +6935,14 @@
         <p:cNvGrpSpPr/>
         <p:nvPr/>
       </p:nvGrpSpPr>
-      <p:grpSpPr/>
+      <p:grpSpPr>
+        <a:xfrm>
+          <a:off x="0" y="0"/>
+          <a:ext cx="0" cy="0"/>
+          <a:chOff x="0" y="0"/>
+          <a:chExt cx="0" cy="0"/>
+        </a:xfrm>
+      </p:grpSpPr>
       <p:sp>
         <p:nvSpPr>
           <p:cNvPr id="2" name="Title 1"/>
@@ -4540,7 +6978,9 @@
         <p:txBody>
           <a:bodyPr/>
           <a:lstStyle/>
-          <a:p/>
+          <a:p>
+            <a:endParaRPr/>
+          </a:p>
         </p:txBody>
       </p:sp>
     </p:spTree>
@@ -4552,7 +6992,7 @@
 </file>
 
 <file path=ppt/slides/slide12.xml><?xml version="1.0" encoding="utf-8"?>
-<p:sld xmlns:a="http://schemas.openxmlformats.org/drawingml/2006/main" xmlns:p="http://schemas.openxmlformats.org/presentationml/2006/main" xmlns:r="http://schemas.openxmlformats.org/officeDocument/2006/relationships">
+<p:sld xmlns:a="http://schemas.openxmlformats.org/drawingml/2006/main" xmlns:r="http://schemas.openxmlformats.org/officeDocument/2006/relationships" xmlns:p="http://schemas.openxmlformats.org/presentationml/2006/main">
   <p:cSld>
     <p:spTree>
       <p:nvGrpSpPr>
@@ -4560,7 +7000,14 @@
         <p:cNvGrpSpPr/>
         <p:nvPr/>
       </p:nvGrpSpPr>
-      <p:grpSpPr/>
+      <p:grpSpPr>
+        <a:xfrm>
+          <a:off x="0" y="0"/>
+          <a:ext cx="0" cy="0"/>
+          <a:chOff x="0" y="0"/>
+          <a:chExt cx="0" cy="0"/>
+        </a:xfrm>
+      </p:grpSpPr>
       <p:sp>
         <p:nvSpPr>
           <p:cNvPr id="2" name="Title 1"/>
@@ -4594,7 +7041,9 @@
         </p:nvSpPr>
         <p:spPr/>
         <p:txBody>
-          <a:bodyPr/>
+          <a:bodyPr>
+            <a:normAutofit/>
+          </a:bodyPr>
           <a:lstStyle/>
           <a:p>
             <a:pPr>
@@ -4609,144 +7058,253 @@
               </a:spcAft>
             </a:pPr>
             <a:r>
-              <a:rPr sz="900">
+              <a:rPr sz="1400" dirty="0">
                 <a:latin typeface="Consolas"/>
               </a:rPr>
               <a:t>Event Flow:</a:t>
             </a:r>
-            <a:br/>
-            <a:r>
-              <a:rPr sz="900">
+            <a:br>
+              <a:rPr sz="4400" dirty="0"/>
+            </a:br>
+            <a:r>
+              <a:rPr sz="1400" dirty="0">
                 <a:latin typeface="Consolas"/>
               </a:rPr>
               <a:t>┌─────────────┐    Events     ┌─────────────┐    Events     ┌─────────────┐</a:t>
             </a:r>
-            <a:br/>
-            <a:r>
-              <a:rPr sz="900">
-                <a:latin typeface="Consolas"/>
-              </a:rPr>
-              <a:t>│  Producers  │ ─────────────&gt; │  Event Bus  │ ─────────────&gt; │  Consumers  │</a:t>
-            </a:r>
-            <a:br/>
-            <a:r>
-              <a:rPr sz="900">
+            <a:br>
+              <a:rPr sz="4400" dirty="0"/>
+            </a:br>
+            <a:r>
+              <a:rPr sz="1400" dirty="0">
+                <a:latin typeface="Consolas"/>
+              </a:rPr>
+              <a:t>│  Producers  │ ────────────&gt; │  Event Bus  │ ────────────&gt; │  Consumers  │</a:t>
+            </a:r>
+            <a:br>
+              <a:rPr sz="4400" dirty="0"/>
+            </a:br>
+            <a:r>
+              <a:rPr sz="1400" dirty="0">
                 <a:latin typeface="Consolas"/>
               </a:rPr>
               <a:t>│             │               │             │               │             │</a:t>
             </a:r>
-            <a:br/>
-            <a:r>
-              <a:rPr sz="900">
+            <a:br>
+              <a:rPr sz="4400" dirty="0"/>
+            </a:br>
+            <a:r>
+              <a:rPr sz="1400" dirty="0">
                 <a:latin typeface="Consolas"/>
               </a:rPr>
               <a:t>│ Device      │               │  Apache     │               │ Alerting    │</a:t>
             </a:r>
-            <a:br/>
-            <a:r>
-              <a:rPr sz="900">
+            <a:br>
+              <a:rPr sz="4400" dirty="0"/>
+            </a:br>
+            <a:r>
+              <a:rPr sz="1400" dirty="0">
                 <a:latin typeface="Consolas"/>
               </a:rPr>
               <a:t>│ Sensors     │               │  Kafka      │               │ System      │</a:t>
             </a:r>
-            <a:br/>
-            <a:r>
-              <a:rPr sz="900">
+            <a:br>
+              <a:rPr sz="4400" dirty="0"/>
+            </a:br>
+            <a:r>
+              <a:rPr sz="1400" dirty="0">
                 <a:latin typeface="Consolas"/>
               </a:rPr>
               <a:t>│             │               │             │               │             │</a:t>
             </a:r>
-            <a:br/>
-            <a:r>
-              <a:rPr sz="900">
+            <a:br>
+              <a:rPr sz="4400" dirty="0"/>
+            </a:br>
+            <a:r>
+              <a:rPr sz="1400" dirty="0">
                 <a:latin typeface="Consolas"/>
               </a:rPr>
               <a:t>│ User        │               │ Topics:     │               │ Analytics   │</a:t>
             </a:r>
-            <a:br/>
-            <a:r>
-              <a:rPr sz="900">
+            <a:br>
+              <a:rPr sz="4400" dirty="0"/>
+            </a:br>
+            <a:r>
+              <a:rPr sz="1400" dirty="0">
                 <a:latin typeface="Consolas"/>
               </a:rPr>
               <a:t>│ Actions     │               │ - alerts    │               │ Engine      │</a:t>
             </a:r>
-            <a:br/>
-            <a:r>
-              <a:rPr sz="900">
+            <a:br>
+              <a:rPr sz="4400" dirty="0"/>
+            </a:br>
+            <a:r>
+              <a:rPr sz="1400" dirty="0">
                 <a:latin typeface="Consolas"/>
               </a:rPr>
               <a:t>│             │               │ - metrics   │               │             │</a:t>
             </a:r>
-            <a:br/>
-            <a:r>
-              <a:rPr sz="900">
+            <a:br>
+              <a:rPr sz="4400" dirty="0"/>
+            </a:br>
+            <a:r>
+              <a:rPr sz="1400" dirty="0">
                 <a:latin typeface="Consolas"/>
               </a:rPr>
               <a:t>│ System      │               │ - configs   │               │ Dashboard   │</a:t>
             </a:r>
-            <a:br/>
-            <a:r>
-              <a:rPr sz="900">
+            <a:br>
+              <a:rPr sz="4400" dirty="0"/>
+            </a:br>
+            <a:r>
+              <a:rPr sz="1400" dirty="0">
                 <a:latin typeface="Consolas"/>
               </a:rPr>
               <a:t>│ Events      │               │ - audit     │               │ Updates     │</a:t>
             </a:r>
-            <a:br/>
-            <a:r>
-              <a:rPr sz="900">
+            <a:br>
+              <a:rPr sz="4400" dirty="0"/>
+            </a:br>
+            <a:r>
+              <a:rPr sz="1400" dirty="0">
                 <a:latin typeface="Consolas"/>
               </a:rPr>
               <a:t>└─────────────┘               └─────────────┘               └─────────────┘</a:t>
             </a:r>
-            <a:br/>
-            <a:br/>
-            <a:r>
-              <a:rPr sz="900">
-                <a:latin typeface="Consolas"/>
-              </a:rPr>
-              <a:t>    │                             │                             │</a:t>
-            </a:r>
-            <a:br/>
-            <a:r>
-              <a:rPr sz="900">
-                <a:latin typeface="Consolas"/>
-              </a:rPr>
-              <a:t>    └─── Async Pub/Sub ────────────┼─── Message Queues ────────┘</a:t>
-            </a:r>
-            <a:br/>
-            <a:r>
-              <a:rPr sz="900">
+            <a:br>
+              <a:rPr sz="4400" dirty="0"/>
+            </a:br>
+            <a:r>
+              <a:rPr sz="1400" dirty="0">
+                <a:latin typeface="Consolas"/>
+              </a:rPr>
+              <a:t>    │                            </a:t>
+            </a:r>
+            <a:r>
+              <a:rPr lang="en-US" sz="1400" dirty="0">
+                <a:latin typeface="Consolas"/>
+              </a:rPr>
+              <a:t> </a:t>
+            </a:r>
+            <a:r>
+              <a:rPr sz="1400" dirty="0">
+                <a:latin typeface="Consolas"/>
+              </a:rPr>
+              <a:t> │                             │</a:t>
+            </a:r>
+            <a:br>
+              <a:rPr sz="4400" dirty="0"/>
+            </a:br>
+            <a:r>
+              <a:rPr sz="1400" dirty="0">
+                <a:latin typeface="Consolas"/>
+              </a:rPr>
+              <a:t>    └─── Async Pub/Sub ────────────┼─── Message Queues ──────</a:t>
+            </a:r>
+            <a:r>
+              <a:rPr lang="en-US" sz="1400" dirty="0">
+                <a:latin typeface="Consolas"/>
+              </a:rPr>
+              <a:t>──</a:t>
+            </a:r>
+            <a:r>
+              <a:rPr sz="1400" dirty="0">
+                <a:latin typeface="Consolas"/>
+              </a:rPr>
+              <a:t>──┘</a:t>
+            </a:r>
+            <a:br>
+              <a:rPr sz="4400" dirty="0"/>
+            </a:br>
+            <a:r>
+              <a:rPr sz="1400" dirty="0">
                 <a:latin typeface="Consolas"/>
               </a:rPr>
               <a:t>                                   │</a:t>
             </a:r>
-            <a:br/>
-            <a:r>
-              <a:rPr sz="900">
-                <a:latin typeface="Consolas"/>
-              </a:rPr>
-              <a:t>                          ┌─────────────┐</a:t>
-            </a:r>
-            <a:br/>
-            <a:r>
-              <a:rPr sz="900">
-                <a:latin typeface="Consolas"/>
-              </a:rPr>
-              <a:t>                          │ Event Store │</a:t>
-            </a:r>
-            <a:br/>
-            <a:r>
-              <a:rPr sz="900">
-                <a:latin typeface="Consolas"/>
-              </a:rPr>
-              <a:t>                          │ (History)   │</a:t>
-            </a:r>
-            <a:br/>
-            <a:r>
-              <a:rPr sz="900">
-                <a:latin typeface="Consolas"/>
-              </a:rPr>
-              <a:t>                          └─────────────┘</a:t>
+            <a:br>
+              <a:rPr sz="4400" dirty="0"/>
+            </a:br>
+            <a:r>
+              <a:rPr sz="1400" dirty="0">
+                <a:latin typeface="Consolas"/>
+              </a:rPr>
+              <a:t>                     </a:t>
+            </a:r>
+            <a:r>
+              <a:rPr lang="en-US" sz="1400" dirty="0">
+                <a:latin typeface="Consolas"/>
+              </a:rPr>
+              <a:t>  </a:t>
+            </a:r>
+            <a:r>
+              <a:rPr sz="1400" dirty="0">
+                <a:latin typeface="Consolas"/>
+              </a:rPr>
+              <a:t>     ┌─────────────┐</a:t>
+            </a:r>
+            <a:br>
+              <a:rPr sz="4400" dirty="0"/>
+            </a:br>
+            <a:r>
+              <a:rPr sz="1400" dirty="0">
+                <a:latin typeface="Consolas"/>
+              </a:rPr>
+              <a:t>                     </a:t>
+            </a:r>
+            <a:r>
+              <a:rPr lang="en-US" sz="1400" dirty="0">
+                <a:latin typeface="Consolas"/>
+              </a:rPr>
+              <a:t>  </a:t>
+            </a:r>
+            <a:r>
+              <a:rPr sz="1400" dirty="0">
+                <a:latin typeface="Consolas"/>
+              </a:rPr>
+              <a:t>     │ Event Store │</a:t>
+            </a:r>
+            <a:br>
+              <a:rPr sz="4400" dirty="0"/>
+            </a:br>
+            <a:r>
+              <a:rPr sz="1400" dirty="0">
+                <a:latin typeface="Consolas"/>
+              </a:rPr>
+              <a:t>                    </a:t>
+            </a:r>
+            <a:r>
+              <a:rPr lang="en-US" sz="1400" dirty="0">
+                <a:latin typeface="Consolas"/>
+              </a:rPr>
+              <a:t>  </a:t>
+            </a:r>
+            <a:r>
+              <a:rPr sz="1400" dirty="0">
+                <a:latin typeface="Consolas"/>
+              </a:rPr>
+              <a:t>      │ (History)   │</a:t>
+            </a:r>
+            <a:br>
+              <a:rPr sz="4400" dirty="0"/>
+            </a:br>
+            <a:r>
+              <a:rPr sz="1400" dirty="0">
+                <a:latin typeface="Consolas"/>
+              </a:rPr>
+              <a:t>                     </a:t>
+            </a:r>
+            <a:r>
+              <a:rPr lang="en-US" sz="1400" dirty="0">
+                <a:latin typeface="Consolas"/>
+              </a:rPr>
+              <a:t>  </a:t>
+            </a:r>
+            <a:r>
+              <a:rPr sz="1400" dirty="0">
+                <a:latin typeface="Consolas"/>
+              </a:rPr>
+              <a:t>     └─────────────┘</a:t>
             </a:r>
           </a:p>
         </p:txBody>
@@ -4760,7 +7318,7 @@
 </file>
 
 <file path=ppt/slides/slide13.xml><?xml version="1.0" encoding="utf-8"?>
-<p:sld xmlns:a="http://schemas.openxmlformats.org/drawingml/2006/main" xmlns:p="http://schemas.openxmlformats.org/presentationml/2006/main" xmlns:r="http://schemas.openxmlformats.org/officeDocument/2006/relationships">
+<p:sld xmlns:a="http://schemas.openxmlformats.org/drawingml/2006/main" xmlns:r="http://schemas.openxmlformats.org/officeDocument/2006/relationships" xmlns:p="http://schemas.openxmlformats.org/presentationml/2006/main">
   <p:cSld>
     <p:spTree>
       <p:nvGrpSpPr>
@@ -4768,7 +7326,14 @@
         <p:cNvGrpSpPr/>
         <p:nvPr/>
       </p:nvGrpSpPr>
-      <p:grpSpPr/>
+      <p:grpSpPr>
+        <a:xfrm>
+          <a:off x="0" y="0"/>
+          <a:ext cx="0" cy="0"/>
+          <a:chOff x="0" y="0"/>
+          <a:chExt cx="0" cy="0"/>
+        </a:xfrm>
+      </p:grpSpPr>
       <p:sp>
         <p:nvSpPr>
           <p:cNvPr id="2" name="Title 1"/>
@@ -4777,6 +7342,29 @@
           </p:cNvSpPr>
           <p:nvPr>
             <p:ph type="ctrTitle"/>
+          </p:nvPr>
+        </p:nvSpPr>
+        <p:spPr/>
+        <p:txBody>
+          <a:bodyPr>
+            <a:normAutofit fontScale="90000"/>
+          </a:bodyPr>
+          <a:lstStyle/>
+          <a:p>
+            <a:r>
+              <a:t>4. Hexagonal Architecture (Ports &amp; Adapters)</a:t>
+            </a:r>
+          </a:p>
+        </p:txBody>
+      </p:sp>
+      <p:sp>
+        <p:nvSpPr>
+          <p:cNvPr id="3" name="Subtitle 2"/>
+          <p:cNvSpPr>
+            <a:spLocks noGrp="1"/>
+          </p:cNvSpPr>
+          <p:nvPr>
+            <p:ph type="subTitle" idx="1"/>
           </p:nvPr>
         </p:nvSpPr>
         <p:spPr/>
@@ -4784,27 +7372,8 @@
           <a:bodyPr/>
           <a:lstStyle/>
           <a:p>
-            <a:r>
-              <a:t>4. Hexagonal Architecture (Ports &amp; Adapters)</a:t>
-            </a:r>
-          </a:p>
-        </p:txBody>
-      </p:sp>
-      <p:sp>
-        <p:nvSpPr>
-          <p:cNvPr id="3" name="Subtitle 2"/>
-          <p:cNvSpPr>
-            <a:spLocks noGrp="1"/>
-          </p:cNvSpPr>
-          <p:nvPr>
-            <p:ph type="subTitle" idx="1"/>
-          </p:nvPr>
-        </p:nvSpPr>
-        <p:spPr/>
-        <p:txBody>
-          <a:bodyPr/>
-          <a:lstStyle/>
-          <a:p/>
+            <a:endParaRPr/>
+          </a:p>
         </p:txBody>
       </p:sp>
     </p:spTree>
@@ -4816,7 +7385,7 @@
 </file>
 
 <file path=ppt/slides/slide14.xml><?xml version="1.0" encoding="utf-8"?>
-<p:sld xmlns:a="http://schemas.openxmlformats.org/drawingml/2006/main" xmlns:p="http://schemas.openxmlformats.org/presentationml/2006/main" xmlns:r="http://schemas.openxmlformats.org/officeDocument/2006/relationships">
+<p:sld xmlns:a="http://schemas.openxmlformats.org/drawingml/2006/main" xmlns:r="http://schemas.openxmlformats.org/officeDocument/2006/relationships" xmlns:p="http://schemas.openxmlformats.org/presentationml/2006/main">
   <p:cSld>
     <p:spTree>
       <p:nvGrpSpPr>
@@ -4824,7 +7393,14 @@
         <p:cNvGrpSpPr/>
         <p:nvPr/>
       </p:nvGrpSpPr>
-      <p:grpSpPr/>
+      <p:grpSpPr>
+        <a:xfrm>
+          <a:off x="0" y="0"/>
+          <a:ext cx="0" cy="0"/>
+          <a:chOff x="0" y="0"/>
+          <a:chExt cx="0" cy="0"/>
+        </a:xfrm>
+      </p:grpSpPr>
       <p:sp>
         <p:nvSpPr>
           <p:cNvPr id="2" name="Title 1"/>
@@ -4841,8 +7417,22 @@
           <a:lstStyle/>
           <a:p>
             <a:r>
-              <a:t>Hexagonal Architecture - Schema</a:t>
-            </a:r>
+              <a:rPr dirty="0"/>
+              <a:t>Hexagonal Architecture </a:t>
+            </a:r>
+            <a:r>
+              <a:rPr lang="en-US" dirty="0"/>
+              <a:t>–</a:t>
+            </a:r>
+            <a:r>
+              <a:rPr dirty="0"/>
+              <a:t> </a:t>
+            </a:r>
+            <a:r>
+              <a:rPr lang="en-US" dirty="0"/>
+              <a:t>Ports &amp; Adapters</a:t>
+            </a:r>
+            <a:endParaRPr dirty="0"/>
           </a:p>
         </p:txBody>
       </p:sp>
@@ -4858,7 +7448,9 @@
         </p:nvSpPr>
         <p:spPr/>
         <p:txBody>
-          <a:bodyPr/>
+          <a:bodyPr>
+            <a:noAutofit/>
+          </a:bodyPr>
           <a:lstStyle/>
           <a:p>
             <a:pPr>
@@ -4872,194 +7464,458 @@
                 <a:spcPts val="0"/>
               </a:spcAft>
             </a:pPr>
-            <a:r>
-              <a:rPr sz="900">
-                <a:latin typeface="Consolas"/>
-              </a:rPr>
-              <a:t>Hexagonal Architecture</a:t>
-            </a:r>
-            <a:br/>
-            <a:r>
-              <a:rPr sz="900">
-                <a:latin typeface="Consolas"/>
-              </a:rPr>
-              <a:t>                           (Ports &amp; Adapters)</a:t>
-            </a:r>
-            <a:br/>
-            <a:br/>
-            <a:r>
-              <a:rPr sz="900">
-                <a:latin typeface="Consolas"/>
-              </a:rPr>
-              <a:t>    ┌─────────────────┐                    ┌─────────────────┐</a:t>
-            </a:r>
-            <a:br/>
-            <a:r>
-              <a:rPr sz="900">
-                <a:latin typeface="Consolas"/>
-              </a:rPr>
-              <a:t>    │   Web UI        │                    │   Database      │</a:t>
-            </a:r>
-            <a:br/>
-            <a:r>
-              <a:rPr sz="900">
-                <a:latin typeface="Consolas"/>
-              </a:rPr>
-              <a:t>    │   Adapter       │                    │   Adapter       │</a:t>
-            </a:r>
-            <a:br/>
-            <a:r>
-              <a:rPr sz="900">
-                <a:latin typeface="Consolas"/>
-              </a:rPr>
-              <a:t>    └─────┬───────────┘                    └─────┬───────────┘</a:t>
-            </a:r>
-            <a:br/>
-            <a:r>
-              <a:rPr sz="900">
-                <a:latin typeface="Consolas"/>
-              </a:rPr>
-              <a:t>          │                                      │</a:t>
-            </a:r>
-            <a:br/>
-            <a:r>
-              <a:rPr sz="900">
-                <a:latin typeface="Consolas"/>
-              </a:rPr>
-              <a:t>    ┌─────┴───────────┐                    ┌─────┴───────────┐</a:t>
-            </a:r>
-            <a:br/>
-            <a:r>
-              <a:rPr sz="900">
-                <a:latin typeface="Consolas"/>
-              </a:rPr>
-              <a:t>    │   HTTP Port     │                    │ Persistence Port│</a:t>
-            </a:r>
-            <a:br/>
-            <a:r>
-              <a:rPr sz="900">
-                <a:latin typeface="Consolas"/>
-              </a:rPr>
-              <a:t>    └─────┬───────────┘                    └─────┬───────────┘</a:t>
-            </a:r>
-            <a:br/>
-            <a:r>
-              <a:rPr sz="900">
-                <a:latin typeface="Consolas"/>
-              </a:rPr>
-              <a:t>          │                                      │</a:t>
-            </a:r>
-            <a:br/>
-            <a:r>
-              <a:rPr sz="900">
-                <a:latin typeface="Consolas"/>
-              </a:rPr>
-              <a:t>          │     ┌─────────────────────────┐      │</a:t>
-            </a:r>
-            <a:br/>
-            <a:r>
-              <a:rPr sz="900">
-                <a:latin typeface="Consolas"/>
-              </a:rPr>
-              <a:t>          └─────│                         │──────┘</a:t>
-            </a:r>
-            <a:br/>
-            <a:r>
-              <a:rPr sz="900">
+            <a:br>
+              <a:rPr sz="1200" dirty="0"/>
+            </a:br>
+            <a:r>
+              <a:rPr sz="1200" dirty="0">
+                <a:latin typeface="Consolas"/>
+              </a:rPr>
+              <a:t>    ┌─────────────────┐                  </a:t>
+            </a:r>
+            <a:r>
+              <a:rPr lang="en-US" sz="1200" dirty="0">
+                <a:latin typeface="Consolas"/>
+              </a:rPr>
+              <a:t>  </a:t>
+            </a:r>
+            <a:r>
+              <a:rPr sz="1200" dirty="0">
+                <a:latin typeface="Consolas"/>
+              </a:rPr>
+              <a:t>  ┌─────────────────┐</a:t>
+            </a:r>
+            <a:br>
+              <a:rPr sz="1200" dirty="0"/>
+            </a:br>
+            <a:r>
+              <a:rPr sz="1200" dirty="0">
+                <a:latin typeface="Consolas"/>
+              </a:rPr>
+              <a:t>    │   Web UI        │                 </a:t>
+            </a:r>
+            <a:r>
+              <a:rPr lang="en-US" sz="1200" dirty="0">
+                <a:latin typeface="Consolas"/>
+              </a:rPr>
+              <a:t>  </a:t>
+            </a:r>
+            <a:r>
+              <a:rPr sz="1200" dirty="0">
+                <a:latin typeface="Consolas"/>
+              </a:rPr>
+              <a:t>   │   Database      │</a:t>
+            </a:r>
+            <a:br>
+              <a:rPr sz="1200" dirty="0"/>
+            </a:br>
+            <a:r>
+              <a:rPr sz="1200" dirty="0">
+                <a:latin typeface="Consolas"/>
+              </a:rPr>
+              <a:t>    │   Adapter       │                </a:t>
+            </a:r>
+            <a:r>
+              <a:rPr lang="en-US" sz="1200" dirty="0">
+                <a:latin typeface="Consolas"/>
+              </a:rPr>
+              <a:t>  </a:t>
+            </a:r>
+            <a:r>
+              <a:rPr sz="1200" dirty="0">
+                <a:latin typeface="Consolas"/>
+              </a:rPr>
+              <a:t>    │   Adapter       │</a:t>
+            </a:r>
+            <a:br>
+              <a:rPr sz="1200" dirty="0"/>
+            </a:br>
+            <a:r>
+              <a:rPr sz="1200" dirty="0">
+                <a:latin typeface="Consolas"/>
+              </a:rPr>
+              <a:t>    └─────┬───────────┘                 </a:t>
+            </a:r>
+            <a:r>
+              <a:rPr lang="en-US" sz="1200" dirty="0">
+                <a:latin typeface="Consolas"/>
+              </a:rPr>
+              <a:t>  </a:t>
+            </a:r>
+            <a:r>
+              <a:rPr sz="1200" dirty="0">
+                <a:latin typeface="Consolas"/>
+              </a:rPr>
+              <a:t>   └─────┬───────────┘</a:t>
+            </a:r>
+            <a:br>
+              <a:rPr sz="1200" dirty="0"/>
+            </a:br>
+            <a:r>
+              <a:rPr sz="1200" dirty="0">
+                <a:latin typeface="Consolas"/>
+              </a:rPr>
+              <a:t>          │                            </a:t>
+            </a:r>
+            <a:r>
+              <a:rPr lang="en-US" sz="1200" dirty="0">
+                <a:latin typeface="Consolas"/>
+              </a:rPr>
+              <a:t>  </a:t>
+            </a:r>
+            <a:r>
+              <a:rPr sz="1200" dirty="0">
+                <a:latin typeface="Consolas"/>
+              </a:rPr>
+              <a:t>          │</a:t>
+            </a:r>
+            <a:br>
+              <a:rPr sz="1200" dirty="0"/>
+            </a:br>
+            <a:r>
+              <a:rPr sz="1200" dirty="0">
+                <a:latin typeface="Consolas"/>
+              </a:rPr>
+              <a:t>    ┌─────┴───────────┐                  </a:t>
+            </a:r>
+            <a:r>
+              <a:rPr lang="en-US" sz="1200" dirty="0">
+                <a:latin typeface="Consolas"/>
+              </a:rPr>
+              <a:t>  </a:t>
+            </a:r>
+            <a:r>
+              <a:rPr sz="1200" dirty="0">
+                <a:latin typeface="Consolas"/>
+              </a:rPr>
+              <a:t>  ┌─────┴───────────┐</a:t>
+            </a:r>
+            <a:br>
+              <a:rPr sz="1200" dirty="0"/>
+            </a:br>
+            <a:r>
+              <a:rPr sz="1200" dirty="0">
+                <a:latin typeface="Consolas"/>
+              </a:rPr>
+              <a:t>    │   HTTP Port     │                </a:t>
+            </a:r>
+            <a:r>
+              <a:rPr lang="en-US" sz="1200" dirty="0">
+                <a:latin typeface="Consolas"/>
+              </a:rPr>
+              <a:t>  </a:t>
+            </a:r>
+            <a:r>
+              <a:rPr sz="1200" dirty="0">
+                <a:latin typeface="Consolas"/>
+              </a:rPr>
+              <a:t>    │ Persistence Port│</a:t>
+            </a:r>
+            <a:br>
+              <a:rPr sz="1200" dirty="0"/>
+            </a:br>
+            <a:r>
+              <a:rPr sz="1200" dirty="0">
+                <a:latin typeface="Consolas"/>
+              </a:rPr>
+              <a:t>    └─────┬───────────┘                </a:t>
+            </a:r>
+            <a:r>
+              <a:rPr lang="en-US" sz="1200" dirty="0">
+                <a:latin typeface="Consolas"/>
+              </a:rPr>
+              <a:t>  </a:t>
+            </a:r>
+            <a:r>
+              <a:rPr sz="1200" dirty="0">
+                <a:latin typeface="Consolas"/>
+              </a:rPr>
+              <a:t>    └─────┬───────────┘</a:t>
+            </a:r>
+            <a:br>
+              <a:rPr sz="1200" dirty="0"/>
+            </a:br>
+            <a:r>
+              <a:rPr sz="1200" dirty="0">
+                <a:latin typeface="Consolas"/>
+              </a:rPr>
+              <a:t>          │                                 </a:t>
+            </a:r>
+            <a:r>
+              <a:rPr lang="en-US" sz="1200" dirty="0">
+                <a:latin typeface="Consolas"/>
+              </a:rPr>
+              <a:t>  </a:t>
+            </a:r>
+            <a:r>
+              <a:rPr sz="1200" dirty="0">
+                <a:latin typeface="Consolas"/>
+              </a:rPr>
+              <a:t>     │</a:t>
+            </a:r>
+            <a:br>
+              <a:rPr sz="1200" dirty="0"/>
+            </a:br>
+            <a:r>
+              <a:rPr sz="1200" dirty="0">
+                <a:latin typeface="Consolas"/>
+              </a:rPr>
+              <a:t>          │     ┌─────────────────────────┐   </a:t>
+            </a:r>
+            <a:r>
+              <a:rPr lang="en-US" sz="1200" dirty="0">
+                <a:latin typeface="Consolas"/>
+              </a:rPr>
+              <a:t>  </a:t>
+            </a:r>
+            <a:r>
+              <a:rPr sz="1200" dirty="0">
+                <a:latin typeface="Consolas"/>
+              </a:rPr>
+              <a:t>   │</a:t>
+            </a:r>
+            <a:br>
+              <a:rPr sz="1200" dirty="0"/>
+            </a:br>
+            <a:r>
+              <a:rPr sz="1200" dirty="0">
+                <a:latin typeface="Consolas"/>
+              </a:rPr>
+              <a:t>          └─────│                         │───</a:t>
+            </a:r>
+            <a:r>
+              <a:rPr lang="en-US" sz="1200" dirty="0">
+                <a:latin typeface="Consolas"/>
+              </a:rPr>
+              <a:t>──</a:t>
+            </a:r>
+            <a:r>
+              <a:rPr sz="1200" dirty="0">
+                <a:latin typeface="Consolas"/>
+              </a:rPr>
+              <a:t>───┘</a:t>
+            </a:r>
+            <a:br>
+              <a:rPr sz="1200" dirty="0"/>
+            </a:br>
+            <a:r>
+              <a:rPr sz="1200" dirty="0">
                 <a:latin typeface="Consolas"/>
               </a:rPr>
               <a:t>                │     Domain Core         │</a:t>
             </a:r>
-            <a:br/>
-            <a:r>
-              <a:rPr sz="900">
+            <a:br>
+              <a:rPr sz="1200" dirty="0"/>
+            </a:br>
+            <a:r>
+              <a:rPr sz="1200" dirty="0">
                 <a:latin typeface="Consolas"/>
               </a:rPr>
               <a:t>                │                         │</a:t>
             </a:r>
-            <a:br/>
-            <a:r>
-              <a:rPr sz="900">
+            <a:br>
+              <a:rPr sz="1200" dirty="0"/>
+            </a:br>
+            <a:r>
+              <a:rPr sz="1200" dirty="0">
                 <a:latin typeface="Consolas"/>
               </a:rPr>
               <a:t>    ┌───────────│   Business Logic        │──────────┐</a:t>
             </a:r>
-            <a:br/>
-            <a:r>
-              <a:rPr sz="900">
+            <a:br>
+              <a:rPr sz="1200" dirty="0"/>
+            </a:br>
+            <a:r>
+              <a:rPr sz="1200" dirty="0">
                 <a:latin typeface="Consolas"/>
               </a:rPr>
               <a:t>    │           │                         │          │</a:t>
             </a:r>
-            <a:br/>
-            <a:r>
-              <a:rPr sz="900">
+            <a:br>
+              <a:rPr sz="1200" dirty="0"/>
+            </a:br>
+            <a:r>
+              <a:rPr sz="1200" dirty="0">
                 <a:latin typeface="Consolas"/>
               </a:rPr>
               <a:t>    │           └─────────────────────────┘          │</a:t>
             </a:r>
-            <a:br/>
-            <a:r>
-              <a:rPr sz="900">
+            <a:br>
+              <a:rPr sz="1200" dirty="0"/>
+            </a:br>
+            <a:r>
+              <a:rPr sz="1200" dirty="0">
                 <a:latin typeface="Consolas"/>
               </a:rPr>
               <a:t>    │                                                │</a:t>
             </a:r>
-            <a:br/>
-            <a:r>
-              <a:rPr sz="900">
-                <a:latin typeface="Consolas"/>
-              </a:rPr>
-              <a:t>┌───┴───────────┐                            ┌─────┴───────────┐</a:t>
-            </a:r>
-            <a:br/>
-            <a:r>
-              <a:rPr sz="900">
-                <a:latin typeface="Consolas"/>
-              </a:rPr>
-              <a:t>│  API Port     │                            │   Event Port    │</a:t>
-            </a:r>
-            <a:br/>
-            <a:r>
-              <a:rPr sz="900">
-                <a:latin typeface="Consolas"/>
-              </a:rPr>
-              <a:t>└───┬───────────┘                            └─────┬───────────┘</a:t>
-            </a:r>
-            <a:br/>
-            <a:r>
-              <a:rPr sz="900">
-                <a:latin typeface="Consolas"/>
-              </a:rPr>
-              <a:t>    │                                              │</a:t>
-            </a:r>
-            <a:br/>
-            <a:r>
-              <a:rPr sz="900">
-                <a:latin typeface="Consolas"/>
-              </a:rPr>
-              <a:t>┌───┴───────────┐                            ┌─────┴───────────┐</a:t>
-            </a:r>
-            <a:br/>
-            <a:r>
-              <a:rPr sz="900">
-                <a:latin typeface="Consolas"/>
-              </a:rPr>
-              <a:t>│   REST API    │                            │   Message       │</a:t>
-            </a:r>
-            <a:br/>
-            <a:r>
-              <a:rPr sz="900">
-                <a:latin typeface="Consolas"/>
-              </a:rPr>
-              <a:t>│   Adapter     │                            │   Queue Adapter │</a:t>
-            </a:r>
-            <a:br/>
-            <a:r>
-              <a:rPr sz="900">
-                <a:latin typeface="Consolas"/>
-              </a:rPr>
-              <a:t>└───────────────┘                            └─────────────────┘</a:t>
+            <a:br>
+              <a:rPr sz="1200" dirty="0"/>
+            </a:br>
+            <a:r>
+              <a:rPr sz="1200" dirty="0">
+                <a:latin typeface="Consolas"/>
+              </a:rPr>
+              <a:t>┌───┴───────────┐                     </a:t>
+            </a:r>
+            <a:r>
+              <a:rPr lang="en-US" sz="1200" dirty="0">
+                <a:latin typeface="Consolas"/>
+              </a:rPr>
+              <a:t>  </a:t>
+            </a:r>
+            <a:r>
+              <a:rPr sz="1200" dirty="0">
+                <a:latin typeface="Consolas"/>
+              </a:rPr>
+              <a:t>       ┌─────┴───────────┐</a:t>
+            </a:r>
+            <a:br>
+              <a:rPr sz="1200" dirty="0"/>
+            </a:br>
+            <a:r>
+              <a:rPr sz="1200" dirty="0">
+                <a:latin typeface="Consolas"/>
+              </a:rPr>
+              <a:t>│  API Port     │                    </a:t>
+            </a:r>
+            <a:r>
+              <a:rPr lang="en-US" sz="1200" dirty="0">
+                <a:latin typeface="Consolas"/>
+              </a:rPr>
+              <a:t>  </a:t>
+            </a:r>
+            <a:r>
+              <a:rPr sz="1200" dirty="0">
+                <a:latin typeface="Consolas"/>
+              </a:rPr>
+              <a:t>        │   Event Port    │</a:t>
+            </a:r>
+            <a:br>
+              <a:rPr sz="1200" dirty="0"/>
+            </a:br>
+            <a:r>
+              <a:rPr sz="1200" dirty="0">
+                <a:latin typeface="Consolas"/>
+              </a:rPr>
+              <a:t>└───┬───────────┘                     </a:t>
+            </a:r>
+            <a:r>
+              <a:rPr lang="en-US" sz="1200" dirty="0">
+                <a:latin typeface="Consolas"/>
+              </a:rPr>
+              <a:t>  </a:t>
+            </a:r>
+            <a:r>
+              <a:rPr sz="1200" dirty="0">
+                <a:latin typeface="Consolas"/>
+              </a:rPr>
+              <a:t>       └─────┬───────────┘</a:t>
+            </a:r>
+            <a:br>
+              <a:rPr sz="1200" dirty="0"/>
+            </a:br>
+            <a:r>
+              <a:rPr sz="1200" dirty="0">
+                <a:latin typeface="Consolas"/>
+              </a:rPr>
+              <a:t>    │                                </a:t>
+            </a:r>
+            <a:r>
+              <a:rPr lang="en-US" sz="1200" dirty="0">
+                <a:latin typeface="Consolas"/>
+              </a:rPr>
+              <a:t>  </a:t>
+            </a:r>
+            <a:r>
+              <a:rPr sz="1200" dirty="0">
+                <a:latin typeface="Consolas"/>
+              </a:rPr>
+              <a:t>              │</a:t>
+            </a:r>
+            <a:br>
+              <a:rPr sz="1200" dirty="0"/>
+            </a:br>
+            <a:r>
+              <a:rPr sz="1200" dirty="0">
+                <a:latin typeface="Consolas"/>
+              </a:rPr>
+              <a:t>┌───┴───────────┐                     </a:t>
+            </a:r>
+            <a:r>
+              <a:rPr lang="en-US" sz="1200" dirty="0">
+                <a:latin typeface="Consolas"/>
+              </a:rPr>
+              <a:t>  </a:t>
+            </a:r>
+            <a:r>
+              <a:rPr sz="1200" dirty="0">
+                <a:latin typeface="Consolas"/>
+              </a:rPr>
+              <a:t>       ┌─────┴───────────┐</a:t>
+            </a:r>
+            <a:br>
+              <a:rPr sz="1200" dirty="0"/>
+            </a:br>
+            <a:r>
+              <a:rPr sz="1200" dirty="0">
+                <a:latin typeface="Consolas"/>
+              </a:rPr>
+              <a:t>│   REST API    │                      </a:t>
+            </a:r>
+            <a:r>
+              <a:rPr lang="en-US" sz="1200" dirty="0">
+                <a:latin typeface="Consolas"/>
+              </a:rPr>
+              <a:t>  </a:t>
+            </a:r>
+            <a:r>
+              <a:rPr sz="1200" dirty="0">
+                <a:latin typeface="Consolas"/>
+              </a:rPr>
+              <a:t>      │   Message       │</a:t>
+            </a:r>
+            <a:br>
+              <a:rPr sz="1200" dirty="0"/>
+            </a:br>
+            <a:r>
+              <a:rPr sz="1200" dirty="0">
+                <a:latin typeface="Consolas"/>
+              </a:rPr>
+              <a:t>│   Adapter     │                     </a:t>
+            </a:r>
+            <a:r>
+              <a:rPr lang="en-US" sz="1200" dirty="0">
+                <a:latin typeface="Consolas"/>
+              </a:rPr>
+              <a:t>  </a:t>
+            </a:r>
+            <a:r>
+              <a:rPr sz="1200" dirty="0">
+                <a:latin typeface="Consolas"/>
+              </a:rPr>
+              <a:t>       │   Queue Adapter │</a:t>
+            </a:r>
+            <a:br>
+              <a:rPr sz="1200" dirty="0"/>
+            </a:br>
+            <a:r>
+              <a:rPr sz="1200" dirty="0">
+                <a:latin typeface="Consolas"/>
+              </a:rPr>
+              <a:t>└───────────────┘                      </a:t>
+            </a:r>
+            <a:r>
+              <a:rPr lang="en-US" sz="1200" dirty="0">
+                <a:latin typeface="Consolas"/>
+              </a:rPr>
+              <a:t>  </a:t>
+            </a:r>
+            <a:r>
+              <a:rPr sz="1200" dirty="0">
+                <a:latin typeface="Consolas"/>
+              </a:rPr>
+              <a:t>      └─────────────────┘</a:t>
             </a:r>
           </a:p>
         </p:txBody>
@@ -5073,6 +7929,926 @@
 </file>
 
 <file path=ppt/slides/slide15.xml><?xml version="1.0" encoding="utf-8"?>
+<p:sld xmlns:a="http://schemas.openxmlformats.org/drawingml/2006/main" xmlns:r="http://schemas.openxmlformats.org/officeDocument/2006/relationships" xmlns:p="http://schemas.openxmlformats.org/presentationml/2006/main">
+  <p:cSld>
+    <p:spTree>
+      <p:nvGrpSpPr>
+        <p:cNvPr id="1" name=""/>
+        <p:cNvGrpSpPr/>
+        <p:nvPr/>
+      </p:nvGrpSpPr>
+      <p:grpSpPr>
+        <a:xfrm>
+          <a:off x="0" y="0"/>
+          <a:ext cx="0" cy="0"/>
+          <a:chOff x="0" y="0"/>
+          <a:chExt cx="0" cy="0"/>
+        </a:xfrm>
+      </p:grpSpPr>
+      <p:sp>
+        <p:nvSpPr>
+          <p:cNvPr id="2" name="Title 1"/>
+          <p:cNvSpPr>
+            <a:spLocks noGrp="1"/>
+          </p:cNvSpPr>
+          <p:nvPr>
+            <p:ph type="title"/>
+          </p:nvPr>
+        </p:nvSpPr>
+        <p:spPr/>
+        <p:txBody>
+          <a:bodyPr/>
+          <a:lstStyle/>
+          <a:p>
+            <a:r>
+              <a:rPr lang="en-US" dirty="0"/>
+              <a:t>Architectural Evolvement</a:t>
+            </a:r>
+            <a:endParaRPr dirty="0"/>
+          </a:p>
+        </p:txBody>
+      </p:sp>
+      <p:sp>
+        <p:nvSpPr>
+          <p:cNvPr id="3" name="Content Placeholder 2"/>
+          <p:cNvSpPr>
+            <a:spLocks noGrp="1"/>
+          </p:cNvSpPr>
+          <p:nvPr>
+            <p:ph idx="1"/>
+          </p:nvPr>
+        </p:nvSpPr>
+        <p:spPr/>
+        <p:txBody>
+          <a:bodyPr numCol="2">
+            <a:normAutofit/>
+          </a:bodyPr>
+          <a:lstStyle/>
+          <a:p>
+            <a:pPr>
+              <a:lnSpc>
+                <a:spcPct val="160000"/>
+              </a:lnSpc>
+            </a:pPr>
+            <a:r>
+              <a:rPr b="1" dirty="0"/>
+              <a:t>Start Simple (Layered):</a:t>
+            </a:r>
+          </a:p>
+          <a:p>
+            <a:pPr lvl="1">
+              <a:lnSpc>
+                <a:spcPct val="160000"/>
+              </a:lnSpc>
+            </a:pPr>
+            <a:r>
+              <a:rPr dirty="0" err="1"/>
+              <a:t>Prototypen</a:t>
+            </a:r>
+            <a:r>
+              <a:rPr dirty="0"/>
+              <a:t> und Proof-of-Concepts</a:t>
+            </a:r>
+          </a:p>
+          <a:p>
+            <a:pPr lvl="1">
+              <a:lnSpc>
+                <a:spcPct val="160000"/>
+              </a:lnSpc>
+            </a:pPr>
+            <a:r>
+              <a:rPr dirty="0"/>
+              <a:t>Kleine Teams (&lt;5 </a:t>
+            </a:r>
+            <a:r>
+              <a:rPr dirty="0" err="1"/>
+              <a:t>Entwickler</a:t>
+            </a:r>
+            <a:r>
+              <a:rPr dirty="0"/>
+              <a:t>)</a:t>
+            </a:r>
+          </a:p>
+          <a:p>
+            <a:pPr lvl="1">
+              <a:lnSpc>
+                <a:spcPct val="160000"/>
+              </a:lnSpc>
+            </a:pPr>
+            <a:r>
+              <a:rPr dirty="0" err="1"/>
+              <a:t>Einfache</a:t>
+            </a:r>
+            <a:r>
+              <a:rPr dirty="0"/>
+              <a:t> CRUD-</a:t>
+            </a:r>
+            <a:r>
+              <a:rPr dirty="0" err="1"/>
+              <a:t>Operationen</a:t>
+            </a:r>
+            <a:endParaRPr dirty="0"/>
+          </a:p>
+          <a:p>
+            <a:pPr>
+              <a:lnSpc>
+                <a:spcPct val="160000"/>
+              </a:lnSpc>
+            </a:pPr>
+            <a:r>
+              <a:rPr b="1" dirty="0"/>
+              <a:t>Scale Smart (Microservices):</a:t>
+            </a:r>
+          </a:p>
+          <a:p>
+            <a:pPr lvl="1">
+              <a:lnSpc>
+                <a:spcPct val="160000"/>
+              </a:lnSpc>
+            </a:pPr>
+            <a:r>
+              <a:rPr dirty="0" err="1"/>
+              <a:t>Große</a:t>
+            </a:r>
+            <a:r>
+              <a:rPr dirty="0"/>
+              <a:t> </a:t>
+            </a:r>
+            <a:r>
+              <a:rPr dirty="0" err="1"/>
+              <a:t>verteilte</a:t>
+            </a:r>
+            <a:r>
+              <a:rPr dirty="0"/>
+              <a:t> Teams</a:t>
+            </a:r>
+          </a:p>
+          <a:p>
+            <a:pPr lvl="1">
+              <a:lnSpc>
+                <a:spcPct val="160000"/>
+              </a:lnSpc>
+            </a:pPr>
+            <a:r>
+              <a:rPr dirty="0"/>
+              <a:t>Independent Service Scaling</a:t>
+            </a:r>
+          </a:p>
+          <a:p>
+            <a:pPr lvl="1">
+              <a:lnSpc>
+                <a:spcPct val="160000"/>
+              </a:lnSpc>
+            </a:pPr>
+            <a:r>
+              <a:rPr dirty="0"/>
+              <a:t>High Availability Requirements</a:t>
+            </a:r>
+          </a:p>
+          <a:p>
+            <a:pPr>
+              <a:lnSpc>
+                <a:spcPct val="160000"/>
+              </a:lnSpc>
+            </a:pPr>
+            <a:r>
+              <a:rPr b="1" dirty="0"/>
+              <a:t>Integrate Efficiently (Event-Driven):</a:t>
+            </a:r>
+          </a:p>
+          <a:p>
+            <a:pPr lvl="1">
+              <a:lnSpc>
+                <a:spcPct val="160000"/>
+              </a:lnSpc>
+            </a:pPr>
+            <a:r>
+              <a:rPr dirty="0"/>
+              <a:t>Real-time Processing</a:t>
+            </a:r>
+          </a:p>
+          <a:p>
+            <a:pPr lvl="1">
+              <a:lnSpc>
+                <a:spcPct val="160000"/>
+              </a:lnSpc>
+            </a:pPr>
+            <a:r>
+              <a:rPr dirty="0"/>
+              <a:t>System Integration</a:t>
+            </a:r>
+          </a:p>
+          <a:p>
+            <a:pPr>
+              <a:lnSpc>
+                <a:spcPct val="160000"/>
+              </a:lnSpc>
+            </a:pPr>
+            <a:r>
+              <a:rPr b="1" dirty="0"/>
+              <a:t>Design for Change (Hexagonal):</a:t>
+            </a:r>
+          </a:p>
+          <a:p>
+            <a:pPr lvl="1">
+              <a:lnSpc>
+                <a:spcPct val="160000"/>
+              </a:lnSpc>
+            </a:pPr>
+            <a:r>
+              <a:rPr dirty="0"/>
+              <a:t>Complex Domain Logic</a:t>
+            </a:r>
+          </a:p>
+          <a:p>
+            <a:pPr lvl="1">
+              <a:lnSpc>
+                <a:spcPct val="160000"/>
+              </a:lnSpc>
+            </a:pPr>
+            <a:r>
+              <a:rPr dirty="0"/>
+              <a:t>Testability Requirements</a:t>
+            </a:r>
+          </a:p>
+        </p:txBody>
+      </p:sp>
+    </p:spTree>
+  </p:cSld>
+  <p:clrMapOvr>
+    <a:masterClrMapping/>
+  </p:clrMapOvr>
+  <p:timing>
+    <p:tnLst>
+      <p:par>
+        <p:cTn id="1" dur="indefinite" restart="never" nodeType="tmRoot">
+          <p:childTnLst>
+            <p:seq concurrent="1" nextAc="seek">
+              <p:cTn id="2" dur="indefinite" nodeType="mainSeq">
+                <p:childTnLst>
+                  <p:par>
+                    <p:cTn id="3" fill="hold">
+                      <p:stCondLst>
+                        <p:cond delay="indefinite"/>
+                      </p:stCondLst>
+                      <p:childTnLst>
+                        <p:par>
+                          <p:cTn id="4" fill="hold">
+                            <p:stCondLst>
+                              <p:cond delay="0"/>
+                            </p:stCondLst>
+                            <p:childTnLst>
+                              <p:par>
+                                <p:cTn id="5" presetID="1" presetClass="entr" presetSubtype="0" fill="hold" nodeType="clickEffect">
+                                  <p:stCondLst>
+                                    <p:cond delay="0"/>
+                                  </p:stCondLst>
+                                  <p:childTnLst>
+                                    <p:set>
+                                      <p:cBhvr>
+                                        <p:cTn id="6" dur="1" fill="hold">
+                                          <p:stCondLst>
+                                            <p:cond delay="0"/>
+                                          </p:stCondLst>
+                                        </p:cTn>
+                                        <p:tgtEl>
+                                          <p:spTgt spid="3">
+                                            <p:txEl>
+                                              <p:pRg st="1" end="1"/>
+                                            </p:txEl>
+                                          </p:spTgt>
+                                        </p:tgtEl>
+                                        <p:attrNameLst>
+                                          <p:attrName>style.visibility</p:attrName>
+                                        </p:attrNameLst>
+                                      </p:cBhvr>
+                                      <p:to>
+                                        <p:strVal val="visible"/>
+                                      </p:to>
+                                    </p:set>
+                                  </p:childTnLst>
+                                </p:cTn>
+                              </p:par>
+                            </p:childTnLst>
+                          </p:cTn>
+                        </p:par>
+                      </p:childTnLst>
+                    </p:cTn>
+                  </p:par>
+                  <p:par>
+                    <p:cTn id="7" fill="hold">
+                      <p:stCondLst>
+                        <p:cond delay="indefinite"/>
+                      </p:stCondLst>
+                      <p:childTnLst>
+                        <p:par>
+                          <p:cTn id="8" fill="hold">
+                            <p:stCondLst>
+                              <p:cond delay="0"/>
+                            </p:stCondLst>
+                            <p:childTnLst>
+                              <p:par>
+                                <p:cTn id="9" presetID="1" presetClass="entr" presetSubtype="0" fill="hold" nodeType="clickEffect">
+                                  <p:stCondLst>
+                                    <p:cond delay="0"/>
+                                  </p:stCondLst>
+                                  <p:childTnLst>
+                                    <p:set>
+                                      <p:cBhvr>
+                                        <p:cTn id="10" dur="1" fill="hold">
+                                          <p:stCondLst>
+                                            <p:cond delay="0"/>
+                                          </p:stCondLst>
+                                        </p:cTn>
+                                        <p:tgtEl>
+                                          <p:spTgt spid="3">
+                                            <p:txEl>
+                                              <p:pRg st="2" end="2"/>
+                                            </p:txEl>
+                                          </p:spTgt>
+                                        </p:tgtEl>
+                                        <p:attrNameLst>
+                                          <p:attrName>style.visibility</p:attrName>
+                                        </p:attrNameLst>
+                                      </p:cBhvr>
+                                      <p:to>
+                                        <p:strVal val="visible"/>
+                                      </p:to>
+                                    </p:set>
+                                  </p:childTnLst>
+                                </p:cTn>
+                              </p:par>
+                            </p:childTnLst>
+                          </p:cTn>
+                        </p:par>
+                      </p:childTnLst>
+                    </p:cTn>
+                  </p:par>
+                  <p:par>
+                    <p:cTn id="11" fill="hold">
+                      <p:stCondLst>
+                        <p:cond delay="indefinite"/>
+                      </p:stCondLst>
+                      <p:childTnLst>
+                        <p:par>
+                          <p:cTn id="12" fill="hold">
+                            <p:stCondLst>
+                              <p:cond delay="0"/>
+                            </p:stCondLst>
+                            <p:childTnLst>
+                              <p:par>
+                                <p:cTn id="13" presetID="1" presetClass="entr" presetSubtype="0" fill="hold" nodeType="clickEffect">
+                                  <p:stCondLst>
+                                    <p:cond delay="0"/>
+                                  </p:stCondLst>
+                                  <p:childTnLst>
+                                    <p:set>
+                                      <p:cBhvr>
+                                        <p:cTn id="14" dur="1" fill="hold">
+                                          <p:stCondLst>
+                                            <p:cond delay="0"/>
+                                          </p:stCondLst>
+                                        </p:cTn>
+                                        <p:tgtEl>
+                                          <p:spTgt spid="3">
+                                            <p:txEl>
+                                              <p:pRg st="3" end="3"/>
+                                            </p:txEl>
+                                          </p:spTgt>
+                                        </p:tgtEl>
+                                        <p:attrNameLst>
+                                          <p:attrName>style.visibility</p:attrName>
+                                        </p:attrNameLst>
+                                      </p:cBhvr>
+                                      <p:to>
+                                        <p:strVal val="visible"/>
+                                      </p:to>
+                                    </p:set>
+                                  </p:childTnLst>
+                                </p:cTn>
+                              </p:par>
+                            </p:childTnLst>
+                          </p:cTn>
+                        </p:par>
+                      </p:childTnLst>
+                    </p:cTn>
+                  </p:par>
+                  <p:par>
+                    <p:cTn id="15" fill="hold">
+                      <p:stCondLst>
+                        <p:cond delay="indefinite"/>
+                      </p:stCondLst>
+                      <p:childTnLst>
+                        <p:par>
+                          <p:cTn id="16" fill="hold">
+                            <p:stCondLst>
+                              <p:cond delay="0"/>
+                            </p:stCondLst>
+                            <p:childTnLst>
+                              <p:par>
+                                <p:cTn id="17" presetID="1" presetClass="entr" presetSubtype="0" fill="hold" nodeType="clickEffect">
+                                  <p:stCondLst>
+                                    <p:cond delay="0"/>
+                                  </p:stCondLst>
+                                  <p:childTnLst>
+                                    <p:set>
+                                      <p:cBhvr>
+                                        <p:cTn id="18" dur="1" fill="hold">
+                                          <p:stCondLst>
+                                            <p:cond delay="0"/>
+                                          </p:stCondLst>
+                                        </p:cTn>
+                                        <p:tgtEl>
+                                          <p:spTgt spid="3">
+                                            <p:txEl>
+                                              <p:pRg st="4" end="4"/>
+                                            </p:txEl>
+                                          </p:spTgt>
+                                        </p:tgtEl>
+                                        <p:attrNameLst>
+                                          <p:attrName>style.visibility</p:attrName>
+                                        </p:attrNameLst>
+                                      </p:cBhvr>
+                                      <p:to>
+                                        <p:strVal val="visible"/>
+                                      </p:to>
+                                    </p:set>
+                                  </p:childTnLst>
+                                </p:cTn>
+                              </p:par>
+                            </p:childTnLst>
+                          </p:cTn>
+                        </p:par>
+                      </p:childTnLst>
+                    </p:cTn>
+                  </p:par>
+                  <p:par>
+                    <p:cTn id="19" fill="hold">
+                      <p:stCondLst>
+                        <p:cond delay="indefinite"/>
+                      </p:stCondLst>
+                      <p:childTnLst>
+                        <p:par>
+                          <p:cTn id="20" fill="hold">
+                            <p:stCondLst>
+                              <p:cond delay="0"/>
+                            </p:stCondLst>
+                            <p:childTnLst>
+                              <p:par>
+                                <p:cTn id="21" presetID="1" presetClass="entr" presetSubtype="0" fill="hold" nodeType="clickEffect">
+                                  <p:stCondLst>
+                                    <p:cond delay="0"/>
+                                  </p:stCondLst>
+                                  <p:childTnLst>
+                                    <p:set>
+                                      <p:cBhvr>
+                                        <p:cTn id="22" dur="1" fill="hold">
+                                          <p:stCondLst>
+                                            <p:cond delay="0"/>
+                                          </p:stCondLst>
+                                        </p:cTn>
+                                        <p:tgtEl>
+                                          <p:spTgt spid="3">
+                                            <p:txEl>
+                                              <p:pRg st="5" end="5"/>
+                                            </p:txEl>
+                                          </p:spTgt>
+                                        </p:tgtEl>
+                                        <p:attrNameLst>
+                                          <p:attrName>style.visibility</p:attrName>
+                                        </p:attrNameLst>
+                                      </p:cBhvr>
+                                      <p:to>
+                                        <p:strVal val="visible"/>
+                                      </p:to>
+                                    </p:set>
+                                  </p:childTnLst>
+                                </p:cTn>
+                              </p:par>
+                            </p:childTnLst>
+                          </p:cTn>
+                        </p:par>
+                      </p:childTnLst>
+                    </p:cTn>
+                  </p:par>
+                  <p:par>
+                    <p:cTn id="23" fill="hold">
+                      <p:stCondLst>
+                        <p:cond delay="indefinite"/>
+                      </p:stCondLst>
+                      <p:childTnLst>
+                        <p:par>
+                          <p:cTn id="24" fill="hold">
+                            <p:stCondLst>
+                              <p:cond delay="0"/>
+                            </p:stCondLst>
+                            <p:childTnLst>
+                              <p:par>
+                                <p:cTn id="25" presetID="1" presetClass="entr" presetSubtype="0" fill="hold" nodeType="clickEffect">
+                                  <p:stCondLst>
+                                    <p:cond delay="0"/>
+                                  </p:stCondLst>
+                                  <p:childTnLst>
+                                    <p:set>
+                                      <p:cBhvr>
+                                        <p:cTn id="26" dur="1" fill="hold">
+                                          <p:stCondLst>
+                                            <p:cond delay="0"/>
+                                          </p:stCondLst>
+                                        </p:cTn>
+                                        <p:tgtEl>
+                                          <p:spTgt spid="3">
+                                            <p:txEl>
+                                              <p:pRg st="6" end="6"/>
+                                            </p:txEl>
+                                          </p:spTgt>
+                                        </p:tgtEl>
+                                        <p:attrNameLst>
+                                          <p:attrName>style.visibility</p:attrName>
+                                        </p:attrNameLst>
+                                      </p:cBhvr>
+                                      <p:to>
+                                        <p:strVal val="visible"/>
+                                      </p:to>
+                                    </p:set>
+                                  </p:childTnLst>
+                                </p:cTn>
+                              </p:par>
+                            </p:childTnLst>
+                          </p:cTn>
+                        </p:par>
+                      </p:childTnLst>
+                    </p:cTn>
+                  </p:par>
+                  <p:par>
+                    <p:cTn id="27" fill="hold">
+                      <p:stCondLst>
+                        <p:cond delay="indefinite"/>
+                      </p:stCondLst>
+                      <p:childTnLst>
+                        <p:par>
+                          <p:cTn id="28" fill="hold">
+                            <p:stCondLst>
+                              <p:cond delay="0"/>
+                            </p:stCondLst>
+                            <p:childTnLst>
+                              <p:par>
+                                <p:cTn id="29" presetID="1" presetClass="entr" presetSubtype="0" fill="hold" nodeType="clickEffect">
+                                  <p:stCondLst>
+                                    <p:cond delay="0"/>
+                                  </p:stCondLst>
+                                  <p:childTnLst>
+                                    <p:set>
+                                      <p:cBhvr>
+                                        <p:cTn id="30" dur="1" fill="hold">
+                                          <p:stCondLst>
+                                            <p:cond delay="0"/>
+                                          </p:stCondLst>
+                                        </p:cTn>
+                                        <p:tgtEl>
+                                          <p:spTgt spid="3">
+                                            <p:txEl>
+                                              <p:pRg st="7" end="7"/>
+                                            </p:txEl>
+                                          </p:spTgt>
+                                        </p:tgtEl>
+                                        <p:attrNameLst>
+                                          <p:attrName>style.visibility</p:attrName>
+                                        </p:attrNameLst>
+                                      </p:cBhvr>
+                                      <p:to>
+                                        <p:strVal val="visible"/>
+                                      </p:to>
+                                    </p:set>
+                                  </p:childTnLst>
+                                </p:cTn>
+                              </p:par>
+                            </p:childTnLst>
+                          </p:cTn>
+                        </p:par>
+                      </p:childTnLst>
+                    </p:cTn>
+                  </p:par>
+                  <p:par>
+                    <p:cTn id="31" fill="hold">
+                      <p:stCondLst>
+                        <p:cond delay="indefinite"/>
+                      </p:stCondLst>
+                      <p:childTnLst>
+                        <p:par>
+                          <p:cTn id="32" fill="hold">
+                            <p:stCondLst>
+                              <p:cond delay="0"/>
+                            </p:stCondLst>
+                            <p:childTnLst>
+                              <p:par>
+                                <p:cTn id="33" presetID="1" presetClass="entr" presetSubtype="0" fill="hold" nodeType="clickEffect">
+                                  <p:stCondLst>
+                                    <p:cond delay="0"/>
+                                  </p:stCondLst>
+                                  <p:childTnLst>
+                                    <p:set>
+                                      <p:cBhvr>
+                                        <p:cTn id="34" dur="1" fill="hold">
+                                          <p:stCondLst>
+                                            <p:cond delay="0"/>
+                                          </p:stCondLst>
+                                        </p:cTn>
+                                        <p:tgtEl>
+                                          <p:spTgt spid="3">
+                                            <p:txEl>
+                                              <p:pRg st="8" end="8"/>
+                                            </p:txEl>
+                                          </p:spTgt>
+                                        </p:tgtEl>
+                                        <p:attrNameLst>
+                                          <p:attrName>style.visibility</p:attrName>
+                                        </p:attrNameLst>
+                                      </p:cBhvr>
+                                      <p:to>
+                                        <p:strVal val="visible"/>
+                                      </p:to>
+                                    </p:set>
+                                  </p:childTnLst>
+                                </p:cTn>
+                              </p:par>
+                            </p:childTnLst>
+                          </p:cTn>
+                        </p:par>
+                      </p:childTnLst>
+                    </p:cTn>
+                  </p:par>
+                  <p:par>
+                    <p:cTn id="35" fill="hold">
+                      <p:stCondLst>
+                        <p:cond delay="indefinite"/>
+                      </p:stCondLst>
+                      <p:childTnLst>
+                        <p:par>
+                          <p:cTn id="36" fill="hold">
+                            <p:stCondLst>
+                              <p:cond delay="0"/>
+                            </p:stCondLst>
+                            <p:childTnLst>
+                              <p:par>
+                                <p:cTn id="37" presetID="1" presetClass="entr" presetSubtype="0" fill="hold" nodeType="clickEffect">
+                                  <p:stCondLst>
+                                    <p:cond delay="0"/>
+                                  </p:stCondLst>
+                                  <p:childTnLst>
+                                    <p:set>
+                                      <p:cBhvr>
+                                        <p:cTn id="38" dur="1" fill="hold">
+                                          <p:stCondLst>
+                                            <p:cond delay="0"/>
+                                          </p:stCondLst>
+                                        </p:cTn>
+                                        <p:tgtEl>
+                                          <p:spTgt spid="3">
+                                            <p:txEl>
+                                              <p:pRg st="9" end="9"/>
+                                            </p:txEl>
+                                          </p:spTgt>
+                                        </p:tgtEl>
+                                        <p:attrNameLst>
+                                          <p:attrName>style.visibility</p:attrName>
+                                        </p:attrNameLst>
+                                      </p:cBhvr>
+                                      <p:to>
+                                        <p:strVal val="visible"/>
+                                      </p:to>
+                                    </p:set>
+                                  </p:childTnLst>
+                                </p:cTn>
+                              </p:par>
+                            </p:childTnLst>
+                          </p:cTn>
+                        </p:par>
+                      </p:childTnLst>
+                    </p:cTn>
+                  </p:par>
+                  <p:par>
+                    <p:cTn id="39" fill="hold">
+                      <p:stCondLst>
+                        <p:cond delay="indefinite"/>
+                      </p:stCondLst>
+                      <p:childTnLst>
+                        <p:par>
+                          <p:cTn id="40" fill="hold">
+                            <p:stCondLst>
+                              <p:cond delay="0"/>
+                            </p:stCondLst>
+                            <p:childTnLst>
+                              <p:par>
+                                <p:cTn id="41" presetID="1" presetClass="entr" presetSubtype="0" fill="hold" nodeType="clickEffect">
+                                  <p:stCondLst>
+                                    <p:cond delay="0"/>
+                                  </p:stCondLst>
+                                  <p:childTnLst>
+                                    <p:set>
+                                      <p:cBhvr>
+                                        <p:cTn id="42" dur="1" fill="hold">
+                                          <p:stCondLst>
+                                            <p:cond delay="0"/>
+                                          </p:stCondLst>
+                                        </p:cTn>
+                                        <p:tgtEl>
+                                          <p:spTgt spid="3">
+                                            <p:txEl>
+                                              <p:pRg st="10" end="10"/>
+                                            </p:txEl>
+                                          </p:spTgt>
+                                        </p:tgtEl>
+                                        <p:attrNameLst>
+                                          <p:attrName>style.visibility</p:attrName>
+                                        </p:attrNameLst>
+                                      </p:cBhvr>
+                                      <p:to>
+                                        <p:strVal val="visible"/>
+                                      </p:to>
+                                    </p:set>
+                                  </p:childTnLst>
+                                </p:cTn>
+                              </p:par>
+                            </p:childTnLst>
+                          </p:cTn>
+                        </p:par>
+                      </p:childTnLst>
+                    </p:cTn>
+                  </p:par>
+                  <p:par>
+                    <p:cTn id="43" fill="hold">
+                      <p:stCondLst>
+                        <p:cond delay="indefinite"/>
+                      </p:stCondLst>
+                      <p:childTnLst>
+                        <p:par>
+                          <p:cTn id="44" fill="hold">
+                            <p:stCondLst>
+                              <p:cond delay="0"/>
+                            </p:stCondLst>
+                            <p:childTnLst>
+                              <p:par>
+                                <p:cTn id="45" presetID="1" presetClass="entr" presetSubtype="0" fill="hold" nodeType="clickEffect">
+                                  <p:stCondLst>
+                                    <p:cond delay="0"/>
+                                  </p:stCondLst>
+                                  <p:childTnLst>
+                                    <p:set>
+                                      <p:cBhvr>
+                                        <p:cTn id="46" dur="1" fill="hold">
+                                          <p:stCondLst>
+                                            <p:cond delay="0"/>
+                                          </p:stCondLst>
+                                        </p:cTn>
+                                        <p:tgtEl>
+                                          <p:spTgt spid="3">
+                                            <p:txEl>
+                                              <p:pRg st="11" end="11"/>
+                                            </p:txEl>
+                                          </p:spTgt>
+                                        </p:tgtEl>
+                                        <p:attrNameLst>
+                                          <p:attrName>style.visibility</p:attrName>
+                                        </p:attrNameLst>
+                                      </p:cBhvr>
+                                      <p:to>
+                                        <p:strVal val="visible"/>
+                                      </p:to>
+                                    </p:set>
+                                  </p:childTnLst>
+                                </p:cTn>
+                              </p:par>
+                            </p:childTnLst>
+                          </p:cTn>
+                        </p:par>
+                      </p:childTnLst>
+                    </p:cTn>
+                  </p:par>
+                  <p:par>
+                    <p:cTn id="47" fill="hold">
+                      <p:stCondLst>
+                        <p:cond delay="indefinite"/>
+                      </p:stCondLst>
+                      <p:childTnLst>
+                        <p:par>
+                          <p:cTn id="48" fill="hold">
+                            <p:stCondLst>
+                              <p:cond delay="0"/>
+                            </p:stCondLst>
+                            <p:childTnLst>
+                              <p:par>
+                                <p:cTn id="49" presetID="1" presetClass="entr" presetSubtype="0" fill="hold" nodeType="clickEffect">
+                                  <p:stCondLst>
+                                    <p:cond delay="0"/>
+                                  </p:stCondLst>
+                                  <p:childTnLst>
+                                    <p:set>
+                                      <p:cBhvr>
+                                        <p:cTn id="50" dur="1" fill="hold">
+                                          <p:stCondLst>
+                                            <p:cond delay="0"/>
+                                          </p:stCondLst>
+                                        </p:cTn>
+                                        <p:tgtEl>
+                                          <p:spTgt spid="3">
+                                            <p:txEl>
+                                              <p:pRg st="12" end="12"/>
+                                            </p:txEl>
+                                          </p:spTgt>
+                                        </p:tgtEl>
+                                        <p:attrNameLst>
+                                          <p:attrName>style.visibility</p:attrName>
+                                        </p:attrNameLst>
+                                      </p:cBhvr>
+                                      <p:to>
+                                        <p:strVal val="visible"/>
+                                      </p:to>
+                                    </p:set>
+                                  </p:childTnLst>
+                                </p:cTn>
+                              </p:par>
+                            </p:childTnLst>
+                          </p:cTn>
+                        </p:par>
+                      </p:childTnLst>
+                    </p:cTn>
+                  </p:par>
+                  <p:par>
+                    <p:cTn id="51" fill="hold">
+                      <p:stCondLst>
+                        <p:cond delay="indefinite"/>
+                      </p:stCondLst>
+                      <p:childTnLst>
+                        <p:par>
+                          <p:cTn id="52" fill="hold">
+                            <p:stCondLst>
+                              <p:cond delay="0"/>
+                            </p:stCondLst>
+                            <p:childTnLst>
+                              <p:par>
+                                <p:cTn id="53" presetID="1" presetClass="entr" presetSubtype="0" fill="hold" nodeType="clickEffect">
+                                  <p:stCondLst>
+                                    <p:cond delay="0"/>
+                                  </p:stCondLst>
+                                  <p:childTnLst>
+                                    <p:set>
+                                      <p:cBhvr>
+                                        <p:cTn id="54" dur="1" fill="hold">
+                                          <p:stCondLst>
+                                            <p:cond delay="0"/>
+                                          </p:stCondLst>
+                                        </p:cTn>
+                                        <p:tgtEl>
+                                          <p:spTgt spid="3">
+                                            <p:txEl>
+                                              <p:pRg st="13" end="13"/>
+                                            </p:txEl>
+                                          </p:spTgt>
+                                        </p:tgtEl>
+                                        <p:attrNameLst>
+                                          <p:attrName>style.visibility</p:attrName>
+                                        </p:attrNameLst>
+                                      </p:cBhvr>
+                                      <p:to>
+                                        <p:strVal val="visible"/>
+                                      </p:to>
+                                    </p:set>
+                                  </p:childTnLst>
+                                </p:cTn>
+                              </p:par>
+                            </p:childTnLst>
+                          </p:cTn>
+                        </p:par>
+                      </p:childTnLst>
+                    </p:cTn>
+                  </p:par>
+                </p:childTnLst>
+              </p:cTn>
+              <p:prevCondLst>
+                <p:cond evt="onPrev" delay="0">
+                  <p:tgtEl>
+                    <p:sldTgt/>
+                  </p:tgtEl>
+                </p:cond>
+              </p:prevCondLst>
+              <p:nextCondLst>
+                <p:cond evt="onNext" delay="0">
+                  <p:tgtEl>
+                    <p:sldTgt/>
+                  </p:tgtEl>
+                </p:cond>
+              </p:nextCondLst>
+            </p:seq>
+          </p:childTnLst>
+        </p:cTn>
+      </p:par>
+    </p:tnLst>
+  </p:timing>
+</p:sld>
+</file>
+
+<file path=ppt/slides/slide16.xml><?xml version="1.0" encoding="utf-8"?>
 <p:sld xmlns:a="http://schemas.openxmlformats.org/drawingml/2006/main" xmlns:p="http://schemas.openxmlformats.org/presentationml/2006/main" xmlns:r="http://schemas.openxmlformats.org/officeDocument/2006/relationships">
   <p:cSld>
     <p:spTree>
@@ -5097,114 +8873,1197 @@
           <a:bodyPr/>
           <a:lstStyle/>
           <a:p>
-            <a:r>
-              <a:t>Summary - Part 1</a:t>
-            </a:r>
-          </a:p>
-        </p:txBody>
-      </p:sp>
-      <p:sp>
-        <p:nvSpPr>
-          <p:cNvPr id="3" name="Content Placeholder 2"/>
-          <p:cNvSpPr>
-            <a:spLocks noGrp="1"/>
-          </p:cNvSpPr>
-          <p:nvPr>
-            <p:ph idx="1"/>
+            <a:pPr>
+              <a:defRPr sz="3200" b="1"/>
+            </a:pPr>
+            <a:r>
+              <a:t>Layered Architecture (Schichtarchitektur) - Vorteile/Nachteile</a:t>
+            </a:r>
+          </a:p>
+        </p:txBody>
+      </p:sp>
+      <p:sp>
+        <p:nvSpPr>
+          <p:cNvPr id="3" name="Text Placeholder 2"/>
+          <p:cNvSpPr>
+            <a:spLocks noGrp="1"/>
+          </p:cNvSpPr>
+          <p:nvPr>
+            <p:ph type="body" idx="1"/>
           </p:nvPr>
         </p:nvSpPr>
         <p:spPr/>
         <p:txBody>
           <a:bodyPr/>
           <a:lstStyle/>
-          <a:p>
-            <a:pPr/>
-            <a:r>
-              <a:t>**Pattern Selection Guide:**</a:t>
-            </a:r>
-          </a:p>
-          <a:p>
-            <a:pPr/>
-            <a:r>
-              <a:t>**Start Simple (Layered):**</a:t>
-            </a:r>
-          </a:p>
-          <a:p>
-            <a:pPr lvl="1"/>
-            <a:r>
-              <a:t>• Prototypen und Proof-of-Concepts</a:t>
-            </a:r>
-          </a:p>
-          <a:p>
-            <a:pPr lvl="1"/>
-            <a:r>
-              <a:t>• Kleine Teams (&lt;5 Entwickler)</a:t>
-            </a:r>
-          </a:p>
-          <a:p>
-            <a:pPr lvl="1"/>
-            <a:r>
-              <a:t>• Einfache CRUD-Operationen</a:t>
-            </a:r>
-          </a:p>
-          <a:p>
-            <a:pPr/>
-            <a:r>
-              <a:t>**Scale Smart (Microservices):**</a:t>
-            </a:r>
-          </a:p>
-          <a:p>
-            <a:pPr lvl="1"/>
-            <a:r>
-              <a:t>• Große verteilte Teams</a:t>
-            </a:r>
-          </a:p>
-          <a:p>
-            <a:pPr lvl="1"/>
-            <a:r>
-              <a:t>• Independent Service Scaling</a:t>
-            </a:r>
-          </a:p>
-          <a:p>
-            <a:pPr lvl="1"/>
-            <a:r>
-              <a:t>• High Availability Requirements</a:t>
-            </a:r>
-          </a:p>
-          <a:p>
-            <a:pPr/>
-            <a:r>
-              <a:t>**Integrate Efficiently (Event-Driven):**</a:t>
-            </a:r>
-          </a:p>
-          <a:p>
-            <a:pPr lvl="1"/>
-            <a:r>
-              <a:t>• Real-time Processing</a:t>
-            </a:r>
-          </a:p>
-          <a:p>
-            <a:pPr lvl="1"/>
-            <a:r>
-              <a:t>• System Integration</a:t>
-            </a:r>
-          </a:p>
-          <a:p>
-            <a:pPr/>
-            <a:r>
-              <a:t>**Design for Change (Hexagonal):**</a:t>
-            </a:r>
-          </a:p>
-          <a:p>
-            <a:pPr lvl="1"/>
-            <a:r>
-              <a:t>• Complex Domain Logic</a:t>
-            </a:r>
-          </a:p>
-          <a:p>
-            <a:pPr lvl="1"/>
-            <a:r>
-              <a:t>• Testability Requirements</a:t>
+          <a:p/>
+        </p:txBody>
+      </p:sp>
+      <p:sp>
+        <p:nvSpPr>
+          <p:cNvPr id="4" name="Content Placeholder 3"/>
+          <p:cNvSpPr>
+            <a:spLocks noGrp="1"/>
+          </p:cNvSpPr>
+          <p:nvPr>
+            <p:ph idx="2" sz="half"/>
+          </p:nvPr>
+        </p:nvSpPr>
+        <p:spPr/>
+        <p:txBody>
+          <a:bodyPr/>
+          <a:lstStyle/>
+          <a:p/>
+        </p:txBody>
+      </p:sp>
+      <p:sp>
+        <p:nvSpPr>
+          <p:cNvPr id="5" name="Text Placeholder 4"/>
+          <p:cNvSpPr>
+            <a:spLocks noGrp="1"/>
+          </p:cNvSpPr>
+          <p:nvPr>
+            <p:ph type="body" idx="3" sz="quarter"/>
+          </p:nvPr>
+        </p:nvSpPr>
+        <p:spPr/>
+        <p:txBody>
+          <a:bodyPr/>
+          <a:lstStyle/>
+          <a:p/>
+        </p:txBody>
+      </p:sp>
+      <p:sp>
+        <p:nvSpPr>
+          <p:cNvPr id="6" name="Content Placeholder 5"/>
+          <p:cNvSpPr>
+            <a:spLocks noGrp="1"/>
+          </p:cNvSpPr>
+          <p:nvPr>
+            <p:ph idx="4" sz="quarter"/>
+          </p:nvPr>
+        </p:nvSpPr>
+        <p:spPr/>
+        <p:txBody>
+          <a:bodyPr/>
+          <a:lstStyle/>
+          <a:p/>
+        </p:txBody>
+      </p:sp>
+      <p:sp>
+        <p:nvSpPr>
+          <p:cNvPr id="7" name="TextBox 6"/>
+          <p:cNvSpPr txBox="1"/>
+          <p:nvPr/>
+        </p:nvSpPr>
+        <p:spPr>
+          <a:xfrm>
+            <a:off x="457200" y="1371600"/>
+            <a:ext cx="4114800" cy="4572000"/>
+          </a:xfrm>
+          <a:prstGeom prst="rect">
+            <a:avLst/>
+          </a:prstGeom>
+          <a:noFill/>
+        </p:spPr>
+        <p:txBody>
+          <a:bodyPr wrap="square">
+            <a:spAutoFit/>
+          </a:bodyPr>
+          <a:lstStyle/>
+          <a:p>
+            <a:pPr>
+              <a:defRPr sz="2400" b="1">
+                <a:solidFill>
+                  <a:srgbClr val="009900"/>
+                </a:solidFill>
+              </a:defRPr>
+            </a:pPr>
+            <a:r>
+              <a:t>Vorteile ✅</a:t>
+            </a:r>
+          </a:p>
+          <a:p>
+            <a:pPr>
+              <a:defRPr sz="1600"/>
+            </a:pPr>
+            <a:r>
+              <a:t>• **Klare Trennung der Verantwortlichkeiten**</a:t>
+            </a:r>
+          </a:p>
+          <a:p>
+            <a:pPr>
+              <a:defRPr sz="1600"/>
+            </a:pPr>
+            <a:r>
+              <a:t>• **Einfache Testbarkeit jeder Schicht**</a:t>
+            </a:r>
+          </a:p>
+          <a:p>
+            <a:pPr>
+              <a:defRPr sz="1600"/>
+            </a:pPr>
+            <a:r>
+              <a:t>• **Bewährtes Pattern mit hoher Entwickler-Akzeptanz**</a:t>
+            </a:r>
+          </a:p>
+          <a:p>
+            <a:pPr>
+              <a:defRPr sz="1600"/>
+            </a:pPr>
+            <a:r>
+              <a:t>• **Gute Performance bei einfachen CRUD-Operationen**</a:t>
+            </a:r>
+          </a:p>
+        </p:txBody>
+      </p:sp>
+      <p:sp>
+        <p:nvSpPr>
+          <p:cNvPr id="8" name="TextBox 7"/>
+          <p:cNvSpPr txBox="1"/>
+          <p:nvPr/>
+        </p:nvSpPr>
+        <p:spPr>
+          <a:xfrm>
+            <a:off x="4572000" y="1371600"/>
+            <a:ext cx="4114800" cy="4572000"/>
+          </a:xfrm>
+          <a:prstGeom prst="rect">
+            <a:avLst/>
+          </a:prstGeom>
+          <a:noFill/>
+        </p:spPr>
+        <p:txBody>
+          <a:bodyPr wrap="square">
+            <a:spAutoFit/>
+          </a:bodyPr>
+          <a:lstStyle/>
+          <a:p>
+            <a:pPr>
+              <a:defRPr sz="2400" b="1">
+                <a:solidFill>
+                  <a:srgbClr val="CC0000"/>
+                </a:solidFill>
+              </a:defRPr>
+            </a:pPr>
+            <a:r>
+              <a:t>Nachteile ❌</a:t>
+            </a:r>
+          </a:p>
+          <a:p>
+            <a:pPr>
+              <a:defRPr sz="1600"/>
+            </a:pPr>
+            <a:r>
+              <a:t>• **Monolithischer Charakter erschwert Skalierung**</a:t>
+            </a:r>
+          </a:p>
+          <a:p>
+            <a:pPr>
+              <a:defRPr sz="1600"/>
+            </a:pPr>
+            <a:r>
+              <a:t>• **Änderungen propagieren durch alle Schichten**</a:t>
+            </a:r>
+          </a:p>
+          <a:p>
+            <a:pPr>
+              <a:defRPr sz="1600"/>
+            </a:pPr>
+            <a:r>
+              <a:t>• **Datenbankschema-Changes beeinflussen alle Layer**</a:t>
+            </a:r>
+          </a:p>
+          <a:p>
+            <a:pPr>
+              <a:defRPr sz="1600"/>
+            </a:pPr>
+            <a:r>
+              <a:t>• **Schwierig für komplexe Domain Logic**</a:t>
+            </a:r>
+          </a:p>
+        </p:txBody>
+      </p:sp>
+      <p:sp>
+        <p:nvSpPr>
+          <p:cNvPr id="9" name="TextBox 8"/>
+          <p:cNvSpPr txBox="1"/>
+          <p:nvPr/>
+        </p:nvSpPr>
+        <p:spPr>
+          <a:xfrm>
+            <a:off x="457200" y="5486400"/>
+            <a:ext cx="8229600" cy="914400"/>
+          </a:xfrm>
+          <a:prstGeom prst="rect">
+            <a:avLst/>
+          </a:prstGeom>
+          <a:noFill/>
+        </p:spPr>
+        <p:txBody>
+          <a:bodyPr wrap="square">
+            <a:spAutoFit/>
+          </a:bodyPr>
+          <a:lstStyle/>
+          <a:p>
+            <a:pPr>
+              <a:defRPr sz="2000" b="1">
+                <a:solidFill>
+                  <a:srgbClr val="FF9900"/>
+                </a:solidFill>
+              </a:defRPr>
+            </a:pPr>
+            <a:r>
+              <a:t>Production Considerations ⚠️</a:t>
+            </a:r>
+          </a:p>
+          <a:p>
+            <a:pPr>
+              <a:defRPr sz="1400"/>
+            </a:pPr>
+            <a:r>
+              <a:t>• **Horizontal Skalierung nur als Ganzes möglich**</a:t>
+            </a:r>
+          </a:p>
+          <a:p>
+            <a:pPr>
+              <a:defRPr sz="1400"/>
+            </a:pPr>
+            <a:r>
+              <a:t>• **Session-Management zwischen Layers erforderlich**</a:t>
+            </a:r>
+          </a:p>
+          <a:p>
+            <a:pPr>
+              <a:defRPr sz="1400"/>
+            </a:pPr>
+            <a:r>
+              <a:t>• **Monitoring muss alle Schichten umfassen**</a:t>
+            </a:r>
+          </a:p>
+        </p:txBody>
+      </p:sp>
+    </p:spTree>
+  </p:cSld>
+  <p:clrMapOvr>
+    <a:masterClrMapping/>
+  </p:clrMapOvr>
+</p:sld>
+</file>
+
+<file path=ppt/slides/slide17.xml><?xml version="1.0" encoding="utf-8"?>
+<p:sld xmlns:a="http://schemas.openxmlformats.org/drawingml/2006/main" xmlns:p="http://schemas.openxmlformats.org/presentationml/2006/main" xmlns:r="http://schemas.openxmlformats.org/officeDocument/2006/relationships">
+  <p:cSld>
+    <p:spTree>
+      <p:nvGrpSpPr>
+        <p:cNvPr id="1" name=""/>
+        <p:cNvGrpSpPr/>
+        <p:nvPr/>
+      </p:nvGrpSpPr>
+      <p:grpSpPr/>
+      <p:sp>
+        <p:nvSpPr>
+          <p:cNvPr id="2" name="Title 1"/>
+          <p:cNvSpPr>
+            <a:spLocks noGrp="1"/>
+          </p:cNvSpPr>
+          <p:nvPr>
+            <p:ph type="title"/>
+          </p:nvPr>
+        </p:nvSpPr>
+        <p:spPr/>
+        <p:txBody>
+          <a:bodyPr/>
+          <a:lstStyle/>
+          <a:p>
+            <a:pPr>
+              <a:defRPr sz="3200" b="1"/>
+            </a:pPr>
+            <a:r>
+              <a:t>Microservices Architecture - Vorteile/Nachteile</a:t>
+            </a:r>
+          </a:p>
+        </p:txBody>
+      </p:sp>
+      <p:sp>
+        <p:nvSpPr>
+          <p:cNvPr id="3" name="Text Placeholder 2"/>
+          <p:cNvSpPr>
+            <a:spLocks noGrp="1"/>
+          </p:cNvSpPr>
+          <p:nvPr>
+            <p:ph type="body" idx="1"/>
+          </p:nvPr>
+        </p:nvSpPr>
+        <p:spPr/>
+        <p:txBody>
+          <a:bodyPr/>
+          <a:lstStyle/>
+          <a:p/>
+        </p:txBody>
+      </p:sp>
+      <p:sp>
+        <p:nvSpPr>
+          <p:cNvPr id="4" name="Content Placeholder 3"/>
+          <p:cNvSpPr>
+            <a:spLocks noGrp="1"/>
+          </p:cNvSpPr>
+          <p:nvPr>
+            <p:ph idx="2" sz="half"/>
+          </p:nvPr>
+        </p:nvSpPr>
+        <p:spPr/>
+        <p:txBody>
+          <a:bodyPr/>
+          <a:lstStyle/>
+          <a:p/>
+        </p:txBody>
+      </p:sp>
+      <p:sp>
+        <p:nvSpPr>
+          <p:cNvPr id="5" name="Text Placeholder 4"/>
+          <p:cNvSpPr>
+            <a:spLocks noGrp="1"/>
+          </p:cNvSpPr>
+          <p:nvPr>
+            <p:ph type="body" idx="3" sz="quarter"/>
+          </p:nvPr>
+        </p:nvSpPr>
+        <p:spPr/>
+        <p:txBody>
+          <a:bodyPr/>
+          <a:lstStyle/>
+          <a:p/>
+        </p:txBody>
+      </p:sp>
+      <p:sp>
+        <p:nvSpPr>
+          <p:cNvPr id="6" name="Content Placeholder 5"/>
+          <p:cNvSpPr>
+            <a:spLocks noGrp="1"/>
+          </p:cNvSpPr>
+          <p:nvPr>
+            <p:ph idx="4" sz="quarter"/>
+          </p:nvPr>
+        </p:nvSpPr>
+        <p:spPr/>
+        <p:txBody>
+          <a:bodyPr/>
+          <a:lstStyle/>
+          <a:p/>
+        </p:txBody>
+      </p:sp>
+      <p:sp>
+        <p:nvSpPr>
+          <p:cNvPr id="7" name="TextBox 6"/>
+          <p:cNvSpPr txBox="1"/>
+          <p:nvPr/>
+        </p:nvSpPr>
+        <p:spPr>
+          <a:xfrm>
+            <a:off x="457200" y="1371600"/>
+            <a:ext cx="4114800" cy="4572000"/>
+          </a:xfrm>
+          <a:prstGeom prst="rect">
+            <a:avLst/>
+          </a:prstGeom>
+          <a:noFill/>
+        </p:spPr>
+        <p:txBody>
+          <a:bodyPr wrap="square">
+            <a:spAutoFit/>
+          </a:bodyPr>
+          <a:lstStyle/>
+          <a:p>
+            <a:pPr>
+              <a:defRPr sz="2400" b="1">
+                <a:solidFill>
+                  <a:srgbClr val="009900"/>
+                </a:solidFill>
+              </a:defRPr>
+            </a:pPr>
+            <a:r>
+              <a:t>Vorteile ✅</a:t>
+            </a:r>
+          </a:p>
+          <a:p>
+            <a:pPr>
+              <a:defRPr sz="1600"/>
+            </a:pPr>
+            <a:r>
+              <a:t>• **Lose Kopplung zwischen Komponenten**</a:t>
+            </a:r>
+          </a:p>
+          <a:p>
+            <a:pPr>
+              <a:defRPr sz="1600"/>
+            </a:pPr>
+            <a:r>
+              <a:t>• **Asynchrone Verarbeitung für bessere Performance**</a:t>
+            </a:r>
+          </a:p>
+          <a:p>
+            <a:pPr>
+              <a:defRPr sz="1600"/>
+            </a:pPr>
+            <a:r>
+              <a:t>• **Event Replay für Debugging und Analytics möglich**</a:t>
+            </a:r>
+          </a:p>
+          <a:p>
+            <a:pPr>
+              <a:defRPr sz="1600"/>
+            </a:pPr>
+            <a:r>
+              <a:t>• **Einfaches Hinzufügen neuer Event Consumer**</a:t>
+            </a:r>
+          </a:p>
+        </p:txBody>
+      </p:sp>
+      <p:sp>
+        <p:nvSpPr>
+          <p:cNvPr id="8" name="TextBox 7"/>
+          <p:cNvSpPr txBox="1"/>
+          <p:nvPr/>
+        </p:nvSpPr>
+        <p:spPr>
+          <a:xfrm>
+            <a:off x="4572000" y="1371600"/>
+            <a:ext cx="4114800" cy="4572000"/>
+          </a:xfrm>
+          <a:prstGeom prst="rect">
+            <a:avLst/>
+          </a:prstGeom>
+          <a:noFill/>
+        </p:spPr>
+        <p:txBody>
+          <a:bodyPr wrap="square">
+            <a:spAutoFit/>
+          </a:bodyPr>
+          <a:lstStyle/>
+          <a:p>
+            <a:pPr>
+              <a:defRPr sz="2400" b="1">
+                <a:solidFill>
+                  <a:srgbClr val="CC0000"/>
+                </a:solidFill>
+              </a:defRPr>
+            </a:pPr>
+            <a:r>
+              <a:t>Nachteile ❌</a:t>
+            </a:r>
+          </a:p>
+          <a:p>
+            <a:pPr>
+              <a:defRPr sz="1600"/>
+            </a:pPr>
+            <a:r>
+              <a:t>• **Eventually Consistent Data**</a:t>
+            </a:r>
+          </a:p>
+          <a:p>
+            <a:pPr>
+              <a:defRPr sz="1600"/>
+            </a:pPr>
+            <a:r>
+              <a:t>• **Komplexere Error Handling (Dead Letter Queues)**</a:t>
+            </a:r>
+          </a:p>
+          <a:p>
+            <a:pPr>
+              <a:defRPr sz="1600"/>
+            </a:pPr>
+            <a:r>
+              <a:t>• **Event Schema Evolution herausfordernd**</a:t>
+            </a:r>
+          </a:p>
+          <a:p>
+            <a:pPr>
+              <a:defRPr sz="1600"/>
+            </a:pPr>
+            <a:r>
+              <a:t>• **Debugging von Event Flows schwierig**</a:t>
+            </a:r>
+          </a:p>
+        </p:txBody>
+      </p:sp>
+      <p:sp>
+        <p:nvSpPr>
+          <p:cNvPr id="9" name="TextBox 8"/>
+          <p:cNvSpPr txBox="1"/>
+          <p:nvPr/>
+        </p:nvSpPr>
+        <p:spPr>
+          <a:xfrm>
+            <a:off x="457200" y="5486400"/>
+            <a:ext cx="8229600" cy="914400"/>
+          </a:xfrm>
+          <a:prstGeom prst="rect">
+            <a:avLst/>
+          </a:prstGeom>
+          <a:noFill/>
+        </p:spPr>
+        <p:txBody>
+          <a:bodyPr wrap="square">
+            <a:spAutoFit/>
+          </a:bodyPr>
+          <a:lstStyle/>
+          <a:p>
+            <a:pPr>
+              <a:defRPr sz="2000" b="1">
+                <a:solidFill>
+                  <a:srgbClr val="FF9900"/>
+                </a:solidFill>
+              </a:defRPr>
+            </a:pPr>
+            <a:r>
+              <a:t>Production Considerations ⚠️</a:t>
+            </a:r>
+          </a:p>
+          <a:p>
+            <a:pPr>
+              <a:defRPr sz="1400"/>
+            </a:pPr>
+            <a:r>
+              <a:t>• **Event Schema Registry für Compatibility**</a:t>
+            </a:r>
+          </a:p>
+          <a:p>
+            <a:pPr>
+              <a:defRPr sz="1400"/>
+            </a:pPr>
+            <a:r>
+              <a:t>• **Dead Letter Queue für Failed Events**</a:t>
+            </a:r>
+          </a:p>
+          <a:p>
+            <a:pPr>
+              <a:defRPr sz="1400"/>
+            </a:pPr>
+            <a:r>
+              <a:t>• **Event Compression für hohe Throughput**</a:t>
+            </a:r>
+          </a:p>
+          <a:p>
+            <a:pPr>
+              <a:defRPr sz="1400"/>
+            </a:pPr>
+            <a:r>
+              <a:t>• **Monitoring von Queue Depths und Lag**</a:t>
+            </a:r>
+          </a:p>
+        </p:txBody>
+      </p:sp>
+    </p:spTree>
+  </p:cSld>
+  <p:clrMapOvr>
+    <a:masterClrMapping/>
+  </p:clrMapOvr>
+</p:sld>
+</file>
+
+<file path=ppt/slides/slide18.xml><?xml version="1.0" encoding="utf-8"?>
+<p:sld xmlns:a="http://schemas.openxmlformats.org/drawingml/2006/main" xmlns:p="http://schemas.openxmlformats.org/presentationml/2006/main" xmlns:r="http://schemas.openxmlformats.org/officeDocument/2006/relationships">
+  <p:cSld>
+    <p:spTree>
+      <p:nvGrpSpPr>
+        <p:cNvPr id="1" name=""/>
+        <p:cNvGrpSpPr/>
+        <p:nvPr/>
+      </p:nvGrpSpPr>
+      <p:grpSpPr/>
+      <p:sp>
+        <p:nvSpPr>
+          <p:cNvPr id="2" name="Title 1"/>
+          <p:cNvSpPr>
+            <a:spLocks noGrp="1"/>
+          </p:cNvSpPr>
+          <p:nvPr>
+            <p:ph type="title"/>
+          </p:nvPr>
+        </p:nvSpPr>
+        <p:spPr/>
+        <p:txBody>
+          <a:bodyPr/>
+          <a:lstStyle/>
+          <a:p>
+            <a:pPr>
+              <a:defRPr sz="3200" b="1"/>
+            </a:pPr>
+            <a:r>
+              <a:t>Hexagonal Architecture (Ports &amp; Adapters) - Vorteile/Nachteile</a:t>
+            </a:r>
+          </a:p>
+        </p:txBody>
+      </p:sp>
+      <p:sp>
+        <p:nvSpPr>
+          <p:cNvPr id="3" name="Text Placeholder 2"/>
+          <p:cNvSpPr>
+            <a:spLocks noGrp="1"/>
+          </p:cNvSpPr>
+          <p:nvPr>
+            <p:ph type="body" idx="1"/>
+          </p:nvPr>
+        </p:nvSpPr>
+        <p:spPr/>
+        <p:txBody>
+          <a:bodyPr/>
+          <a:lstStyle/>
+          <a:p/>
+        </p:txBody>
+      </p:sp>
+      <p:sp>
+        <p:nvSpPr>
+          <p:cNvPr id="4" name="Content Placeholder 3"/>
+          <p:cNvSpPr>
+            <a:spLocks noGrp="1"/>
+          </p:cNvSpPr>
+          <p:nvPr>
+            <p:ph idx="2" sz="half"/>
+          </p:nvPr>
+        </p:nvSpPr>
+        <p:spPr/>
+        <p:txBody>
+          <a:bodyPr/>
+          <a:lstStyle/>
+          <a:p/>
+        </p:txBody>
+      </p:sp>
+      <p:sp>
+        <p:nvSpPr>
+          <p:cNvPr id="5" name="Text Placeholder 4"/>
+          <p:cNvSpPr>
+            <a:spLocks noGrp="1"/>
+          </p:cNvSpPr>
+          <p:nvPr>
+            <p:ph type="body" idx="3" sz="quarter"/>
+          </p:nvPr>
+        </p:nvSpPr>
+        <p:spPr/>
+        <p:txBody>
+          <a:bodyPr/>
+          <a:lstStyle/>
+          <a:p/>
+        </p:txBody>
+      </p:sp>
+      <p:sp>
+        <p:nvSpPr>
+          <p:cNvPr id="6" name="Content Placeholder 5"/>
+          <p:cNvSpPr>
+            <a:spLocks noGrp="1"/>
+          </p:cNvSpPr>
+          <p:nvPr>
+            <p:ph idx="4" sz="quarter"/>
+          </p:nvPr>
+        </p:nvSpPr>
+        <p:spPr/>
+        <p:txBody>
+          <a:bodyPr/>
+          <a:lstStyle/>
+          <a:p/>
+        </p:txBody>
+      </p:sp>
+      <p:sp>
+        <p:nvSpPr>
+          <p:cNvPr id="7" name="TextBox 6"/>
+          <p:cNvSpPr txBox="1"/>
+          <p:nvPr/>
+        </p:nvSpPr>
+        <p:spPr>
+          <a:xfrm>
+            <a:off x="457200" y="1371600"/>
+            <a:ext cx="4114800" cy="4572000"/>
+          </a:xfrm>
+          <a:prstGeom prst="rect">
+            <a:avLst/>
+          </a:prstGeom>
+          <a:noFill/>
+        </p:spPr>
+        <p:txBody>
+          <a:bodyPr wrap="square">
+            <a:spAutoFit/>
+          </a:bodyPr>
+          <a:lstStyle/>
+          <a:p>
+            <a:pPr>
+              <a:defRPr sz="2400" b="1">
+                <a:solidFill>
+                  <a:srgbClr val="009900"/>
+                </a:solidFill>
+              </a:defRPr>
+            </a:pPr>
+            <a:r>
+              <a:t>Vorteile ✅</a:t>
+            </a:r>
+          </a:p>
+          <a:p>
+            <a:pPr>
+              <a:defRPr sz="1600"/>
+            </a:pPr>
+            <a:r>
+              <a:t>• **Domain Logic vollständig isoliert von Infrastructure**</a:t>
+            </a:r>
+          </a:p>
+          <a:p>
+            <a:pPr>
+              <a:defRPr sz="1600"/>
+            </a:pPr>
+            <a:r>
+              <a:t>• **Austauschbare External Dependencies (Database, APIs)**</a:t>
+            </a:r>
+          </a:p>
+          <a:p>
+            <a:pPr>
+              <a:defRPr sz="1600"/>
+            </a:pPr>
+            <a:r>
+              <a:t>• **Excellente Testbarkeit durch Dependency Inversion**</a:t>
+            </a:r>
+          </a:p>
+          <a:p>
+            <a:pPr>
+              <a:defRPr sz="1600"/>
+            </a:pPr>
+            <a:r>
+              <a:t>• **Framework-agnostic Domain Layer**</a:t>
+            </a:r>
+          </a:p>
+        </p:txBody>
+      </p:sp>
+      <p:sp>
+        <p:nvSpPr>
+          <p:cNvPr id="8" name="TextBox 7"/>
+          <p:cNvSpPr txBox="1"/>
+          <p:nvPr/>
+        </p:nvSpPr>
+        <p:spPr>
+          <a:xfrm>
+            <a:off x="4572000" y="1371600"/>
+            <a:ext cx="4114800" cy="4572000"/>
+          </a:xfrm>
+          <a:prstGeom prst="rect">
+            <a:avLst/>
+          </a:prstGeom>
+          <a:noFill/>
+        </p:spPr>
+        <p:txBody>
+          <a:bodyPr wrap="square">
+            <a:spAutoFit/>
+          </a:bodyPr>
+          <a:lstStyle/>
+          <a:p>
+            <a:pPr>
+              <a:defRPr sz="2400" b="1">
+                <a:solidFill>
+                  <a:srgbClr val="CC0000"/>
+                </a:solidFill>
+              </a:defRPr>
+            </a:pPr>
+            <a:r>
+              <a:t>Nachteile ❌</a:t>
+            </a:r>
+          </a:p>
+          <a:p>
+            <a:pPr>
+              <a:defRPr sz="1600"/>
+            </a:pPr>
+            <a:r>
+              <a:t>• **Initial Setup komplexer als Layer Architecture**</a:t>
+            </a:r>
+          </a:p>
+          <a:p>
+            <a:pPr>
+              <a:defRPr sz="1600"/>
+            </a:pPr>
+            <a:r>
+              <a:t>• **Mehr Abstractions und Interfaces**</a:t>
+            </a:r>
+          </a:p>
+          <a:p>
+            <a:pPr>
+              <a:defRPr sz="1600"/>
+            </a:pPr>
+            <a:r>
+              <a:t>• **Kann Over-Engineering für einfache CRUD Apps sein**</a:t>
+            </a:r>
+          </a:p>
+          <a:p>
+            <a:pPr>
+              <a:defRPr sz="1600"/>
+            </a:pPr>
+            <a:r>
+              <a:t>• **Team muss Dependency Inversion verstehen**</a:t>
+            </a:r>
+          </a:p>
+        </p:txBody>
+      </p:sp>
+      <p:sp>
+        <p:nvSpPr>
+          <p:cNvPr id="9" name="TextBox 8"/>
+          <p:cNvSpPr txBox="1"/>
+          <p:nvPr/>
+        </p:nvSpPr>
+        <p:spPr>
+          <a:xfrm>
+            <a:off x="457200" y="5486400"/>
+            <a:ext cx="8229600" cy="914400"/>
+          </a:xfrm>
+          <a:prstGeom prst="rect">
+            <a:avLst/>
+          </a:prstGeom>
+          <a:noFill/>
+        </p:spPr>
+        <p:txBody>
+          <a:bodyPr wrap="square">
+            <a:spAutoFit/>
+          </a:bodyPr>
+          <a:lstStyle/>
+          <a:p>
+            <a:pPr>
+              <a:defRPr sz="2000" b="1">
+                <a:solidFill>
+                  <a:srgbClr val="FF9900"/>
+                </a:solidFill>
+              </a:defRPr>
+            </a:pPr>
+            <a:r>
+              <a:t>Production Considerations ⚠️</a:t>
+            </a:r>
+          </a:p>
+          <a:p>
+            <a:pPr>
+              <a:defRPr sz="1400"/>
+            </a:pPr>
+            <a:r>
+              <a:t>• **Adapter Health Checks für alle External Systems**</a:t>
+            </a:r>
+          </a:p>
+          <a:p>
+            <a:pPr>
+              <a:defRPr sz="1400"/>
+            </a:pPr>
+            <a:r>
+              <a:t>• **Circuit Breaker Pattern für External Dependencies**</a:t>
+            </a:r>
+          </a:p>
+          <a:p>
+            <a:pPr>
+              <a:defRPr sz="1400"/>
+            </a:pPr>
+            <a:r>
+              <a:t>• **Adapter-specific Monitoring und Alerting**</a:t>
+            </a:r>
+          </a:p>
+          <a:p>
+            <a:pPr>
+              <a:defRPr sz="1400"/>
+            </a:pPr>
+            <a:r>
+              <a:t>• **Configuration für Adapter Switching**</a:t>
+            </a:r>
+          </a:p>
+        </p:txBody>
+      </p:sp>
+    </p:spTree>
+  </p:cSld>
+  <p:clrMapOvr>
+    <a:masterClrMapping/>
+  </p:clrMapOvr>
+</p:sld>
+</file>
+
+<file path=ppt/slides/slide19.xml><?xml version="1.0" encoding="utf-8"?>
+<p:sld xmlns:a="http://schemas.openxmlformats.org/drawingml/2006/main" xmlns:p="http://schemas.openxmlformats.org/presentationml/2006/main" xmlns:r="http://schemas.openxmlformats.org/officeDocument/2006/relationships">
+  <p:cSld>
+    <p:spTree>
+      <p:nvGrpSpPr>
+        <p:cNvPr id="1" name=""/>
+        <p:cNvGrpSpPr/>
+        <p:nvPr/>
+      </p:nvGrpSpPr>
+      <p:grpSpPr/>
+      <p:sp>
+        <p:nvSpPr>
+          <p:cNvPr id="2" name="Title 1"/>
+          <p:cNvSpPr>
+            <a:spLocks noGrp="1"/>
+          </p:cNvSpPr>
+          <p:nvPr>
+            <p:ph type="title"/>
+          </p:nvPr>
+        </p:nvSpPr>
+        <p:spPr/>
+        <p:txBody>
+          <a:bodyPr/>
+          <a:lstStyle/>
+          <a:p>
+            <a:pPr>
+              <a:defRPr sz="3200" b="1"/>
+            </a:pPr>
+            <a:r>
+              <a:t>Event-Driven Architecture - Vorteile/Nachteile</a:t>
+            </a:r>
+          </a:p>
+        </p:txBody>
+      </p:sp>
+      <p:sp>
+        <p:nvSpPr>
+          <p:cNvPr id="3" name="Text Placeholder 2"/>
+          <p:cNvSpPr>
+            <a:spLocks noGrp="1"/>
+          </p:cNvSpPr>
+          <p:nvPr>
+            <p:ph type="body" idx="1"/>
+          </p:nvPr>
+        </p:nvSpPr>
+        <p:spPr/>
+        <p:txBody>
+          <a:bodyPr/>
+          <a:lstStyle/>
+          <a:p/>
+        </p:txBody>
+      </p:sp>
+      <p:sp>
+        <p:nvSpPr>
+          <p:cNvPr id="4" name="Content Placeholder 3"/>
+          <p:cNvSpPr>
+            <a:spLocks noGrp="1"/>
+          </p:cNvSpPr>
+          <p:nvPr>
+            <p:ph idx="2" sz="half"/>
+          </p:nvPr>
+        </p:nvSpPr>
+        <p:spPr/>
+        <p:txBody>
+          <a:bodyPr/>
+          <a:lstStyle/>
+          <a:p/>
+        </p:txBody>
+      </p:sp>
+      <p:sp>
+        <p:nvSpPr>
+          <p:cNvPr id="5" name="Text Placeholder 4"/>
+          <p:cNvSpPr>
+            <a:spLocks noGrp="1"/>
+          </p:cNvSpPr>
+          <p:nvPr>
+            <p:ph type="body" idx="3" sz="quarter"/>
+          </p:nvPr>
+        </p:nvSpPr>
+        <p:spPr/>
+        <p:txBody>
+          <a:bodyPr/>
+          <a:lstStyle/>
+          <a:p/>
+        </p:txBody>
+      </p:sp>
+      <p:sp>
+        <p:nvSpPr>
+          <p:cNvPr id="6" name="Content Placeholder 5"/>
+          <p:cNvSpPr>
+            <a:spLocks noGrp="1"/>
+          </p:cNvSpPr>
+          <p:nvPr>
+            <p:ph idx="4" sz="quarter"/>
+          </p:nvPr>
+        </p:nvSpPr>
+        <p:spPr/>
+        <p:txBody>
+          <a:bodyPr/>
+          <a:lstStyle/>
+          <a:p/>
+        </p:txBody>
+      </p:sp>
+      <p:sp>
+        <p:nvSpPr>
+          <p:cNvPr id="7" name="TextBox 6"/>
+          <p:cNvSpPr txBox="1"/>
+          <p:nvPr/>
+        </p:nvSpPr>
+        <p:spPr>
+          <a:xfrm>
+            <a:off x="457200" y="1371600"/>
+            <a:ext cx="4114800" cy="4572000"/>
+          </a:xfrm>
+          <a:prstGeom prst="rect">
+            <a:avLst/>
+          </a:prstGeom>
+          <a:noFill/>
+        </p:spPr>
+        <p:txBody>
+          <a:bodyPr wrap="square">
+            <a:spAutoFit/>
+          </a:bodyPr>
+          <a:lstStyle/>
+          <a:p>
+            <a:pPr>
+              <a:defRPr sz="2400" b="1">
+                <a:solidFill>
+                  <a:srgbClr val="009900"/>
+                </a:solidFill>
+              </a:defRPr>
+            </a:pPr>
+            <a:r>
+              <a:t>Vorteile ✅</a:t>
+            </a:r>
+          </a:p>
+          <a:p>
+            <a:pPr>
+              <a:defRPr sz="1600"/>
+            </a:pPr>
+            <a:r>
+              <a:t>• **Klare Trennung der Verantwortlichkeiten**</a:t>
+            </a:r>
+          </a:p>
+          <a:p>
+            <a:pPr>
+              <a:defRPr sz="1600"/>
+            </a:pPr>
+            <a:r>
+              <a:t>• **Einfache Testbarkeit jeder Schicht**</a:t>
+            </a:r>
+          </a:p>
+          <a:p>
+            <a:pPr>
+              <a:defRPr sz="1600"/>
+            </a:pPr>
+            <a:r>
+              <a:t>• **Bewährtes Pattern mit hoher Entwickler-Akzeptanz**</a:t>
+            </a:r>
+          </a:p>
+          <a:p>
+            <a:pPr>
+              <a:defRPr sz="1600"/>
+            </a:pPr>
+            <a:r>
+              <a:t>• **Gute Performance bei einfachen CRUD-Operationen**</a:t>
+            </a:r>
+          </a:p>
+        </p:txBody>
+      </p:sp>
+      <p:sp>
+        <p:nvSpPr>
+          <p:cNvPr id="8" name="TextBox 7"/>
+          <p:cNvSpPr txBox="1"/>
+          <p:nvPr/>
+        </p:nvSpPr>
+        <p:spPr>
+          <a:xfrm>
+            <a:off x="4572000" y="1371600"/>
+            <a:ext cx="4114800" cy="4572000"/>
+          </a:xfrm>
+          <a:prstGeom prst="rect">
+            <a:avLst/>
+          </a:prstGeom>
+          <a:noFill/>
+        </p:spPr>
+        <p:txBody>
+          <a:bodyPr wrap="square">
+            <a:spAutoFit/>
+          </a:bodyPr>
+          <a:lstStyle/>
+          <a:p>
+            <a:pPr>
+              <a:defRPr sz="2400" b="1">
+                <a:solidFill>
+                  <a:srgbClr val="CC0000"/>
+                </a:solidFill>
+              </a:defRPr>
+            </a:pPr>
+            <a:r>
+              <a:t>Nachteile ❌</a:t>
+            </a:r>
+          </a:p>
+          <a:p>
+            <a:pPr>
+              <a:defRPr sz="1600"/>
+            </a:pPr>
+            <a:r>
+              <a:t>• **Monolithischer Charakter erschwert Skalierung**</a:t>
+            </a:r>
+          </a:p>
+          <a:p>
+            <a:pPr>
+              <a:defRPr sz="1600"/>
+            </a:pPr>
+            <a:r>
+              <a:t>• **Änderungen propagieren durch alle Schichten**</a:t>
+            </a:r>
+          </a:p>
+          <a:p>
+            <a:pPr>
+              <a:defRPr sz="1600"/>
+            </a:pPr>
+            <a:r>
+              <a:t>• **Datenbankschema-Changes beeinflussen alle Layer**</a:t>
+            </a:r>
+          </a:p>
+          <a:p>
+            <a:pPr>
+              <a:defRPr sz="1600"/>
+            </a:pPr>
+            <a:r>
+              <a:t>• **Schwierig für komplexe Domain Logic**</a:t>
+            </a:r>
+          </a:p>
+        </p:txBody>
+      </p:sp>
+      <p:sp>
+        <p:nvSpPr>
+          <p:cNvPr id="9" name="TextBox 8"/>
+          <p:cNvSpPr txBox="1"/>
+          <p:nvPr/>
+        </p:nvSpPr>
+        <p:spPr>
+          <a:xfrm>
+            <a:off x="457200" y="5486400"/>
+            <a:ext cx="8229600" cy="914400"/>
+          </a:xfrm>
+          <a:prstGeom prst="rect">
+            <a:avLst/>
+          </a:prstGeom>
+          <a:noFill/>
+        </p:spPr>
+        <p:txBody>
+          <a:bodyPr wrap="square">
+            <a:spAutoFit/>
+          </a:bodyPr>
+          <a:lstStyle/>
+          <a:p>
+            <a:pPr>
+              <a:defRPr sz="2000" b="1">
+                <a:solidFill>
+                  <a:srgbClr val="FF9900"/>
+                </a:solidFill>
+              </a:defRPr>
+            </a:pPr>
+            <a:r>
+              <a:t>Production Considerations ⚠️</a:t>
+            </a:r>
+          </a:p>
+          <a:p>
+            <a:pPr>
+              <a:defRPr sz="1400"/>
+            </a:pPr>
+            <a:r>
+              <a:t>• **Horizontal Skalierung nur als Ganzes möglich**</a:t>
+            </a:r>
+          </a:p>
+          <a:p>
+            <a:pPr>
+              <a:defRPr sz="1400"/>
+            </a:pPr>
+            <a:r>
+              <a:t>• **Session-Management zwischen Layers erforderlich**</a:t>
+            </a:r>
+          </a:p>
+          <a:p>
+            <a:pPr>
+              <a:defRPr sz="1400"/>
+            </a:pPr>
+            <a:r>
+              <a:t>• **Monitoring muss alle Schichten umfassen**</a:t>
             </a:r>
           </a:p>
         </p:txBody>
@@ -5218,7 +10077,7 @@
 </file>
 
 <file path=ppt/slides/slide2.xml><?xml version="1.0" encoding="utf-8"?>
-<p:sld xmlns:a="http://schemas.openxmlformats.org/drawingml/2006/main" xmlns:p="http://schemas.openxmlformats.org/presentationml/2006/main" xmlns:r="http://schemas.openxmlformats.org/officeDocument/2006/relationships">
+<p:sld xmlns:a="http://schemas.openxmlformats.org/drawingml/2006/main" xmlns:r="http://schemas.openxmlformats.org/officeDocument/2006/relationships" xmlns:p="http://schemas.openxmlformats.org/presentationml/2006/main">
   <p:cSld>
     <p:spTree>
       <p:nvGrpSpPr>
@@ -5226,7 +10085,14 @@
         <p:cNvGrpSpPr/>
         <p:nvPr/>
       </p:nvGrpSpPr>
-      <p:grpSpPr/>
+      <p:grpSpPr>
+        <a:xfrm>
+          <a:off x="0" y="0"/>
+          <a:ext cx="0" cy="0"/>
+          <a:chOff x="0" y="0"/>
+          <a:chExt cx="0" cy="0"/>
+        </a:xfrm>
+      </p:grpSpPr>
       <p:sp>
         <p:nvSpPr>
           <p:cNvPr id="2" name="Title 1"/>
@@ -5262,7 +10128,9 @@
         <p:txBody>
           <a:bodyPr/>
           <a:lstStyle/>
-          <a:p/>
+          <a:p>
+            <a:endParaRPr/>
+          </a:p>
         </p:txBody>
       </p:sp>
     </p:spTree>
@@ -5274,7 +10142,7 @@
 </file>
 
 <file path=ppt/slides/slide3.xml><?xml version="1.0" encoding="utf-8"?>
-<p:sld xmlns:a="http://schemas.openxmlformats.org/drawingml/2006/main" xmlns:p="http://schemas.openxmlformats.org/presentationml/2006/main" xmlns:r="http://schemas.openxmlformats.org/officeDocument/2006/relationships">
+<p:sld xmlns:a="http://schemas.openxmlformats.org/drawingml/2006/main" xmlns:r="http://schemas.openxmlformats.org/officeDocument/2006/relationships" xmlns:p="http://schemas.openxmlformats.org/presentationml/2006/main">
   <p:cSld>
     <p:spTree>
       <p:nvGrpSpPr>
@@ -5282,7 +10150,14 @@
         <p:cNvGrpSpPr/>
         <p:nvPr/>
       </p:nvGrpSpPr>
-      <p:grpSpPr/>
+      <p:grpSpPr>
+        <a:xfrm>
+          <a:off x="0" y="0"/>
+          <a:ext cx="0" cy="0"/>
+          <a:chOff x="0" y="0"/>
+          <a:chExt cx="0" cy="0"/>
+        </a:xfrm>
+      </p:grpSpPr>
       <p:sp>
         <p:nvSpPr>
           <p:cNvPr id="2" name="Title 1"/>
@@ -5316,7 +10191,9 @@
         </p:nvSpPr>
         <p:spPr/>
         <p:txBody>
-          <a:bodyPr/>
+          <a:bodyPr>
+            <a:normAutofit/>
+          </a:bodyPr>
           <a:lstStyle/>
           <a:p>
             <a:pPr>
@@ -5331,84 +10208,106 @@
               </a:spcAft>
             </a:pPr>
             <a:r>
-              <a:rPr sz="900">
+              <a:rPr sz="1800" dirty="0">
                 <a:latin typeface="Consolas"/>
               </a:rPr>
               <a:t>Layered Architecture        N-Tier Architecture        Clean Architecture</a:t>
             </a:r>
-            <a:br/>
-            <a:r>
-              <a:rPr sz="900">
+            <a:br>
+              <a:rPr sz="5400" dirty="0"/>
+            </a:br>
+            <a:r>
+              <a:rPr sz="1800" dirty="0">
                 <a:latin typeface="Consolas"/>
               </a:rPr>
               <a:t>┌─────────────────┐        ┌─────────────────┐        ┌─────────────────┐</a:t>
             </a:r>
-            <a:br/>
-            <a:r>
-              <a:rPr sz="900">
+            <a:br>
+              <a:rPr sz="5400" dirty="0"/>
+            </a:br>
+            <a:r>
+              <a:rPr sz="1800" dirty="0">
                 <a:latin typeface="Consolas"/>
               </a:rPr>
               <a:t>│   Presentation  │        │   Client Tier   │        │   Frameworks    │</a:t>
             </a:r>
-            <a:br/>
-            <a:r>
-              <a:rPr sz="900">
+            <a:br>
+              <a:rPr sz="5400" dirty="0"/>
+            </a:br>
+            <a:r>
+              <a:rPr sz="1800" dirty="0">
                 <a:latin typeface="Consolas"/>
               </a:rPr>
               <a:t>├─────────────────┤        ├─────────────────┤        ├─────────────────┤</a:t>
             </a:r>
-            <a:br/>
-            <a:r>
-              <a:rPr sz="900">
+            <a:br>
+              <a:rPr sz="5400" dirty="0"/>
+            </a:br>
+            <a:r>
+              <a:rPr sz="1800" dirty="0">
                 <a:latin typeface="Consolas"/>
               </a:rPr>
               <a:t>│    Business     │        │ Application     │        │   Interface     │</a:t>
             </a:r>
-            <a:br/>
-            <a:r>
-              <a:rPr sz="900">
+            <a:br>
+              <a:rPr sz="5400" dirty="0"/>
+            </a:br>
+            <a:r>
+              <a:rPr sz="1800" dirty="0">
                 <a:latin typeface="Consolas"/>
               </a:rPr>
               <a:t>├─────────────────┤  &lt;--&gt;  │      Tier       │  &lt;--&gt;  │   Adapters      │</a:t>
             </a:r>
-            <a:br/>
-            <a:r>
-              <a:rPr sz="900">
+            <a:br>
+              <a:rPr sz="5400" dirty="0"/>
+            </a:br>
+            <a:r>
+              <a:rPr sz="1800" dirty="0">
                 <a:latin typeface="Consolas"/>
               </a:rPr>
               <a:t>│  Persistence    │        ├─────────────────┤        ├─────────────────┤</a:t>
             </a:r>
-            <a:br/>
-            <a:r>
-              <a:rPr sz="900">
+            <a:br>
+              <a:rPr sz="5400" dirty="0"/>
+            </a:br>
+            <a:r>
+              <a:rPr sz="1800" dirty="0">
                 <a:latin typeface="Consolas"/>
               </a:rPr>
               <a:t>├─────────────────┤        │   Data Tier     │        │  Use Cases      │</a:t>
             </a:r>
-            <a:br/>
-            <a:r>
-              <a:rPr sz="900">
+            <a:br>
+              <a:rPr sz="5400" dirty="0"/>
+            </a:br>
+            <a:r>
+              <a:rPr sz="1800" dirty="0">
                 <a:latin typeface="Consolas"/>
               </a:rPr>
               <a:t>│    Database     │        └─────────────────┘        ├─────────────────┤</a:t>
             </a:r>
-            <a:br/>
-            <a:r>
-              <a:rPr sz="900">
+            <a:br>
+              <a:rPr sz="5400" dirty="0"/>
+            </a:br>
+            <a:r>
+              <a:rPr sz="1800" dirty="0">
                 <a:latin typeface="Consolas"/>
               </a:rPr>
               <a:t>└─────────────────┘                                   │   Entities      │</a:t>
             </a:r>
-            <a:br/>
-            <a:r>
-              <a:rPr sz="900">
-                <a:latin typeface="Consolas"/>
-              </a:rPr>
-              <a:t>                                                       └─────────────────┘</a:t>
-            </a:r>
-            <a:br/>
-            <a:r>
-              <a:rPr sz="900">
+            <a:br>
+              <a:rPr sz="5400" dirty="0"/>
+            </a:br>
+            <a:r>
+              <a:rPr sz="1800" dirty="0">
+                <a:latin typeface="Consolas"/>
+              </a:rPr>
+              <a:t>                                                      └─────────────────┘</a:t>
+            </a:r>
+            <a:br>
+              <a:rPr sz="5400" dirty="0"/>
+            </a:br>
+            <a:r>
+              <a:rPr sz="1800" dirty="0">
                 <a:latin typeface="Consolas"/>
               </a:rPr>
               <a:t>Classic Layering           Enterprise N-Tier          Domain-Centric</a:t>
@@ -5425,7 +10324,7 @@
 </file>
 
 <file path=ppt/slides/slide4.xml><?xml version="1.0" encoding="utf-8"?>
-<p:sld xmlns:a="http://schemas.openxmlformats.org/drawingml/2006/main" xmlns:p="http://schemas.openxmlformats.org/presentationml/2006/main" xmlns:r="http://schemas.openxmlformats.org/officeDocument/2006/relationships">
+<p:sld xmlns:a="http://schemas.openxmlformats.org/drawingml/2006/main" xmlns:r="http://schemas.openxmlformats.org/officeDocument/2006/relationships" xmlns:p="http://schemas.openxmlformats.org/presentationml/2006/main">
   <p:cSld>
     <p:spTree>
       <p:nvGrpSpPr>
@@ -5433,7 +10332,14 @@
         <p:cNvGrpSpPr/>
         <p:nvPr/>
       </p:nvGrpSpPr>
-      <p:grpSpPr/>
+      <p:grpSpPr>
+        <a:xfrm>
+          <a:off x="0" y="0"/>
+          <a:ext cx="0" cy="0"/>
+          <a:chOff x="0" y="0"/>
+          <a:chExt cx="0" cy="0"/>
+        </a:xfrm>
+      </p:grpSpPr>
       <p:sp>
         <p:nvSpPr>
           <p:cNvPr id="2" name="Title 1"/>
@@ -5442,6 +10348,29 @@
           </p:cNvSpPr>
           <p:nvPr>
             <p:ph type="ctrTitle"/>
+          </p:nvPr>
+        </p:nvSpPr>
+        <p:spPr/>
+        <p:txBody>
+          <a:bodyPr>
+            <a:normAutofit fontScale="90000"/>
+          </a:bodyPr>
+          <a:lstStyle/>
+          <a:p>
+            <a:r>
+              <a:t>1. Layered Architecture (Schichtarchitektur)</a:t>
+            </a:r>
+          </a:p>
+        </p:txBody>
+      </p:sp>
+      <p:sp>
+        <p:nvSpPr>
+          <p:cNvPr id="3" name="Subtitle 2"/>
+          <p:cNvSpPr>
+            <a:spLocks noGrp="1"/>
+          </p:cNvSpPr>
+          <p:nvPr>
+            <p:ph type="subTitle" idx="1"/>
           </p:nvPr>
         </p:nvSpPr>
         <p:spPr/>
@@ -5449,27 +10378,8 @@
           <a:bodyPr/>
           <a:lstStyle/>
           <a:p>
-            <a:r>
-              <a:t>1. Layered Architecture (Schichtarchitektur)</a:t>
-            </a:r>
-          </a:p>
-        </p:txBody>
-      </p:sp>
-      <p:sp>
-        <p:nvSpPr>
-          <p:cNvPr id="3" name="Subtitle 2"/>
-          <p:cNvSpPr>
-            <a:spLocks noGrp="1"/>
-          </p:cNvSpPr>
-          <p:nvPr>
-            <p:ph type="subTitle" idx="1"/>
-          </p:nvPr>
-        </p:nvSpPr>
-        <p:spPr/>
-        <p:txBody>
-          <a:bodyPr/>
-          <a:lstStyle/>
-          <a:p/>
+            <a:endParaRPr/>
+          </a:p>
         </p:txBody>
       </p:sp>
     </p:spTree>
@@ -5481,7 +10391,7 @@
 </file>
 
 <file path=ppt/slides/slide5.xml><?xml version="1.0" encoding="utf-8"?>
-<p:sld xmlns:a="http://schemas.openxmlformats.org/drawingml/2006/main" xmlns:p="http://schemas.openxmlformats.org/presentationml/2006/main" xmlns:r="http://schemas.openxmlformats.org/officeDocument/2006/relationships">
+<p:sld xmlns:a="http://schemas.openxmlformats.org/drawingml/2006/main" xmlns:r="http://schemas.openxmlformats.org/officeDocument/2006/relationships" xmlns:p="http://schemas.openxmlformats.org/presentationml/2006/main">
   <p:cSld>
     <p:spTree>
       <p:nvGrpSpPr>
@@ -5489,7 +10399,14 @@
         <p:cNvGrpSpPr/>
         <p:nvPr/>
       </p:nvGrpSpPr>
-      <p:grpSpPr/>
+      <p:grpSpPr>
+        <a:xfrm>
+          <a:off x="0" y="0"/>
+          <a:ext cx="0" cy="0"/>
+          <a:chOff x="0" y="0"/>
+          <a:chExt cx="0" cy="0"/>
+        </a:xfrm>
+      </p:grpSpPr>
       <p:sp>
         <p:nvSpPr>
           <p:cNvPr id="2" name="Title 1"/>
@@ -5523,7 +10440,9 @@
         </p:nvSpPr>
         <p:spPr/>
         <p:txBody>
-          <a:bodyPr/>
+          <a:bodyPr>
+            <a:normAutofit/>
+          </a:bodyPr>
           <a:lstStyle/>
           <a:p>
             <a:pPr>
@@ -5538,78 +10457,100 @@
               </a:spcAft>
             </a:pPr>
             <a:r>
-              <a:rPr sz="900">
+              <a:rPr sz="1600" dirty="0">
                 <a:latin typeface="Consolas"/>
               </a:rPr>
               <a:t>┌─────────────────────────────────────────────────┐</a:t>
             </a:r>
-            <a:br/>
-            <a:r>
-              <a:rPr sz="900">
+            <a:br>
+              <a:rPr sz="4800" dirty="0"/>
+            </a:br>
+            <a:r>
+              <a:rPr sz="1600" dirty="0">
                 <a:latin typeface="Consolas"/>
               </a:rPr>
               <a:t>│                Presentation Layer               │ &lt;- Web UI, REST APIs</a:t>
             </a:r>
-            <a:br/>
-            <a:r>
-              <a:rPr sz="900">
+            <a:br>
+              <a:rPr sz="4800" dirty="0"/>
+            </a:br>
+            <a:r>
+              <a:rPr sz="1600" dirty="0">
                 <a:latin typeface="Consolas"/>
               </a:rPr>
               <a:t>├─────────────────────────────────────────────────┤</a:t>
             </a:r>
-            <a:br/>
-            <a:r>
-              <a:rPr sz="900">
+            <a:br>
+              <a:rPr sz="4800" dirty="0"/>
+            </a:br>
+            <a:r>
+              <a:rPr sz="1600" dirty="0">
                 <a:latin typeface="Consolas"/>
               </a:rPr>
               <a:t>│                 Business Layer                  │ &lt;- Domain Logic</a:t>
             </a:r>
-            <a:br/>
-            <a:r>
-              <a:rPr sz="900">
+            <a:br>
+              <a:rPr sz="4800" dirty="0"/>
+            </a:br>
+            <a:r>
+              <a:rPr sz="1600" dirty="0">
                 <a:latin typeface="Consolas"/>
               </a:rPr>
               <a:t>├─────────────────────────────────────────────────┤</a:t>
             </a:r>
-            <a:br/>
-            <a:r>
-              <a:rPr sz="900">
+            <a:br>
+              <a:rPr sz="4800" dirty="0"/>
+            </a:br>
+            <a:r>
+              <a:rPr sz="1600" dirty="0">
                 <a:latin typeface="Consolas"/>
               </a:rPr>
               <a:t>│                Persistence Layer                │ &lt;- Data Access</a:t>
             </a:r>
-            <a:br/>
-            <a:r>
-              <a:rPr sz="900">
+            <a:br>
+              <a:rPr sz="4800" dirty="0"/>
+            </a:br>
+            <a:r>
+              <a:rPr sz="1600" dirty="0">
                 <a:latin typeface="Consolas"/>
               </a:rPr>
               <a:t>├─────────────────────────────────────────────────┤</a:t>
             </a:r>
-            <a:br/>
-            <a:r>
-              <a:rPr sz="900">
+            <a:br>
+              <a:rPr sz="4800" dirty="0"/>
+            </a:br>
+            <a:r>
+              <a:rPr sz="1600" dirty="0">
                 <a:latin typeface="Consolas"/>
               </a:rPr>
               <a:t>│                 Database Layer                  │ &lt;- Data Storage</a:t>
             </a:r>
-            <a:br/>
-            <a:r>
-              <a:rPr sz="900">
+            <a:br>
+              <a:rPr sz="4800" dirty="0"/>
+            </a:br>
+            <a:r>
+              <a:rPr sz="1600" dirty="0">
                 <a:latin typeface="Consolas"/>
               </a:rPr>
               <a:t>└─────────────────────────────────────────────────┘</a:t>
             </a:r>
-            <a:br/>
-            <a:br/>
-            <a:r>
-              <a:rPr sz="900">
+            <a:br>
+              <a:rPr sz="4800" dirty="0"/>
+            </a:br>
+            <a:br>
+              <a:rPr sz="4800" dirty="0"/>
+            </a:br>
+            <a:r>
+              <a:rPr sz="1600" dirty="0">
                 <a:latin typeface="Consolas"/>
               </a:rPr>
               <a:t>Dependency Flow: Top -&gt; Down (Higher layers depend on lower layers)</a:t>
             </a:r>
-            <a:br/>
-            <a:r>
-              <a:rPr sz="900">
+            <a:br>
+              <a:rPr sz="4800" dirty="0"/>
+            </a:br>
+            <a:r>
+              <a:rPr sz="1600" dirty="0">
                 <a:latin typeface="Consolas"/>
               </a:rPr>
               <a:t>Data Flow: Bidirectional through defined interfaces</a:t>
@@ -5626,7 +10567,7 @@
 </file>
 
 <file path=ppt/slides/slide6.xml><?xml version="1.0" encoding="utf-8"?>
-<p:sld xmlns:a="http://schemas.openxmlformats.org/drawingml/2006/main" xmlns:p="http://schemas.openxmlformats.org/presentationml/2006/main" xmlns:r="http://schemas.openxmlformats.org/officeDocument/2006/relationships">
+<p:sld xmlns:a="http://schemas.openxmlformats.org/drawingml/2006/main" xmlns:r="http://schemas.openxmlformats.org/officeDocument/2006/relationships" xmlns:p="http://schemas.openxmlformats.org/presentationml/2006/main">
   <p:cSld>
     <p:spTree>
       <p:nvGrpSpPr>
@@ -5634,7 +10575,14 @@
         <p:cNvGrpSpPr/>
         <p:nvPr/>
       </p:nvGrpSpPr>
-      <p:grpSpPr/>
+      <p:grpSpPr>
+        <a:xfrm>
+          <a:off x="0" y="0"/>
+          <a:ext cx="0" cy="0"/>
+          <a:chOff x="0" y="0"/>
+          <a:chExt cx="0" cy="0"/>
+        </a:xfrm>
+      </p:grpSpPr>
       <p:sp>
         <p:nvSpPr>
           <p:cNvPr id="2" name="Title 1"/>
@@ -5651,8 +10599,14 @@
           <a:lstStyle/>
           <a:p>
             <a:r>
-              <a:t>Layered Architecture - Telekom Use Case</a:t>
-            </a:r>
+              <a:rPr dirty="0"/>
+              <a:t>Layered Architecture - </a:t>
+            </a:r>
+            <a:r>
+              <a:rPr lang="en-US" dirty="0"/>
+              <a:t>Network Config Management System</a:t>
+            </a:r>
+            <a:endParaRPr dirty="0"/>
           </a:p>
         </p:txBody>
       </p:sp>
@@ -5668,72 +10622,118 @@
         </p:nvSpPr>
         <p:spPr/>
         <p:txBody>
-          <a:bodyPr/>
+          <a:bodyPr>
+            <a:normAutofit fontScale="92500" lnSpcReduction="20000"/>
+          </a:bodyPr>
           <a:lstStyle/>
           <a:p>
-            <a:pPr/>
-            <a:r>
-              <a:t>**Network Configuration Management System**</a:t>
-            </a:r>
-          </a:p>
-          <a:p>
-            <a:pPr/>
-            <a:r>
-              <a:t>**Layer Implementation:**</a:t>
-            </a:r>
-          </a:p>
-          <a:p>
-            <a:pPr lvl="1"/>
-            <a:r>
-              <a:t>• Presentation: Web Dashboard für Network Engineers</a:t>
-            </a:r>
-          </a:p>
-          <a:p>
-            <a:pPr lvl="1"/>
-            <a:r>
-              <a:t>• Business: Configuration Validation, Change Management</a:t>
-            </a:r>
-          </a:p>
-          <a:p>
-            <a:pPr lvl="1"/>
-            <a:r>
-              <a:t>• Persistence: Configuration Repository, Audit Logging</a:t>
-            </a:r>
-          </a:p>
-          <a:p>
-            <a:pPr lvl="1"/>
-            <a:r>
-              <a:t>• Database: PostgreSQL für Config Data, MongoDB für Audit Logs</a:t>
-            </a:r>
-          </a:p>
-          <a:p>
-            <a:pPr/>
-            <a:r>
-              <a:t>**Real-world Application:**</a:t>
-            </a:r>
-          </a:p>
-          <a:p>
-            <a:pPr lvl="1"/>
-            <a:r>
-              <a:t>• SNMP configuration management</a:t>
-            </a:r>
-          </a:p>
-          <a:p>
-            <a:pPr lvl="1"/>
-            <a:r>
-              <a:t>• Network device inventory</a:t>
-            </a:r>
-          </a:p>
-          <a:p>
-            <a:pPr lvl="1"/>
-            <a:r>
-              <a:t>• Change approval workflows</a:t>
-            </a:r>
-          </a:p>
-          <a:p>
-            <a:pPr lvl="1"/>
-            <a:r>
-              <a:t>• Configuration backup and restore</a:t>
+            <a:pPr>
+              <a:lnSpc>
+                <a:spcPct val="150000"/>
+              </a:lnSpc>
+            </a:pPr>
+            <a:r>
+              <a:rPr b="1" dirty="0"/>
+              <a:t>Layer Implementation:</a:t>
+            </a:r>
+          </a:p>
+          <a:p>
+            <a:pPr lvl="1">
+              <a:lnSpc>
+                <a:spcPct val="150000"/>
+              </a:lnSpc>
+            </a:pPr>
+            <a:r>
+              <a:rPr dirty="0"/>
+              <a:t>Presentation: Web Dashboard für Network Engineers</a:t>
+            </a:r>
+          </a:p>
+          <a:p>
+            <a:pPr lvl="1">
+              <a:lnSpc>
+                <a:spcPct val="150000"/>
+              </a:lnSpc>
+            </a:pPr>
+            <a:r>
+              <a:rPr dirty="0"/>
+              <a:t>Business: Configuration Validation, Change Management</a:t>
+            </a:r>
+          </a:p>
+          <a:p>
+            <a:pPr lvl="1">
+              <a:lnSpc>
+                <a:spcPct val="150000"/>
+              </a:lnSpc>
+            </a:pPr>
+            <a:r>
+              <a:rPr dirty="0"/>
+              <a:t>Persistence: Configuration Repository, Audit Logging</a:t>
+            </a:r>
+          </a:p>
+          <a:p>
+            <a:pPr lvl="1">
+              <a:lnSpc>
+                <a:spcPct val="150000"/>
+              </a:lnSpc>
+            </a:pPr>
+            <a:r>
+              <a:rPr dirty="0"/>
+              <a:t>Database: PostgreSQL für Config Data, MongoDB für Audit Logs</a:t>
+            </a:r>
+          </a:p>
+          <a:p>
+            <a:pPr>
+              <a:lnSpc>
+                <a:spcPct val="150000"/>
+              </a:lnSpc>
+            </a:pPr>
+            <a:r>
+              <a:rPr b="1" dirty="0"/>
+              <a:t>Real-world Application:</a:t>
+            </a:r>
+          </a:p>
+          <a:p>
+            <a:pPr lvl="1">
+              <a:lnSpc>
+                <a:spcPct val="150000"/>
+              </a:lnSpc>
+            </a:pPr>
+            <a:r>
+              <a:rPr dirty="0"/>
+              <a:t>SNMP configuration management</a:t>
+            </a:r>
+          </a:p>
+          <a:p>
+            <a:pPr lvl="1">
+              <a:lnSpc>
+                <a:spcPct val="150000"/>
+              </a:lnSpc>
+            </a:pPr>
+            <a:r>
+              <a:rPr dirty="0"/>
+              <a:t>Network device inventory</a:t>
+            </a:r>
+          </a:p>
+          <a:p>
+            <a:pPr lvl="1">
+              <a:lnSpc>
+                <a:spcPct val="150000"/>
+              </a:lnSpc>
+            </a:pPr>
+            <a:r>
+              <a:rPr dirty="0"/>
+              <a:t>Change approval workflows</a:t>
+            </a:r>
+          </a:p>
+          <a:p>
+            <a:pPr lvl="1">
+              <a:lnSpc>
+                <a:spcPct val="150000"/>
+              </a:lnSpc>
+            </a:pPr>
+            <a:r>
+              <a:rPr dirty="0"/>
+              <a:t>Configuration backup and restore</a:t>
             </a:r>
           </a:p>
         </p:txBody>
@@ -5747,7 +10747,7 @@
 </file>
 
 <file path=ppt/slides/slide7.xml><?xml version="1.0" encoding="utf-8"?>
-<p:sld xmlns:a="http://schemas.openxmlformats.org/drawingml/2006/main" xmlns:p="http://schemas.openxmlformats.org/presentationml/2006/main" xmlns:r="http://schemas.openxmlformats.org/officeDocument/2006/relationships">
+<p:sld xmlns:a="http://schemas.openxmlformats.org/drawingml/2006/main" xmlns:r="http://schemas.openxmlformats.org/officeDocument/2006/relationships" xmlns:p="http://schemas.openxmlformats.org/presentationml/2006/main">
   <p:cSld>
     <p:spTree>
       <p:nvGrpSpPr>
@@ -5755,7 +10755,14 @@
         <p:cNvGrpSpPr/>
         <p:nvPr/>
       </p:nvGrpSpPr>
-      <p:grpSpPr/>
+      <p:grpSpPr>
+        <a:xfrm>
+          <a:off x="0" y="0"/>
+          <a:ext cx="0" cy="0"/>
+          <a:chOff x="0" y="0"/>
+          <a:chExt cx="0" cy="0"/>
+        </a:xfrm>
+      </p:grpSpPr>
       <p:sp>
         <p:nvSpPr>
           <p:cNvPr id="2" name="Title 1"/>
@@ -5784,60 +10791,171 @@
             <a:spLocks noGrp="1"/>
           </p:cNvSpPr>
           <p:nvPr>
-            <p:ph idx="1" sz="half"/>
+            <p:ph sz="half" idx="1"/>
           </p:nvPr>
         </p:nvSpPr>
         <p:spPr/>
         <p:txBody>
-          <a:bodyPr/>
+          <a:bodyPr>
+            <a:normAutofit/>
+          </a:bodyPr>
           <a:lstStyle/>
           <a:p>
+            <a:pPr marL="0" indent="0">
+              <a:lnSpc>
+                <a:spcPct val="150000"/>
+              </a:lnSpc>
+              <a:buNone/>
+              <a:defRPr sz="1600" b="1"/>
+            </a:pPr>
+            <a:r>
+              <a:rPr sz="1800" dirty="0" err="1"/>
+              <a:t>Vorteile</a:t>
+            </a:r>
+            <a:r>
+              <a:rPr sz="1800" dirty="0"/>
+              <a:t> </a:t>
+            </a:r>
+          </a:p>
+          <a:p>
             <a:pPr>
-              <a:defRPr b="1" sz="1600"/>
-            </a:pPr>
-            <a:r>
-              <a:t>Vorteile ✅</a:t>
-            </a:r>
-          </a:p>
-          <a:p>
-            <a:pPr>
+              <a:lnSpc>
+                <a:spcPct val="150000"/>
+              </a:lnSpc>
               <a:spcAft>
                 <a:spcPts val="600"/>
               </a:spcAft>
             </a:pPr>
             <a:r>
-              <a:t>• Klare Trennung der Verantwortlichkeiten</a:t>
-            </a:r>
+              <a:rPr sz="1800" dirty="0"/>
+              <a:t>Klare </a:t>
+            </a:r>
+            <a:r>
+              <a:rPr sz="1800" dirty="0" err="1"/>
+              <a:t>Trennung</a:t>
+            </a:r>
+            <a:r>
+              <a:rPr sz="1800" dirty="0"/>
+              <a:t> der </a:t>
+            </a:r>
+            <a:r>
+              <a:rPr sz="1800" dirty="0" err="1"/>
+              <a:t>Verantwortlichkeiten</a:t>
+            </a:r>
+            <a:endParaRPr sz="1800" dirty="0"/>
           </a:p>
           <a:p>
             <a:pPr>
+              <a:lnSpc>
+                <a:spcPct val="150000"/>
+              </a:lnSpc>
               <a:spcAft>
                 <a:spcPts val="600"/>
               </a:spcAft>
             </a:pPr>
             <a:r>
-              <a:t>• Einfache Testbarkeit jeder Schicht</a:t>
-            </a:r>
+              <a:rPr sz="1800" dirty="0" err="1"/>
+              <a:t>Einfache</a:t>
+            </a:r>
+            <a:r>
+              <a:rPr sz="1800" dirty="0"/>
+              <a:t> </a:t>
+            </a:r>
+            <a:r>
+              <a:rPr sz="1800" dirty="0" err="1"/>
+              <a:t>Testbarkeit</a:t>
+            </a:r>
+            <a:r>
+              <a:rPr sz="1800" dirty="0"/>
+              <a:t> </a:t>
+            </a:r>
+            <a:r>
+              <a:rPr sz="1800" dirty="0" err="1"/>
+              <a:t>jeder</a:t>
+            </a:r>
+            <a:r>
+              <a:rPr sz="1800" dirty="0"/>
+              <a:t> </a:t>
+            </a:r>
+            <a:r>
+              <a:rPr sz="1800" dirty="0" err="1"/>
+              <a:t>Schicht</a:t>
+            </a:r>
+            <a:endParaRPr sz="1800" dirty="0"/>
           </a:p>
           <a:p>
             <a:pPr>
+              <a:lnSpc>
+                <a:spcPct val="150000"/>
+              </a:lnSpc>
               <a:spcAft>
                 <a:spcPts val="600"/>
               </a:spcAft>
             </a:pPr>
             <a:r>
-              <a:t>• Bewährtes Pattern mit hoher Entwickler-Akzeptanz</a:t>
-            </a:r>
+              <a:rPr sz="1800" dirty="0" err="1"/>
+              <a:t>Bewährtes</a:t>
+            </a:r>
+            <a:r>
+              <a:rPr sz="1800" dirty="0"/>
+              <a:t> Pattern </a:t>
+            </a:r>
+            <a:r>
+              <a:rPr sz="1800" dirty="0" err="1"/>
+              <a:t>mit</a:t>
+            </a:r>
+            <a:r>
+              <a:rPr sz="1800" dirty="0"/>
+              <a:t> </a:t>
+            </a:r>
+            <a:r>
+              <a:rPr sz="1800" dirty="0" err="1"/>
+              <a:t>hoher</a:t>
+            </a:r>
+            <a:r>
+              <a:rPr sz="1800" dirty="0"/>
+              <a:t> </a:t>
+            </a:r>
+            <a:r>
+              <a:rPr sz="1800" dirty="0" err="1"/>
+              <a:t>Entwickler-Akzeptanz</a:t>
+            </a:r>
+            <a:endParaRPr sz="1800" dirty="0"/>
           </a:p>
           <a:p>
             <a:pPr>
+              <a:lnSpc>
+                <a:spcPct val="150000"/>
+              </a:lnSpc>
               <a:spcAft>
                 <a:spcPts val="600"/>
               </a:spcAft>
             </a:pPr>
             <a:r>
-              <a:t>• Gute Performance bei einfachen CRUD-Operationen</a:t>
-            </a:r>
+              <a:rPr sz="1800" dirty="0"/>
+              <a:t>Gute Performance </a:t>
+            </a:r>
+            <a:r>
+              <a:rPr sz="1800" dirty="0" err="1"/>
+              <a:t>bei</a:t>
+            </a:r>
+            <a:r>
+              <a:rPr sz="1800" dirty="0"/>
+              <a:t> </a:t>
+            </a:r>
+            <a:r>
+              <a:rPr sz="1800" dirty="0" err="1"/>
+              <a:t>einfachen</a:t>
+            </a:r>
+            <a:r>
+              <a:rPr sz="1800" dirty="0"/>
+              <a:t> CRUD-</a:t>
+            </a:r>
+            <a:r>
+              <a:rPr sz="1800" dirty="0" err="1"/>
+              <a:t>Operationen</a:t>
+            </a:r>
+            <a:endParaRPr sz="1800" dirty="0"/>
           </a:p>
         </p:txBody>
       </p:sp>
@@ -5848,59 +10966,152 @@
             <a:spLocks noGrp="1"/>
           </p:cNvSpPr>
           <p:nvPr>
-            <p:ph idx="2" sz="half"/>
+            <p:ph sz="half" idx="2"/>
           </p:nvPr>
         </p:nvSpPr>
         <p:spPr/>
         <p:txBody>
-          <a:bodyPr/>
+          <a:bodyPr>
+            <a:normAutofit/>
+          </a:bodyPr>
           <a:lstStyle/>
           <a:p>
+            <a:pPr marL="0" indent="0">
+              <a:lnSpc>
+                <a:spcPct val="150000"/>
+              </a:lnSpc>
+              <a:buNone/>
+              <a:defRPr sz="1600" b="1"/>
+            </a:pPr>
+            <a:r>
+              <a:rPr sz="1800" dirty="0" err="1"/>
+              <a:t>Nachteile</a:t>
+            </a:r>
+            <a:r>
+              <a:rPr sz="1800" dirty="0"/>
+              <a:t> </a:t>
+            </a:r>
+          </a:p>
+          <a:p>
             <a:pPr>
-              <a:defRPr b="1" sz="1600"/>
-            </a:pPr>
-            <a:r>
-              <a:t>Nachteile ❌</a:t>
-            </a:r>
-          </a:p>
-          <a:p>
-            <a:pPr>
+              <a:lnSpc>
+                <a:spcPct val="150000"/>
+              </a:lnSpc>
               <a:spcAft>
                 <a:spcPts val="600"/>
               </a:spcAft>
             </a:pPr>
             <a:r>
-              <a:t>• Monolithischer Charakter erschwert Skalierung</a:t>
-            </a:r>
+              <a:rPr sz="1800" dirty="0" err="1"/>
+              <a:t>Monolithischer</a:t>
+            </a:r>
+            <a:r>
+              <a:rPr sz="1800" dirty="0"/>
+              <a:t> Charakter </a:t>
+            </a:r>
+            <a:r>
+              <a:rPr sz="1800" dirty="0" err="1"/>
+              <a:t>erschwert</a:t>
+            </a:r>
+            <a:r>
+              <a:rPr sz="1800" dirty="0"/>
+              <a:t> </a:t>
+            </a:r>
+            <a:r>
+              <a:rPr sz="1800" dirty="0" err="1"/>
+              <a:t>Skalierung</a:t>
+            </a:r>
+            <a:endParaRPr sz="1800" dirty="0"/>
           </a:p>
           <a:p>
             <a:pPr>
+              <a:lnSpc>
+                <a:spcPct val="150000"/>
+              </a:lnSpc>
               <a:spcAft>
                 <a:spcPts val="600"/>
               </a:spcAft>
             </a:pPr>
             <a:r>
-              <a:t>• Änderungen propagieren durch alle Schichten</a:t>
-            </a:r>
+              <a:rPr sz="1800" dirty="0" err="1"/>
+              <a:t>Änderungen</a:t>
+            </a:r>
+            <a:r>
+              <a:rPr sz="1800" dirty="0"/>
+              <a:t> </a:t>
+            </a:r>
+            <a:r>
+              <a:rPr sz="1800" dirty="0" err="1"/>
+              <a:t>propagieren</a:t>
+            </a:r>
+            <a:r>
+              <a:rPr sz="1800" dirty="0"/>
+              <a:t> </a:t>
+            </a:r>
+            <a:r>
+              <a:rPr sz="1800" dirty="0" err="1"/>
+              <a:t>durch</a:t>
+            </a:r>
+            <a:r>
+              <a:rPr sz="1800" dirty="0"/>
+              <a:t> alle </a:t>
+            </a:r>
+            <a:r>
+              <a:rPr sz="1800" dirty="0" err="1"/>
+              <a:t>Schichten</a:t>
+            </a:r>
+            <a:endParaRPr sz="1800" dirty="0"/>
           </a:p>
           <a:p>
             <a:pPr>
+              <a:lnSpc>
+                <a:spcPct val="150000"/>
+              </a:lnSpc>
               <a:spcAft>
                 <a:spcPts val="600"/>
               </a:spcAft>
             </a:pPr>
             <a:r>
-              <a:t>• Datenbankschema-Changes beeinflussen alle Layer</a:t>
+              <a:rPr sz="1800" dirty="0" err="1"/>
+              <a:t>Datenbankschema</a:t>
+            </a:r>
+            <a:r>
+              <a:rPr sz="1800" dirty="0"/>
+              <a:t>-Changes </a:t>
+            </a:r>
+            <a:r>
+              <a:rPr sz="1800" dirty="0" err="1"/>
+              <a:t>beeinflussen</a:t>
+            </a:r>
+            <a:r>
+              <a:rPr sz="1800" dirty="0"/>
+              <a:t> alle Layer</a:t>
             </a:r>
           </a:p>
           <a:p>
             <a:pPr>
+              <a:lnSpc>
+                <a:spcPct val="150000"/>
+              </a:lnSpc>
               <a:spcAft>
                 <a:spcPts val="600"/>
               </a:spcAft>
             </a:pPr>
             <a:r>
-              <a:t>• Schwierig für komplexe Domain Logic</a:t>
+              <a:rPr sz="1800" dirty="0" err="1"/>
+              <a:t>Schwierig</a:t>
+            </a:r>
+            <a:r>
+              <a:rPr sz="1800" dirty="0"/>
+              <a:t> für </a:t>
+            </a:r>
+            <a:r>
+              <a:rPr sz="1800" dirty="0" err="1"/>
+              <a:t>komplexe</a:t>
+            </a:r>
+            <a:r>
+              <a:rPr sz="1800" dirty="0"/>
+              <a:t> Domain Logic</a:t>
             </a:r>
           </a:p>
         </p:txBody>
@@ -5910,11 +11121,433 @@
   <p:clrMapOvr>
     <a:masterClrMapping/>
   </p:clrMapOvr>
+  <p:timing>
+    <p:tnLst>
+      <p:par>
+        <p:cTn id="1" dur="indefinite" restart="never" nodeType="tmRoot">
+          <p:childTnLst>
+            <p:seq concurrent="1" nextAc="seek">
+              <p:cTn id="2" dur="indefinite" nodeType="mainSeq">
+                <p:childTnLst>
+                  <p:par>
+                    <p:cTn id="3" fill="hold">
+                      <p:stCondLst>
+                        <p:cond delay="indefinite"/>
+                      </p:stCondLst>
+                      <p:childTnLst>
+                        <p:par>
+                          <p:cTn id="4" fill="hold">
+                            <p:stCondLst>
+                              <p:cond delay="0"/>
+                            </p:stCondLst>
+                            <p:childTnLst>
+                              <p:par>
+                                <p:cTn id="5" presetID="1" presetClass="entr" presetSubtype="0" fill="hold" nodeType="clickEffect">
+                                  <p:stCondLst>
+                                    <p:cond delay="0"/>
+                                  </p:stCondLst>
+                                  <p:childTnLst>
+                                    <p:set>
+                                      <p:cBhvr>
+                                        <p:cTn id="6" dur="1" fill="hold">
+                                          <p:stCondLst>
+                                            <p:cond delay="0"/>
+                                          </p:stCondLst>
+                                        </p:cTn>
+                                        <p:tgtEl>
+                                          <p:spTgt spid="3">
+                                            <p:txEl>
+                                              <p:pRg st="1" end="1"/>
+                                            </p:txEl>
+                                          </p:spTgt>
+                                        </p:tgtEl>
+                                        <p:attrNameLst>
+                                          <p:attrName>style.visibility</p:attrName>
+                                        </p:attrNameLst>
+                                      </p:cBhvr>
+                                      <p:to>
+                                        <p:strVal val="visible"/>
+                                      </p:to>
+                                    </p:set>
+                                  </p:childTnLst>
+                                </p:cTn>
+                              </p:par>
+                            </p:childTnLst>
+                          </p:cTn>
+                        </p:par>
+                      </p:childTnLst>
+                    </p:cTn>
+                  </p:par>
+                  <p:par>
+                    <p:cTn id="7" fill="hold">
+                      <p:stCondLst>
+                        <p:cond delay="indefinite"/>
+                      </p:stCondLst>
+                      <p:childTnLst>
+                        <p:par>
+                          <p:cTn id="8" fill="hold">
+                            <p:stCondLst>
+                              <p:cond delay="0"/>
+                            </p:stCondLst>
+                            <p:childTnLst>
+                              <p:par>
+                                <p:cTn id="9" presetID="1" presetClass="entr" presetSubtype="0" fill="hold" nodeType="clickEffect">
+                                  <p:stCondLst>
+                                    <p:cond delay="0"/>
+                                  </p:stCondLst>
+                                  <p:childTnLst>
+                                    <p:set>
+                                      <p:cBhvr>
+                                        <p:cTn id="10" dur="1" fill="hold">
+                                          <p:stCondLst>
+                                            <p:cond delay="0"/>
+                                          </p:stCondLst>
+                                        </p:cTn>
+                                        <p:tgtEl>
+                                          <p:spTgt spid="3">
+                                            <p:txEl>
+                                              <p:pRg st="2" end="2"/>
+                                            </p:txEl>
+                                          </p:spTgt>
+                                        </p:tgtEl>
+                                        <p:attrNameLst>
+                                          <p:attrName>style.visibility</p:attrName>
+                                        </p:attrNameLst>
+                                      </p:cBhvr>
+                                      <p:to>
+                                        <p:strVal val="visible"/>
+                                      </p:to>
+                                    </p:set>
+                                  </p:childTnLst>
+                                </p:cTn>
+                              </p:par>
+                            </p:childTnLst>
+                          </p:cTn>
+                        </p:par>
+                      </p:childTnLst>
+                    </p:cTn>
+                  </p:par>
+                  <p:par>
+                    <p:cTn id="11" fill="hold">
+                      <p:stCondLst>
+                        <p:cond delay="indefinite"/>
+                      </p:stCondLst>
+                      <p:childTnLst>
+                        <p:par>
+                          <p:cTn id="12" fill="hold">
+                            <p:stCondLst>
+                              <p:cond delay="0"/>
+                            </p:stCondLst>
+                            <p:childTnLst>
+                              <p:par>
+                                <p:cTn id="13" presetID="1" presetClass="entr" presetSubtype="0" fill="hold" nodeType="clickEffect">
+                                  <p:stCondLst>
+                                    <p:cond delay="0"/>
+                                  </p:stCondLst>
+                                  <p:childTnLst>
+                                    <p:set>
+                                      <p:cBhvr>
+                                        <p:cTn id="14" dur="1" fill="hold">
+                                          <p:stCondLst>
+                                            <p:cond delay="0"/>
+                                          </p:stCondLst>
+                                        </p:cTn>
+                                        <p:tgtEl>
+                                          <p:spTgt spid="3">
+                                            <p:txEl>
+                                              <p:pRg st="3" end="3"/>
+                                            </p:txEl>
+                                          </p:spTgt>
+                                        </p:tgtEl>
+                                        <p:attrNameLst>
+                                          <p:attrName>style.visibility</p:attrName>
+                                        </p:attrNameLst>
+                                      </p:cBhvr>
+                                      <p:to>
+                                        <p:strVal val="visible"/>
+                                      </p:to>
+                                    </p:set>
+                                  </p:childTnLst>
+                                </p:cTn>
+                              </p:par>
+                            </p:childTnLst>
+                          </p:cTn>
+                        </p:par>
+                      </p:childTnLst>
+                    </p:cTn>
+                  </p:par>
+                  <p:par>
+                    <p:cTn id="15" fill="hold">
+                      <p:stCondLst>
+                        <p:cond delay="indefinite"/>
+                      </p:stCondLst>
+                      <p:childTnLst>
+                        <p:par>
+                          <p:cTn id="16" fill="hold">
+                            <p:stCondLst>
+                              <p:cond delay="0"/>
+                            </p:stCondLst>
+                            <p:childTnLst>
+                              <p:par>
+                                <p:cTn id="17" presetID="1" presetClass="entr" presetSubtype="0" fill="hold" nodeType="clickEffect">
+                                  <p:stCondLst>
+                                    <p:cond delay="0"/>
+                                  </p:stCondLst>
+                                  <p:childTnLst>
+                                    <p:set>
+                                      <p:cBhvr>
+                                        <p:cTn id="18" dur="1" fill="hold">
+                                          <p:stCondLst>
+                                            <p:cond delay="0"/>
+                                          </p:stCondLst>
+                                        </p:cTn>
+                                        <p:tgtEl>
+                                          <p:spTgt spid="3">
+                                            <p:txEl>
+                                              <p:pRg st="4" end="4"/>
+                                            </p:txEl>
+                                          </p:spTgt>
+                                        </p:tgtEl>
+                                        <p:attrNameLst>
+                                          <p:attrName>style.visibility</p:attrName>
+                                        </p:attrNameLst>
+                                      </p:cBhvr>
+                                      <p:to>
+                                        <p:strVal val="visible"/>
+                                      </p:to>
+                                    </p:set>
+                                  </p:childTnLst>
+                                </p:cTn>
+                              </p:par>
+                            </p:childTnLst>
+                          </p:cTn>
+                        </p:par>
+                      </p:childTnLst>
+                    </p:cTn>
+                  </p:par>
+                  <p:par>
+                    <p:cTn id="19" fill="hold">
+                      <p:stCondLst>
+                        <p:cond delay="indefinite"/>
+                      </p:stCondLst>
+                      <p:childTnLst>
+                        <p:par>
+                          <p:cTn id="20" fill="hold">
+                            <p:stCondLst>
+                              <p:cond delay="0"/>
+                            </p:stCondLst>
+                            <p:childTnLst>
+                              <p:par>
+                                <p:cTn id="21" presetID="1" presetClass="entr" presetSubtype="0" fill="hold" nodeType="clickEffect">
+                                  <p:stCondLst>
+                                    <p:cond delay="0"/>
+                                  </p:stCondLst>
+                                  <p:childTnLst>
+                                    <p:set>
+                                      <p:cBhvr>
+                                        <p:cTn id="22" dur="1" fill="hold">
+                                          <p:stCondLst>
+                                            <p:cond delay="0"/>
+                                          </p:stCondLst>
+                                        </p:cTn>
+                                        <p:tgtEl>
+                                          <p:spTgt spid="4">
+                                            <p:txEl>
+                                              <p:pRg st="1" end="1"/>
+                                            </p:txEl>
+                                          </p:spTgt>
+                                        </p:tgtEl>
+                                        <p:attrNameLst>
+                                          <p:attrName>style.visibility</p:attrName>
+                                        </p:attrNameLst>
+                                      </p:cBhvr>
+                                      <p:to>
+                                        <p:strVal val="visible"/>
+                                      </p:to>
+                                    </p:set>
+                                  </p:childTnLst>
+                                </p:cTn>
+                              </p:par>
+                            </p:childTnLst>
+                          </p:cTn>
+                        </p:par>
+                      </p:childTnLst>
+                    </p:cTn>
+                  </p:par>
+                  <p:par>
+                    <p:cTn id="23" fill="hold">
+                      <p:stCondLst>
+                        <p:cond delay="indefinite"/>
+                      </p:stCondLst>
+                      <p:childTnLst>
+                        <p:par>
+                          <p:cTn id="24" fill="hold">
+                            <p:stCondLst>
+                              <p:cond delay="0"/>
+                            </p:stCondLst>
+                            <p:childTnLst>
+                              <p:par>
+                                <p:cTn id="25" presetID="1" presetClass="entr" presetSubtype="0" fill="hold" nodeType="clickEffect">
+                                  <p:stCondLst>
+                                    <p:cond delay="0"/>
+                                  </p:stCondLst>
+                                  <p:childTnLst>
+                                    <p:set>
+                                      <p:cBhvr>
+                                        <p:cTn id="26" dur="1" fill="hold">
+                                          <p:stCondLst>
+                                            <p:cond delay="0"/>
+                                          </p:stCondLst>
+                                        </p:cTn>
+                                        <p:tgtEl>
+                                          <p:spTgt spid="4">
+                                            <p:txEl>
+                                              <p:pRg st="2" end="2"/>
+                                            </p:txEl>
+                                          </p:spTgt>
+                                        </p:tgtEl>
+                                        <p:attrNameLst>
+                                          <p:attrName>style.visibility</p:attrName>
+                                        </p:attrNameLst>
+                                      </p:cBhvr>
+                                      <p:to>
+                                        <p:strVal val="visible"/>
+                                      </p:to>
+                                    </p:set>
+                                  </p:childTnLst>
+                                </p:cTn>
+                              </p:par>
+                            </p:childTnLst>
+                          </p:cTn>
+                        </p:par>
+                      </p:childTnLst>
+                    </p:cTn>
+                  </p:par>
+                  <p:par>
+                    <p:cTn id="27" fill="hold">
+                      <p:stCondLst>
+                        <p:cond delay="indefinite"/>
+                      </p:stCondLst>
+                      <p:childTnLst>
+                        <p:par>
+                          <p:cTn id="28" fill="hold">
+                            <p:stCondLst>
+                              <p:cond delay="0"/>
+                            </p:stCondLst>
+                            <p:childTnLst>
+                              <p:par>
+                                <p:cTn id="29" presetID="1" presetClass="entr" presetSubtype="0" fill="hold" nodeType="clickEffect">
+                                  <p:stCondLst>
+                                    <p:cond delay="0"/>
+                                  </p:stCondLst>
+                                  <p:childTnLst>
+                                    <p:set>
+                                      <p:cBhvr>
+                                        <p:cTn id="30" dur="1" fill="hold">
+                                          <p:stCondLst>
+                                            <p:cond delay="0"/>
+                                          </p:stCondLst>
+                                        </p:cTn>
+                                        <p:tgtEl>
+                                          <p:spTgt spid="4">
+                                            <p:txEl>
+                                              <p:pRg st="3" end="3"/>
+                                            </p:txEl>
+                                          </p:spTgt>
+                                        </p:tgtEl>
+                                        <p:attrNameLst>
+                                          <p:attrName>style.visibility</p:attrName>
+                                        </p:attrNameLst>
+                                      </p:cBhvr>
+                                      <p:to>
+                                        <p:strVal val="visible"/>
+                                      </p:to>
+                                    </p:set>
+                                  </p:childTnLst>
+                                </p:cTn>
+                              </p:par>
+                            </p:childTnLst>
+                          </p:cTn>
+                        </p:par>
+                      </p:childTnLst>
+                    </p:cTn>
+                  </p:par>
+                  <p:par>
+                    <p:cTn id="31" fill="hold">
+                      <p:stCondLst>
+                        <p:cond delay="indefinite"/>
+                      </p:stCondLst>
+                      <p:childTnLst>
+                        <p:par>
+                          <p:cTn id="32" fill="hold">
+                            <p:stCondLst>
+                              <p:cond delay="0"/>
+                            </p:stCondLst>
+                            <p:childTnLst>
+                              <p:par>
+                                <p:cTn id="33" presetID="1" presetClass="entr" presetSubtype="0" fill="hold" nodeType="clickEffect">
+                                  <p:stCondLst>
+                                    <p:cond delay="0"/>
+                                  </p:stCondLst>
+                                  <p:childTnLst>
+                                    <p:set>
+                                      <p:cBhvr>
+                                        <p:cTn id="34" dur="1" fill="hold">
+                                          <p:stCondLst>
+                                            <p:cond delay="0"/>
+                                          </p:stCondLst>
+                                        </p:cTn>
+                                        <p:tgtEl>
+                                          <p:spTgt spid="4">
+                                            <p:txEl>
+                                              <p:pRg st="4" end="4"/>
+                                            </p:txEl>
+                                          </p:spTgt>
+                                        </p:tgtEl>
+                                        <p:attrNameLst>
+                                          <p:attrName>style.visibility</p:attrName>
+                                        </p:attrNameLst>
+                                      </p:cBhvr>
+                                      <p:to>
+                                        <p:strVal val="visible"/>
+                                      </p:to>
+                                    </p:set>
+                                  </p:childTnLst>
+                                </p:cTn>
+                              </p:par>
+                            </p:childTnLst>
+                          </p:cTn>
+                        </p:par>
+                      </p:childTnLst>
+                    </p:cTn>
+                  </p:par>
+                </p:childTnLst>
+              </p:cTn>
+              <p:prevCondLst>
+                <p:cond evt="onPrev" delay="0">
+                  <p:tgtEl>
+                    <p:sldTgt/>
+                  </p:tgtEl>
+                </p:cond>
+              </p:prevCondLst>
+              <p:nextCondLst>
+                <p:cond evt="onNext" delay="0">
+                  <p:tgtEl>
+                    <p:sldTgt/>
+                  </p:tgtEl>
+                </p:cond>
+              </p:nextCondLst>
+            </p:seq>
+          </p:childTnLst>
+        </p:cTn>
+      </p:par>
+    </p:tnLst>
+  </p:timing>
 </p:sld>
 </file>
 
 <file path=ppt/slides/slide8.xml><?xml version="1.0" encoding="utf-8"?>
-<p:sld xmlns:a="http://schemas.openxmlformats.org/drawingml/2006/main" xmlns:p="http://schemas.openxmlformats.org/presentationml/2006/main" xmlns:r="http://schemas.openxmlformats.org/officeDocument/2006/relationships">
+<p:sld xmlns:a="http://schemas.openxmlformats.org/drawingml/2006/main" xmlns:r="http://schemas.openxmlformats.org/officeDocument/2006/relationships" xmlns:p="http://schemas.openxmlformats.org/presentationml/2006/main">
   <p:cSld>
     <p:spTree>
       <p:nvGrpSpPr>
@@ -5922,7 +11555,14 @@
         <p:cNvGrpSpPr/>
         <p:nvPr/>
       </p:nvGrpSpPr>
-      <p:grpSpPr/>
+      <p:grpSpPr>
+        <a:xfrm>
+          <a:off x="0" y="0"/>
+          <a:ext cx="0" cy="0"/>
+          <a:chOff x="0" y="0"/>
+          <a:chExt cx="0" cy="0"/>
+        </a:xfrm>
+      </p:grpSpPr>
       <p:sp>
         <p:nvSpPr>
           <p:cNvPr id="2" name="Title 1"/>
@@ -5958,7 +11598,9 @@
         <p:txBody>
           <a:bodyPr/>
           <a:lstStyle/>
-          <a:p/>
+          <a:p>
+            <a:endParaRPr/>
+          </a:p>
         </p:txBody>
       </p:sp>
     </p:spTree>
@@ -5970,7 +11612,7 @@
 </file>
 
 <file path=ppt/slides/slide9.xml><?xml version="1.0" encoding="utf-8"?>
-<p:sld xmlns:a="http://schemas.openxmlformats.org/drawingml/2006/main" xmlns:p="http://schemas.openxmlformats.org/presentationml/2006/main" xmlns:r="http://schemas.openxmlformats.org/officeDocument/2006/relationships">
+<p:sld xmlns:a="http://schemas.openxmlformats.org/drawingml/2006/main" xmlns:r="http://schemas.openxmlformats.org/officeDocument/2006/relationships" xmlns:p="http://schemas.openxmlformats.org/presentationml/2006/main">
   <p:cSld>
     <p:spTree>
       <p:nvGrpSpPr>
@@ -5978,7 +11620,14 @@
         <p:cNvGrpSpPr/>
         <p:nvPr/>
       </p:nvGrpSpPr>
-      <p:grpSpPr/>
+      <p:grpSpPr>
+        <a:xfrm>
+          <a:off x="0" y="0"/>
+          <a:ext cx="0" cy="0"/>
+          <a:chOff x="0" y="0"/>
+          <a:chExt cx="0" cy="0"/>
+        </a:xfrm>
+      </p:grpSpPr>
       <p:sp>
         <p:nvSpPr>
           <p:cNvPr id="2" name="Title 1"/>
@@ -6012,7 +11661,9 @@
         </p:nvSpPr>
         <p:spPr/>
         <p:txBody>
-          <a:bodyPr/>
+          <a:bodyPr>
+            <a:normAutofit lnSpcReduction="10000"/>
+          </a:bodyPr>
           <a:lstStyle/>
           <a:p>
             <a:pPr>
@@ -6027,119 +11678,175 @@
               </a:spcAft>
             </a:pPr>
             <a:r>
-              <a:rPr sz="900">
+              <a:rPr sz="1800" dirty="0">
                 <a:latin typeface="Consolas"/>
               </a:rPr>
               <a:t>Service Landscape:</a:t>
             </a:r>
-            <a:br/>
-            <a:r>
-              <a:rPr sz="900">
+            <a:br>
+              <a:rPr sz="5400" dirty="0"/>
+            </a:br>
+            <a:r>
+              <a:rPr sz="1800" dirty="0">
                 <a:latin typeface="Consolas"/>
               </a:rPr>
               <a:t>┌───────────────┐  ┌───────────────┐  ┌───────────────┐</a:t>
             </a:r>
-            <a:br/>
-            <a:r>
-              <a:rPr sz="900">
-                <a:latin typeface="Consolas"/>
-              </a:rPr>
-              <a:t>│  Device Mgmt  │  │   Monitoring  │  │  Configuration │</a:t>
-            </a:r>
-            <a:br/>
-            <a:r>
-              <a:rPr sz="900">
+            <a:br>
+              <a:rPr sz="5400" dirty="0"/>
+            </a:br>
+            <a:r>
+              <a:rPr sz="1800" dirty="0">
+                <a:latin typeface="Consolas"/>
+              </a:rPr>
+              <a:t>│  Device </a:t>
+            </a:r>
+            <a:r>
+              <a:rPr sz="1800" dirty="0" err="1">
+                <a:latin typeface="Consolas"/>
+              </a:rPr>
+              <a:t>Mgmt</a:t>
+            </a:r>
+            <a:r>
+              <a:rPr sz="1800" dirty="0">
+                <a:latin typeface="Consolas"/>
+              </a:rPr>
+              <a:t>  │  │   Monitoring  │  │ Configuration │</a:t>
+            </a:r>
+            <a:br>
+              <a:rPr sz="5400" dirty="0"/>
+            </a:br>
+            <a:r>
+              <a:rPr sz="1800" dirty="0">
                 <a:latin typeface="Consolas"/>
               </a:rPr>
               <a:t>│   Service     │  │    Service    │  │    Service    │</a:t>
             </a:r>
-            <a:br/>
-            <a:r>
-              <a:rPr sz="900">
+            <a:br>
+              <a:rPr sz="5400" dirty="0"/>
+            </a:br>
+            <a:r>
+              <a:rPr sz="1800" dirty="0">
                 <a:latin typeface="Consolas"/>
               </a:rPr>
               <a:t>├───────────────┤  ├───────────────┤  ├───────────────┤</a:t>
             </a:r>
-            <a:br/>
-            <a:r>
-              <a:rPr sz="900">
-                <a:latin typeface="Consolas"/>
-              </a:rPr>
-              <a:t>│  PostgreSQL   │  │  InfluxDB     │  │   MongoDB     │</a:t>
-            </a:r>
-            <a:br/>
-            <a:r>
-              <a:rPr sz="900">
+            <a:br>
+              <a:rPr sz="5400" dirty="0"/>
+            </a:br>
+            <a:r>
+              <a:rPr sz="1800" dirty="0">
+                <a:latin typeface="Consolas"/>
+              </a:rPr>
+              <a:t>│  PostgreSQL   │  │  </a:t>
+            </a:r>
+            <a:r>
+              <a:rPr sz="1800" dirty="0" err="1">
+                <a:latin typeface="Consolas"/>
+              </a:rPr>
+              <a:t>InfluxDB</a:t>
+            </a:r>
+            <a:r>
+              <a:rPr sz="1800" dirty="0">
+                <a:latin typeface="Consolas"/>
+              </a:rPr>
+              <a:t>     │  │   MongoDB     │</a:t>
+            </a:r>
+            <a:br>
+              <a:rPr sz="5400" dirty="0"/>
+            </a:br>
+            <a:r>
+              <a:rPr sz="1800" dirty="0">
                 <a:latin typeface="Consolas"/>
               </a:rPr>
               <a:t>└───────────────┘  └───────────────┘  └───────────────┘</a:t>
             </a:r>
-            <a:br/>
-            <a:r>
-              <a:rPr sz="900">
+            <a:br>
+              <a:rPr sz="5400" dirty="0"/>
+            </a:br>
+            <a:r>
+              <a:rPr sz="1800" dirty="0">
                 <a:latin typeface="Consolas"/>
               </a:rPr>
               <a:t>         │                  │                  │</a:t>
             </a:r>
-            <a:br/>
-            <a:r>
-              <a:rPr sz="900">
+            <a:br>
+              <a:rPr sz="5400" dirty="0"/>
+            </a:br>
+            <a:r>
+              <a:rPr sz="1800" dirty="0">
                 <a:latin typeface="Consolas"/>
               </a:rPr>
               <a:t>         └──────────────────┼──────────────────┘</a:t>
             </a:r>
-            <a:br/>
-            <a:r>
-              <a:rPr sz="900">
+            <a:br>
+              <a:rPr sz="5400" dirty="0"/>
+            </a:br>
+            <a:r>
+              <a:rPr sz="1800" dirty="0">
                 <a:latin typeface="Consolas"/>
               </a:rPr>
               <a:t>                            │</a:t>
             </a:r>
-            <a:br/>
-            <a:r>
-              <a:rPr sz="900">
+            <a:br>
+              <a:rPr sz="5400" dirty="0"/>
+            </a:br>
+            <a:r>
+              <a:rPr sz="1800" dirty="0">
                 <a:latin typeface="Consolas"/>
               </a:rPr>
               <a:t>                   ┌─────────────────┐</a:t>
             </a:r>
-            <a:br/>
-            <a:r>
-              <a:rPr sz="900">
+            <a:br>
+              <a:rPr sz="5400" dirty="0"/>
+            </a:br>
+            <a:r>
+              <a:rPr sz="1800" dirty="0">
                 <a:latin typeface="Consolas"/>
               </a:rPr>
               <a:t>                   │   API Gateway   │</a:t>
             </a:r>
-            <a:br/>
-            <a:r>
-              <a:rPr sz="900">
+            <a:br>
+              <a:rPr sz="5400" dirty="0"/>
+            </a:br>
+            <a:r>
+              <a:rPr sz="1800" dirty="0">
                 <a:latin typeface="Consolas"/>
               </a:rPr>
               <a:t>                   ├─────────────────┤</a:t>
             </a:r>
-            <a:br/>
-            <a:r>
-              <a:rPr sz="900">
+            <a:br>
+              <a:rPr sz="5400" dirty="0"/>
+            </a:br>
+            <a:r>
+              <a:rPr sz="1800" dirty="0">
                 <a:latin typeface="Consolas"/>
               </a:rPr>
               <a:t>                   │ Load Balancer   │</a:t>
             </a:r>
-            <a:br/>
-            <a:r>
-              <a:rPr sz="900">
+            <a:br>
+              <a:rPr sz="5400" dirty="0"/>
+            </a:br>
+            <a:r>
+              <a:rPr sz="1800" dirty="0">
                 <a:latin typeface="Consolas"/>
               </a:rPr>
               <a:t>                   ├─────────────────┤</a:t>
             </a:r>
-            <a:br/>
-            <a:r>
-              <a:rPr sz="900">
+            <a:br>
+              <a:rPr sz="5400" dirty="0"/>
+            </a:br>
+            <a:r>
+              <a:rPr sz="1800" dirty="0">
                 <a:latin typeface="Consolas"/>
               </a:rPr>
               <a:t>                   │ Service Mesh    │</a:t>
             </a:r>
-            <a:br/>
-            <a:r>
-              <a:rPr sz="900">
+            <a:br>
+              <a:rPr sz="5400" dirty="0"/>
+            </a:br>
+            <a:r>
+              <a:rPr sz="1800" dirty="0">
                 <a:latin typeface="Consolas"/>
               </a:rPr>
               <a:t>                   └─────────────────┘</a:t>
@@ -6468,4 +12175,324 @@
     </a:ext>
   </a:extLst>
 </a:theme>
+</file>
+
+<file path=ppt/theme/theme2.xml><?xml version="1.0" encoding="utf-8"?>
+<a:theme xmlns:a="http://schemas.openxmlformats.org/drawingml/2006/main" name="Office Theme">
+  <a:themeElements>
+    <a:clrScheme name="Office">
+      <a:dk1>
+        <a:sysClr val="windowText" lastClr="000000"/>
+      </a:dk1>
+      <a:lt1>
+        <a:sysClr val="window" lastClr="FFFFFF"/>
+      </a:lt1>
+      <a:dk2>
+        <a:srgbClr val="1F497D"/>
+      </a:dk2>
+      <a:lt2>
+        <a:srgbClr val="EEECE1"/>
+      </a:lt2>
+      <a:accent1>
+        <a:srgbClr val="4F81BD"/>
+      </a:accent1>
+      <a:accent2>
+        <a:srgbClr val="C0504D"/>
+      </a:accent2>
+      <a:accent3>
+        <a:srgbClr val="9BBB59"/>
+      </a:accent3>
+      <a:accent4>
+        <a:srgbClr val="8064A2"/>
+      </a:accent4>
+      <a:accent5>
+        <a:srgbClr val="4BACC6"/>
+      </a:accent5>
+      <a:accent6>
+        <a:srgbClr val="F79646"/>
+      </a:accent6>
+      <a:hlink>
+        <a:srgbClr val="0000FF"/>
+      </a:hlink>
+      <a:folHlink>
+        <a:srgbClr val="800080"/>
+      </a:folHlink>
+    </a:clrScheme>
+    <a:fontScheme name="Office">
+      <a:majorFont>
+        <a:latin typeface="Calibri"/>
+        <a:ea typeface=""/>
+        <a:cs typeface=""/>
+        <a:font script="Jpan" typeface="ＭＳ Ｐゴシック"/>
+        <a:font script="Hang" typeface="맑은 고딕"/>
+        <a:font script="Hans" typeface="宋体"/>
+        <a:font script="Hant" typeface="新細明體"/>
+        <a:font script="Arab" typeface="Times New Roman"/>
+        <a:font script="Hebr" typeface="Times New Roman"/>
+        <a:font script="Thai" typeface="Angsana New"/>
+        <a:font script="Ethi" typeface="Nyala"/>
+        <a:font script="Beng" typeface="Vrinda"/>
+        <a:font script="Gujr" typeface="Shruti"/>
+        <a:font script="Khmr" typeface="MoolBoran"/>
+        <a:font script="Knda" typeface="Tunga"/>
+        <a:font script="Guru" typeface="Raavi"/>
+        <a:font script="Cans" typeface="Euphemia"/>
+        <a:font script="Cher" typeface="Plantagenet Cherokee"/>
+        <a:font script="Yiii" typeface="Microsoft Yi Baiti"/>
+        <a:font script="Tibt" typeface="Microsoft Himalaya"/>
+        <a:font script="Thaa" typeface="MV Boli"/>
+        <a:font script="Deva" typeface="Mangal"/>
+        <a:font script="Telu" typeface="Gautami"/>
+        <a:font script="Taml" typeface="Latha"/>
+        <a:font script="Syrc" typeface="Estrangelo Edessa"/>
+        <a:font script="Orya" typeface="Kalinga"/>
+        <a:font script="Mlym" typeface="Kartika"/>
+        <a:font script="Laoo" typeface="DokChampa"/>
+        <a:font script="Sinh" typeface="Iskoola Pota"/>
+        <a:font script="Mong" typeface="Mongolian Baiti"/>
+        <a:font script="Viet" typeface="Times New Roman"/>
+        <a:font script="Uigh" typeface="Microsoft Uighur"/>
+        <a:font script="Geor" typeface="Sylfaen"/>
+      </a:majorFont>
+      <a:minorFont>
+        <a:latin typeface="Calibri"/>
+        <a:ea typeface=""/>
+        <a:cs typeface=""/>
+        <a:font script="Jpan" typeface="ＭＳ Ｐゴシック"/>
+        <a:font script="Hang" typeface="맑은 고딕"/>
+        <a:font script="Hans" typeface="宋体"/>
+        <a:font script="Hant" typeface="新細明體"/>
+        <a:font script="Arab" typeface="Arial"/>
+        <a:font script="Hebr" typeface="Arial"/>
+        <a:font script="Thai" typeface="Cordia New"/>
+        <a:font script="Ethi" typeface="Nyala"/>
+        <a:font script="Beng" typeface="Vrinda"/>
+        <a:font script="Gujr" typeface="Shruti"/>
+        <a:font script="Khmr" typeface="DaunPenh"/>
+        <a:font script="Knda" typeface="Tunga"/>
+        <a:font script="Guru" typeface="Raavi"/>
+        <a:font script="Cans" typeface="Euphemia"/>
+        <a:font script="Cher" typeface="Plantagenet Cherokee"/>
+        <a:font script="Yiii" typeface="Microsoft Yi Baiti"/>
+        <a:font script="Tibt" typeface="Microsoft Himalaya"/>
+        <a:font script="Thaa" typeface="MV Boli"/>
+        <a:font script="Deva" typeface="Mangal"/>
+        <a:font script="Telu" typeface="Gautami"/>
+        <a:font script="Taml" typeface="Latha"/>
+        <a:font script="Syrc" typeface="Estrangelo Edessa"/>
+        <a:font script="Orya" typeface="Kalinga"/>
+        <a:font script="Mlym" typeface="Kartika"/>
+        <a:font script="Laoo" typeface="DokChampa"/>
+        <a:font script="Sinh" typeface="Iskoola Pota"/>
+        <a:font script="Mong" typeface="Mongolian Baiti"/>
+        <a:font script="Viet" typeface="Arial"/>
+        <a:font script="Uigh" typeface="Microsoft Uighur"/>
+        <a:font script="Geor" typeface="Sylfaen"/>
+      </a:minorFont>
+    </a:fontScheme>
+    <a:fmtScheme name="Office">
+      <a:fillStyleLst>
+        <a:solidFill>
+          <a:schemeClr val="phClr"/>
+        </a:solidFill>
+        <a:gradFill rotWithShape="1">
+          <a:gsLst>
+            <a:gs pos="0">
+              <a:schemeClr val="phClr">
+                <a:tint val="50000"/>
+                <a:satMod val="300000"/>
+              </a:schemeClr>
+            </a:gs>
+            <a:gs pos="35000">
+              <a:schemeClr val="phClr">
+                <a:tint val="37000"/>
+                <a:satMod val="300000"/>
+              </a:schemeClr>
+            </a:gs>
+            <a:gs pos="100000">
+              <a:schemeClr val="phClr">
+                <a:tint val="15000"/>
+                <a:satMod val="350000"/>
+              </a:schemeClr>
+            </a:gs>
+          </a:gsLst>
+          <a:lin ang="16200000" scaled="1"/>
+        </a:gradFill>
+        <a:gradFill rotWithShape="1">
+          <a:gsLst>
+            <a:gs pos="0">
+              <a:schemeClr val="phClr">
+                <a:tint val="100000"/>
+                <a:shade val="100000"/>
+                <a:satMod val="130000"/>
+              </a:schemeClr>
+            </a:gs>
+            <a:gs pos="100000">
+              <a:schemeClr val="phClr">
+                <a:tint val="50000"/>
+                <a:shade val="100000"/>
+                <a:satMod val="350000"/>
+              </a:schemeClr>
+            </a:gs>
+          </a:gsLst>
+          <a:lin ang="16200000" scaled="0"/>
+        </a:gradFill>
+      </a:fillStyleLst>
+      <a:lnStyleLst>
+        <a:ln w="9525" cap="flat" cmpd="sng" algn="ctr">
+          <a:solidFill>
+            <a:schemeClr val="phClr">
+              <a:shade val="95000"/>
+              <a:satMod val="105000"/>
+            </a:schemeClr>
+          </a:solidFill>
+          <a:prstDash val="solid"/>
+        </a:ln>
+        <a:ln w="25400" cap="flat" cmpd="sng" algn="ctr">
+          <a:solidFill>
+            <a:schemeClr val="phClr"/>
+          </a:solidFill>
+          <a:prstDash val="solid"/>
+        </a:ln>
+        <a:ln w="38100" cap="flat" cmpd="sng" algn="ctr">
+          <a:solidFill>
+            <a:schemeClr val="phClr"/>
+          </a:solidFill>
+          <a:prstDash val="solid"/>
+        </a:ln>
+      </a:lnStyleLst>
+      <a:effectStyleLst>
+        <a:effectStyle>
+          <a:effectLst>
+            <a:outerShdw blurRad="40000" dist="20000" dir="5400000" rotWithShape="0">
+              <a:srgbClr val="000000">
+                <a:alpha val="38000"/>
+              </a:srgbClr>
+            </a:outerShdw>
+          </a:effectLst>
+        </a:effectStyle>
+        <a:effectStyle>
+          <a:effectLst>
+            <a:outerShdw blurRad="40000" dist="23000" dir="5400000" rotWithShape="0">
+              <a:srgbClr val="000000">
+                <a:alpha val="35000"/>
+              </a:srgbClr>
+            </a:outerShdw>
+          </a:effectLst>
+        </a:effectStyle>
+        <a:effectStyle>
+          <a:effectLst>
+            <a:outerShdw blurRad="40000" dist="23000" dir="5400000" rotWithShape="0">
+              <a:srgbClr val="000000">
+                <a:alpha val="35000"/>
+              </a:srgbClr>
+            </a:outerShdw>
+          </a:effectLst>
+          <a:scene3d>
+            <a:camera prst="orthographicFront">
+              <a:rot lat="0" lon="0" rev="0"/>
+            </a:camera>
+            <a:lightRig rig="threePt" dir="t">
+              <a:rot lat="0" lon="0" rev="1200000"/>
+            </a:lightRig>
+          </a:scene3d>
+          <a:sp3d>
+            <a:bevelT w="63500" h="25400"/>
+          </a:sp3d>
+        </a:effectStyle>
+      </a:effectStyleLst>
+      <a:bgFillStyleLst>
+        <a:solidFill>
+          <a:schemeClr val="phClr"/>
+        </a:solidFill>
+        <a:gradFill rotWithShape="1">
+          <a:gsLst>
+            <a:gs pos="0">
+              <a:schemeClr val="phClr">
+                <a:tint val="40000"/>
+                <a:satMod val="350000"/>
+              </a:schemeClr>
+            </a:gs>
+            <a:gs pos="40000">
+              <a:schemeClr val="phClr">
+                <a:tint val="45000"/>
+                <a:shade val="99000"/>
+                <a:satMod val="350000"/>
+              </a:schemeClr>
+            </a:gs>
+            <a:gs pos="100000">
+              <a:schemeClr val="phClr">
+                <a:shade val="20000"/>
+                <a:satMod val="255000"/>
+              </a:schemeClr>
+            </a:gs>
+          </a:gsLst>
+          <a:path path="circle">
+            <a:fillToRect l="50000" t="-80000" r="50000" b="180000"/>
+          </a:path>
+        </a:gradFill>
+        <a:gradFill rotWithShape="1">
+          <a:gsLst>
+            <a:gs pos="0">
+              <a:schemeClr val="phClr">
+                <a:tint val="80000"/>
+                <a:satMod val="300000"/>
+              </a:schemeClr>
+            </a:gs>
+            <a:gs pos="100000">
+              <a:schemeClr val="phClr">
+                <a:shade val="30000"/>
+                <a:satMod val="200000"/>
+              </a:schemeClr>
+            </a:gs>
+          </a:gsLst>
+          <a:path path="circle">
+            <a:fillToRect l="50000" t="50000" r="50000" b="50000"/>
+          </a:path>
+        </a:gradFill>
+      </a:bgFillStyleLst>
+    </a:fmtScheme>
+  </a:themeElements>
+  <a:objectDefaults>
+    <a:spDef>
+      <a:spPr/>
+      <a:bodyPr/>
+      <a:lstStyle/>
+      <a:style>
+        <a:lnRef idx="1">
+          <a:schemeClr val="accent1"/>
+        </a:lnRef>
+        <a:fillRef idx="3">
+          <a:schemeClr val="accent1"/>
+        </a:fillRef>
+        <a:effectRef idx="2">
+          <a:schemeClr val="accent1"/>
+        </a:effectRef>
+        <a:fontRef idx="minor">
+          <a:schemeClr val="lt1"/>
+        </a:fontRef>
+      </a:style>
+    </a:spDef>
+    <a:lnDef>
+      <a:spPr/>
+      <a:bodyPr/>
+      <a:lstStyle/>
+      <a:style>
+        <a:lnRef idx="2">
+          <a:schemeClr val="accent1"/>
+        </a:lnRef>
+        <a:fillRef idx="0">
+          <a:schemeClr val="accent1"/>
+        </a:fillRef>
+        <a:effectRef idx="1">
+          <a:schemeClr val="accent1"/>
+        </a:effectRef>
+        <a:fontRef idx="minor">
+          <a:schemeClr val="tx1"/>
+        </a:fontRef>
+      </a:style>
+    </a:lnDef>
+  </a:objectDefaults>
+  <a:extraClrSchemeLst/>
+</a:theme>
 </file>
--- a/presentations/powerpoint/arch-patterns-part1.pptx
+++ b/presentations/powerpoint/arch-patterns-part1.pptx
@@ -18,12 +18,18 @@
     <p:sldId id="268" r:id="rId14"/>
     <p:sldId id="269" r:id="rId15"/>
     <p:sldId id="270" r:id="rId16"/>
-    <p:sldId id="275" r:id="rId26"/>
-    <p:sldId id="276" r:id="rId27"/>
-    <p:sldId id="277" r:id="rId28"/>
-    <p:sldId id="278" r:id="rId29"/>
-    <p:sldId id="279" r:id="rId30"/>
-    <p:sldId id="280" r:id="rId31"/>
+    <p:sldId id="271" r:id="rId25"/>
+    <p:sldId id="272" r:id="rId23"/>
+    <p:sldId id="273" r:id="rId22"/>
+    <p:sldId id="274" r:id="rId21"/>
+    <p:sldId id="275" r:id="rId11"/>
+    <p:sldId id="276" r:id="rId8"/>
+    <p:sldId id="277" r:id="rId32"/>
+    <p:sldId id="278" r:id="rId33"/>
+    <p:sldId id="279" r:id="rId34"/>
+    <p:sldId id="280" r:id="rId35"/>
+    <p:sldId id="281" r:id="rId36"/>
+    <p:sldId id="282" r:id="rId37"/>
   </p:sldIdLst>
   <p:sldSz cx="12192000" cy="6858000"/>
   <p:notesSz cx="6858000" cy="9144000"/>
@@ -1440,171 +1446,6 @@
 </p:notes>
 </file>
 
-<file path=ppt/notesSlides/notesSlide19.xml><?xml version="1.0" encoding="utf-8"?>
-<p:notes xmlns:a="http://schemas.openxmlformats.org/drawingml/2006/main" xmlns:p="http://schemas.openxmlformats.org/presentationml/2006/main" xmlns:r="http://schemas.openxmlformats.org/officeDocument/2006/relationships">
-  <p:cSld>
-    <p:spTree>
-      <p:nvGrpSpPr>
-        <p:cNvPr id="1" name=""/>
-        <p:cNvGrpSpPr/>
-        <p:nvPr/>
-      </p:nvGrpSpPr>
-      <p:grpSpPr>
-        <a:xfrm>
-          <a:off x="0" y="0"/>
-          <a:ext cx="0" cy="0"/>
-          <a:chOff x="0" y="0"/>
-          <a:chExt cx="0" cy="0"/>
-        </a:xfrm>
-      </p:grpSpPr>
-      <p:sp>
-        <p:nvSpPr>
-          <p:cNvPr id="2" name="Slide Image Placeholder 1"/>
-          <p:cNvSpPr>
-            <a:spLocks noGrp="1"/>
-          </p:cNvSpPr>
-          <p:nvPr>
-            <p:ph type="sldImg" idx="2"/>
-          </p:nvPr>
-        </p:nvSpPr>
-        <p:spPr/>
-      </p:sp>
-      <p:sp>
-        <p:nvSpPr>
-          <p:cNvPr id="3" name="Notes Placeholder 2"/>
-          <p:cNvSpPr>
-            <a:spLocks noGrp="1"/>
-          </p:cNvSpPr>
-          <p:nvPr>
-            <p:ph type="body" idx="3" sz="quarter"/>
-          </p:nvPr>
-        </p:nvSpPr>
-        <p:spPr/>
-        <p:txBody>
-          <a:bodyPr/>
-          <a:lstStyle/>
-          <a:p>
-            <a:r>
-              <a:t>Sprecher-Notizen für Layered Architecture Trade-offs:</a:t>
-            </a:r>
-          </a:p>
-          <a:p/>
-          <a:p>
-            <a:r>
-              <a:t>EINFÜHRUNG:</a:t>
-            </a:r>
-          </a:p>
-          <a:p>
-            <a:r>
-              <a:t>- Kurz den Kontext des Patterns wiederholen</a:t>
-            </a:r>
-          </a:p>
-          <a:p>
-            <a:r>
-              <a:t>- Betonen: Jede Architekturentscheidung hat Vor- und Nachteile</a:t>
-            </a:r>
-          </a:p>
-          <a:p/>
-          <a:p>
-            <a:r>
-              <a:t>VORTEILE (0 Punkte):</a:t>
-            </a:r>
-          </a:p>
-          <a:p>
-            <a:r>
-              <a:t>- Jeden Vorteil mit konkreten Telekom-Beispielen untermauern</a:t>
-            </a:r>
-          </a:p>
-          <a:p>
-            <a:r>
-              <a:t>- Bei Performance-Vorteilen: Zahlen und Metriken erwähnen</a:t>
-            </a:r>
-          </a:p>
-          <a:p>
-            <a:r>
-              <a:t>- Bei Team-Vorteilen: Auswirkungen auf Entwicklungsprozesse erklären</a:t>
-            </a:r>
-          </a:p>
-          <a:p/>
-          <a:p>
-            <a:r>
-              <a:t>NACHTEILE (0 Punkte):</a:t>
-            </a:r>
-          </a:p>
-          <a:p>
-            <a:r>
-              <a:t>- Ehrlich über Herausforderungen sprechen</a:t>
-            </a:r>
-          </a:p>
-          <a:p>
-            <a:r>
-              <a:t>- Mitigation-Strategien für kritische Nachteile erwähnen</a:t>
-            </a:r>
-          </a:p>
-          <a:p>
-            <a:r>
-              <a:t>- Kosten-Nutzen-Abwägung diskutieren</a:t>
-            </a:r>
-          </a:p>
-          <a:p/>
-          <a:p>
-            <a:r>
-              <a:t>TELEKOM-SPEZIFISCH:</a:t>
-            </a:r>
-          </a:p>
-          <a:p>
-            <a:r>
-              <a:t>- Welche Nachteile sind für Telekom besonders relevant?</a:t>
-            </a:r>
-          </a:p>
-          <a:p>
-            <a:r>
-              <a:t>- Gibt es interne Tools/Prozesse, die Nachteile abmildern?</a:t>
-            </a:r>
-          </a:p>
-          <a:p>
-            <a:r>
-              <a:t>- Lessons learned aus ähnlichen Projekten erwähnen</a:t>
-            </a:r>
-          </a:p>
-          <a:p/>
-          <a:p>
-            <a:r>
-              <a:t>ÜBERLEITUNG:</a:t>
-            </a:r>
-          </a:p>
-          <a:p>
-            <a:r>
-              <a:t>- Vorbereitung auf 'When to Use' Slide</a:t>
-            </a:r>
-          </a:p>
-          <a:p>
-            <a:r>
-              <a:t>- Hint: Context ist entscheidend für Entscheidung</a:t>
-            </a:r>
-          </a:p>
-        </p:txBody>
-      </p:sp>
-      <p:sp>
-        <p:nvSpPr>
-          <p:cNvPr id="4" name="Slide Number Placeholder 3"/>
-          <p:cNvSpPr>
-            <a:spLocks noGrp="1"/>
-          </p:cNvSpPr>
-          <p:nvPr>
-            <p:ph type="sldNum" idx="5" sz="quarter"/>
-          </p:nvPr>
-        </p:nvSpPr>
-        <p:spPr/>
-      </p:sp>
-    </p:spTree>
-  </p:cSld>
-  <p:clrMapOvr>
-    <a:masterClrMapping/>
-  </p:clrMapOvr>
-</p:notes>
-</file>
-
 <file path=ppt/notesSlides/notesSlide2.xml><?xml version="1.0" encoding="utf-8"?>
 <p:notes xmlns:a="http://schemas.openxmlformats.org/drawingml/2006/main" xmlns:p="http://schemas.openxmlformats.org/presentationml/2006/main" xmlns:r="http://schemas.openxmlformats.org/officeDocument/2006/relationships">
   <p:cSld>
@@ -1746,171 +1587,6 @@
           <a:p>
             <a:r>
               <a:t>- Lernkurve von grundlegend zu advanced erklären</a:t>
-            </a:r>
-          </a:p>
-        </p:txBody>
-      </p:sp>
-      <p:sp>
-        <p:nvSpPr>
-          <p:cNvPr id="4" name="Slide Number Placeholder 3"/>
-          <p:cNvSpPr>
-            <a:spLocks noGrp="1"/>
-          </p:cNvSpPr>
-          <p:nvPr>
-            <p:ph type="sldNum" idx="5" sz="quarter"/>
-          </p:nvPr>
-        </p:nvSpPr>
-        <p:spPr/>
-      </p:sp>
-    </p:spTree>
-  </p:cSld>
-  <p:clrMapOvr>
-    <a:masterClrMapping/>
-  </p:clrMapOvr>
-</p:notes>
-</file>
-
-<file path=ppt/notesSlides/notesSlide20.xml><?xml version="1.0" encoding="utf-8"?>
-<p:notes xmlns:a="http://schemas.openxmlformats.org/drawingml/2006/main" xmlns:p="http://schemas.openxmlformats.org/presentationml/2006/main" xmlns:r="http://schemas.openxmlformats.org/officeDocument/2006/relationships">
-  <p:cSld>
-    <p:spTree>
-      <p:nvGrpSpPr>
-        <p:cNvPr id="1" name=""/>
-        <p:cNvGrpSpPr/>
-        <p:nvPr/>
-      </p:nvGrpSpPr>
-      <p:grpSpPr>
-        <a:xfrm>
-          <a:off x="0" y="0"/>
-          <a:ext cx="0" cy="0"/>
-          <a:chOff x="0" y="0"/>
-          <a:chExt cx="0" cy="0"/>
-        </a:xfrm>
-      </p:grpSpPr>
-      <p:sp>
-        <p:nvSpPr>
-          <p:cNvPr id="2" name="Slide Image Placeholder 1"/>
-          <p:cNvSpPr>
-            <a:spLocks noGrp="1"/>
-          </p:cNvSpPr>
-          <p:nvPr>
-            <p:ph type="sldImg" idx="2"/>
-          </p:nvPr>
-        </p:nvSpPr>
-        <p:spPr/>
-      </p:sp>
-      <p:sp>
-        <p:nvSpPr>
-          <p:cNvPr id="3" name="Notes Placeholder 2"/>
-          <p:cNvSpPr>
-            <a:spLocks noGrp="1"/>
-          </p:cNvSpPr>
-          <p:nvPr>
-            <p:ph type="body" idx="3" sz="quarter"/>
-          </p:nvPr>
-        </p:nvSpPr>
-        <p:spPr/>
-        <p:txBody>
-          <a:bodyPr/>
-          <a:lstStyle/>
-          <a:p>
-            <a:r>
-              <a:t>Sprecher-Notizen für Microservices Trade-offs:</a:t>
-            </a:r>
-          </a:p>
-          <a:p/>
-          <a:p>
-            <a:r>
-              <a:t>EINFÜHRUNG:</a:t>
-            </a:r>
-          </a:p>
-          <a:p>
-            <a:r>
-              <a:t>- Kurz den Kontext des Patterns wiederholen</a:t>
-            </a:r>
-          </a:p>
-          <a:p>
-            <a:r>
-              <a:t>- Betonen: Jede Architekturentscheidung hat Vor- und Nachteile</a:t>
-            </a:r>
-          </a:p>
-          <a:p/>
-          <a:p>
-            <a:r>
-              <a:t>VORTEILE (0 Punkte):</a:t>
-            </a:r>
-          </a:p>
-          <a:p>
-            <a:r>
-              <a:t>- Jeden Vorteil mit konkreten Telekom-Beispielen untermauern</a:t>
-            </a:r>
-          </a:p>
-          <a:p>
-            <a:r>
-              <a:t>- Bei Performance-Vorteilen: Zahlen und Metriken erwähnen</a:t>
-            </a:r>
-          </a:p>
-          <a:p>
-            <a:r>
-              <a:t>- Bei Team-Vorteilen: Auswirkungen auf Entwicklungsprozesse erklären</a:t>
-            </a:r>
-          </a:p>
-          <a:p/>
-          <a:p>
-            <a:r>
-              <a:t>NACHTEILE (0 Punkte):</a:t>
-            </a:r>
-          </a:p>
-          <a:p>
-            <a:r>
-              <a:t>- Ehrlich über Herausforderungen sprechen</a:t>
-            </a:r>
-          </a:p>
-          <a:p>
-            <a:r>
-              <a:t>- Mitigation-Strategien für kritische Nachteile erwähnen</a:t>
-            </a:r>
-          </a:p>
-          <a:p>
-            <a:r>
-              <a:t>- Kosten-Nutzen-Abwägung diskutieren</a:t>
-            </a:r>
-          </a:p>
-          <a:p/>
-          <a:p>
-            <a:r>
-              <a:t>TELEKOM-SPEZIFISCH:</a:t>
-            </a:r>
-          </a:p>
-          <a:p>
-            <a:r>
-              <a:t>- Welche Nachteile sind für Telekom besonders relevant?</a:t>
-            </a:r>
-          </a:p>
-          <a:p>
-            <a:r>
-              <a:t>- Gibt es interne Tools/Prozesse, die Nachteile abmildern?</a:t>
-            </a:r>
-          </a:p>
-          <a:p>
-            <a:r>
-              <a:t>- Lessons learned aus ähnlichen Projekten erwähnen</a:t>
-            </a:r>
-          </a:p>
-          <a:p/>
-          <a:p>
-            <a:r>
-              <a:t>ÜBERLEITUNG:</a:t>
-            </a:r>
-          </a:p>
-          <a:p>
-            <a:r>
-              <a:t>- Vorbereitung auf 'When to Use' Slide</a:t>
-            </a:r>
-          </a:p>
-          <a:p>
-            <a:r>
-              <a:t>- Hint: Context ist entscheidend für Entscheidung</a:t>
             </a:r>
           </a:p>
         </p:txBody>
@@ -2107,666 +1783,6 @@
           <a:p>
             <a:r>
               <a:t>- Zeit für Fragen einplanen</a:t>
-            </a:r>
-          </a:p>
-        </p:txBody>
-      </p:sp>
-      <p:sp>
-        <p:nvSpPr>
-          <p:cNvPr id="4" name="Slide Number Placeholder 3"/>
-          <p:cNvSpPr>
-            <a:spLocks noGrp="1"/>
-          </p:cNvSpPr>
-          <p:nvPr>
-            <p:ph type="sldNum" idx="5" sz="quarter"/>
-          </p:nvPr>
-        </p:nvSpPr>
-        <p:spPr/>
-      </p:sp>
-    </p:spTree>
-  </p:cSld>
-  <p:clrMapOvr>
-    <a:masterClrMapping/>
-  </p:clrMapOvr>
-</p:notes>
-</file>
-
-<file path=ppt/notesSlides/notesSlide22.xml><?xml version="1.0" encoding="utf-8"?>
-<p:notes xmlns:a="http://schemas.openxmlformats.org/drawingml/2006/main" xmlns:p="http://schemas.openxmlformats.org/presentationml/2006/main" xmlns:r="http://schemas.openxmlformats.org/officeDocument/2006/relationships">
-  <p:cSld>
-    <p:spTree>
-      <p:nvGrpSpPr>
-        <p:cNvPr id="1" name=""/>
-        <p:cNvGrpSpPr/>
-        <p:nvPr/>
-      </p:nvGrpSpPr>
-      <p:grpSpPr>
-        <a:xfrm>
-          <a:off x="0" y="0"/>
-          <a:ext cx="0" cy="0"/>
-          <a:chOff x="0" y="0"/>
-          <a:chExt cx="0" cy="0"/>
-        </a:xfrm>
-      </p:grpSpPr>
-      <p:sp>
-        <p:nvSpPr>
-          <p:cNvPr id="2" name="Slide Image Placeholder 1"/>
-          <p:cNvSpPr>
-            <a:spLocks noGrp="1"/>
-          </p:cNvSpPr>
-          <p:nvPr>
-            <p:ph type="sldImg" idx="2"/>
-          </p:nvPr>
-        </p:nvSpPr>
-        <p:spPr/>
-      </p:sp>
-      <p:sp>
-        <p:nvSpPr>
-          <p:cNvPr id="3" name="Notes Placeholder 2"/>
-          <p:cNvSpPr>
-            <a:spLocks noGrp="1"/>
-          </p:cNvSpPr>
-          <p:nvPr>
-            <p:ph type="body" idx="3" sz="quarter"/>
-          </p:nvPr>
-        </p:nvSpPr>
-        <p:spPr/>
-        <p:txBody>
-          <a:bodyPr/>
-          <a:lstStyle/>
-          <a:p>
-            <a:r>
-              <a:t>Sprecher-Notizen für Layered Architecture (Schichtarchitektur) Trade-offs:</a:t>
-            </a:r>
-          </a:p>
-          <a:p/>
-          <a:p>
-            <a:r>
-              <a:t>EINFÜHRUNG:</a:t>
-            </a:r>
-          </a:p>
-          <a:p>
-            <a:r>
-              <a:t>- Kurz den Kontext des Patterns wiederholen</a:t>
-            </a:r>
-          </a:p>
-          <a:p>
-            <a:r>
-              <a:t>- Betonen: Jede Architekturentscheidung hat Vor- und Nachteile</a:t>
-            </a:r>
-          </a:p>
-          <a:p/>
-          <a:p>
-            <a:r>
-              <a:t>VORTEILE (0 Punkte):</a:t>
-            </a:r>
-          </a:p>
-          <a:p>
-            <a:r>
-              <a:t>- Jeden Vorteil mit konkreten Telekom-Beispielen untermauern</a:t>
-            </a:r>
-          </a:p>
-          <a:p>
-            <a:r>
-              <a:t>- Bei Performance-Vorteilen: Zahlen und Metriken erwähnen</a:t>
-            </a:r>
-          </a:p>
-          <a:p>
-            <a:r>
-              <a:t>- Bei Team-Vorteilen: Auswirkungen auf Entwicklungsprozesse erklären</a:t>
-            </a:r>
-          </a:p>
-          <a:p/>
-          <a:p>
-            <a:r>
-              <a:t>NACHTEILE (0 Punkte):</a:t>
-            </a:r>
-          </a:p>
-          <a:p>
-            <a:r>
-              <a:t>- Ehrlich über Herausforderungen sprechen</a:t>
-            </a:r>
-          </a:p>
-          <a:p>
-            <a:r>
-              <a:t>- Mitigation-Strategien für kritische Nachteile erwähnen</a:t>
-            </a:r>
-          </a:p>
-          <a:p>
-            <a:r>
-              <a:t>- Kosten-Nutzen-Abwägung diskutieren</a:t>
-            </a:r>
-          </a:p>
-          <a:p/>
-          <a:p>
-            <a:r>
-              <a:t>TELEKOM-SPEZIFISCH:</a:t>
-            </a:r>
-          </a:p>
-          <a:p>
-            <a:r>
-              <a:t>- Welche Nachteile sind für Telekom besonders relevant?</a:t>
-            </a:r>
-          </a:p>
-          <a:p>
-            <a:r>
-              <a:t>- Gibt es interne Tools/Prozesse, die Nachteile abmildern?</a:t>
-            </a:r>
-          </a:p>
-          <a:p>
-            <a:r>
-              <a:t>- Lessons learned aus ähnlichen Projekten erwähnen</a:t>
-            </a:r>
-          </a:p>
-          <a:p/>
-          <a:p>
-            <a:r>
-              <a:t>ÜBERLEITUNG:</a:t>
-            </a:r>
-          </a:p>
-          <a:p>
-            <a:r>
-              <a:t>- Vorbereitung auf 'When to Use' Slide</a:t>
-            </a:r>
-          </a:p>
-          <a:p>
-            <a:r>
-              <a:t>- Hint: Context ist entscheidend für Entscheidung</a:t>
-            </a:r>
-          </a:p>
-        </p:txBody>
-      </p:sp>
-      <p:sp>
-        <p:nvSpPr>
-          <p:cNvPr id="4" name="Slide Number Placeholder 3"/>
-          <p:cNvSpPr>
-            <a:spLocks noGrp="1"/>
-          </p:cNvSpPr>
-          <p:nvPr>
-            <p:ph type="sldNum" idx="5" sz="quarter"/>
-          </p:nvPr>
-        </p:nvSpPr>
-        <p:spPr/>
-      </p:sp>
-    </p:spTree>
-  </p:cSld>
-  <p:clrMapOvr>
-    <a:masterClrMapping/>
-  </p:clrMapOvr>
-</p:notes>
-</file>
-
-<file path=ppt/notesSlides/notesSlide23.xml><?xml version="1.0" encoding="utf-8"?>
-<p:notes xmlns:a="http://schemas.openxmlformats.org/drawingml/2006/main" xmlns:p="http://schemas.openxmlformats.org/presentationml/2006/main" xmlns:r="http://schemas.openxmlformats.org/officeDocument/2006/relationships">
-  <p:cSld>
-    <p:spTree>
-      <p:nvGrpSpPr>
-        <p:cNvPr id="1" name=""/>
-        <p:cNvGrpSpPr/>
-        <p:nvPr/>
-      </p:nvGrpSpPr>
-      <p:grpSpPr>
-        <a:xfrm>
-          <a:off x="0" y="0"/>
-          <a:ext cx="0" cy="0"/>
-          <a:chOff x="0" y="0"/>
-          <a:chExt cx="0" cy="0"/>
-        </a:xfrm>
-      </p:grpSpPr>
-      <p:sp>
-        <p:nvSpPr>
-          <p:cNvPr id="2" name="Slide Image Placeholder 1"/>
-          <p:cNvSpPr>
-            <a:spLocks noGrp="1"/>
-          </p:cNvSpPr>
-          <p:nvPr>
-            <p:ph type="sldImg" idx="2"/>
-          </p:nvPr>
-        </p:nvSpPr>
-        <p:spPr/>
-      </p:sp>
-      <p:sp>
-        <p:nvSpPr>
-          <p:cNvPr id="3" name="Notes Placeholder 2"/>
-          <p:cNvSpPr>
-            <a:spLocks noGrp="1"/>
-          </p:cNvSpPr>
-          <p:nvPr>
-            <p:ph type="body" idx="3" sz="quarter"/>
-          </p:nvPr>
-        </p:nvSpPr>
-        <p:spPr/>
-        <p:txBody>
-          <a:bodyPr/>
-          <a:lstStyle/>
-          <a:p>
-            <a:r>
-              <a:t>Sprecher-Notizen für Microservices Architecture Trade-offs:</a:t>
-            </a:r>
-          </a:p>
-          <a:p/>
-          <a:p>
-            <a:r>
-              <a:t>EINFÜHRUNG:</a:t>
-            </a:r>
-          </a:p>
-          <a:p>
-            <a:r>
-              <a:t>- Kurz den Kontext des Patterns wiederholen</a:t>
-            </a:r>
-          </a:p>
-          <a:p>
-            <a:r>
-              <a:t>- Betonen: Jede Architekturentscheidung hat Vor- und Nachteile</a:t>
-            </a:r>
-          </a:p>
-          <a:p/>
-          <a:p>
-            <a:r>
-              <a:t>VORTEILE (0 Punkte):</a:t>
-            </a:r>
-          </a:p>
-          <a:p>
-            <a:r>
-              <a:t>- Jeden Vorteil mit konkreten Telekom-Beispielen untermauern</a:t>
-            </a:r>
-          </a:p>
-          <a:p>
-            <a:r>
-              <a:t>- Bei Performance-Vorteilen: Zahlen und Metriken erwähnen</a:t>
-            </a:r>
-          </a:p>
-          <a:p>
-            <a:r>
-              <a:t>- Bei Team-Vorteilen: Auswirkungen auf Entwicklungsprozesse erklären</a:t>
-            </a:r>
-          </a:p>
-          <a:p/>
-          <a:p>
-            <a:r>
-              <a:t>NACHTEILE (0 Punkte):</a:t>
-            </a:r>
-          </a:p>
-          <a:p>
-            <a:r>
-              <a:t>- Ehrlich über Herausforderungen sprechen</a:t>
-            </a:r>
-          </a:p>
-          <a:p>
-            <a:r>
-              <a:t>- Mitigation-Strategien für kritische Nachteile erwähnen</a:t>
-            </a:r>
-          </a:p>
-          <a:p>
-            <a:r>
-              <a:t>- Kosten-Nutzen-Abwägung diskutieren</a:t>
-            </a:r>
-          </a:p>
-          <a:p/>
-          <a:p>
-            <a:r>
-              <a:t>TELEKOM-SPEZIFISCH:</a:t>
-            </a:r>
-          </a:p>
-          <a:p>
-            <a:r>
-              <a:t>- Welche Nachteile sind für Telekom besonders relevant?</a:t>
-            </a:r>
-          </a:p>
-          <a:p>
-            <a:r>
-              <a:t>- Gibt es interne Tools/Prozesse, die Nachteile abmildern?</a:t>
-            </a:r>
-          </a:p>
-          <a:p>
-            <a:r>
-              <a:t>- Lessons learned aus ähnlichen Projekten erwähnen</a:t>
-            </a:r>
-          </a:p>
-          <a:p/>
-          <a:p>
-            <a:r>
-              <a:t>ÜBERLEITUNG:</a:t>
-            </a:r>
-          </a:p>
-          <a:p>
-            <a:r>
-              <a:t>- Vorbereitung auf 'When to Use' Slide</a:t>
-            </a:r>
-          </a:p>
-          <a:p>
-            <a:r>
-              <a:t>- Hint: Context ist entscheidend für Entscheidung</a:t>
-            </a:r>
-          </a:p>
-        </p:txBody>
-      </p:sp>
-      <p:sp>
-        <p:nvSpPr>
-          <p:cNvPr id="4" name="Slide Number Placeholder 3"/>
-          <p:cNvSpPr>
-            <a:spLocks noGrp="1"/>
-          </p:cNvSpPr>
-          <p:nvPr>
-            <p:ph type="sldNum" idx="5" sz="quarter"/>
-          </p:nvPr>
-        </p:nvSpPr>
-        <p:spPr/>
-      </p:sp>
-    </p:spTree>
-  </p:cSld>
-  <p:clrMapOvr>
-    <a:masterClrMapping/>
-  </p:clrMapOvr>
-</p:notes>
-</file>
-
-<file path=ppt/notesSlides/notesSlide24.xml><?xml version="1.0" encoding="utf-8"?>
-<p:notes xmlns:a="http://schemas.openxmlformats.org/drawingml/2006/main" xmlns:p="http://schemas.openxmlformats.org/presentationml/2006/main" xmlns:r="http://schemas.openxmlformats.org/officeDocument/2006/relationships">
-  <p:cSld>
-    <p:spTree>
-      <p:nvGrpSpPr>
-        <p:cNvPr id="1" name=""/>
-        <p:cNvGrpSpPr/>
-        <p:nvPr/>
-      </p:nvGrpSpPr>
-      <p:grpSpPr>
-        <a:xfrm>
-          <a:off x="0" y="0"/>
-          <a:ext cx="0" cy="0"/>
-          <a:chOff x="0" y="0"/>
-          <a:chExt cx="0" cy="0"/>
-        </a:xfrm>
-      </p:grpSpPr>
-      <p:sp>
-        <p:nvSpPr>
-          <p:cNvPr id="2" name="Slide Image Placeholder 1"/>
-          <p:cNvSpPr>
-            <a:spLocks noGrp="1"/>
-          </p:cNvSpPr>
-          <p:nvPr>
-            <p:ph type="sldImg" idx="2"/>
-          </p:nvPr>
-        </p:nvSpPr>
-        <p:spPr/>
-      </p:sp>
-      <p:sp>
-        <p:nvSpPr>
-          <p:cNvPr id="3" name="Notes Placeholder 2"/>
-          <p:cNvSpPr>
-            <a:spLocks noGrp="1"/>
-          </p:cNvSpPr>
-          <p:nvPr>
-            <p:ph type="body" idx="3" sz="quarter"/>
-          </p:nvPr>
-        </p:nvSpPr>
-        <p:spPr/>
-        <p:txBody>
-          <a:bodyPr/>
-          <a:lstStyle/>
-          <a:p>
-            <a:r>
-              <a:t>Sprecher-Notizen für Hexagonal Architecture (Ports &amp; Adapters) Trade-offs:</a:t>
-            </a:r>
-          </a:p>
-          <a:p/>
-          <a:p>
-            <a:r>
-              <a:t>EINFÜHRUNG:</a:t>
-            </a:r>
-          </a:p>
-          <a:p>
-            <a:r>
-              <a:t>- Kurz den Kontext des Patterns wiederholen</a:t>
-            </a:r>
-          </a:p>
-          <a:p>
-            <a:r>
-              <a:t>- Betonen: Jede Architekturentscheidung hat Vor- und Nachteile</a:t>
-            </a:r>
-          </a:p>
-          <a:p/>
-          <a:p>
-            <a:r>
-              <a:t>VORTEILE (0 Punkte):</a:t>
-            </a:r>
-          </a:p>
-          <a:p>
-            <a:r>
-              <a:t>- Jeden Vorteil mit konkreten Telekom-Beispielen untermauern</a:t>
-            </a:r>
-          </a:p>
-          <a:p>
-            <a:r>
-              <a:t>- Bei Performance-Vorteilen: Zahlen und Metriken erwähnen</a:t>
-            </a:r>
-          </a:p>
-          <a:p>
-            <a:r>
-              <a:t>- Bei Team-Vorteilen: Auswirkungen auf Entwicklungsprozesse erklären</a:t>
-            </a:r>
-          </a:p>
-          <a:p/>
-          <a:p>
-            <a:r>
-              <a:t>NACHTEILE (0 Punkte):</a:t>
-            </a:r>
-          </a:p>
-          <a:p>
-            <a:r>
-              <a:t>- Ehrlich über Herausforderungen sprechen</a:t>
-            </a:r>
-          </a:p>
-          <a:p>
-            <a:r>
-              <a:t>- Mitigation-Strategien für kritische Nachteile erwähnen</a:t>
-            </a:r>
-          </a:p>
-          <a:p>
-            <a:r>
-              <a:t>- Kosten-Nutzen-Abwägung diskutieren</a:t>
-            </a:r>
-          </a:p>
-          <a:p/>
-          <a:p>
-            <a:r>
-              <a:t>TELEKOM-SPEZIFISCH:</a:t>
-            </a:r>
-          </a:p>
-          <a:p>
-            <a:r>
-              <a:t>- Welche Nachteile sind für Telekom besonders relevant?</a:t>
-            </a:r>
-          </a:p>
-          <a:p>
-            <a:r>
-              <a:t>- Gibt es interne Tools/Prozesse, die Nachteile abmildern?</a:t>
-            </a:r>
-          </a:p>
-          <a:p>
-            <a:r>
-              <a:t>- Lessons learned aus ähnlichen Projekten erwähnen</a:t>
-            </a:r>
-          </a:p>
-          <a:p/>
-          <a:p>
-            <a:r>
-              <a:t>ÜBERLEITUNG:</a:t>
-            </a:r>
-          </a:p>
-          <a:p>
-            <a:r>
-              <a:t>- Vorbereitung auf 'When to Use' Slide</a:t>
-            </a:r>
-          </a:p>
-          <a:p>
-            <a:r>
-              <a:t>- Hint: Context ist entscheidend für Entscheidung</a:t>
-            </a:r>
-          </a:p>
-        </p:txBody>
-      </p:sp>
-      <p:sp>
-        <p:nvSpPr>
-          <p:cNvPr id="4" name="Slide Number Placeholder 3"/>
-          <p:cNvSpPr>
-            <a:spLocks noGrp="1"/>
-          </p:cNvSpPr>
-          <p:nvPr>
-            <p:ph type="sldNum" idx="5" sz="quarter"/>
-          </p:nvPr>
-        </p:nvSpPr>
-        <p:spPr/>
-      </p:sp>
-    </p:spTree>
-  </p:cSld>
-  <p:clrMapOvr>
-    <a:masterClrMapping/>
-  </p:clrMapOvr>
-</p:notes>
-</file>
-
-<file path=ppt/notesSlides/notesSlide25.xml><?xml version="1.0" encoding="utf-8"?>
-<p:notes xmlns:a="http://schemas.openxmlformats.org/drawingml/2006/main" xmlns:p="http://schemas.openxmlformats.org/presentationml/2006/main" xmlns:r="http://schemas.openxmlformats.org/officeDocument/2006/relationships">
-  <p:cSld>
-    <p:spTree>
-      <p:nvGrpSpPr>
-        <p:cNvPr id="1" name=""/>
-        <p:cNvGrpSpPr/>
-        <p:nvPr/>
-      </p:nvGrpSpPr>
-      <p:grpSpPr>
-        <a:xfrm>
-          <a:off x="0" y="0"/>
-          <a:ext cx="0" cy="0"/>
-          <a:chOff x="0" y="0"/>
-          <a:chExt cx="0" cy="0"/>
-        </a:xfrm>
-      </p:grpSpPr>
-      <p:sp>
-        <p:nvSpPr>
-          <p:cNvPr id="2" name="Slide Image Placeholder 1"/>
-          <p:cNvSpPr>
-            <a:spLocks noGrp="1"/>
-          </p:cNvSpPr>
-          <p:nvPr>
-            <p:ph type="sldImg" idx="2"/>
-          </p:nvPr>
-        </p:nvSpPr>
-        <p:spPr/>
-      </p:sp>
-      <p:sp>
-        <p:nvSpPr>
-          <p:cNvPr id="3" name="Notes Placeholder 2"/>
-          <p:cNvSpPr>
-            <a:spLocks noGrp="1"/>
-          </p:cNvSpPr>
-          <p:nvPr>
-            <p:ph type="body" idx="3" sz="quarter"/>
-          </p:nvPr>
-        </p:nvSpPr>
-        <p:spPr/>
-        <p:txBody>
-          <a:bodyPr/>
-          <a:lstStyle/>
-          <a:p>
-            <a:r>
-              <a:t>Sprecher-Notizen für Event-Driven Architecture Trade-offs:</a:t>
-            </a:r>
-          </a:p>
-          <a:p/>
-          <a:p>
-            <a:r>
-              <a:t>EINFÜHRUNG:</a:t>
-            </a:r>
-          </a:p>
-          <a:p>
-            <a:r>
-              <a:t>- Kurz den Kontext des Patterns wiederholen</a:t>
-            </a:r>
-          </a:p>
-          <a:p>
-            <a:r>
-              <a:t>- Betonen: Jede Architekturentscheidung hat Vor- und Nachteile</a:t>
-            </a:r>
-          </a:p>
-          <a:p/>
-          <a:p>
-            <a:r>
-              <a:t>VORTEILE (0 Punkte):</a:t>
-            </a:r>
-          </a:p>
-          <a:p>
-            <a:r>
-              <a:t>- Jeden Vorteil mit konkreten Telekom-Beispielen untermauern</a:t>
-            </a:r>
-          </a:p>
-          <a:p>
-            <a:r>
-              <a:t>- Bei Performance-Vorteilen: Zahlen und Metriken erwähnen</a:t>
-            </a:r>
-          </a:p>
-          <a:p>
-            <a:r>
-              <a:t>- Bei Team-Vorteilen: Auswirkungen auf Entwicklungsprozesse erklären</a:t>
-            </a:r>
-          </a:p>
-          <a:p/>
-          <a:p>
-            <a:r>
-              <a:t>NACHTEILE (0 Punkte):</a:t>
-            </a:r>
-          </a:p>
-          <a:p>
-            <a:r>
-              <a:t>- Ehrlich über Herausforderungen sprechen</a:t>
-            </a:r>
-          </a:p>
-          <a:p>
-            <a:r>
-              <a:t>- Mitigation-Strategien für kritische Nachteile erwähnen</a:t>
-            </a:r>
-          </a:p>
-          <a:p>
-            <a:r>
-              <a:t>- Kosten-Nutzen-Abwägung diskutieren</a:t>
-            </a:r>
-          </a:p>
-          <a:p/>
-          <a:p>
-            <a:r>
-              <a:t>TELEKOM-SPEZIFISCH:</a:t>
-            </a:r>
-          </a:p>
-          <a:p>
-            <a:r>
-              <a:t>- Welche Nachteile sind für Telekom besonders relevant?</a:t>
-            </a:r>
-          </a:p>
-          <a:p>
-            <a:r>
-              <a:t>- Gibt es interne Tools/Prozesse, die Nachteile abmildern?</a:t>
-            </a:r>
-          </a:p>
-          <a:p>
-            <a:r>
-              <a:t>- Lessons learned aus ähnlichen Projekten erwähnen</a:t>
-            </a:r>
-          </a:p>
-          <a:p/>
-          <a:p>
-            <a:r>
-              <a:t>ÜBERLEITUNG:</a:t>
-            </a:r>
-          </a:p>
-          <a:p>
-            <a:r>
-              <a:t>- Vorbereitung auf 'When to Use' Slide</a:t>
-            </a:r>
-          </a:p>
-          <a:p>
-            <a:r>
-              <a:t>- Hint: Context ist entscheidend für Entscheidung</a:t>
             </a:r>
           </a:p>
         </p:txBody>
@@ -12286,6 +11302,332 @@
 </p:sld>
 </file>
 
+<file path=ppt/slides/slide10.xml><?xml version="1.0" encoding="utf-8"?>
+<p:sld xmlns:a="http://schemas.openxmlformats.org/drawingml/2006/main" xmlns:r="http://schemas.openxmlformats.org/officeDocument/2006/relationships" xmlns:p="http://schemas.openxmlformats.org/presentationml/2006/main">
+  <p:cSld>
+    <p:spTree>
+      <p:nvGrpSpPr>
+        <p:cNvPr id="1" name=""/>
+        <p:cNvGrpSpPr/>
+        <p:nvPr/>
+      </p:nvGrpSpPr>
+      <p:grpSpPr>
+        <a:xfrm>
+          <a:off x="0" y="0"/>
+          <a:ext cx="0" cy="0"/>
+          <a:chOff x="0" y="0"/>
+          <a:chExt cx="0" cy="0"/>
+        </a:xfrm>
+      </p:grpSpPr>
+      <p:sp>
+        <p:nvSpPr>
+          <p:cNvPr id="2" name="Title 1"/>
+          <p:cNvSpPr>
+            <a:spLocks noGrp="1"/>
+          </p:cNvSpPr>
+          <p:nvPr>
+            <p:ph type="title"/>
+          </p:nvPr>
+        </p:nvSpPr>
+        <p:spPr/>
+        <p:txBody>
+          <a:bodyPr/>
+          <a:lstStyle/>
+          <a:p>
+            <a:r>
+              <a:t>Event-Driven Architecture - Schema</a:t>
+            </a:r>
+          </a:p>
+        </p:txBody>
+      </p:sp>
+      <p:sp>
+        <p:nvSpPr>
+          <p:cNvPr id="3" name="Content Placeholder 2"/>
+          <p:cNvSpPr>
+            <a:spLocks noGrp="1"/>
+          </p:cNvSpPr>
+          <p:nvPr>
+            <p:ph idx="1"/>
+          </p:nvPr>
+        </p:nvSpPr>
+        <p:spPr/>
+        <p:txBody>
+          <a:bodyPr>
+            <a:normAutofit/>
+          </a:bodyPr>
+          <a:lstStyle/>
+          <a:p>
+            <a:pPr>
+              <a:lnSpc>
+                <a:spcPct val="100000"/>
+              </a:lnSpc>
+              <a:spcBef>
+                <a:spcPts val="0"/>
+              </a:spcBef>
+              <a:spcAft>
+                <a:spcPts val="0"/>
+              </a:spcAft>
+            </a:pPr>
+            <a:r>
+              <a:rPr sz="1400" dirty="0">
+                <a:latin typeface="Consolas"/>
+              </a:rPr>
+              <a:t>Event Flow:</a:t>
+            </a:r>
+            <a:br>
+              <a:rPr sz="4400" dirty="0"/>
+            </a:br>
+            <a:r>
+              <a:rPr sz="1400" dirty="0">
+                <a:latin typeface="Consolas"/>
+              </a:rPr>
+              <a:t>┌─────────────┐    Events     ┌─────────────┐    Events     ┌─────────────┐</a:t>
+            </a:r>
+            <a:br>
+              <a:rPr sz="4400" dirty="0"/>
+            </a:br>
+            <a:r>
+              <a:rPr sz="1400" dirty="0">
+                <a:latin typeface="Consolas"/>
+              </a:rPr>
+              <a:t>│  Producers  │ ────────────&gt; │  Event Bus  │ ────────────&gt; │  Consumers  │</a:t>
+            </a:r>
+            <a:br>
+              <a:rPr sz="4400" dirty="0"/>
+            </a:br>
+            <a:r>
+              <a:rPr sz="1400" dirty="0">
+                <a:latin typeface="Consolas"/>
+              </a:rPr>
+              <a:t>│             │               │             │               │             │</a:t>
+            </a:r>
+            <a:br>
+              <a:rPr sz="4400" dirty="0"/>
+            </a:br>
+            <a:r>
+              <a:rPr sz="1400" dirty="0">
+                <a:latin typeface="Consolas"/>
+              </a:rPr>
+              <a:t>│ Device      │               │  Apache     │               │ Alerting    │</a:t>
+            </a:r>
+            <a:br>
+              <a:rPr sz="4400" dirty="0"/>
+            </a:br>
+            <a:r>
+              <a:rPr sz="1400" dirty="0">
+                <a:latin typeface="Consolas"/>
+              </a:rPr>
+              <a:t>│ Sensors     │               │  Kafka      │               │ System      │</a:t>
+            </a:r>
+            <a:br>
+              <a:rPr sz="4400" dirty="0"/>
+            </a:br>
+            <a:r>
+              <a:rPr sz="1400" dirty="0">
+                <a:latin typeface="Consolas"/>
+              </a:rPr>
+              <a:t>│             │               │             │               │             │</a:t>
+            </a:r>
+            <a:br>
+              <a:rPr sz="4400" dirty="0"/>
+            </a:br>
+            <a:r>
+              <a:rPr sz="1400" dirty="0">
+                <a:latin typeface="Consolas"/>
+              </a:rPr>
+              <a:t>│ User        │               │ Topics:     │               │ Analytics   │</a:t>
+            </a:r>
+            <a:br>
+              <a:rPr sz="4400" dirty="0"/>
+            </a:br>
+            <a:r>
+              <a:rPr sz="1400" dirty="0">
+                <a:latin typeface="Consolas"/>
+              </a:rPr>
+              <a:t>│ Actions     │               │ - alerts    │               │ Engine      │</a:t>
+            </a:r>
+            <a:br>
+              <a:rPr sz="4400" dirty="0"/>
+            </a:br>
+            <a:r>
+              <a:rPr sz="1400" dirty="0">
+                <a:latin typeface="Consolas"/>
+              </a:rPr>
+              <a:t>│             │               │ - metrics   │               │             │</a:t>
+            </a:r>
+            <a:br>
+              <a:rPr sz="4400" dirty="0"/>
+            </a:br>
+            <a:r>
+              <a:rPr sz="1400" dirty="0">
+                <a:latin typeface="Consolas"/>
+              </a:rPr>
+              <a:t>│ System      │               │ - configs   │               │ Dashboard   │</a:t>
+            </a:r>
+            <a:br>
+              <a:rPr sz="4400" dirty="0"/>
+            </a:br>
+            <a:r>
+              <a:rPr sz="1400" dirty="0">
+                <a:latin typeface="Consolas"/>
+              </a:rPr>
+              <a:t>│ Events      │               │ - audit     │               │ Updates     │</a:t>
+            </a:r>
+            <a:br>
+              <a:rPr sz="4400" dirty="0"/>
+            </a:br>
+            <a:r>
+              <a:rPr sz="1400" dirty="0">
+                <a:latin typeface="Consolas"/>
+              </a:rPr>
+              <a:t>└─────────────┘               └─────────────┘               └─────────────┘</a:t>
+            </a:r>
+            <a:br>
+              <a:rPr sz="4400" dirty="0"/>
+            </a:br>
+            <a:r>
+              <a:rPr sz="1400" dirty="0">
+                <a:latin typeface="Consolas"/>
+              </a:rPr>
+              <a:t>    │                            </a:t>
+            </a:r>
+            <a:r>
+              <a:rPr lang="en-US" sz="1400" dirty="0">
+                <a:latin typeface="Consolas"/>
+              </a:rPr>
+              <a:t> </a:t>
+            </a:r>
+            <a:r>
+              <a:rPr sz="1400" dirty="0">
+                <a:latin typeface="Consolas"/>
+              </a:rPr>
+              <a:t> │                             │</a:t>
+            </a:r>
+            <a:br>
+              <a:rPr sz="4400" dirty="0"/>
+            </a:br>
+            <a:r>
+              <a:rPr sz="1400" dirty="0">
+                <a:latin typeface="Consolas"/>
+              </a:rPr>
+              <a:t>    └─── Async Pub/Sub ────────────┼─── Message Queues ──────</a:t>
+            </a:r>
+            <a:r>
+              <a:rPr lang="en-US" sz="1400" dirty="0">
+                <a:latin typeface="Consolas"/>
+              </a:rPr>
+              <a:t>──</a:t>
+            </a:r>
+            <a:r>
+              <a:rPr sz="1400" dirty="0">
+                <a:latin typeface="Consolas"/>
+              </a:rPr>
+              <a:t>──┘</a:t>
+            </a:r>
+            <a:br>
+              <a:rPr sz="4400" dirty="0"/>
+            </a:br>
+            <a:r>
+              <a:rPr sz="1400" dirty="0">
+                <a:latin typeface="Consolas"/>
+              </a:rPr>
+              <a:t>                                   │</a:t>
+            </a:r>
+            <a:br>
+              <a:rPr sz="4400" dirty="0"/>
+            </a:br>
+            <a:r>
+              <a:rPr sz="1400" dirty="0">
+                <a:latin typeface="Consolas"/>
+              </a:rPr>
+              <a:t>                     </a:t>
+            </a:r>
+            <a:r>
+              <a:rPr lang="en-US" sz="1400" dirty="0">
+                <a:latin typeface="Consolas"/>
+              </a:rPr>
+              <a:t>  </a:t>
+            </a:r>
+            <a:r>
+              <a:rPr sz="1400" dirty="0">
+                <a:latin typeface="Consolas"/>
+              </a:rPr>
+              <a:t>     ┌─────────────┐</a:t>
+            </a:r>
+            <a:br>
+              <a:rPr sz="4400" dirty="0"/>
+            </a:br>
+            <a:r>
+              <a:rPr sz="1400" dirty="0">
+                <a:latin typeface="Consolas"/>
+              </a:rPr>
+              <a:t>                     </a:t>
+            </a:r>
+            <a:r>
+              <a:rPr lang="en-US" sz="1400" dirty="0">
+                <a:latin typeface="Consolas"/>
+              </a:rPr>
+              <a:t>  </a:t>
+            </a:r>
+            <a:r>
+              <a:rPr sz="1400" dirty="0">
+                <a:latin typeface="Consolas"/>
+              </a:rPr>
+              <a:t>     │ Event Store │</a:t>
+            </a:r>
+            <a:br>
+              <a:rPr sz="4400" dirty="0"/>
+            </a:br>
+            <a:r>
+              <a:rPr sz="1400" dirty="0">
+                <a:latin typeface="Consolas"/>
+              </a:rPr>
+              <a:t>                    </a:t>
+            </a:r>
+            <a:r>
+              <a:rPr lang="en-US" sz="1400" dirty="0">
+                <a:latin typeface="Consolas"/>
+              </a:rPr>
+              <a:t>  </a:t>
+            </a:r>
+            <a:r>
+              <a:rPr sz="1400" dirty="0">
+                <a:latin typeface="Consolas"/>
+              </a:rPr>
+              <a:t>      │ (History)   │</a:t>
+            </a:r>
+            <a:br>
+              <a:rPr sz="4400" dirty="0"/>
+            </a:br>
+            <a:r>
+              <a:rPr sz="1400" dirty="0">
+                <a:latin typeface="Consolas"/>
+              </a:rPr>
+              <a:t>                     </a:t>
+            </a:r>
+            <a:r>
+              <a:rPr lang="en-US" sz="1400" dirty="0">
+                <a:latin typeface="Consolas"/>
+              </a:rPr>
+              <a:t>  </a:t>
+            </a:r>
+            <a:r>
+              <a:rPr sz="1400" dirty="0">
+                <a:latin typeface="Consolas"/>
+              </a:rPr>
+              <a:t>     └─────────────┘</a:t>
+            </a:r>
+          </a:p>
+        </p:txBody>
+      </p:sp>
+    </p:spTree>
+  </p:cSld>
+  <p:clrMapOvr>
+    <a:masterClrMapping/>
+  </p:clrMapOvr>
+</p:sld>
+</file>
+
 <file path=ppt/slides/slide11.xml><?xml version="1.0" encoding="utf-8"?>
 <p:sld xmlns:a="http://schemas.openxmlformats.org/drawingml/2006/main" xmlns:r="http://schemas.openxmlformats.org/officeDocument/2006/relationships" xmlns:p="http://schemas.openxmlformats.org/presentationml/2006/main">
   <p:cSld>
@@ -12315,11 +11657,13 @@
         </p:nvSpPr>
         <p:spPr/>
         <p:txBody>
-          <a:bodyPr/>
+          <a:bodyPr>
+            <a:normAutofit fontScale="90000"/>
+          </a:bodyPr>
           <a:lstStyle/>
           <a:p>
             <a:r>
-              <a:t>3. Event-Driven Architecture</a:t>
+              <a:t>4. Hexagonal Architecture (Ports &amp; Adapters)</a:t>
             </a:r>
           </a:p>
         </p:txBody>
@@ -12384,399 +11728,6 @@
           <a:lstStyle/>
           <a:p>
             <a:r>
-              <a:t>Event-Driven Architecture - Schema</a:t>
-            </a:r>
-          </a:p>
-        </p:txBody>
-      </p:sp>
-      <p:sp>
-        <p:nvSpPr>
-          <p:cNvPr id="3" name="Content Placeholder 2"/>
-          <p:cNvSpPr>
-            <a:spLocks noGrp="1"/>
-          </p:cNvSpPr>
-          <p:nvPr>
-            <p:ph idx="1"/>
-          </p:nvPr>
-        </p:nvSpPr>
-        <p:spPr/>
-        <p:txBody>
-          <a:bodyPr>
-            <a:normAutofit/>
-          </a:bodyPr>
-          <a:lstStyle/>
-          <a:p>
-            <a:pPr>
-              <a:lnSpc>
-                <a:spcPct val="100000"/>
-              </a:lnSpc>
-              <a:spcBef>
-                <a:spcPts val="0"/>
-              </a:spcBef>
-              <a:spcAft>
-                <a:spcPts val="0"/>
-              </a:spcAft>
-            </a:pPr>
-            <a:r>
-              <a:rPr sz="1400" dirty="0">
-                <a:latin typeface="Consolas"/>
-              </a:rPr>
-              <a:t>Event Flow:</a:t>
-            </a:r>
-            <a:br>
-              <a:rPr sz="4400" dirty="0"/>
-            </a:br>
-            <a:r>
-              <a:rPr sz="1400" dirty="0">
-                <a:latin typeface="Consolas"/>
-              </a:rPr>
-              <a:t>┌─────────────┐    Events     ┌─────────────┐    Events     ┌─────────────┐</a:t>
-            </a:r>
-            <a:br>
-              <a:rPr sz="4400" dirty="0"/>
-            </a:br>
-            <a:r>
-              <a:rPr sz="1400" dirty="0">
-                <a:latin typeface="Consolas"/>
-              </a:rPr>
-              <a:t>│  Producers  │ ────────────&gt; │  Event Bus  │ ────────────&gt; │  Consumers  │</a:t>
-            </a:r>
-            <a:br>
-              <a:rPr sz="4400" dirty="0"/>
-            </a:br>
-            <a:r>
-              <a:rPr sz="1400" dirty="0">
-                <a:latin typeface="Consolas"/>
-              </a:rPr>
-              <a:t>│             │               │             │               │             │</a:t>
-            </a:r>
-            <a:br>
-              <a:rPr sz="4400" dirty="0"/>
-            </a:br>
-            <a:r>
-              <a:rPr sz="1400" dirty="0">
-                <a:latin typeface="Consolas"/>
-              </a:rPr>
-              <a:t>│ Device      │               │  Apache     │               │ Alerting    │</a:t>
-            </a:r>
-            <a:br>
-              <a:rPr sz="4400" dirty="0"/>
-            </a:br>
-            <a:r>
-              <a:rPr sz="1400" dirty="0">
-                <a:latin typeface="Consolas"/>
-              </a:rPr>
-              <a:t>│ Sensors     │               │  Kafka      │               │ System      │</a:t>
-            </a:r>
-            <a:br>
-              <a:rPr sz="4400" dirty="0"/>
-            </a:br>
-            <a:r>
-              <a:rPr sz="1400" dirty="0">
-                <a:latin typeface="Consolas"/>
-              </a:rPr>
-              <a:t>│             │               │             │               │             │</a:t>
-            </a:r>
-            <a:br>
-              <a:rPr sz="4400" dirty="0"/>
-            </a:br>
-            <a:r>
-              <a:rPr sz="1400" dirty="0">
-                <a:latin typeface="Consolas"/>
-              </a:rPr>
-              <a:t>│ User        │               │ Topics:     │               │ Analytics   │</a:t>
-            </a:r>
-            <a:br>
-              <a:rPr sz="4400" dirty="0"/>
-            </a:br>
-            <a:r>
-              <a:rPr sz="1400" dirty="0">
-                <a:latin typeface="Consolas"/>
-              </a:rPr>
-              <a:t>│ Actions     │               │ - alerts    │               │ Engine      │</a:t>
-            </a:r>
-            <a:br>
-              <a:rPr sz="4400" dirty="0"/>
-            </a:br>
-            <a:r>
-              <a:rPr sz="1400" dirty="0">
-                <a:latin typeface="Consolas"/>
-              </a:rPr>
-              <a:t>│             │               │ - metrics   │               │             │</a:t>
-            </a:r>
-            <a:br>
-              <a:rPr sz="4400" dirty="0"/>
-            </a:br>
-            <a:r>
-              <a:rPr sz="1400" dirty="0">
-                <a:latin typeface="Consolas"/>
-              </a:rPr>
-              <a:t>│ System      │               │ - configs   │               │ Dashboard   │</a:t>
-            </a:r>
-            <a:br>
-              <a:rPr sz="4400" dirty="0"/>
-            </a:br>
-            <a:r>
-              <a:rPr sz="1400" dirty="0">
-                <a:latin typeface="Consolas"/>
-              </a:rPr>
-              <a:t>│ Events      │               │ - audit     │               │ Updates     │</a:t>
-            </a:r>
-            <a:br>
-              <a:rPr sz="4400" dirty="0"/>
-            </a:br>
-            <a:r>
-              <a:rPr sz="1400" dirty="0">
-                <a:latin typeface="Consolas"/>
-              </a:rPr>
-              <a:t>└─────────────┘               └─────────────┘               └─────────────┘</a:t>
-            </a:r>
-            <a:br>
-              <a:rPr sz="4400" dirty="0"/>
-            </a:br>
-            <a:r>
-              <a:rPr sz="1400" dirty="0">
-                <a:latin typeface="Consolas"/>
-              </a:rPr>
-              <a:t>    │                            </a:t>
-            </a:r>
-            <a:r>
-              <a:rPr lang="en-US" sz="1400" dirty="0">
-                <a:latin typeface="Consolas"/>
-              </a:rPr>
-              <a:t> </a:t>
-            </a:r>
-            <a:r>
-              <a:rPr sz="1400" dirty="0">
-                <a:latin typeface="Consolas"/>
-              </a:rPr>
-              <a:t> │                             │</a:t>
-            </a:r>
-            <a:br>
-              <a:rPr sz="4400" dirty="0"/>
-            </a:br>
-            <a:r>
-              <a:rPr sz="1400" dirty="0">
-                <a:latin typeface="Consolas"/>
-              </a:rPr>
-              <a:t>    └─── Async Pub/Sub ────────────┼─── Message Queues ──────</a:t>
-            </a:r>
-            <a:r>
-              <a:rPr lang="en-US" sz="1400" dirty="0">
-                <a:latin typeface="Consolas"/>
-              </a:rPr>
-              <a:t>──</a:t>
-            </a:r>
-            <a:r>
-              <a:rPr sz="1400" dirty="0">
-                <a:latin typeface="Consolas"/>
-              </a:rPr>
-              <a:t>──┘</a:t>
-            </a:r>
-            <a:br>
-              <a:rPr sz="4400" dirty="0"/>
-            </a:br>
-            <a:r>
-              <a:rPr sz="1400" dirty="0">
-                <a:latin typeface="Consolas"/>
-              </a:rPr>
-              <a:t>                                   │</a:t>
-            </a:r>
-            <a:br>
-              <a:rPr sz="4400" dirty="0"/>
-            </a:br>
-            <a:r>
-              <a:rPr sz="1400" dirty="0">
-                <a:latin typeface="Consolas"/>
-              </a:rPr>
-              <a:t>                     </a:t>
-            </a:r>
-            <a:r>
-              <a:rPr lang="en-US" sz="1400" dirty="0">
-                <a:latin typeface="Consolas"/>
-              </a:rPr>
-              <a:t>  </a:t>
-            </a:r>
-            <a:r>
-              <a:rPr sz="1400" dirty="0">
-                <a:latin typeface="Consolas"/>
-              </a:rPr>
-              <a:t>     ┌─────────────┐</a:t>
-            </a:r>
-            <a:br>
-              <a:rPr sz="4400" dirty="0"/>
-            </a:br>
-            <a:r>
-              <a:rPr sz="1400" dirty="0">
-                <a:latin typeface="Consolas"/>
-              </a:rPr>
-              <a:t>                     </a:t>
-            </a:r>
-            <a:r>
-              <a:rPr lang="en-US" sz="1400" dirty="0">
-                <a:latin typeface="Consolas"/>
-              </a:rPr>
-              <a:t>  </a:t>
-            </a:r>
-            <a:r>
-              <a:rPr sz="1400" dirty="0">
-                <a:latin typeface="Consolas"/>
-              </a:rPr>
-              <a:t>     │ Event Store │</a:t>
-            </a:r>
-            <a:br>
-              <a:rPr sz="4400" dirty="0"/>
-            </a:br>
-            <a:r>
-              <a:rPr sz="1400" dirty="0">
-                <a:latin typeface="Consolas"/>
-              </a:rPr>
-              <a:t>                    </a:t>
-            </a:r>
-            <a:r>
-              <a:rPr lang="en-US" sz="1400" dirty="0">
-                <a:latin typeface="Consolas"/>
-              </a:rPr>
-              <a:t>  </a:t>
-            </a:r>
-            <a:r>
-              <a:rPr sz="1400" dirty="0">
-                <a:latin typeface="Consolas"/>
-              </a:rPr>
-              <a:t>      │ (History)   │</a:t>
-            </a:r>
-            <a:br>
-              <a:rPr sz="4400" dirty="0"/>
-            </a:br>
-            <a:r>
-              <a:rPr sz="1400" dirty="0">
-                <a:latin typeface="Consolas"/>
-              </a:rPr>
-              <a:t>                     </a:t>
-            </a:r>
-            <a:r>
-              <a:rPr lang="en-US" sz="1400" dirty="0">
-                <a:latin typeface="Consolas"/>
-              </a:rPr>
-              <a:t>  </a:t>
-            </a:r>
-            <a:r>
-              <a:rPr sz="1400" dirty="0">
-                <a:latin typeface="Consolas"/>
-              </a:rPr>
-              <a:t>     └─────────────┘</a:t>
-            </a:r>
-          </a:p>
-        </p:txBody>
-      </p:sp>
-    </p:spTree>
-  </p:cSld>
-  <p:clrMapOvr>
-    <a:masterClrMapping/>
-  </p:clrMapOvr>
-</p:sld>
-</file>
-
-<file path=ppt/slides/slide13.xml><?xml version="1.0" encoding="utf-8"?>
-<p:sld xmlns:a="http://schemas.openxmlformats.org/drawingml/2006/main" xmlns:r="http://schemas.openxmlformats.org/officeDocument/2006/relationships" xmlns:p="http://schemas.openxmlformats.org/presentationml/2006/main">
-  <p:cSld>
-    <p:spTree>
-      <p:nvGrpSpPr>
-        <p:cNvPr id="1" name=""/>
-        <p:cNvGrpSpPr/>
-        <p:nvPr/>
-      </p:nvGrpSpPr>
-      <p:grpSpPr>
-        <a:xfrm>
-          <a:off x="0" y="0"/>
-          <a:ext cx="0" cy="0"/>
-          <a:chOff x="0" y="0"/>
-          <a:chExt cx="0" cy="0"/>
-        </a:xfrm>
-      </p:grpSpPr>
-      <p:sp>
-        <p:nvSpPr>
-          <p:cNvPr id="2" name="Title 1"/>
-          <p:cNvSpPr>
-            <a:spLocks noGrp="1"/>
-          </p:cNvSpPr>
-          <p:nvPr>
-            <p:ph type="ctrTitle"/>
-          </p:nvPr>
-        </p:nvSpPr>
-        <p:spPr/>
-        <p:txBody>
-          <a:bodyPr>
-            <a:normAutofit fontScale="90000"/>
-          </a:bodyPr>
-          <a:lstStyle/>
-          <a:p>
-            <a:r>
-              <a:t>4. Hexagonal Architecture (Ports &amp; Adapters)</a:t>
-            </a:r>
-          </a:p>
-        </p:txBody>
-      </p:sp>
-      <p:sp>
-        <p:nvSpPr>
-          <p:cNvPr id="3" name="Subtitle 2"/>
-          <p:cNvSpPr>
-            <a:spLocks noGrp="1"/>
-          </p:cNvSpPr>
-          <p:nvPr>
-            <p:ph type="subTitle" idx="1"/>
-          </p:nvPr>
-        </p:nvSpPr>
-        <p:spPr/>
-        <p:txBody>
-          <a:bodyPr/>
-          <a:lstStyle/>
-          <a:p>
-            <a:endParaRPr/>
-          </a:p>
-        </p:txBody>
-      </p:sp>
-    </p:spTree>
-  </p:cSld>
-  <p:clrMapOvr>
-    <a:masterClrMapping/>
-  </p:clrMapOvr>
-</p:sld>
-</file>
-
-<file path=ppt/slides/slide14.xml><?xml version="1.0" encoding="utf-8"?>
-<p:sld xmlns:a="http://schemas.openxmlformats.org/drawingml/2006/main" xmlns:r="http://schemas.openxmlformats.org/officeDocument/2006/relationships" xmlns:p="http://schemas.openxmlformats.org/presentationml/2006/main">
-  <p:cSld>
-    <p:spTree>
-      <p:nvGrpSpPr>
-        <p:cNvPr id="1" name=""/>
-        <p:cNvGrpSpPr/>
-        <p:nvPr/>
-      </p:nvGrpSpPr>
-      <p:grpSpPr>
-        <a:xfrm>
-          <a:off x="0" y="0"/>
-          <a:ext cx="0" cy="0"/>
-          <a:chOff x="0" y="0"/>
-          <a:chExt cx="0" cy="0"/>
-        </a:xfrm>
-      </p:grpSpPr>
-      <p:sp>
-        <p:nvSpPr>
-          <p:cNvPr id="2" name="Title 1"/>
-          <p:cNvSpPr>
-            <a:spLocks noGrp="1"/>
-          </p:cNvSpPr>
-          <p:nvPr>
-            <p:ph type="title"/>
-          </p:nvPr>
-        </p:nvSpPr>
-        <p:spPr/>
-        <p:txBody>
-          <a:bodyPr/>
-          <a:lstStyle/>
-          <a:p>
-            <a:r>
               <a:rPr dirty="0"/>
               <a:t>Hexagonal Architecture </a:t>
             </a:r>
@@ -13288,7 +12239,7 @@
 </p:sld>
 </file>
 
-<file path=ppt/slides/slide15.xml><?xml version="1.0" encoding="utf-8"?>
+<file path=ppt/slides/slide13.xml><?xml version="1.0" encoding="utf-8"?>
 <p:sld xmlns:a="http://schemas.openxmlformats.org/drawingml/2006/main" xmlns:r="http://schemas.openxmlformats.org/officeDocument/2006/relationships" xmlns:p="http://schemas.openxmlformats.org/presentationml/2006/main">
   <p:cSld>
     <p:spTree>
@@ -14208,6 +13159,342 @@
 </p:sld>
 </file>
 
+<file path=ppt/slides/slide14.xml><?xml version="1.0" encoding="utf-8"?>
+<p:sld xmlns:a="http://schemas.openxmlformats.org/drawingml/2006/main" xmlns:p="http://schemas.openxmlformats.org/presentationml/2006/main" xmlns:r="http://schemas.openxmlformats.org/officeDocument/2006/relationships">
+  <p:cSld>
+    <p:spTree>
+      <p:nvGrpSpPr>
+        <p:cNvPr id="1" name=""/>
+        <p:cNvGrpSpPr/>
+        <p:nvPr/>
+      </p:nvGrpSpPr>
+      <p:grpSpPr/>
+      <p:sp>
+        <p:nvSpPr>
+          <p:cNvPr id="2" name="Title 1"/>
+          <p:cNvSpPr>
+            <a:spLocks noGrp="1"/>
+          </p:cNvSpPr>
+          <p:nvPr>
+            <p:ph type="title"/>
+          </p:nvPr>
+        </p:nvSpPr>
+        <p:spPr/>
+        <p:txBody>
+          <a:bodyPr/>
+          <a:lstStyle/>
+          <a:p>
+            <a:r>
+              <a:t>Layered Architecture - Trade-offs</a:t>
+            </a:r>
+          </a:p>
+        </p:txBody>
+      </p:sp>
+      <p:sp>
+        <p:nvSpPr>
+          <p:cNvPr id="3" name="Content Placeholder 2"/>
+          <p:cNvSpPr>
+            <a:spLocks noGrp="1"/>
+          </p:cNvSpPr>
+          <p:nvPr>
+            <p:ph idx="1"/>
+          </p:nvPr>
+        </p:nvSpPr>
+        <p:spPr/>
+        <p:txBody>
+          <a:bodyPr/>
+          <a:lstStyle/>
+          <a:p/>
+        </p:txBody>
+      </p:sp>
+    </p:spTree>
+  </p:cSld>
+  <p:clrMapOvr>
+    <a:masterClrMapping/>
+  </p:clrMapOvr>
+</p:sld>
+</file>
+
+<file path=ppt/slides/slide15.xml><?xml version="1.0" encoding="utf-8"?>
+<p:sld xmlns:a="http://schemas.openxmlformats.org/drawingml/2006/main" xmlns:p="http://schemas.openxmlformats.org/presentationml/2006/main" xmlns:r="http://schemas.openxmlformats.org/officeDocument/2006/relationships">
+  <p:cSld>
+    <p:spTree>
+      <p:nvGrpSpPr>
+        <p:cNvPr id="1" name=""/>
+        <p:cNvGrpSpPr/>
+        <p:nvPr/>
+      </p:nvGrpSpPr>
+      <p:grpSpPr/>
+      <p:sp>
+        <p:nvSpPr>
+          <p:cNvPr id="2" name="Title 1"/>
+          <p:cNvSpPr>
+            <a:spLocks noGrp="1"/>
+          </p:cNvSpPr>
+          <p:nvPr>
+            <p:ph type="title"/>
+          </p:nvPr>
+        </p:nvSpPr>
+        <p:spPr/>
+        <p:txBody>
+          <a:bodyPr/>
+          <a:lstStyle/>
+          <a:p>
+            <a:r>
+              <a:t>Microservices - Trade-offs</a:t>
+            </a:r>
+          </a:p>
+        </p:txBody>
+      </p:sp>
+      <p:sp>
+        <p:nvSpPr>
+          <p:cNvPr id="3" name="Content Placeholder 2"/>
+          <p:cNvSpPr>
+            <a:spLocks noGrp="1"/>
+          </p:cNvSpPr>
+          <p:nvPr>
+            <p:ph idx="1"/>
+          </p:nvPr>
+        </p:nvSpPr>
+        <p:spPr/>
+        <p:txBody>
+          <a:bodyPr/>
+          <a:lstStyle/>
+          <a:p/>
+        </p:txBody>
+      </p:sp>
+    </p:spTree>
+  </p:cSld>
+  <p:clrMapOvr>
+    <a:masterClrMapping/>
+  </p:clrMapOvr>
+</p:sld>
+</file>
+
+<file path=ppt/slides/slide16.xml><?xml version="1.0" encoding="utf-8"?>
+<p:sld xmlns:a="http://schemas.openxmlformats.org/drawingml/2006/main" xmlns:p="http://schemas.openxmlformats.org/presentationml/2006/main" xmlns:r="http://schemas.openxmlformats.org/officeDocument/2006/relationships">
+  <p:cSld>
+    <p:spTree>
+      <p:nvGrpSpPr>
+        <p:cNvPr id="1" name=""/>
+        <p:cNvGrpSpPr/>
+        <p:nvPr/>
+      </p:nvGrpSpPr>
+      <p:grpSpPr/>
+      <p:sp>
+        <p:nvSpPr>
+          <p:cNvPr id="2" name="Title 1"/>
+          <p:cNvSpPr>
+            <a:spLocks noGrp="1"/>
+          </p:cNvSpPr>
+          <p:nvPr>
+            <p:ph type="title"/>
+          </p:nvPr>
+        </p:nvSpPr>
+        <p:spPr/>
+        <p:txBody>
+          <a:bodyPr/>
+          <a:lstStyle/>
+          <a:p>
+            <a:r>
+              <a:t>Layered Architecture (Schichtarchitektur) - Vorteile/Nachteile</a:t>
+            </a:r>
+          </a:p>
+        </p:txBody>
+      </p:sp>
+      <p:sp>
+        <p:nvSpPr>
+          <p:cNvPr id="3" name="Content Placeholder 2"/>
+          <p:cNvSpPr>
+            <a:spLocks noGrp="1"/>
+          </p:cNvSpPr>
+          <p:nvPr>
+            <p:ph idx="1"/>
+          </p:nvPr>
+        </p:nvSpPr>
+        <p:spPr/>
+        <p:txBody>
+          <a:bodyPr/>
+          <a:lstStyle/>
+          <a:p/>
+        </p:txBody>
+      </p:sp>
+    </p:spTree>
+  </p:cSld>
+  <p:clrMapOvr>
+    <a:masterClrMapping/>
+  </p:clrMapOvr>
+</p:sld>
+</file>
+
+<file path=ppt/slides/slide17.xml><?xml version="1.0" encoding="utf-8"?>
+<p:sld xmlns:a="http://schemas.openxmlformats.org/drawingml/2006/main" xmlns:p="http://schemas.openxmlformats.org/presentationml/2006/main" xmlns:r="http://schemas.openxmlformats.org/officeDocument/2006/relationships">
+  <p:cSld>
+    <p:spTree>
+      <p:nvGrpSpPr>
+        <p:cNvPr id="1" name=""/>
+        <p:cNvGrpSpPr/>
+        <p:nvPr/>
+      </p:nvGrpSpPr>
+      <p:grpSpPr/>
+      <p:sp>
+        <p:nvSpPr>
+          <p:cNvPr id="2" name="Title 1"/>
+          <p:cNvSpPr>
+            <a:spLocks noGrp="1"/>
+          </p:cNvSpPr>
+          <p:nvPr>
+            <p:ph type="title"/>
+          </p:nvPr>
+        </p:nvSpPr>
+        <p:spPr/>
+        <p:txBody>
+          <a:bodyPr/>
+          <a:lstStyle/>
+          <a:p>
+            <a:r>
+              <a:t>Microservices Architecture - Vorteile/Nachteile</a:t>
+            </a:r>
+          </a:p>
+        </p:txBody>
+      </p:sp>
+      <p:sp>
+        <p:nvSpPr>
+          <p:cNvPr id="3" name="Content Placeholder 2"/>
+          <p:cNvSpPr>
+            <a:spLocks noGrp="1"/>
+          </p:cNvSpPr>
+          <p:nvPr>
+            <p:ph idx="1"/>
+          </p:nvPr>
+        </p:nvSpPr>
+        <p:spPr/>
+        <p:txBody>
+          <a:bodyPr/>
+          <a:lstStyle/>
+          <a:p/>
+        </p:txBody>
+      </p:sp>
+    </p:spTree>
+  </p:cSld>
+  <p:clrMapOvr>
+    <a:masterClrMapping/>
+  </p:clrMapOvr>
+</p:sld>
+</file>
+
+<file path=ppt/slides/slide18.xml><?xml version="1.0" encoding="utf-8"?>
+<p:sld xmlns:a="http://schemas.openxmlformats.org/drawingml/2006/main" xmlns:p="http://schemas.openxmlformats.org/presentationml/2006/main" xmlns:r="http://schemas.openxmlformats.org/officeDocument/2006/relationships">
+  <p:cSld>
+    <p:spTree>
+      <p:nvGrpSpPr>
+        <p:cNvPr id="1" name=""/>
+        <p:cNvGrpSpPr/>
+        <p:nvPr/>
+      </p:nvGrpSpPr>
+      <p:grpSpPr/>
+      <p:sp>
+        <p:nvSpPr>
+          <p:cNvPr id="2" name="Title 1"/>
+          <p:cNvSpPr>
+            <a:spLocks noGrp="1"/>
+          </p:cNvSpPr>
+          <p:nvPr>
+            <p:ph type="title"/>
+          </p:nvPr>
+        </p:nvSpPr>
+        <p:spPr/>
+        <p:txBody>
+          <a:bodyPr/>
+          <a:lstStyle/>
+          <a:p>
+            <a:r>
+              <a:t>Hexagonal Architecture (Ports &amp; Adapters) - Vorteile/Nachteile</a:t>
+            </a:r>
+          </a:p>
+        </p:txBody>
+      </p:sp>
+      <p:sp>
+        <p:nvSpPr>
+          <p:cNvPr id="3" name="Content Placeholder 2"/>
+          <p:cNvSpPr>
+            <a:spLocks noGrp="1"/>
+          </p:cNvSpPr>
+          <p:nvPr>
+            <p:ph idx="1"/>
+          </p:nvPr>
+        </p:nvSpPr>
+        <p:spPr/>
+        <p:txBody>
+          <a:bodyPr/>
+          <a:lstStyle/>
+          <a:p/>
+        </p:txBody>
+      </p:sp>
+    </p:spTree>
+  </p:cSld>
+  <p:clrMapOvr>
+    <a:masterClrMapping/>
+  </p:clrMapOvr>
+</p:sld>
+</file>
+
+<file path=ppt/slides/slide19.xml><?xml version="1.0" encoding="utf-8"?>
+<p:sld xmlns:a="http://schemas.openxmlformats.org/drawingml/2006/main" xmlns:p="http://schemas.openxmlformats.org/presentationml/2006/main" xmlns:r="http://schemas.openxmlformats.org/officeDocument/2006/relationships">
+  <p:cSld>
+    <p:spTree>
+      <p:nvGrpSpPr>
+        <p:cNvPr id="1" name=""/>
+        <p:cNvGrpSpPr/>
+        <p:nvPr/>
+      </p:nvGrpSpPr>
+      <p:grpSpPr/>
+      <p:sp>
+        <p:nvSpPr>
+          <p:cNvPr id="2" name="Title 1"/>
+          <p:cNvSpPr>
+            <a:spLocks noGrp="1"/>
+          </p:cNvSpPr>
+          <p:nvPr>
+            <p:ph type="title"/>
+          </p:nvPr>
+        </p:nvSpPr>
+        <p:spPr/>
+        <p:txBody>
+          <a:bodyPr/>
+          <a:lstStyle/>
+          <a:p>
+            <a:r>
+              <a:t>Event-Driven Architecture - Vorteile/Nachteile</a:t>
+            </a:r>
+          </a:p>
+        </p:txBody>
+      </p:sp>
+      <p:sp>
+        <p:nvSpPr>
+          <p:cNvPr id="3" name="Content Placeholder 2"/>
+          <p:cNvSpPr>
+            <a:spLocks noGrp="1"/>
+          </p:cNvSpPr>
+          <p:nvPr>
+            <p:ph idx="1"/>
+          </p:nvPr>
+        </p:nvSpPr>
+        <p:spPr/>
+        <p:txBody>
+          <a:bodyPr/>
+          <a:lstStyle/>
+          <a:p/>
+        </p:txBody>
+      </p:sp>
+    </p:spTree>
+  </p:cSld>
+  <p:clrMapOvr>
+    <a:masterClrMapping/>
+  </p:clrMapOvr>
+</p:sld>
+</file>
+
 <file path=ppt/slides/slide2.xml><?xml version="1.0" encoding="utf-8"?>
 <p:sld xmlns:a="http://schemas.openxmlformats.org/drawingml/2006/main" xmlns:r="http://schemas.openxmlformats.org/officeDocument/2006/relationships" xmlns:p="http://schemas.openxmlformats.org/presentationml/2006/main">
   <p:cSld>
@@ -14290,7 +13577,7 @@
             <a:spLocks noGrp="1"/>
           </p:cNvSpPr>
           <p:nvPr>
-            <p:ph type="title"/>
+            <p:ph type="ctrTitle"/>
           </p:nvPr>
         </p:nvSpPr>
         <p:spPr/>
@@ -14306,12 +13593,12 @@
       </p:sp>
       <p:sp>
         <p:nvSpPr>
-          <p:cNvPr id="3" name="Content Placeholder 2"/>
-          <p:cNvSpPr>
-            <a:spLocks noGrp="1"/>
-          </p:cNvSpPr>
-          <p:nvPr>
-            <p:ph idx="1"/>
+          <p:cNvPr id="3" name="Subtitle 2"/>
+          <p:cNvSpPr>
+            <a:spLocks noGrp="1"/>
+          </p:cNvSpPr>
+          <p:nvPr>
+            <p:ph type="subTitle" idx="1"/>
           </p:nvPr>
         </p:nvSpPr>
         <p:spPr/>
@@ -14319,6 +13606,164 @@
           <a:bodyPr/>
           <a:lstStyle/>
           <a:p/>
+        </p:txBody>
+      </p:sp>
+      <p:sp>
+        <p:nvSpPr>
+          <p:cNvPr id="4" name="TextBox 3"/>
+          <p:cNvSpPr txBox="1"/>
+          <p:nvPr/>
+        </p:nvSpPr>
+        <p:spPr>
+          <a:xfrm>
+            <a:off x="457200" y="1371600"/>
+            <a:ext cx="4114800" cy="5029200"/>
+          </a:xfrm>
+          <a:prstGeom prst="rect">
+            <a:avLst/>
+          </a:prstGeom>
+          <a:noFill/>
+        </p:spPr>
+        <p:txBody>
+          <a:bodyPr wrap="none">
+            <a:spAutoFit/>
+          </a:bodyPr>
+          <a:lstStyle/>
+          <a:p>
+            <a:pPr>
+              <a:defRPr sz="2000" b="1">
+                <a:solidFill>
+                  <a:srgbClr val="008000"/>
+                </a:solidFill>
+              </a:defRPr>
+            </a:pPr>
+            <a:r>
+              <a:t>Vorteile ✅</a:t>
+            </a:r>
+          </a:p>
+          <a:p>
+            <a:pPr>
+              <a:spcAft>
+                <a:spcPts val="600"/>
+              </a:spcAft>
+              <a:defRPr sz="1400"/>
+            </a:pPr>
+            <a:r>
+              <a:t>• Klare Trennung der Verantwortlichkeiten</a:t>
+            </a:r>
+          </a:p>
+          <a:p>
+            <a:pPr>
+              <a:spcAft>
+                <a:spcPts val="600"/>
+              </a:spcAft>
+              <a:defRPr sz="1400"/>
+            </a:pPr>
+            <a:r>
+              <a:t>• Einfache Testbarkeit jeder Schicht</a:t>
+            </a:r>
+          </a:p>
+          <a:p>
+            <a:pPr>
+              <a:spcAft>
+                <a:spcPts val="600"/>
+              </a:spcAft>
+              <a:defRPr sz="1400"/>
+            </a:pPr>
+            <a:r>
+              <a:t>• Bewährtes Pattern mit hoher Entwickler-Akzeptanz</a:t>
+            </a:r>
+          </a:p>
+          <a:p>
+            <a:pPr>
+              <a:spcAft>
+                <a:spcPts val="600"/>
+              </a:spcAft>
+              <a:defRPr sz="1400"/>
+            </a:pPr>
+            <a:r>
+              <a:t>• Gute Performance bei einfachen CRUD-Operationen</a:t>
+            </a:r>
+          </a:p>
+        </p:txBody>
+      </p:sp>
+      <p:sp>
+        <p:nvSpPr>
+          <p:cNvPr id="5" name="TextBox 4"/>
+          <p:cNvSpPr txBox="1"/>
+          <p:nvPr/>
+        </p:nvSpPr>
+        <p:spPr>
+          <a:xfrm>
+            <a:off x="4754880" y="1371600"/>
+            <a:ext cx="4114800" cy="5029200"/>
+          </a:xfrm>
+          <a:prstGeom prst="rect">
+            <a:avLst/>
+          </a:prstGeom>
+          <a:noFill/>
+        </p:spPr>
+        <p:txBody>
+          <a:bodyPr wrap="none">
+            <a:spAutoFit/>
+          </a:bodyPr>
+          <a:lstStyle/>
+          <a:p>
+            <a:pPr>
+              <a:defRPr sz="2000" b="1">
+                <a:solidFill>
+                  <a:srgbClr val="FF0000"/>
+                </a:solidFill>
+              </a:defRPr>
+            </a:pPr>
+            <a:r>
+              <a:t>Nachteile ❌</a:t>
+            </a:r>
+          </a:p>
+          <a:p>
+            <a:pPr>
+              <a:spcAft>
+                <a:spcPts val="600"/>
+              </a:spcAft>
+              <a:defRPr sz="1400"/>
+            </a:pPr>
+            <a:r>
+              <a:t>• Monolithischer Charakter erschwert Skalierung</a:t>
+            </a:r>
+          </a:p>
+          <a:p>
+            <a:pPr>
+              <a:spcAft>
+                <a:spcPts val="600"/>
+              </a:spcAft>
+              <a:defRPr sz="1400"/>
+            </a:pPr>
+            <a:r>
+              <a:t>• Änderungen propagieren durch alle Schichten</a:t>
+            </a:r>
+          </a:p>
+          <a:p>
+            <a:pPr>
+              <a:spcAft>
+                <a:spcPts val="600"/>
+              </a:spcAft>
+              <a:defRPr sz="1400"/>
+            </a:pPr>
+            <a:r>
+              <a:t>• Datenbankschema-Changes beeinflussen alle Layer</a:t>
+            </a:r>
+          </a:p>
+          <a:p>
+            <a:pPr>
+              <a:spcAft>
+                <a:spcPts val="600"/>
+              </a:spcAft>
+              <a:defRPr sz="1400"/>
+            </a:pPr>
+            <a:r>
+              <a:t>• Schwierig für komplexe Domain Logic</a:t>
+            </a:r>
+          </a:p>
         </p:txBody>
       </p:sp>
     </p:spTree>
@@ -14346,7 +13791,7 @@
             <a:spLocks noGrp="1"/>
           </p:cNvSpPr>
           <p:nvPr>
-            <p:ph type="title"/>
+            <p:ph type="ctrTitle"/>
           </p:nvPr>
         </p:nvSpPr>
         <p:spPr/>
@@ -14362,12 +13807,12 @@
       </p:sp>
       <p:sp>
         <p:nvSpPr>
-          <p:cNvPr id="3" name="Content Placeholder 2"/>
-          <p:cNvSpPr>
-            <a:spLocks noGrp="1"/>
-          </p:cNvSpPr>
-          <p:nvPr>
-            <p:ph idx="1"/>
+          <p:cNvPr id="3" name="Subtitle 2"/>
+          <p:cNvSpPr>
+            <a:spLocks noGrp="1"/>
+          </p:cNvSpPr>
+          <p:nvPr>
+            <p:ph type="subTitle" idx="1"/>
           </p:nvPr>
         </p:nvSpPr>
         <p:spPr/>
@@ -14375,6 +13820,164 @@
           <a:bodyPr/>
           <a:lstStyle/>
           <a:p/>
+        </p:txBody>
+      </p:sp>
+      <p:sp>
+        <p:nvSpPr>
+          <p:cNvPr id="4" name="TextBox 3"/>
+          <p:cNvSpPr txBox="1"/>
+          <p:nvPr/>
+        </p:nvSpPr>
+        <p:spPr>
+          <a:xfrm>
+            <a:off x="457200" y="1371600"/>
+            <a:ext cx="4114800" cy="5029200"/>
+          </a:xfrm>
+          <a:prstGeom prst="rect">
+            <a:avLst/>
+          </a:prstGeom>
+          <a:noFill/>
+        </p:spPr>
+        <p:txBody>
+          <a:bodyPr wrap="none">
+            <a:spAutoFit/>
+          </a:bodyPr>
+          <a:lstStyle/>
+          <a:p>
+            <a:pPr>
+              <a:defRPr sz="2000" b="1">
+                <a:solidFill>
+                  <a:srgbClr val="008000"/>
+                </a:solidFill>
+              </a:defRPr>
+            </a:pPr>
+            <a:r>
+              <a:t>Vorteile ✅</a:t>
+            </a:r>
+          </a:p>
+          <a:p>
+            <a:pPr>
+              <a:spcAft>
+                <a:spcPts val="600"/>
+              </a:spcAft>
+              <a:defRPr sz="1400"/>
+            </a:pPr>
+            <a:r>
+              <a:t>• Unabhängige Skalierung pro Service</a:t>
+            </a:r>
+          </a:p>
+          <a:p>
+            <a:pPr>
+              <a:spcAft>
+                <a:spcPts val="600"/>
+              </a:spcAft>
+              <a:defRPr sz="1400"/>
+            </a:pPr>
+            <a:r>
+              <a:t>• Technology Stack Diversität möglich</a:t>
+            </a:r>
+          </a:p>
+          <a:p>
+            <a:pPr>
+              <a:spcAft>
+                <a:spcPts val="600"/>
+              </a:spcAft>
+              <a:defRPr sz="1400"/>
+            </a:pPr>
+            <a:r>
+              <a:t>• Fehler-Isolierung zwischen Services</a:t>
+            </a:r>
+          </a:p>
+          <a:p>
+            <a:pPr>
+              <a:spcAft>
+                <a:spcPts val="600"/>
+              </a:spcAft>
+              <a:defRPr sz="1400"/>
+            </a:pPr>
+            <a:r>
+              <a:t>• Parallele Entwicklung durch verschiedene Teams</a:t>
+            </a:r>
+          </a:p>
+        </p:txBody>
+      </p:sp>
+      <p:sp>
+        <p:nvSpPr>
+          <p:cNvPr id="5" name="TextBox 4"/>
+          <p:cNvSpPr txBox="1"/>
+          <p:nvPr/>
+        </p:nvSpPr>
+        <p:spPr>
+          <a:xfrm>
+            <a:off x="4754880" y="1371600"/>
+            <a:ext cx="4114800" cy="5029200"/>
+          </a:xfrm>
+          <a:prstGeom prst="rect">
+            <a:avLst/>
+          </a:prstGeom>
+          <a:noFill/>
+        </p:spPr>
+        <p:txBody>
+          <a:bodyPr wrap="none">
+            <a:spAutoFit/>
+          </a:bodyPr>
+          <a:lstStyle/>
+          <a:p>
+            <a:pPr>
+              <a:defRPr sz="2000" b="1">
+                <a:solidFill>
+                  <a:srgbClr val="FF0000"/>
+                </a:solidFill>
+              </a:defRPr>
+            </a:pPr>
+            <a:r>
+              <a:t>Nachteile ❌</a:t>
+            </a:r>
+          </a:p>
+          <a:p>
+            <a:pPr>
+              <a:spcAft>
+                <a:spcPts val="600"/>
+              </a:spcAft>
+              <a:defRPr sz="1400"/>
+            </a:pPr>
+            <a:r>
+              <a:t>• Hohe operationale Komplexität</a:t>
+            </a:r>
+          </a:p>
+          <a:p>
+            <a:pPr>
+              <a:spcAft>
+                <a:spcPts val="600"/>
+              </a:spcAft>
+              <a:defRPr sz="1400"/>
+            </a:pPr>
+            <a:r>
+              <a:t>• Distributed System Challenges (Latency, Partial Failures)</a:t>
+            </a:r>
+          </a:p>
+          <a:p>
+            <a:pPr>
+              <a:spcAft>
+                <a:spcPts val="600"/>
+              </a:spcAft>
+              <a:defRPr sz="1400"/>
+            </a:pPr>
+            <a:r>
+              <a:t>• Data Consistency zwischen Services schwierig</a:t>
+            </a:r>
+          </a:p>
+          <a:p>
+            <a:pPr>
+              <a:spcAft>
+                <a:spcPts val="600"/>
+              </a:spcAft>
+              <a:defRPr sz="1400"/>
+            </a:pPr>
+            <a:r>
+              <a:t>• Service Discovery und Load Balancing erforderlich</a:t>
+            </a:r>
+          </a:p>
         </p:txBody>
       </p:sp>
     </p:spTree>
@@ -14402,7 +14005,7 @@
             <a:spLocks noGrp="1"/>
           </p:cNvSpPr>
           <p:nvPr>
-            <p:ph type="title"/>
+            <p:ph type="ctrTitle"/>
           </p:nvPr>
         </p:nvSpPr>
         <p:spPr/>
@@ -14418,12 +14021,12 @@
       </p:sp>
       <p:sp>
         <p:nvSpPr>
-          <p:cNvPr id="3" name="Content Placeholder 2"/>
-          <p:cNvSpPr>
-            <a:spLocks noGrp="1"/>
-          </p:cNvSpPr>
-          <p:nvPr>
-            <p:ph idx="1"/>
+          <p:cNvPr id="3" name="Subtitle 2"/>
+          <p:cNvSpPr>
+            <a:spLocks noGrp="1"/>
+          </p:cNvSpPr>
+          <p:nvPr>
+            <p:ph type="subTitle" idx="1"/>
           </p:nvPr>
         </p:nvSpPr>
         <p:spPr/>
@@ -14431,6 +14034,164 @@
           <a:bodyPr/>
           <a:lstStyle/>
           <a:p/>
+        </p:txBody>
+      </p:sp>
+      <p:sp>
+        <p:nvSpPr>
+          <p:cNvPr id="4" name="TextBox 3"/>
+          <p:cNvSpPr txBox="1"/>
+          <p:nvPr/>
+        </p:nvSpPr>
+        <p:spPr>
+          <a:xfrm>
+            <a:off x="457200" y="1371600"/>
+            <a:ext cx="4114800" cy="5029200"/>
+          </a:xfrm>
+          <a:prstGeom prst="rect">
+            <a:avLst/>
+          </a:prstGeom>
+          <a:noFill/>
+        </p:spPr>
+        <p:txBody>
+          <a:bodyPr wrap="none">
+            <a:spAutoFit/>
+          </a:bodyPr>
+          <a:lstStyle/>
+          <a:p>
+            <a:pPr>
+              <a:defRPr sz="2000" b="1">
+                <a:solidFill>
+                  <a:srgbClr val="008000"/>
+                </a:solidFill>
+              </a:defRPr>
+            </a:pPr>
+            <a:r>
+              <a:t>Vorteile ✅</a:t>
+            </a:r>
+          </a:p>
+          <a:p>
+            <a:pPr>
+              <a:spcAft>
+                <a:spcPts val="600"/>
+              </a:spcAft>
+              <a:defRPr sz="1400"/>
+            </a:pPr>
+            <a:r>
+              <a:t>• Klare Trennung der Verantwortlichkeiten</a:t>
+            </a:r>
+          </a:p>
+          <a:p>
+            <a:pPr>
+              <a:spcAft>
+                <a:spcPts val="600"/>
+              </a:spcAft>
+              <a:defRPr sz="1400"/>
+            </a:pPr>
+            <a:r>
+              <a:t>• Einfache Testbarkeit jeder Schicht</a:t>
+            </a:r>
+          </a:p>
+          <a:p>
+            <a:pPr>
+              <a:spcAft>
+                <a:spcPts val="600"/>
+              </a:spcAft>
+              <a:defRPr sz="1400"/>
+            </a:pPr>
+            <a:r>
+              <a:t>• Bewährtes Pattern mit hoher Entwickler-Akzeptanz</a:t>
+            </a:r>
+          </a:p>
+          <a:p>
+            <a:pPr>
+              <a:spcAft>
+                <a:spcPts val="600"/>
+              </a:spcAft>
+              <a:defRPr sz="1400"/>
+            </a:pPr>
+            <a:r>
+              <a:t>• Gute Performance bei einfachen CRUD-Operationen</a:t>
+            </a:r>
+          </a:p>
+        </p:txBody>
+      </p:sp>
+      <p:sp>
+        <p:nvSpPr>
+          <p:cNvPr id="5" name="TextBox 4"/>
+          <p:cNvSpPr txBox="1"/>
+          <p:nvPr/>
+        </p:nvSpPr>
+        <p:spPr>
+          <a:xfrm>
+            <a:off x="4754880" y="1371600"/>
+            <a:ext cx="4114800" cy="5029200"/>
+          </a:xfrm>
+          <a:prstGeom prst="rect">
+            <a:avLst/>
+          </a:prstGeom>
+          <a:noFill/>
+        </p:spPr>
+        <p:txBody>
+          <a:bodyPr wrap="none">
+            <a:spAutoFit/>
+          </a:bodyPr>
+          <a:lstStyle/>
+          <a:p>
+            <a:pPr>
+              <a:defRPr sz="2000" b="1">
+                <a:solidFill>
+                  <a:srgbClr val="FF0000"/>
+                </a:solidFill>
+              </a:defRPr>
+            </a:pPr>
+            <a:r>
+              <a:t>Nachteile ❌</a:t>
+            </a:r>
+          </a:p>
+          <a:p>
+            <a:pPr>
+              <a:spcAft>
+                <a:spcPts val="600"/>
+              </a:spcAft>
+              <a:defRPr sz="1400"/>
+            </a:pPr>
+            <a:r>
+              <a:t>• Monolithischer Charakter erschwert Skalierung</a:t>
+            </a:r>
+          </a:p>
+          <a:p>
+            <a:pPr>
+              <a:spcAft>
+                <a:spcPts val="600"/>
+              </a:spcAft>
+              <a:defRPr sz="1400"/>
+            </a:pPr>
+            <a:r>
+              <a:t>• Änderungen propagieren durch alle Schichten</a:t>
+            </a:r>
+          </a:p>
+          <a:p>
+            <a:pPr>
+              <a:spcAft>
+                <a:spcPts val="600"/>
+              </a:spcAft>
+              <a:defRPr sz="1400"/>
+            </a:pPr>
+            <a:r>
+              <a:t>• Datenbankschema-Changes beeinflussen alle Layer</a:t>
+            </a:r>
+          </a:p>
+          <a:p>
+            <a:pPr>
+              <a:spcAft>
+                <a:spcPts val="600"/>
+              </a:spcAft>
+              <a:defRPr sz="1400"/>
+            </a:pPr>
+            <a:r>
+              <a:t>• Schwierig für komplexe Domain Logic</a:t>
+            </a:r>
+          </a:p>
         </p:txBody>
       </p:sp>
     </p:spTree>
@@ -14458,7 +14219,7 @@
             <a:spLocks noGrp="1"/>
           </p:cNvSpPr>
           <p:nvPr>
-            <p:ph type="title"/>
+            <p:ph type="ctrTitle"/>
           </p:nvPr>
         </p:nvSpPr>
         <p:spPr/>
@@ -14474,12 +14235,12 @@
       </p:sp>
       <p:sp>
         <p:nvSpPr>
-          <p:cNvPr id="3" name="Content Placeholder 2"/>
-          <p:cNvSpPr>
-            <a:spLocks noGrp="1"/>
-          </p:cNvSpPr>
-          <p:nvPr>
-            <p:ph idx="1"/>
+          <p:cNvPr id="3" name="Subtitle 2"/>
+          <p:cNvSpPr>
+            <a:spLocks noGrp="1"/>
+          </p:cNvSpPr>
+          <p:nvPr>
+            <p:ph type="subTitle" idx="1"/>
           </p:nvPr>
         </p:nvSpPr>
         <p:spPr/>
@@ -14487,6 +14248,164 @@
           <a:bodyPr/>
           <a:lstStyle/>
           <a:p/>
+        </p:txBody>
+      </p:sp>
+      <p:sp>
+        <p:nvSpPr>
+          <p:cNvPr id="4" name="TextBox 3"/>
+          <p:cNvSpPr txBox="1"/>
+          <p:nvPr/>
+        </p:nvSpPr>
+        <p:spPr>
+          <a:xfrm>
+            <a:off x="457200" y="1371600"/>
+            <a:ext cx="4114800" cy="5029200"/>
+          </a:xfrm>
+          <a:prstGeom prst="rect">
+            <a:avLst/>
+          </a:prstGeom>
+          <a:noFill/>
+        </p:spPr>
+        <p:txBody>
+          <a:bodyPr wrap="none">
+            <a:spAutoFit/>
+          </a:bodyPr>
+          <a:lstStyle/>
+          <a:p>
+            <a:pPr>
+              <a:defRPr sz="2000" b="1">
+                <a:solidFill>
+                  <a:srgbClr val="008000"/>
+                </a:solidFill>
+              </a:defRPr>
+            </a:pPr>
+            <a:r>
+              <a:t>Vorteile ✅</a:t>
+            </a:r>
+          </a:p>
+          <a:p>
+            <a:pPr>
+              <a:spcAft>
+                <a:spcPts val="600"/>
+              </a:spcAft>
+              <a:defRPr sz="1400"/>
+            </a:pPr>
+            <a:r>
+              <a:t>• Unabhängige Skalierung pro Service</a:t>
+            </a:r>
+          </a:p>
+          <a:p>
+            <a:pPr>
+              <a:spcAft>
+                <a:spcPts val="600"/>
+              </a:spcAft>
+              <a:defRPr sz="1400"/>
+            </a:pPr>
+            <a:r>
+              <a:t>• Technology Stack Diversität möglich</a:t>
+            </a:r>
+          </a:p>
+          <a:p>
+            <a:pPr>
+              <a:spcAft>
+                <a:spcPts val="600"/>
+              </a:spcAft>
+              <a:defRPr sz="1400"/>
+            </a:pPr>
+            <a:r>
+              <a:t>• Fehler-Isolierung zwischen Services</a:t>
+            </a:r>
+          </a:p>
+          <a:p>
+            <a:pPr>
+              <a:spcAft>
+                <a:spcPts val="600"/>
+              </a:spcAft>
+              <a:defRPr sz="1400"/>
+            </a:pPr>
+            <a:r>
+              <a:t>• Parallele Entwicklung durch verschiedene Teams</a:t>
+            </a:r>
+          </a:p>
+        </p:txBody>
+      </p:sp>
+      <p:sp>
+        <p:nvSpPr>
+          <p:cNvPr id="5" name="TextBox 4"/>
+          <p:cNvSpPr txBox="1"/>
+          <p:nvPr/>
+        </p:nvSpPr>
+        <p:spPr>
+          <a:xfrm>
+            <a:off x="4754880" y="1371600"/>
+            <a:ext cx="4114800" cy="5029200"/>
+          </a:xfrm>
+          <a:prstGeom prst="rect">
+            <a:avLst/>
+          </a:prstGeom>
+          <a:noFill/>
+        </p:spPr>
+        <p:txBody>
+          <a:bodyPr wrap="none">
+            <a:spAutoFit/>
+          </a:bodyPr>
+          <a:lstStyle/>
+          <a:p>
+            <a:pPr>
+              <a:defRPr sz="2000" b="1">
+                <a:solidFill>
+                  <a:srgbClr val="FF0000"/>
+                </a:solidFill>
+              </a:defRPr>
+            </a:pPr>
+            <a:r>
+              <a:t>Nachteile ❌</a:t>
+            </a:r>
+          </a:p>
+          <a:p>
+            <a:pPr>
+              <a:spcAft>
+                <a:spcPts val="600"/>
+              </a:spcAft>
+              <a:defRPr sz="1400"/>
+            </a:pPr>
+            <a:r>
+              <a:t>• Hohe operationale Komplexität</a:t>
+            </a:r>
+          </a:p>
+          <a:p>
+            <a:pPr>
+              <a:spcAft>
+                <a:spcPts val="600"/>
+              </a:spcAft>
+              <a:defRPr sz="1400"/>
+            </a:pPr>
+            <a:r>
+              <a:t>• Distributed System Challenges (Latency, Partial Failures)</a:t>
+            </a:r>
+          </a:p>
+          <a:p>
+            <a:pPr>
+              <a:spcAft>
+                <a:spcPts val="600"/>
+              </a:spcAft>
+              <a:defRPr sz="1400"/>
+            </a:pPr>
+            <a:r>
+              <a:t>• Data Consistency zwischen Services schwierig</a:t>
+            </a:r>
+          </a:p>
+          <a:p>
+            <a:pPr>
+              <a:spcAft>
+                <a:spcPts val="600"/>
+              </a:spcAft>
+              <a:defRPr sz="1400"/>
+            </a:pPr>
+            <a:r>
+              <a:t>• Service Discovery und Load Balancing erforderlich</a:t>
+            </a:r>
+          </a:p>
         </p:txBody>
       </p:sp>
     </p:spTree>
@@ -14514,7 +14433,7 @@
             <a:spLocks noGrp="1"/>
           </p:cNvSpPr>
           <p:nvPr>
-            <p:ph type="title"/>
+            <p:ph type="ctrTitle"/>
           </p:nvPr>
         </p:nvSpPr>
         <p:spPr/>
@@ -14530,12 +14449,12 @@
       </p:sp>
       <p:sp>
         <p:nvSpPr>
-          <p:cNvPr id="3" name="Content Placeholder 2"/>
-          <p:cNvSpPr>
-            <a:spLocks noGrp="1"/>
-          </p:cNvSpPr>
-          <p:nvPr>
-            <p:ph idx="1"/>
+          <p:cNvPr id="3" name="Subtitle 2"/>
+          <p:cNvSpPr>
+            <a:spLocks noGrp="1"/>
+          </p:cNvSpPr>
+          <p:nvPr>
+            <p:ph type="subTitle" idx="1"/>
           </p:nvPr>
         </p:nvSpPr>
         <p:spPr/>
@@ -14543,6 +14462,164 @@
           <a:bodyPr/>
           <a:lstStyle/>
           <a:p/>
+        </p:txBody>
+      </p:sp>
+      <p:sp>
+        <p:nvSpPr>
+          <p:cNvPr id="4" name="TextBox 3"/>
+          <p:cNvSpPr txBox="1"/>
+          <p:nvPr/>
+        </p:nvSpPr>
+        <p:spPr>
+          <a:xfrm>
+            <a:off x="457200" y="1371600"/>
+            <a:ext cx="4114800" cy="5029200"/>
+          </a:xfrm>
+          <a:prstGeom prst="rect">
+            <a:avLst/>
+          </a:prstGeom>
+          <a:noFill/>
+        </p:spPr>
+        <p:txBody>
+          <a:bodyPr wrap="none">
+            <a:spAutoFit/>
+          </a:bodyPr>
+          <a:lstStyle/>
+          <a:p>
+            <a:pPr>
+              <a:defRPr sz="2000" b="1">
+                <a:solidFill>
+                  <a:srgbClr val="008000"/>
+                </a:solidFill>
+              </a:defRPr>
+            </a:pPr>
+            <a:r>
+              <a:t>Vorteile ✅</a:t>
+            </a:r>
+          </a:p>
+          <a:p>
+            <a:pPr>
+              <a:spcAft>
+                <a:spcPts val="600"/>
+              </a:spcAft>
+              <a:defRPr sz="1400"/>
+            </a:pPr>
+            <a:r>
+              <a:t>• Domain Logic vollständig isoliert von Infrastructure</a:t>
+            </a:r>
+          </a:p>
+          <a:p>
+            <a:pPr>
+              <a:spcAft>
+                <a:spcPts val="600"/>
+              </a:spcAft>
+              <a:defRPr sz="1400"/>
+            </a:pPr>
+            <a:r>
+              <a:t>• Austauschbare External Dependencies (Database, APIs)</a:t>
+            </a:r>
+          </a:p>
+          <a:p>
+            <a:pPr>
+              <a:spcAft>
+                <a:spcPts val="600"/>
+              </a:spcAft>
+              <a:defRPr sz="1400"/>
+            </a:pPr>
+            <a:r>
+              <a:t>• Excellente Testbarkeit durch Dependency Inversion</a:t>
+            </a:r>
+          </a:p>
+          <a:p>
+            <a:pPr>
+              <a:spcAft>
+                <a:spcPts val="600"/>
+              </a:spcAft>
+              <a:defRPr sz="1400"/>
+            </a:pPr>
+            <a:r>
+              <a:t>• Framework-agnostic Domain Layer</a:t>
+            </a:r>
+          </a:p>
+        </p:txBody>
+      </p:sp>
+      <p:sp>
+        <p:nvSpPr>
+          <p:cNvPr id="5" name="TextBox 4"/>
+          <p:cNvSpPr txBox="1"/>
+          <p:nvPr/>
+        </p:nvSpPr>
+        <p:spPr>
+          <a:xfrm>
+            <a:off x="4754880" y="1371600"/>
+            <a:ext cx="4114800" cy="5029200"/>
+          </a:xfrm>
+          <a:prstGeom prst="rect">
+            <a:avLst/>
+          </a:prstGeom>
+          <a:noFill/>
+        </p:spPr>
+        <p:txBody>
+          <a:bodyPr wrap="none">
+            <a:spAutoFit/>
+          </a:bodyPr>
+          <a:lstStyle/>
+          <a:p>
+            <a:pPr>
+              <a:defRPr sz="2000" b="1">
+                <a:solidFill>
+                  <a:srgbClr val="FF0000"/>
+                </a:solidFill>
+              </a:defRPr>
+            </a:pPr>
+            <a:r>
+              <a:t>Nachteile ❌</a:t>
+            </a:r>
+          </a:p>
+          <a:p>
+            <a:pPr>
+              <a:spcAft>
+                <a:spcPts val="600"/>
+              </a:spcAft>
+              <a:defRPr sz="1400"/>
+            </a:pPr>
+            <a:r>
+              <a:t>• Initial Setup komplexer als Layer Architecture</a:t>
+            </a:r>
+          </a:p>
+          <a:p>
+            <a:pPr>
+              <a:spcAft>
+                <a:spcPts val="600"/>
+              </a:spcAft>
+              <a:defRPr sz="1400"/>
+            </a:pPr>
+            <a:r>
+              <a:t>• Mehr Abstractions und Interfaces</a:t>
+            </a:r>
+          </a:p>
+          <a:p>
+            <a:pPr>
+              <a:spcAft>
+                <a:spcPts val="600"/>
+              </a:spcAft>
+              <a:defRPr sz="1400"/>
+            </a:pPr>
+            <a:r>
+              <a:t>• Kann Over-Engineering für einfache CRUD Apps sein</a:t>
+            </a:r>
+          </a:p>
+          <a:p>
+            <a:pPr>
+              <a:spcAft>
+                <a:spcPts val="600"/>
+              </a:spcAft>
+              <a:defRPr sz="1400"/>
+            </a:pPr>
+            <a:r>
+              <a:t>• Team muss Dependency Inversion verstehen</a:t>
+            </a:r>
+          </a:p>
         </p:txBody>
       </p:sp>
     </p:spTree>
@@ -14570,7 +14647,7 @@
             <a:spLocks noGrp="1"/>
           </p:cNvSpPr>
           <p:nvPr>
-            <p:ph type="title"/>
+            <p:ph type="ctrTitle"/>
           </p:nvPr>
         </p:nvSpPr>
         <p:spPr/>
@@ -14586,12 +14663,12 @@
       </p:sp>
       <p:sp>
         <p:nvSpPr>
-          <p:cNvPr id="3" name="Content Placeholder 2"/>
-          <p:cNvSpPr>
-            <a:spLocks noGrp="1"/>
-          </p:cNvSpPr>
-          <p:nvPr>
-            <p:ph idx="1"/>
+          <p:cNvPr id="3" name="Subtitle 2"/>
+          <p:cNvSpPr>
+            <a:spLocks noGrp="1"/>
+          </p:cNvSpPr>
+          <p:nvPr>
+            <p:ph type="subTitle" idx="1"/>
           </p:nvPr>
         </p:nvSpPr>
         <p:spPr/>
@@ -14599,6 +14676,164 @@
           <a:bodyPr/>
           <a:lstStyle/>
           <a:p/>
+        </p:txBody>
+      </p:sp>
+      <p:sp>
+        <p:nvSpPr>
+          <p:cNvPr id="4" name="TextBox 3"/>
+          <p:cNvSpPr txBox="1"/>
+          <p:nvPr/>
+        </p:nvSpPr>
+        <p:spPr>
+          <a:xfrm>
+            <a:off x="457200" y="1371600"/>
+            <a:ext cx="4114800" cy="5029200"/>
+          </a:xfrm>
+          <a:prstGeom prst="rect">
+            <a:avLst/>
+          </a:prstGeom>
+          <a:noFill/>
+        </p:spPr>
+        <p:txBody>
+          <a:bodyPr wrap="none">
+            <a:spAutoFit/>
+          </a:bodyPr>
+          <a:lstStyle/>
+          <a:p>
+            <a:pPr>
+              <a:defRPr sz="2000" b="1">
+                <a:solidFill>
+                  <a:srgbClr val="008000"/>
+                </a:solidFill>
+              </a:defRPr>
+            </a:pPr>
+            <a:r>
+              <a:t>Vorteile ✅</a:t>
+            </a:r>
+          </a:p>
+          <a:p>
+            <a:pPr>
+              <a:spcAft>
+                <a:spcPts val="600"/>
+              </a:spcAft>
+              <a:defRPr sz="1400"/>
+            </a:pPr>
+            <a:r>
+              <a:t>• Lose Kopplung zwischen Komponenten</a:t>
+            </a:r>
+          </a:p>
+          <a:p>
+            <a:pPr>
+              <a:spcAft>
+                <a:spcPts val="600"/>
+              </a:spcAft>
+              <a:defRPr sz="1400"/>
+            </a:pPr>
+            <a:r>
+              <a:t>• Asynchrone Verarbeitung für bessere Performance</a:t>
+            </a:r>
+          </a:p>
+          <a:p>
+            <a:pPr>
+              <a:spcAft>
+                <a:spcPts val="600"/>
+              </a:spcAft>
+              <a:defRPr sz="1400"/>
+            </a:pPr>
+            <a:r>
+              <a:t>• Event Replay für Debugging und Analytics möglich</a:t>
+            </a:r>
+          </a:p>
+          <a:p>
+            <a:pPr>
+              <a:spcAft>
+                <a:spcPts val="600"/>
+              </a:spcAft>
+              <a:defRPr sz="1400"/>
+            </a:pPr>
+            <a:r>
+              <a:t>• Einfaches Hinzufügen neuer Event Consumer</a:t>
+            </a:r>
+          </a:p>
+        </p:txBody>
+      </p:sp>
+      <p:sp>
+        <p:nvSpPr>
+          <p:cNvPr id="5" name="TextBox 4"/>
+          <p:cNvSpPr txBox="1"/>
+          <p:nvPr/>
+        </p:nvSpPr>
+        <p:spPr>
+          <a:xfrm>
+            <a:off x="4754880" y="1371600"/>
+            <a:ext cx="4114800" cy="5029200"/>
+          </a:xfrm>
+          <a:prstGeom prst="rect">
+            <a:avLst/>
+          </a:prstGeom>
+          <a:noFill/>
+        </p:spPr>
+        <p:txBody>
+          <a:bodyPr wrap="none">
+            <a:spAutoFit/>
+          </a:bodyPr>
+          <a:lstStyle/>
+          <a:p>
+            <a:pPr>
+              <a:defRPr sz="2000" b="1">
+                <a:solidFill>
+                  <a:srgbClr val="FF0000"/>
+                </a:solidFill>
+              </a:defRPr>
+            </a:pPr>
+            <a:r>
+              <a:t>Nachteile ❌</a:t>
+            </a:r>
+          </a:p>
+          <a:p>
+            <a:pPr>
+              <a:spcAft>
+                <a:spcPts val="600"/>
+              </a:spcAft>
+              <a:defRPr sz="1400"/>
+            </a:pPr>
+            <a:r>
+              <a:t>• Eventually Consistent Data</a:t>
+            </a:r>
+          </a:p>
+          <a:p>
+            <a:pPr>
+              <a:spcAft>
+                <a:spcPts val="600"/>
+              </a:spcAft>
+              <a:defRPr sz="1400"/>
+            </a:pPr>
+            <a:r>
+              <a:t>• Komplexere Error Handling (Dead Letter Queues)</a:t>
+            </a:r>
+          </a:p>
+          <a:p>
+            <a:pPr>
+              <a:spcAft>
+                <a:spcPts val="600"/>
+              </a:spcAft>
+              <a:defRPr sz="1400"/>
+            </a:pPr>
+            <a:r>
+              <a:t>• Event Schema Evolution herausfordernd</a:t>
+            </a:r>
+          </a:p>
+          <a:p>
+            <a:pPr>
+              <a:spcAft>
+                <a:spcPts val="600"/>
+              </a:spcAft>
+              <a:defRPr sz="1400"/>
+            </a:pPr>
+            <a:r>
+              <a:t>• Debugging von Event Flows schwierig</a:t>
+            </a:r>
+          </a:p>
         </p:txBody>
       </p:sp>
     </p:spTree>
@@ -15214,6 +15449,71 @@
 </p:sld>
 </file>
 
+<file path=ppt/slides/slide7.xml><?xml version="1.0" encoding="utf-8"?>
+<p:sld xmlns:a="http://schemas.openxmlformats.org/drawingml/2006/main" xmlns:r="http://schemas.openxmlformats.org/officeDocument/2006/relationships" xmlns:p="http://schemas.openxmlformats.org/presentationml/2006/main">
+  <p:cSld>
+    <p:spTree>
+      <p:nvGrpSpPr>
+        <p:cNvPr id="1" name=""/>
+        <p:cNvGrpSpPr/>
+        <p:nvPr/>
+      </p:nvGrpSpPr>
+      <p:grpSpPr>
+        <a:xfrm>
+          <a:off x="0" y="0"/>
+          <a:ext cx="0" cy="0"/>
+          <a:chOff x="0" y="0"/>
+          <a:chExt cx="0" cy="0"/>
+        </a:xfrm>
+      </p:grpSpPr>
+      <p:sp>
+        <p:nvSpPr>
+          <p:cNvPr id="2" name="Title 1"/>
+          <p:cNvSpPr>
+            <a:spLocks noGrp="1"/>
+          </p:cNvSpPr>
+          <p:nvPr>
+            <p:ph type="ctrTitle"/>
+          </p:nvPr>
+        </p:nvSpPr>
+        <p:spPr/>
+        <p:txBody>
+          <a:bodyPr/>
+          <a:lstStyle/>
+          <a:p>
+            <a:r>
+              <a:t>2. Microservices Architecture</a:t>
+            </a:r>
+          </a:p>
+        </p:txBody>
+      </p:sp>
+      <p:sp>
+        <p:nvSpPr>
+          <p:cNvPr id="3" name="Subtitle 2"/>
+          <p:cNvSpPr>
+            <a:spLocks noGrp="1"/>
+          </p:cNvSpPr>
+          <p:nvPr>
+            <p:ph type="subTitle" idx="1"/>
+          </p:nvPr>
+        </p:nvSpPr>
+        <p:spPr/>
+        <p:txBody>
+          <a:bodyPr/>
+          <a:lstStyle/>
+          <a:p>
+            <a:endParaRPr/>
+          </a:p>
+        </p:txBody>
+      </p:sp>
+    </p:spTree>
+  </p:cSld>
+  <p:clrMapOvr>
+    <a:masterClrMapping/>
+  </p:clrMapOvr>
+</p:sld>
+</file>
+
 <file path=ppt/slides/slide8.xml><?xml version="1.0" encoding="utf-8"?>
 <p:sld xmlns:a="http://schemas.openxmlformats.org/drawingml/2006/main" xmlns:r="http://schemas.openxmlformats.org/officeDocument/2006/relationships" xmlns:p="http://schemas.openxmlformats.org/presentationml/2006/main">
   <p:cSld>
@@ -15238,7 +15538,7 @@
             <a:spLocks noGrp="1"/>
           </p:cNvSpPr>
           <p:nvPr>
-            <p:ph type="ctrTitle"/>
+            <p:ph type="title"/>
           </p:nvPr>
         </p:nvSpPr>
         <p:spPr/>
@@ -15247,27 +15547,213 @@
           <a:lstStyle/>
           <a:p>
             <a:r>
-              <a:t>2. Microservices Architecture</a:t>
-            </a:r>
-          </a:p>
-        </p:txBody>
-      </p:sp>
-      <p:sp>
-        <p:nvSpPr>
-          <p:cNvPr id="3" name="Subtitle 2"/>
-          <p:cNvSpPr>
-            <a:spLocks noGrp="1"/>
-          </p:cNvSpPr>
-          <p:nvPr>
-            <p:ph type="subTitle" idx="1"/>
+              <a:t>Microservices Architecture - Schema</a:t>
+            </a:r>
+          </a:p>
+        </p:txBody>
+      </p:sp>
+      <p:sp>
+        <p:nvSpPr>
+          <p:cNvPr id="3" name="Content Placeholder 2"/>
+          <p:cNvSpPr>
+            <a:spLocks noGrp="1"/>
+          </p:cNvSpPr>
+          <p:nvPr>
+            <p:ph idx="1"/>
           </p:nvPr>
         </p:nvSpPr>
         <p:spPr/>
         <p:txBody>
-          <a:bodyPr/>
+          <a:bodyPr>
+            <a:normAutofit lnSpcReduction="10000"/>
+          </a:bodyPr>
           <a:lstStyle/>
           <a:p>
-            <a:endParaRPr/>
+            <a:pPr>
+              <a:lnSpc>
+                <a:spcPct val="100000"/>
+              </a:lnSpc>
+              <a:spcBef>
+                <a:spcPts val="0"/>
+              </a:spcBef>
+              <a:spcAft>
+                <a:spcPts val="0"/>
+              </a:spcAft>
+            </a:pPr>
+            <a:r>
+              <a:rPr sz="1800" dirty="0">
+                <a:latin typeface="Consolas"/>
+              </a:rPr>
+              <a:t>Service Landscape:</a:t>
+            </a:r>
+            <a:br>
+              <a:rPr sz="5400" dirty="0"/>
+            </a:br>
+            <a:r>
+              <a:rPr sz="1800" dirty="0">
+                <a:latin typeface="Consolas"/>
+              </a:rPr>
+              <a:t>┌───────────────┐  ┌───────────────┐  ┌───────────────┐</a:t>
+            </a:r>
+            <a:br>
+              <a:rPr sz="5400" dirty="0"/>
+            </a:br>
+            <a:r>
+              <a:rPr sz="1800" dirty="0">
+                <a:latin typeface="Consolas"/>
+              </a:rPr>
+              <a:t>│  Device </a:t>
+            </a:r>
+            <a:r>
+              <a:rPr sz="1800" dirty="0" err="1">
+                <a:latin typeface="Consolas"/>
+              </a:rPr>
+              <a:t>Mgmt</a:t>
+            </a:r>
+            <a:r>
+              <a:rPr sz="1800" dirty="0">
+                <a:latin typeface="Consolas"/>
+              </a:rPr>
+              <a:t>  │  │   Monitoring  │  │ Configuration │</a:t>
+            </a:r>
+            <a:br>
+              <a:rPr sz="5400" dirty="0"/>
+            </a:br>
+            <a:r>
+              <a:rPr sz="1800" dirty="0">
+                <a:latin typeface="Consolas"/>
+              </a:rPr>
+              <a:t>│   Service     │  │    Service    │  │    Service    │</a:t>
+            </a:r>
+            <a:br>
+              <a:rPr sz="5400" dirty="0"/>
+            </a:br>
+            <a:r>
+              <a:rPr sz="1800" dirty="0">
+                <a:latin typeface="Consolas"/>
+              </a:rPr>
+              <a:t>├───────────────┤  ├───────────────┤  ├───────────────┤</a:t>
+            </a:r>
+            <a:br>
+              <a:rPr sz="5400" dirty="0"/>
+            </a:br>
+            <a:r>
+              <a:rPr sz="1800" dirty="0">
+                <a:latin typeface="Consolas"/>
+              </a:rPr>
+              <a:t>│  PostgreSQL   │  │  </a:t>
+            </a:r>
+            <a:r>
+              <a:rPr sz="1800" dirty="0" err="1">
+                <a:latin typeface="Consolas"/>
+              </a:rPr>
+              <a:t>InfluxDB</a:t>
+            </a:r>
+            <a:r>
+              <a:rPr sz="1800" dirty="0">
+                <a:latin typeface="Consolas"/>
+              </a:rPr>
+              <a:t>     │  │   MongoDB     │</a:t>
+            </a:r>
+            <a:br>
+              <a:rPr sz="5400" dirty="0"/>
+            </a:br>
+            <a:r>
+              <a:rPr sz="1800" dirty="0">
+                <a:latin typeface="Consolas"/>
+              </a:rPr>
+              <a:t>└───────────────┘  └───────────────┘  └───────────────┘</a:t>
+            </a:r>
+            <a:br>
+              <a:rPr sz="5400" dirty="0"/>
+            </a:br>
+            <a:r>
+              <a:rPr sz="1800" dirty="0">
+                <a:latin typeface="Consolas"/>
+              </a:rPr>
+              <a:t>         │                  │                  │</a:t>
+            </a:r>
+            <a:br>
+              <a:rPr sz="5400" dirty="0"/>
+            </a:br>
+            <a:r>
+              <a:rPr sz="1800" dirty="0">
+                <a:latin typeface="Consolas"/>
+              </a:rPr>
+              <a:t>         └──────────────────┼──────────────────┘</a:t>
+            </a:r>
+            <a:br>
+              <a:rPr sz="5400" dirty="0"/>
+            </a:br>
+            <a:r>
+              <a:rPr sz="1800" dirty="0">
+                <a:latin typeface="Consolas"/>
+              </a:rPr>
+              <a:t>                            │</a:t>
+            </a:r>
+            <a:br>
+              <a:rPr sz="5400" dirty="0"/>
+            </a:br>
+            <a:r>
+              <a:rPr sz="1800" dirty="0">
+                <a:latin typeface="Consolas"/>
+              </a:rPr>
+              <a:t>                   ┌─────────────────┐</a:t>
+            </a:r>
+            <a:br>
+              <a:rPr sz="5400" dirty="0"/>
+            </a:br>
+            <a:r>
+              <a:rPr sz="1800" dirty="0">
+                <a:latin typeface="Consolas"/>
+              </a:rPr>
+              <a:t>                   │   API Gateway   │</a:t>
+            </a:r>
+            <a:br>
+              <a:rPr sz="5400" dirty="0"/>
+            </a:br>
+            <a:r>
+              <a:rPr sz="1800" dirty="0">
+                <a:latin typeface="Consolas"/>
+              </a:rPr>
+              <a:t>                   ├─────────────────┤</a:t>
+            </a:r>
+            <a:br>
+              <a:rPr sz="5400" dirty="0"/>
+            </a:br>
+            <a:r>
+              <a:rPr sz="1800" dirty="0">
+                <a:latin typeface="Consolas"/>
+              </a:rPr>
+              <a:t>                   │ Load Balancer   │</a:t>
+            </a:r>
+            <a:br>
+              <a:rPr sz="5400" dirty="0"/>
+            </a:br>
+            <a:r>
+              <a:rPr sz="1800" dirty="0">
+                <a:latin typeface="Consolas"/>
+              </a:rPr>
+              <a:t>                   ├─────────────────┤</a:t>
+            </a:r>
+            <a:br>
+              <a:rPr sz="5400" dirty="0"/>
+            </a:br>
+            <a:r>
+              <a:rPr sz="1800" dirty="0">
+                <a:latin typeface="Consolas"/>
+              </a:rPr>
+              <a:t>                   │ Service Mesh    │</a:t>
+            </a:r>
+            <a:br>
+              <a:rPr sz="5400" dirty="0"/>
+            </a:br>
+            <a:r>
+              <a:rPr sz="1800" dirty="0">
+                <a:latin typeface="Consolas"/>
+              </a:rPr>
+              <a:t>                   └─────────────────┘</a:t>
+            </a:r>
           </a:p>
         </p:txBody>
       </p:sp>
@@ -15303,7 +15789,7 @@
             <a:spLocks noGrp="1"/>
           </p:cNvSpPr>
           <p:nvPr>
-            <p:ph type="title"/>
+            <p:ph type="ctrTitle"/>
           </p:nvPr>
         </p:nvSpPr>
         <p:spPr/>
@@ -15312,213 +15798,27 @@
           <a:lstStyle/>
           <a:p>
             <a:r>
-              <a:t>Microservices Architecture - Schema</a:t>
-            </a:r>
-          </a:p>
-        </p:txBody>
-      </p:sp>
-      <p:sp>
-        <p:nvSpPr>
-          <p:cNvPr id="3" name="Content Placeholder 2"/>
-          <p:cNvSpPr>
-            <a:spLocks noGrp="1"/>
-          </p:cNvSpPr>
-          <p:nvPr>
-            <p:ph idx="1"/>
+              <a:t>3. Event-Driven Architecture</a:t>
+            </a:r>
+          </a:p>
+        </p:txBody>
+      </p:sp>
+      <p:sp>
+        <p:nvSpPr>
+          <p:cNvPr id="3" name="Subtitle 2"/>
+          <p:cNvSpPr>
+            <a:spLocks noGrp="1"/>
+          </p:cNvSpPr>
+          <p:nvPr>
+            <p:ph type="subTitle" idx="1"/>
           </p:nvPr>
         </p:nvSpPr>
         <p:spPr/>
         <p:txBody>
-          <a:bodyPr>
-            <a:normAutofit lnSpcReduction="10000"/>
-          </a:bodyPr>
+          <a:bodyPr/>
           <a:lstStyle/>
           <a:p>
-            <a:pPr>
-              <a:lnSpc>
-                <a:spcPct val="100000"/>
-              </a:lnSpc>
-              <a:spcBef>
-                <a:spcPts val="0"/>
-              </a:spcBef>
-              <a:spcAft>
-                <a:spcPts val="0"/>
-              </a:spcAft>
-            </a:pPr>
-            <a:r>
-              <a:rPr sz="1800" dirty="0">
-                <a:latin typeface="Consolas"/>
-              </a:rPr>
-              <a:t>Service Landscape:</a:t>
-            </a:r>
-            <a:br>
-              <a:rPr sz="5400" dirty="0"/>
-            </a:br>
-            <a:r>
-              <a:rPr sz="1800" dirty="0">
-                <a:latin typeface="Consolas"/>
-              </a:rPr>
-              <a:t>┌───────────────┐  ┌───────────────┐  ┌───────────────┐</a:t>
-            </a:r>
-            <a:br>
-              <a:rPr sz="5400" dirty="0"/>
-            </a:br>
-            <a:r>
-              <a:rPr sz="1800" dirty="0">
-                <a:latin typeface="Consolas"/>
-              </a:rPr>
-              <a:t>│  Device </a:t>
-            </a:r>
-            <a:r>
-              <a:rPr sz="1800" dirty="0" err="1">
-                <a:latin typeface="Consolas"/>
-              </a:rPr>
-              <a:t>Mgmt</a:t>
-            </a:r>
-            <a:r>
-              <a:rPr sz="1800" dirty="0">
-                <a:latin typeface="Consolas"/>
-              </a:rPr>
-              <a:t>  │  │   Monitoring  │  │ Configuration │</a:t>
-            </a:r>
-            <a:br>
-              <a:rPr sz="5400" dirty="0"/>
-            </a:br>
-            <a:r>
-              <a:rPr sz="1800" dirty="0">
-                <a:latin typeface="Consolas"/>
-              </a:rPr>
-              <a:t>│   Service     │  │    Service    │  │    Service    │</a:t>
-            </a:r>
-            <a:br>
-              <a:rPr sz="5400" dirty="0"/>
-            </a:br>
-            <a:r>
-              <a:rPr sz="1800" dirty="0">
-                <a:latin typeface="Consolas"/>
-              </a:rPr>
-              <a:t>├───────────────┤  ├───────────────┤  ├───────────────┤</a:t>
-            </a:r>
-            <a:br>
-              <a:rPr sz="5400" dirty="0"/>
-            </a:br>
-            <a:r>
-              <a:rPr sz="1800" dirty="0">
-                <a:latin typeface="Consolas"/>
-              </a:rPr>
-              <a:t>│  PostgreSQL   │  │  </a:t>
-            </a:r>
-            <a:r>
-              <a:rPr sz="1800" dirty="0" err="1">
-                <a:latin typeface="Consolas"/>
-              </a:rPr>
-              <a:t>InfluxDB</a:t>
-            </a:r>
-            <a:r>
-              <a:rPr sz="1800" dirty="0">
-                <a:latin typeface="Consolas"/>
-              </a:rPr>
-              <a:t>     │  │   MongoDB     │</a:t>
-            </a:r>
-            <a:br>
-              <a:rPr sz="5400" dirty="0"/>
-            </a:br>
-            <a:r>
-              <a:rPr sz="1800" dirty="0">
-                <a:latin typeface="Consolas"/>
-              </a:rPr>
-              <a:t>└───────────────┘  └───────────────┘  └───────────────┘</a:t>
-            </a:r>
-            <a:br>
-              <a:rPr sz="5400" dirty="0"/>
-            </a:br>
-            <a:r>
-              <a:rPr sz="1800" dirty="0">
-                <a:latin typeface="Consolas"/>
-              </a:rPr>
-              <a:t>         │                  │                  │</a:t>
-            </a:r>
-            <a:br>
-              <a:rPr sz="5400" dirty="0"/>
-            </a:br>
-            <a:r>
-              <a:rPr sz="1800" dirty="0">
-                <a:latin typeface="Consolas"/>
-              </a:rPr>
-              <a:t>         └──────────────────┼──────────────────┘</a:t>
-            </a:r>
-            <a:br>
-              <a:rPr sz="5400" dirty="0"/>
-            </a:br>
-            <a:r>
-              <a:rPr sz="1800" dirty="0">
-                <a:latin typeface="Consolas"/>
-              </a:rPr>
-              <a:t>                            │</a:t>
-            </a:r>
-            <a:br>
-              <a:rPr sz="5400" dirty="0"/>
-            </a:br>
-            <a:r>
-              <a:rPr sz="1800" dirty="0">
-                <a:latin typeface="Consolas"/>
-              </a:rPr>
-              <a:t>                   ┌─────────────────┐</a:t>
-            </a:r>
-            <a:br>
-              <a:rPr sz="5400" dirty="0"/>
-            </a:br>
-            <a:r>
-              <a:rPr sz="1800" dirty="0">
-                <a:latin typeface="Consolas"/>
-              </a:rPr>
-              <a:t>                   │   API Gateway   │</a:t>
-            </a:r>
-            <a:br>
-              <a:rPr sz="5400" dirty="0"/>
-            </a:br>
-            <a:r>
-              <a:rPr sz="1800" dirty="0">
-                <a:latin typeface="Consolas"/>
-              </a:rPr>
-              <a:t>                   ├─────────────────┤</a:t>
-            </a:r>
-            <a:br>
-              <a:rPr sz="5400" dirty="0"/>
-            </a:br>
-            <a:r>
-              <a:rPr sz="1800" dirty="0">
-                <a:latin typeface="Consolas"/>
-              </a:rPr>
-              <a:t>                   │ Load Balancer   │</a:t>
-            </a:r>
-            <a:br>
-              <a:rPr sz="5400" dirty="0"/>
-            </a:br>
-            <a:r>
-              <a:rPr sz="1800" dirty="0">
-                <a:latin typeface="Consolas"/>
-              </a:rPr>
-              <a:t>                   ├─────────────────┤</a:t>
-            </a:r>
-            <a:br>
-              <a:rPr sz="5400" dirty="0"/>
-            </a:br>
-            <a:r>
-              <a:rPr sz="1800" dirty="0">
-                <a:latin typeface="Consolas"/>
-              </a:rPr>
-              <a:t>                   │ Service Mesh    │</a:t>
-            </a:r>
-            <a:br>
-              <a:rPr sz="5400" dirty="0"/>
-            </a:br>
-            <a:r>
-              <a:rPr sz="1800" dirty="0">
-                <a:latin typeface="Consolas"/>
-              </a:rPr>
-              <a:t>                   └─────────────────┘</a:t>
-            </a:r>
+            <a:endParaRPr/>
           </a:p>
         </p:txBody>
       </p:sp>

--- a/presentations/powerpoint/arch-patterns-part1.pptx
+++ b/presentations/powerpoint/arch-patterns-part1.pptx
@@ -18,18 +18,10 @@
     <p:sldId id="268" r:id="rId14"/>
     <p:sldId id="269" r:id="rId15"/>
     <p:sldId id="270" r:id="rId16"/>
-    <p:sldId id="271" r:id="rId25"/>
-    <p:sldId id="272" r:id="rId23"/>
-    <p:sldId id="273" r:id="rId22"/>
-    <p:sldId id="274" r:id="rId21"/>
-    <p:sldId id="275" r:id="rId11"/>
-    <p:sldId id="276" r:id="rId8"/>
-    <p:sldId id="277" r:id="rId32"/>
-    <p:sldId id="278" r:id="rId33"/>
-    <p:sldId id="279" r:id="rId34"/>
-    <p:sldId id="280" r:id="rId35"/>
-    <p:sldId id="281" r:id="rId36"/>
-    <p:sldId id="282" r:id="rId37"/>
+    <p:sldId id="271" r:id="rId38"/>
+    <p:sldId id="272" r:id="rId39"/>
+    <p:sldId id="273" r:id="rId40"/>
+    <p:sldId id="274" r:id="rId41"/>
   </p:sldIdLst>
   <p:sldSz cx="12192000" cy="6858000"/>
   <p:notesSz cx="6858000" cy="9144000"/>
@@ -13185,19 +13177,40 @@
           <a:lstStyle/>
           <a:p>
             <a:r>
-              <a:t>Layered Architecture - Trade-offs</a:t>
-            </a:r>
-          </a:p>
-        </p:txBody>
-      </p:sp>
-      <p:sp>
-        <p:nvSpPr>
-          <p:cNvPr id="3" name="Content Placeholder 2"/>
-          <p:cNvSpPr>
-            <a:spLocks noGrp="1"/>
-          </p:cNvSpPr>
-          <p:nvPr>
-            <p:ph idx="1"/>
+              <a:t>Layered Architecture - Vorteile/Nachteile</a:t>
+            </a:r>
+          </a:p>
+        </p:txBody>
+      </p:sp>
+      <p:sp>
+        <p:nvSpPr>
+          <p:cNvPr id="3" name="Text Placeholder 2"/>
+          <p:cNvSpPr>
+            <a:spLocks noGrp="1"/>
+          </p:cNvSpPr>
+          <p:nvPr>
+            <p:ph type="body" idx="1"/>
+          </p:nvPr>
+        </p:nvSpPr>
+        <p:spPr/>
+        <p:txBody>
+          <a:bodyPr/>
+          <a:lstStyle/>
+          <a:p>
+            <a:r>
+              <a:t>Vorteile ✅</a:t>
+            </a:r>
+          </a:p>
+        </p:txBody>
+      </p:sp>
+      <p:sp>
+        <p:nvSpPr>
+          <p:cNvPr id="4" name="Content Placeholder 3"/>
+          <p:cNvSpPr>
+            <a:spLocks noGrp="1"/>
+          </p:cNvSpPr>
+          <p:nvPr>
+            <p:ph idx="2" sz="half"/>
           </p:nvPr>
         </p:nvSpPr>
         <p:spPr/>
@@ -13205,6 +13218,239 @@
           <a:bodyPr/>
           <a:lstStyle/>
           <a:p/>
+          <a:p>
+            <a:r>
+              <a:t>Klare Trennung der Verantwortlichkeiten</a:t>
+            </a:r>
+          </a:p>
+          <a:p>
+            <a:r>
+              <a:t>Einfache Testbarkeit jeder Schicht</a:t>
+            </a:r>
+          </a:p>
+          <a:p>
+            <a:r>
+              <a:t>Bewährtes Pattern mit hoher Entwickler-Akzeptanz</a:t>
+            </a:r>
+          </a:p>
+          <a:p>
+            <a:r>
+              <a:t>Gute Performance bei einfachen CRUD-Operationen</a:t>
+            </a:r>
+          </a:p>
+        </p:txBody>
+      </p:sp>
+      <p:sp>
+        <p:nvSpPr>
+          <p:cNvPr id="5" name="Text Placeholder 4"/>
+          <p:cNvSpPr>
+            <a:spLocks noGrp="1"/>
+          </p:cNvSpPr>
+          <p:nvPr>
+            <p:ph type="body" idx="3" sz="quarter"/>
+          </p:nvPr>
+        </p:nvSpPr>
+        <p:spPr/>
+        <p:txBody>
+          <a:bodyPr/>
+          <a:lstStyle/>
+          <a:p>
+            <a:r>
+              <a:t>Nachteile ❌</a:t>
+            </a:r>
+          </a:p>
+        </p:txBody>
+      </p:sp>
+      <p:sp>
+        <p:nvSpPr>
+          <p:cNvPr id="6" name="Content Placeholder 5"/>
+          <p:cNvSpPr>
+            <a:spLocks noGrp="1"/>
+          </p:cNvSpPr>
+          <p:nvPr>
+            <p:ph idx="4" sz="quarter"/>
+          </p:nvPr>
+        </p:nvSpPr>
+        <p:spPr/>
+        <p:txBody>
+          <a:bodyPr/>
+          <a:lstStyle/>
+          <a:p/>
+          <a:p>
+            <a:r>
+              <a:t>Monolithischer Charakter erschwert Skalierung</a:t>
+            </a:r>
+          </a:p>
+          <a:p>
+            <a:r>
+              <a:t>Änderungen propagieren durch alle Schichten</a:t>
+            </a:r>
+          </a:p>
+          <a:p>
+            <a:r>
+              <a:t>Datenbankschema-Changes beeinflussen alle Layer</a:t>
+            </a:r>
+          </a:p>
+          <a:p>
+            <a:r>
+              <a:t>Schwierig für komplexe Domain Logic</a:t>
+            </a:r>
+          </a:p>
+        </p:txBody>
+      </p:sp>
+    </p:spTree>
+  </p:cSld>
+  <p:clrMapOvr>
+    <a:masterClrMapping/>
+  </p:clrMapOvr>
+</p:sld>
+</file>
+
+<file path=ppt/slides/slide14.xml><?xml version="1.0" encoding="utf-8"?>
+<p:sld xmlns:a="http://schemas.openxmlformats.org/drawingml/2006/main" xmlns:p="http://schemas.openxmlformats.org/presentationml/2006/main" xmlns:r="http://schemas.openxmlformats.org/officeDocument/2006/relationships">
+  <p:cSld>
+    <p:spTree>
+      <p:nvGrpSpPr>
+        <p:cNvPr id="1" name=""/>
+        <p:cNvGrpSpPr/>
+        <p:nvPr/>
+      </p:nvGrpSpPr>
+      <p:grpSpPr/>
+      <p:sp>
+        <p:nvSpPr>
+          <p:cNvPr id="2" name="Title 1"/>
+          <p:cNvSpPr>
+            <a:spLocks noGrp="1"/>
+          </p:cNvSpPr>
+          <p:nvPr>
+            <p:ph type="title"/>
+          </p:nvPr>
+        </p:nvSpPr>
+        <p:spPr/>
+        <p:txBody>
+          <a:bodyPr/>
+          <a:lstStyle/>
+          <a:p>
+            <a:r>
+              <a:t>Layered Architecture - Vorteile/Nachteile</a:t>
+            </a:r>
+          </a:p>
+        </p:txBody>
+      </p:sp>
+      <p:sp>
+        <p:nvSpPr>
+          <p:cNvPr id="3" name="Text Placeholder 2"/>
+          <p:cNvSpPr>
+            <a:spLocks noGrp="1"/>
+          </p:cNvSpPr>
+          <p:nvPr>
+            <p:ph type="body" idx="1"/>
+          </p:nvPr>
+        </p:nvSpPr>
+        <p:spPr/>
+        <p:txBody>
+          <a:bodyPr/>
+          <a:lstStyle/>
+          <a:p>
+            <a:r>
+              <a:t>Vorteile ✅</a:t>
+            </a:r>
+          </a:p>
+        </p:txBody>
+      </p:sp>
+      <p:sp>
+        <p:nvSpPr>
+          <p:cNvPr id="4" name="Content Placeholder 3"/>
+          <p:cNvSpPr>
+            <a:spLocks noGrp="1"/>
+          </p:cNvSpPr>
+          <p:nvPr>
+            <p:ph idx="2" sz="half"/>
+          </p:nvPr>
+        </p:nvSpPr>
+        <p:spPr/>
+        <p:txBody>
+          <a:bodyPr/>
+          <a:lstStyle/>
+          <a:p/>
+          <a:p>
+            <a:r>
+              <a:t>Klare Trennung der Verantwortlichkeiten</a:t>
+            </a:r>
+          </a:p>
+          <a:p>
+            <a:r>
+              <a:t>Einfache Testbarkeit jeder Schicht</a:t>
+            </a:r>
+          </a:p>
+          <a:p>
+            <a:r>
+              <a:t>Bewährtes Pattern mit hoher Entwickler-Akzeptanz</a:t>
+            </a:r>
+          </a:p>
+          <a:p>
+            <a:r>
+              <a:t>Gute Performance bei einfachen CRUD-Operationen</a:t>
+            </a:r>
+          </a:p>
+        </p:txBody>
+      </p:sp>
+      <p:sp>
+        <p:nvSpPr>
+          <p:cNvPr id="5" name="Text Placeholder 4"/>
+          <p:cNvSpPr>
+            <a:spLocks noGrp="1"/>
+          </p:cNvSpPr>
+          <p:nvPr>
+            <p:ph type="body" idx="3" sz="quarter"/>
+          </p:nvPr>
+        </p:nvSpPr>
+        <p:spPr/>
+        <p:txBody>
+          <a:bodyPr/>
+          <a:lstStyle/>
+          <a:p>
+            <a:r>
+              <a:t>Nachteile ❌</a:t>
+            </a:r>
+          </a:p>
+        </p:txBody>
+      </p:sp>
+      <p:sp>
+        <p:nvSpPr>
+          <p:cNvPr id="6" name="Content Placeholder 5"/>
+          <p:cNvSpPr>
+            <a:spLocks noGrp="1"/>
+          </p:cNvSpPr>
+          <p:nvPr>
+            <p:ph idx="4" sz="quarter"/>
+          </p:nvPr>
+        </p:nvSpPr>
+        <p:spPr/>
+        <p:txBody>
+          <a:bodyPr/>
+          <a:lstStyle/>
+          <a:p/>
+          <a:p>
+            <a:r>
+              <a:t>Monolithischer Charakter erschwert Skalierung</a:t>
+            </a:r>
+          </a:p>
+          <a:p>
+            <a:r>
+              <a:t>Änderungen propagieren durch alle Schichten</a:t>
+            </a:r>
+          </a:p>
+          <a:p>
+            <a:r>
+              <a:t>Datenbankschema-Changes beeinflussen alle Layer</a:t>
+            </a:r>
+          </a:p>
+          <a:p>
+            <a:r>
+              <a:t>Schwierig für komplexe Domain Logic</a:t>
+            </a:r>
+          </a:p>
         </p:txBody>
       </p:sp>
     </p:spTree>
@@ -13241,19 +13487,40 @@
           <a:lstStyle/>
           <a:p>
             <a:r>
-              <a:t>Microservices - Trade-offs</a:t>
-            </a:r>
-          </a:p>
-        </p:txBody>
-      </p:sp>
-      <p:sp>
-        <p:nvSpPr>
-          <p:cNvPr id="3" name="Content Placeholder 2"/>
-          <p:cNvSpPr>
-            <a:spLocks noGrp="1"/>
-          </p:cNvSpPr>
-          <p:nvPr>
-            <p:ph idx="1"/>
+              <a:t>Microservices - Vorteile/Nachteile</a:t>
+            </a:r>
+          </a:p>
+        </p:txBody>
+      </p:sp>
+      <p:sp>
+        <p:nvSpPr>
+          <p:cNvPr id="3" name="Text Placeholder 2"/>
+          <p:cNvSpPr>
+            <a:spLocks noGrp="1"/>
+          </p:cNvSpPr>
+          <p:nvPr>
+            <p:ph type="body" idx="1"/>
+          </p:nvPr>
+        </p:nvSpPr>
+        <p:spPr/>
+        <p:txBody>
+          <a:bodyPr/>
+          <a:lstStyle/>
+          <a:p>
+            <a:r>
+              <a:t>Vorteile ✅</a:t>
+            </a:r>
+          </a:p>
+        </p:txBody>
+      </p:sp>
+      <p:sp>
+        <p:nvSpPr>
+          <p:cNvPr id="4" name="Content Placeholder 3"/>
+          <p:cNvSpPr>
+            <a:spLocks noGrp="1"/>
+          </p:cNvSpPr>
+          <p:nvPr>
+            <p:ph idx="2" sz="half"/>
           </p:nvPr>
         </p:nvSpPr>
         <p:spPr/>
@@ -13261,6 +13528,239 @@
           <a:bodyPr/>
           <a:lstStyle/>
           <a:p/>
+          <a:p>
+            <a:r>
+              <a:t>Unabhängige Skalierung pro Service</a:t>
+            </a:r>
+          </a:p>
+          <a:p>
+            <a:r>
+              <a:t>Technology Stack Diversität möglich</a:t>
+            </a:r>
+          </a:p>
+          <a:p>
+            <a:r>
+              <a:t>Fehler-Isolierung zwischen Services</a:t>
+            </a:r>
+          </a:p>
+          <a:p>
+            <a:r>
+              <a:t>Parallele Entwicklung durch verschiedene Teams</a:t>
+            </a:r>
+          </a:p>
+        </p:txBody>
+      </p:sp>
+      <p:sp>
+        <p:nvSpPr>
+          <p:cNvPr id="5" name="Text Placeholder 4"/>
+          <p:cNvSpPr>
+            <a:spLocks noGrp="1"/>
+          </p:cNvSpPr>
+          <p:nvPr>
+            <p:ph type="body" idx="3" sz="quarter"/>
+          </p:nvPr>
+        </p:nvSpPr>
+        <p:spPr/>
+        <p:txBody>
+          <a:bodyPr/>
+          <a:lstStyle/>
+          <a:p>
+            <a:r>
+              <a:t>Nachteile ❌</a:t>
+            </a:r>
+          </a:p>
+        </p:txBody>
+      </p:sp>
+      <p:sp>
+        <p:nvSpPr>
+          <p:cNvPr id="6" name="Content Placeholder 5"/>
+          <p:cNvSpPr>
+            <a:spLocks noGrp="1"/>
+          </p:cNvSpPr>
+          <p:nvPr>
+            <p:ph idx="4" sz="quarter"/>
+          </p:nvPr>
+        </p:nvSpPr>
+        <p:spPr/>
+        <p:txBody>
+          <a:bodyPr/>
+          <a:lstStyle/>
+          <a:p/>
+          <a:p>
+            <a:r>
+              <a:t>Hohe operationale Komplexität</a:t>
+            </a:r>
+          </a:p>
+          <a:p>
+            <a:r>
+              <a:t>Distributed System Challenges (Latency, Partial Failures)</a:t>
+            </a:r>
+          </a:p>
+          <a:p>
+            <a:r>
+              <a:t>Data Consistency zwischen Services schwierig</a:t>
+            </a:r>
+          </a:p>
+          <a:p>
+            <a:r>
+              <a:t>Service Discovery und Load Balancing erforderlich</a:t>
+            </a:r>
+          </a:p>
+        </p:txBody>
+      </p:sp>
+    </p:spTree>
+  </p:cSld>
+  <p:clrMapOvr>
+    <a:masterClrMapping/>
+  </p:clrMapOvr>
+</p:sld>
+</file>
+
+<file path=ppt/slides/slide15.xml><?xml version="1.0" encoding="utf-8"?>
+<p:sld xmlns:a="http://schemas.openxmlformats.org/drawingml/2006/main" xmlns:p="http://schemas.openxmlformats.org/presentationml/2006/main" xmlns:r="http://schemas.openxmlformats.org/officeDocument/2006/relationships">
+  <p:cSld>
+    <p:spTree>
+      <p:nvGrpSpPr>
+        <p:cNvPr id="1" name=""/>
+        <p:cNvGrpSpPr/>
+        <p:nvPr/>
+      </p:nvGrpSpPr>
+      <p:grpSpPr/>
+      <p:sp>
+        <p:nvSpPr>
+          <p:cNvPr id="2" name="Title 1"/>
+          <p:cNvSpPr>
+            <a:spLocks noGrp="1"/>
+          </p:cNvSpPr>
+          <p:nvPr>
+            <p:ph type="title"/>
+          </p:nvPr>
+        </p:nvSpPr>
+        <p:spPr/>
+        <p:txBody>
+          <a:bodyPr/>
+          <a:lstStyle/>
+          <a:p>
+            <a:r>
+              <a:t>Microservices - Vorteile/Nachteile</a:t>
+            </a:r>
+          </a:p>
+        </p:txBody>
+      </p:sp>
+      <p:sp>
+        <p:nvSpPr>
+          <p:cNvPr id="3" name="Text Placeholder 2"/>
+          <p:cNvSpPr>
+            <a:spLocks noGrp="1"/>
+          </p:cNvSpPr>
+          <p:nvPr>
+            <p:ph type="body" idx="1"/>
+          </p:nvPr>
+        </p:nvSpPr>
+        <p:spPr/>
+        <p:txBody>
+          <a:bodyPr/>
+          <a:lstStyle/>
+          <a:p>
+            <a:r>
+              <a:t>Vorteile ✅</a:t>
+            </a:r>
+          </a:p>
+        </p:txBody>
+      </p:sp>
+      <p:sp>
+        <p:nvSpPr>
+          <p:cNvPr id="4" name="Content Placeholder 3"/>
+          <p:cNvSpPr>
+            <a:spLocks noGrp="1"/>
+          </p:cNvSpPr>
+          <p:nvPr>
+            <p:ph idx="2" sz="half"/>
+          </p:nvPr>
+        </p:nvSpPr>
+        <p:spPr/>
+        <p:txBody>
+          <a:bodyPr/>
+          <a:lstStyle/>
+          <a:p/>
+          <a:p>
+            <a:r>
+              <a:t>Unabhängige Skalierung pro Service</a:t>
+            </a:r>
+          </a:p>
+          <a:p>
+            <a:r>
+              <a:t>Technology Stack Diversität möglich</a:t>
+            </a:r>
+          </a:p>
+          <a:p>
+            <a:r>
+              <a:t>Fehler-Isolierung zwischen Services</a:t>
+            </a:r>
+          </a:p>
+          <a:p>
+            <a:r>
+              <a:t>Parallele Entwicklung durch verschiedene Teams</a:t>
+            </a:r>
+          </a:p>
+        </p:txBody>
+      </p:sp>
+      <p:sp>
+        <p:nvSpPr>
+          <p:cNvPr id="5" name="Text Placeholder 4"/>
+          <p:cNvSpPr>
+            <a:spLocks noGrp="1"/>
+          </p:cNvSpPr>
+          <p:nvPr>
+            <p:ph type="body" idx="3" sz="quarter"/>
+          </p:nvPr>
+        </p:nvSpPr>
+        <p:spPr/>
+        <p:txBody>
+          <a:bodyPr/>
+          <a:lstStyle/>
+          <a:p>
+            <a:r>
+              <a:t>Nachteile ❌</a:t>
+            </a:r>
+          </a:p>
+        </p:txBody>
+      </p:sp>
+      <p:sp>
+        <p:nvSpPr>
+          <p:cNvPr id="6" name="Content Placeholder 5"/>
+          <p:cNvSpPr>
+            <a:spLocks noGrp="1"/>
+          </p:cNvSpPr>
+          <p:nvPr>
+            <p:ph idx="4" sz="quarter"/>
+          </p:nvPr>
+        </p:nvSpPr>
+        <p:spPr/>
+        <p:txBody>
+          <a:bodyPr/>
+          <a:lstStyle/>
+          <a:p/>
+          <a:p>
+            <a:r>
+              <a:t>Hohe operationale Komplexität</a:t>
+            </a:r>
+          </a:p>
+          <a:p>
+            <a:r>
+              <a:t>Distributed System Challenges (Latency, Partial Failures)</a:t>
+            </a:r>
+          </a:p>
+          <a:p>
+            <a:r>
+              <a:t>Data Consistency zwischen Services schwierig</a:t>
+            </a:r>
+          </a:p>
+          <a:p>
+            <a:r>
+              <a:t>Service Discovery und Load Balancing erforderlich</a:t>
+            </a:r>
+          </a:p>
         </p:txBody>
       </p:sp>
     </p:spTree>
@@ -13297,19 +13797,40 @@
           <a:lstStyle/>
           <a:p>
             <a:r>
-              <a:t>Layered Architecture (Schichtarchitektur) - Vorteile/Nachteile</a:t>
-            </a:r>
-          </a:p>
-        </p:txBody>
-      </p:sp>
-      <p:sp>
-        <p:nvSpPr>
-          <p:cNvPr id="3" name="Content Placeholder 2"/>
-          <p:cNvSpPr>
-            <a:spLocks noGrp="1"/>
-          </p:cNvSpPr>
-          <p:nvPr>
-            <p:ph idx="1"/>
+              <a:t>Hexagonal Architecture - Vorteile/Nachteile</a:t>
+            </a:r>
+          </a:p>
+        </p:txBody>
+      </p:sp>
+      <p:sp>
+        <p:nvSpPr>
+          <p:cNvPr id="3" name="Text Placeholder 2"/>
+          <p:cNvSpPr>
+            <a:spLocks noGrp="1"/>
+          </p:cNvSpPr>
+          <p:nvPr>
+            <p:ph type="body" idx="1"/>
+          </p:nvPr>
+        </p:nvSpPr>
+        <p:spPr/>
+        <p:txBody>
+          <a:bodyPr/>
+          <a:lstStyle/>
+          <a:p>
+            <a:r>
+              <a:t>Vorteile ✅</a:t>
+            </a:r>
+          </a:p>
+        </p:txBody>
+      </p:sp>
+      <p:sp>
+        <p:nvSpPr>
+          <p:cNvPr id="4" name="Content Placeholder 3"/>
+          <p:cNvSpPr>
+            <a:spLocks noGrp="1"/>
+          </p:cNvSpPr>
+          <p:nvPr>
+            <p:ph idx="2" sz="half"/>
           </p:nvPr>
         </p:nvSpPr>
         <p:spPr/>
@@ -13317,6 +13838,239 @@
           <a:bodyPr/>
           <a:lstStyle/>
           <a:p/>
+          <a:p>
+            <a:r>
+              <a:t>Domain Logic vollständig isoliert von Infrastructure</a:t>
+            </a:r>
+          </a:p>
+          <a:p>
+            <a:r>
+              <a:t>Austauschbare External Dependencies (Database, APIs)</a:t>
+            </a:r>
+          </a:p>
+          <a:p>
+            <a:r>
+              <a:t>Excellente Testbarkeit durch Dependency Inversion</a:t>
+            </a:r>
+          </a:p>
+          <a:p>
+            <a:r>
+              <a:t>Framework-agnostic Domain Layer</a:t>
+            </a:r>
+          </a:p>
+        </p:txBody>
+      </p:sp>
+      <p:sp>
+        <p:nvSpPr>
+          <p:cNvPr id="5" name="Text Placeholder 4"/>
+          <p:cNvSpPr>
+            <a:spLocks noGrp="1"/>
+          </p:cNvSpPr>
+          <p:nvPr>
+            <p:ph type="body" idx="3" sz="quarter"/>
+          </p:nvPr>
+        </p:nvSpPr>
+        <p:spPr/>
+        <p:txBody>
+          <a:bodyPr/>
+          <a:lstStyle/>
+          <a:p>
+            <a:r>
+              <a:t>Nachteile ❌</a:t>
+            </a:r>
+          </a:p>
+        </p:txBody>
+      </p:sp>
+      <p:sp>
+        <p:nvSpPr>
+          <p:cNvPr id="6" name="Content Placeholder 5"/>
+          <p:cNvSpPr>
+            <a:spLocks noGrp="1"/>
+          </p:cNvSpPr>
+          <p:nvPr>
+            <p:ph idx="4" sz="quarter"/>
+          </p:nvPr>
+        </p:nvSpPr>
+        <p:spPr/>
+        <p:txBody>
+          <a:bodyPr/>
+          <a:lstStyle/>
+          <a:p/>
+          <a:p>
+            <a:r>
+              <a:t>Initial Setup komplexer als Layer Architecture</a:t>
+            </a:r>
+          </a:p>
+          <a:p>
+            <a:r>
+              <a:t>Mehr Abstractions und Interfaces</a:t>
+            </a:r>
+          </a:p>
+          <a:p>
+            <a:r>
+              <a:t>Kann Over-Engineering für einfache CRUD Apps sein</a:t>
+            </a:r>
+          </a:p>
+          <a:p>
+            <a:r>
+              <a:t>Team muss Dependency Inversion verstehen</a:t>
+            </a:r>
+          </a:p>
+        </p:txBody>
+      </p:sp>
+    </p:spTree>
+  </p:cSld>
+  <p:clrMapOvr>
+    <a:masterClrMapping/>
+  </p:clrMapOvr>
+</p:sld>
+</file>
+
+<file path=ppt/slides/slide16.xml><?xml version="1.0" encoding="utf-8"?>
+<p:sld xmlns:a="http://schemas.openxmlformats.org/drawingml/2006/main" xmlns:p="http://schemas.openxmlformats.org/presentationml/2006/main" xmlns:r="http://schemas.openxmlformats.org/officeDocument/2006/relationships">
+  <p:cSld>
+    <p:spTree>
+      <p:nvGrpSpPr>
+        <p:cNvPr id="1" name=""/>
+        <p:cNvGrpSpPr/>
+        <p:nvPr/>
+      </p:nvGrpSpPr>
+      <p:grpSpPr/>
+      <p:sp>
+        <p:nvSpPr>
+          <p:cNvPr id="2" name="Title 1"/>
+          <p:cNvSpPr>
+            <a:spLocks noGrp="1"/>
+          </p:cNvSpPr>
+          <p:nvPr>
+            <p:ph type="title"/>
+          </p:nvPr>
+        </p:nvSpPr>
+        <p:spPr/>
+        <p:txBody>
+          <a:bodyPr/>
+          <a:lstStyle/>
+          <a:p>
+            <a:r>
+              <a:t>Hexagonal Architecture - Vorteile/Nachteile</a:t>
+            </a:r>
+          </a:p>
+        </p:txBody>
+      </p:sp>
+      <p:sp>
+        <p:nvSpPr>
+          <p:cNvPr id="3" name="Text Placeholder 2"/>
+          <p:cNvSpPr>
+            <a:spLocks noGrp="1"/>
+          </p:cNvSpPr>
+          <p:nvPr>
+            <p:ph type="body" idx="1"/>
+          </p:nvPr>
+        </p:nvSpPr>
+        <p:spPr/>
+        <p:txBody>
+          <a:bodyPr/>
+          <a:lstStyle/>
+          <a:p>
+            <a:r>
+              <a:t>Vorteile ✅</a:t>
+            </a:r>
+          </a:p>
+        </p:txBody>
+      </p:sp>
+      <p:sp>
+        <p:nvSpPr>
+          <p:cNvPr id="4" name="Content Placeholder 3"/>
+          <p:cNvSpPr>
+            <a:spLocks noGrp="1"/>
+          </p:cNvSpPr>
+          <p:nvPr>
+            <p:ph idx="2" sz="half"/>
+          </p:nvPr>
+        </p:nvSpPr>
+        <p:spPr/>
+        <p:txBody>
+          <a:bodyPr/>
+          <a:lstStyle/>
+          <a:p/>
+          <a:p>
+            <a:r>
+              <a:t>Domain Logic vollständig isoliert von Infrastructure</a:t>
+            </a:r>
+          </a:p>
+          <a:p>
+            <a:r>
+              <a:t>Austauschbare External Dependencies (Database, APIs)</a:t>
+            </a:r>
+          </a:p>
+          <a:p>
+            <a:r>
+              <a:t>Excellente Testbarkeit durch Dependency Inversion</a:t>
+            </a:r>
+          </a:p>
+          <a:p>
+            <a:r>
+              <a:t>Framework-agnostic Domain Layer</a:t>
+            </a:r>
+          </a:p>
+        </p:txBody>
+      </p:sp>
+      <p:sp>
+        <p:nvSpPr>
+          <p:cNvPr id="5" name="Text Placeholder 4"/>
+          <p:cNvSpPr>
+            <a:spLocks noGrp="1"/>
+          </p:cNvSpPr>
+          <p:nvPr>
+            <p:ph type="body" idx="3" sz="quarter"/>
+          </p:nvPr>
+        </p:nvSpPr>
+        <p:spPr/>
+        <p:txBody>
+          <a:bodyPr/>
+          <a:lstStyle/>
+          <a:p>
+            <a:r>
+              <a:t>Nachteile ❌</a:t>
+            </a:r>
+          </a:p>
+        </p:txBody>
+      </p:sp>
+      <p:sp>
+        <p:nvSpPr>
+          <p:cNvPr id="6" name="Content Placeholder 5"/>
+          <p:cNvSpPr>
+            <a:spLocks noGrp="1"/>
+          </p:cNvSpPr>
+          <p:nvPr>
+            <p:ph idx="4" sz="quarter"/>
+          </p:nvPr>
+        </p:nvSpPr>
+        <p:spPr/>
+        <p:txBody>
+          <a:bodyPr/>
+          <a:lstStyle/>
+          <a:p/>
+          <a:p>
+            <a:r>
+              <a:t>Initial Setup komplexer als Layer Architecture</a:t>
+            </a:r>
+          </a:p>
+          <a:p>
+            <a:r>
+              <a:t>Mehr Abstractions und Interfaces</a:t>
+            </a:r>
+          </a:p>
+          <a:p>
+            <a:r>
+              <a:t>Kann Over-Engineering für einfache CRUD Apps sein</a:t>
+            </a:r>
+          </a:p>
+          <a:p>
+            <a:r>
+              <a:t>Team muss Dependency Inversion verstehen</a:t>
+            </a:r>
+          </a:p>
         </p:txBody>
       </p:sp>
     </p:spTree>
@@ -13353,19 +14107,40 @@
           <a:lstStyle/>
           <a:p>
             <a:r>
-              <a:t>Microservices Architecture - Vorteile/Nachteile</a:t>
-            </a:r>
-          </a:p>
-        </p:txBody>
-      </p:sp>
-      <p:sp>
-        <p:nvSpPr>
-          <p:cNvPr id="3" name="Content Placeholder 2"/>
-          <p:cNvSpPr>
-            <a:spLocks noGrp="1"/>
-          </p:cNvSpPr>
-          <p:nvPr>
-            <p:ph idx="1"/>
+              <a:t>Event-Driven Architecture - Vorteile/Nachteile</a:t>
+            </a:r>
+          </a:p>
+        </p:txBody>
+      </p:sp>
+      <p:sp>
+        <p:nvSpPr>
+          <p:cNvPr id="3" name="Text Placeholder 2"/>
+          <p:cNvSpPr>
+            <a:spLocks noGrp="1"/>
+          </p:cNvSpPr>
+          <p:nvPr>
+            <p:ph type="body" idx="1"/>
+          </p:nvPr>
+        </p:nvSpPr>
+        <p:spPr/>
+        <p:txBody>
+          <a:bodyPr/>
+          <a:lstStyle/>
+          <a:p>
+            <a:r>
+              <a:t>Vorteile ✅</a:t>
+            </a:r>
+          </a:p>
+        </p:txBody>
+      </p:sp>
+      <p:sp>
+        <p:nvSpPr>
+          <p:cNvPr id="4" name="Content Placeholder 3"/>
+          <p:cNvSpPr>
+            <a:spLocks noGrp="1"/>
+          </p:cNvSpPr>
+          <p:nvPr>
+            <p:ph idx="2" sz="half"/>
           </p:nvPr>
         </p:nvSpPr>
         <p:spPr/>
@@ -13373,6 +14148,239 @@
           <a:bodyPr/>
           <a:lstStyle/>
           <a:p/>
+          <a:p>
+            <a:r>
+              <a:t>Lose Kopplung zwischen Komponenten</a:t>
+            </a:r>
+          </a:p>
+          <a:p>
+            <a:r>
+              <a:t>Asynchrone Verarbeitung für bessere Performance</a:t>
+            </a:r>
+          </a:p>
+          <a:p>
+            <a:r>
+              <a:t>Event Replay für Debugging und Analytics möglich</a:t>
+            </a:r>
+          </a:p>
+          <a:p>
+            <a:r>
+              <a:t>Einfaches Hinzufügen neuer Event Consumer</a:t>
+            </a:r>
+          </a:p>
+        </p:txBody>
+      </p:sp>
+      <p:sp>
+        <p:nvSpPr>
+          <p:cNvPr id="5" name="Text Placeholder 4"/>
+          <p:cNvSpPr>
+            <a:spLocks noGrp="1"/>
+          </p:cNvSpPr>
+          <p:nvPr>
+            <p:ph type="body" idx="3" sz="quarter"/>
+          </p:nvPr>
+        </p:nvSpPr>
+        <p:spPr/>
+        <p:txBody>
+          <a:bodyPr/>
+          <a:lstStyle/>
+          <a:p>
+            <a:r>
+              <a:t>Nachteile ❌</a:t>
+            </a:r>
+          </a:p>
+        </p:txBody>
+      </p:sp>
+      <p:sp>
+        <p:nvSpPr>
+          <p:cNvPr id="6" name="Content Placeholder 5"/>
+          <p:cNvSpPr>
+            <a:spLocks noGrp="1"/>
+          </p:cNvSpPr>
+          <p:nvPr>
+            <p:ph idx="4" sz="quarter"/>
+          </p:nvPr>
+        </p:nvSpPr>
+        <p:spPr/>
+        <p:txBody>
+          <a:bodyPr/>
+          <a:lstStyle/>
+          <a:p/>
+          <a:p>
+            <a:r>
+              <a:t>Eventually Consistent Data</a:t>
+            </a:r>
+          </a:p>
+          <a:p>
+            <a:r>
+              <a:t>Komplexere Error Handling (Dead Letter Queues)</a:t>
+            </a:r>
+          </a:p>
+          <a:p>
+            <a:r>
+              <a:t>Event Schema Evolution herausfordernd</a:t>
+            </a:r>
+          </a:p>
+          <a:p>
+            <a:r>
+              <a:t>Debugging von Event Flows schwierig</a:t>
+            </a:r>
+          </a:p>
+        </p:txBody>
+      </p:sp>
+    </p:spTree>
+  </p:cSld>
+  <p:clrMapOvr>
+    <a:masterClrMapping/>
+  </p:clrMapOvr>
+</p:sld>
+</file>
+
+<file path=ppt/slides/slide17.xml><?xml version="1.0" encoding="utf-8"?>
+<p:sld xmlns:a="http://schemas.openxmlformats.org/drawingml/2006/main" xmlns:p="http://schemas.openxmlformats.org/presentationml/2006/main" xmlns:r="http://schemas.openxmlformats.org/officeDocument/2006/relationships">
+  <p:cSld>
+    <p:spTree>
+      <p:nvGrpSpPr>
+        <p:cNvPr id="1" name=""/>
+        <p:cNvGrpSpPr/>
+        <p:nvPr/>
+      </p:nvGrpSpPr>
+      <p:grpSpPr/>
+      <p:sp>
+        <p:nvSpPr>
+          <p:cNvPr id="2" name="Title 1"/>
+          <p:cNvSpPr>
+            <a:spLocks noGrp="1"/>
+          </p:cNvSpPr>
+          <p:nvPr>
+            <p:ph type="title"/>
+          </p:nvPr>
+        </p:nvSpPr>
+        <p:spPr/>
+        <p:txBody>
+          <a:bodyPr/>
+          <a:lstStyle/>
+          <a:p>
+            <a:r>
+              <a:t>Event-Driven Architecture - Vorteile/Nachteile</a:t>
+            </a:r>
+          </a:p>
+        </p:txBody>
+      </p:sp>
+      <p:sp>
+        <p:nvSpPr>
+          <p:cNvPr id="3" name="Text Placeholder 2"/>
+          <p:cNvSpPr>
+            <a:spLocks noGrp="1"/>
+          </p:cNvSpPr>
+          <p:nvPr>
+            <p:ph type="body" idx="1"/>
+          </p:nvPr>
+        </p:nvSpPr>
+        <p:spPr/>
+        <p:txBody>
+          <a:bodyPr/>
+          <a:lstStyle/>
+          <a:p>
+            <a:r>
+              <a:t>Vorteile ✅</a:t>
+            </a:r>
+          </a:p>
+        </p:txBody>
+      </p:sp>
+      <p:sp>
+        <p:nvSpPr>
+          <p:cNvPr id="4" name="Content Placeholder 3"/>
+          <p:cNvSpPr>
+            <a:spLocks noGrp="1"/>
+          </p:cNvSpPr>
+          <p:nvPr>
+            <p:ph idx="2" sz="half"/>
+          </p:nvPr>
+        </p:nvSpPr>
+        <p:spPr/>
+        <p:txBody>
+          <a:bodyPr/>
+          <a:lstStyle/>
+          <a:p/>
+          <a:p>
+            <a:r>
+              <a:t>Lose Kopplung zwischen Komponenten</a:t>
+            </a:r>
+          </a:p>
+          <a:p>
+            <a:r>
+              <a:t>Asynchrone Verarbeitung für bessere Performance</a:t>
+            </a:r>
+          </a:p>
+          <a:p>
+            <a:r>
+              <a:t>Event Replay für Debugging und Analytics möglich</a:t>
+            </a:r>
+          </a:p>
+          <a:p>
+            <a:r>
+              <a:t>Einfaches Hinzufügen neuer Event Consumer</a:t>
+            </a:r>
+          </a:p>
+        </p:txBody>
+      </p:sp>
+      <p:sp>
+        <p:nvSpPr>
+          <p:cNvPr id="5" name="Text Placeholder 4"/>
+          <p:cNvSpPr>
+            <a:spLocks noGrp="1"/>
+          </p:cNvSpPr>
+          <p:nvPr>
+            <p:ph type="body" idx="3" sz="quarter"/>
+          </p:nvPr>
+        </p:nvSpPr>
+        <p:spPr/>
+        <p:txBody>
+          <a:bodyPr/>
+          <a:lstStyle/>
+          <a:p>
+            <a:r>
+              <a:t>Nachteile ❌</a:t>
+            </a:r>
+          </a:p>
+        </p:txBody>
+      </p:sp>
+      <p:sp>
+        <p:nvSpPr>
+          <p:cNvPr id="6" name="Content Placeholder 5"/>
+          <p:cNvSpPr>
+            <a:spLocks noGrp="1"/>
+          </p:cNvSpPr>
+          <p:nvPr>
+            <p:ph idx="4" sz="quarter"/>
+          </p:nvPr>
+        </p:nvSpPr>
+        <p:spPr/>
+        <p:txBody>
+          <a:bodyPr/>
+          <a:lstStyle/>
+          <a:p/>
+          <a:p>
+            <a:r>
+              <a:t>Eventually Consistent Data</a:t>
+            </a:r>
+          </a:p>
+          <a:p>
+            <a:r>
+              <a:t>Komplexere Error Handling (Dead Letter Queues)</a:t>
+            </a:r>
+          </a:p>
+          <a:p>
+            <a:r>
+              <a:t>Event Schema Evolution herausfordernd</a:t>
+            </a:r>
+          </a:p>
+          <a:p>
+            <a:r>
+              <a:t>Debugging von Event Flows schwierig</a:t>
+            </a:r>
+          </a:p>
         </p:txBody>
       </p:sp>
     </p:spTree>
